--- a/08-materiais/modelos/abba-deck-institucional.pptx
+++ b/08-materiais/modelos/abba-deck-institucional.pptx
@@ -6434,7 +6434,7 @@
                 <a:ea typeface="Calibri" pitchFamily="34" charset="-122"/>
                 <a:cs typeface="Calibri" pitchFamily="34" charset="-120"/>
               </a:rPr>
-              <a:t>Operação contínua com SLA e relatório mensal de impacto</a:t>
+              <a:t>Operação contínua em 3 camadas, com SLA e relatório mensal de impacto</a:t>
             </a:r>
             <a:endParaRPr lang="en-US" sz="1150" dirty="0"/>
           </a:p>
@@ -6570,7 +6570,7 @@
                 <a:ea typeface="Calibri" pitchFamily="34" charset="-122"/>
                 <a:cs typeface="Calibri" pitchFamily="34" charset="-120"/>
               </a:rPr>
-              <a:t>Ritual trimestral: resultados contra os objetivos que VOCÊS declararam. Nós recomendamos com convicção; a decisão é sua.</a:t>
+              <a:t>Ritual trimestral: resultados contra os objetivos que VOCÊS declararam. Nós recomendamos com convicção; a decisão é sua. Também disponível como produto contínuo: o Conselheiro de IA ABBA.</a:t>
             </a:r>
             <a:endParaRPr lang="en-US" sz="1400" dirty="0"/>
           </a:p>

--- a/08-materiais/modelos/abba-deck-institucional.pptx
+++ b/08-materiais/modelos/abba-deck-institucional.pptx
@@ -14,6 +14,7 @@
     <p:sldId id="262" r:id="rId8"/>
     <p:sldId id="263" r:id="rId9"/>
     <p:sldId id="264" r:id="rId10"/>
+    <p:sldId id="268" r:id="rId19"/>
     <p:sldId id="265" r:id="rId11"/>
     <p:sldId id="266" r:id="rId12"/>
     <p:sldId id="267" r:id="rId13"/>
@@ -2259,6 +2260,10 @@
           </a:solidFill>
           <a:ln/>
         </p:spPr>
+        <p:txBody>
+          <a:bodyPr/>
+          <a:p/>
+        </p:txBody>
       </p:sp>
       <p:sp>
         <p:nvSpPr>
@@ -2332,7 +2337,7 @@
                 <a:ea typeface="Calibri" pitchFamily="34" charset="-122"/>
                 <a:cs typeface="Calibri" pitchFamily="34" charset="-120"/>
               </a:rPr>
-              <a:t>Status de 30 min com o patrocinador: progresso, bloqueios, próximos 7 dias</a:t>
+              <a:t>Programa: status de 30 min com o patrocinador. Manutenção: ritual de 20 min — o que venceu, qual gatilho disparou, o que decidimos, o que vamos medir</a:t>
             </a:r>
             <a:endParaRPr lang="en-US" sz="1250" dirty="0"/>
           </a:p>
@@ -3617,22 +3622,11 @@
                 <a:ea typeface="Calibri" pitchFamily="34" charset="-122"/>
                 <a:cs typeface="Calibri" pitchFamily="34" charset="-120"/>
               </a:rPr>
-              <a:t>Análise ABBA — gratuita. </a:t>
-            </a:r>
-            <a:pPr indent="0" marL="0">
-              <a:buNone/>
-            </a:pPr>
-            <a:r>
-              <a:rPr lang="en-US" sz="1700" dirty="0">
-                <a:solidFill>
-                  <a:srgbClr val="E8E8E8"/>
-                </a:solidFill>
-                <a:latin typeface="Calibri" pitchFamily="34" charset="0"/>
-                <a:ea typeface="Calibri" pitchFamily="34" charset="-122"/>
-                <a:cs typeface="Calibri" pitchFamily="34" charset="-120"/>
-              </a:rPr>
-              <a:t>Uma análise da sua empresa feita apenas com informação pública: hipóteses de oportunidade de IA, as perguntas que faríamos à sua diretoria e o que a avaliação profunda revelaria. Apresentada ao vivo, em 45 minutos.</a:t>
-            </a:r>
+              <a:t>Mapa de Vazamento — gratuito. 45 minutos de conversa + informação pública → 2 páginas com uma faixa em R$ do que estimamos estar vazando, entregues em 48h. Calculado de fora, com premissas citadas — e é exatamente por isso que a primeira reunião existe.</a:t>
+            </a:r>
+            <a:pPr indent="0" marL="0">
+              <a:buNone/>
+            </a:pPr>
             <a:endParaRPr lang="en-US" sz="1700" dirty="0"/>
           </a:p>
         </p:txBody>
@@ -3774,6 +3768,636 @@
               <a:t>ABBA · Consultoria de IA · Confidencial</a:t>
             </a:r>
             <a:endParaRPr lang="en-US" sz="1000" dirty="0"/>
+          </a:p>
+        </p:txBody>
+      </p:sp>
+    </p:spTree>
+  </p:cSld>
+  <p:clrMapOvr>
+    <a:masterClrMapping/>
+  </p:clrMapOvr>
+</p:sld>
+</file>
+
+<file path=ppt/slides/slide13.xml><?xml version="1.0" encoding="utf-8"?>
+<p:sld xmlns:a="http://schemas.openxmlformats.org/drawingml/2006/main" xmlns:p="http://schemas.openxmlformats.org/presentationml/2006/main" xmlns:r="http://schemas.openxmlformats.org/officeDocument/2006/relationships">
+  <p:cSld>
+    <p:spTree>
+      <p:nvGrpSpPr>
+        <p:cNvPr id="1" name=""/>
+        <p:cNvGrpSpPr/>
+        <p:nvPr/>
+      </p:nvGrpSpPr>
+      <p:grpSpPr/>
+      <p:sp>
+        <p:nvSpPr>
+          <p:cNvPr id="2" name="TextBox 1"/>
+          <p:cNvSpPr txBox="1"/>
+          <p:nvPr/>
+        </p:nvSpPr>
+        <p:spPr>
+          <a:xfrm>
+            <a:off x="548640" y="365760"/>
+            <a:ext cx="11064240" cy="274320"/>
+          </a:xfrm>
+          <a:prstGeom prst="rect">
+            <a:avLst/>
+          </a:prstGeom>
+          <a:noFill/>
+        </p:spPr>
+        <p:txBody>
+          <a:bodyPr wrap="square">
+            <a:spAutoFit/>
+          </a:bodyPr>
+          <a:lstStyle/>
+          <a:p>
+            <a:r>
+              <a:rPr sz="1200" b="1">
+                <a:solidFill>
+                  <a:srgbClr val="C2A35B"/>
+                </a:solidFill>
+                <a:latin typeface="Calibri"/>
+              </a:rPr>
+              <a:t>A NOSSA PALAVRA</a:t>
+            </a:r>
+          </a:p>
+        </p:txBody>
+      </p:sp>
+      <p:sp>
+        <p:nvSpPr>
+          <p:cNvPr id="3" name="TextBox 2"/>
+          <p:cNvSpPr txBox="1"/>
+          <p:nvPr/>
+        </p:nvSpPr>
+        <p:spPr>
+          <a:xfrm>
+            <a:off x="548640" y="640080"/>
+            <a:ext cx="11064240" cy="731520"/>
+          </a:xfrm>
+          <a:prstGeom prst="rect">
+            <a:avLst/>
+          </a:prstGeom>
+          <a:noFill/>
+        </p:spPr>
+        <p:txBody>
+          <a:bodyPr wrap="square">
+            <a:spAutoFit/>
+          </a:bodyPr>
+          <a:lstStyle/>
+          <a:p>
+            <a:r>
+              <a:rPr sz="3400" b="1">
+                <a:solidFill>
+                  <a:srgbClr val="1B2A4A"/>
+                </a:solidFill>
+                <a:latin typeface="Calibri"/>
+              </a:rPr>
+              <a:t>O que prometemos — e o que nos recusamos a prometer</a:t>
+            </a:r>
+          </a:p>
+        </p:txBody>
+      </p:sp>
+      <p:sp>
+        <p:nvSpPr>
+          <p:cNvPr id="4" name="TextBox 3"/>
+          <p:cNvSpPr txBox="1"/>
+          <p:nvPr/>
+        </p:nvSpPr>
+        <p:spPr>
+          <a:xfrm>
+            <a:off x="548640" y="1737360"/>
+            <a:ext cx="5394960" cy="365760"/>
+          </a:xfrm>
+          <a:prstGeom prst="rect">
+            <a:avLst/>
+          </a:prstGeom>
+          <a:noFill/>
+        </p:spPr>
+        <p:txBody>
+          <a:bodyPr wrap="square">
+            <a:spAutoFit/>
+          </a:bodyPr>
+          <a:lstStyle/>
+          <a:p>
+            <a:r>
+              <a:rPr sz="1600" b="1">
+                <a:solidFill>
+                  <a:srgbClr val="1B2A4A"/>
+                </a:solidFill>
+                <a:latin typeface="Calibri"/>
+              </a:rPr>
+              <a:t>Prometemos</a:t>
+            </a:r>
+          </a:p>
+        </p:txBody>
+      </p:sp>
+      <p:sp>
+        <p:nvSpPr>
+          <p:cNvPr id="5" name="TextBox 4"/>
+          <p:cNvSpPr txBox="1"/>
+          <p:nvPr/>
+        </p:nvSpPr>
+        <p:spPr>
+          <a:xfrm>
+            <a:off x="6309360" y="1737360"/>
+            <a:ext cx="5394960" cy="365760"/>
+          </a:xfrm>
+          <a:prstGeom prst="rect">
+            <a:avLst/>
+          </a:prstGeom>
+          <a:noFill/>
+        </p:spPr>
+        <p:txBody>
+          <a:bodyPr wrap="square">
+            <a:spAutoFit/>
+          </a:bodyPr>
+          <a:lstStyle/>
+          <a:p>
+            <a:r>
+              <a:rPr sz="1600" b="1">
+                <a:solidFill>
+                  <a:srgbClr val="1B2A4A"/>
+                </a:solidFill>
+                <a:latin typeface="Calibri"/>
+              </a:rPr>
+              <a:t>Recusamos</a:t>
+            </a:r>
+          </a:p>
+        </p:txBody>
+      </p:sp>
+      <p:sp>
+        <p:nvSpPr>
+          <p:cNvPr id="6" name="TextBox 5"/>
+          <p:cNvSpPr txBox="1"/>
+          <p:nvPr/>
+        </p:nvSpPr>
+        <p:spPr>
+          <a:xfrm>
+            <a:off x="548640" y="2286000"/>
+            <a:ext cx="5394960" cy="320040"/>
+          </a:xfrm>
+          <a:prstGeom prst="rect">
+            <a:avLst/>
+          </a:prstGeom>
+          <a:noFill/>
+        </p:spPr>
+        <p:txBody>
+          <a:bodyPr wrap="square">
+            <a:spAutoFit/>
+          </a:bodyPr>
+          <a:lstStyle/>
+          <a:p>
+            <a:r>
+              <a:rPr sz="1400" b="1">
+                <a:solidFill>
+                  <a:srgbClr val="1B2A4A"/>
+                </a:solidFill>
+                <a:latin typeface="Calibri"/>
+              </a:rPr>
+              <a:t>Nada entra sem métrica</a:t>
+            </a:r>
+          </a:p>
+        </p:txBody>
+      </p:sp>
+      <p:sp>
+        <p:nvSpPr>
+          <p:cNvPr id="7" name="TextBox 6"/>
+          <p:cNvSpPr txBox="1"/>
+          <p:nvPr/>
+        </p:nvSpPr>
+        <p:spPr>
+          <a:xfrm>
+            <a:off x="548640" y="2633472"/>
+            <a:ext cx="5394960" cy="822960"/>
+          </a:xfrm>
+          <a:prstGeom prst="rect">
+            <a:avLst/>
+          </a:prstGeom>
+          <a:noFill/>
+        </p:spPr>
+        <p:txBody>
+          <a:bodyPr wrap="square">
+            <a:spAutoFit/>
+          </a:bodyPr>
+          <a:lstStyle/>
+          <a:p>
+            <a:r>
+              <a:rPr sz="1150" b="0">
+                <a:solidFill>
+                  <a:srgbClr val="5A6472"/>
+                </a:solidFill>
+                <a:latin typeface="Calibri"/>
+              </a:rPr>
+              <a:t>Toda recomendação nasce com o número que dirá se deu certo — acordado com vocês antes da execução começar.</a:t>
+            </a:r>
+          </a:p>
+        </p:txBody>
+      </p:sp>
+      <p:sp>
+        <p:nvSpPr>
+          <p:cNvPr id="8" name="TextBox 7"/>
+          <p:cNvSpPr txBox="1"/>
+          <p:nvPr/>
+        </p:nvSpPr>
+        <p:spPr>
+          <a:xfrm>
+            <a:off x="548640" y="3611880"/>
+            <a:ext cx="5394960" cy="320040"/>
+          </a:xfrm>
+          <a:prstGeom prst="rect">
+            <a:avLst/>
+          </a:prstGeom>
+          <a:noFill/>
+        </p:spPr>
+        <p:txBody>
+          <a:bodyPr wrap="square">
+            <a:spAutoFit/>
+          </a:bodyPr>
+          <a:lstStyle/>
+          <a:p>
+            <a:r>
+              <a:rPr sz="1400" b="1">
+                <a:solidFill>
+                  <a:srgbClr val="1B2A4A"/>
+                </a:solidFill>
+                <a:latin typeface="Calibri"/>
+              </a:rPr>
+              <a:t>Tudo sai medido</a:t>
+            </a:r>
+          </a:p>
+        </p:txBody>
+      </p:sp>
+      <p:sp>
+        <p:nvSpPr>
+          <p:cNvPr id="9" name="TextBox 8"/>
+          <p:cNvSpPr txBox="1"/>
+          <p:nvPr/>
+        </p:nvSpPr>
+        <p:spPr>
+          <a:xfrm>
+            <a:off x="548640" y="3959352"/>
+            <a:ext cx="5394960" cy="822960"/>
+          </a:xfrm>
+          <a:prstGeom prst="rect">
+            <a:avLst/>
+          </a:prstGeom>
+          <a:noFill/>
+        </p:spPr>
+        <p:txBody>
+          <a:bodyPr wrap="square">
+            <a:spAutoFit/>
+          </a:bodyPr>
+          <a:lstStyle/>
+          <a:p>
+            <a:r>
+              <a:rPr sz="1150" b="0">
+                <a:solidFill>
+                  <a:srgbClr val="5A6472"/>
+                </a:solidFill>
+                <a:latin typeface="Calibri"/>
+              </a:rPr>
+              <a:t>Terminado o prazo, o número é remedido e o veredito registrado: melhor, pior, neutro ou inconclusivo.</a:t>
+            </a:r>
+          </a:p>
+        </p:txBody>
+      </p:sp>
+      <p:sp>
+        <p:nvSpPr>
+          <p:cNvPr id="10" name="TextBox 9"/>
+          <p:cNvSpPr txBox="1"/>
+          <p:nvPr/>
+        </p:nvSpPr>
+        <p:spPr>
+          <a:xfrm>
+            <a:off x="548640" y="4937760"/>
+            <a:ext cx="5394960" cy="320040"/>
+          </a:xfrm>
+          <a:prstGeom prst="rect">
+            <a:avLst/>
+          </a:prstGeom>
+          <a:noFill/>
+        </p:spPr>
+        <p:txBody>
+          <a:bodyPr wrap="square">
+            <a:spAutoFit/>
+          </a:bodyPr>
+          <a:lstStyle/>
+          <a:p>
+            <a:r>
+              <a:rPr sz="1400" b="1">
+                <a:solidFill>
+                  <a:srgbClr val="1B2A4A"/>
+                </a:solidFill>
+                <a:latin typeface="Calibri"/>
+              </a:rPr>
+              <a:t>Vocês veem o registro inteiro</a:t>
+            </a:r>
+          </a:p>
+        </p:txBody>
+      </p:sp>
+      <p:sp>
+        <p:nvSpPr>
+          <p:cNvPr id="11" name="TextBox 10"/>
+          <p:cNvSpPr txBox="1"/>
+          <p:nvPr/>
+        </p:nvSpPr>
+        <p:spPr>
+          <a:xfrm>
+            <a:off x="548640" y="5285232"/>
+            <a:ext cx="5394960" cy="822960"/>
+          </a:xfrm>
+          <a:prstGeom prst="rect">
+            <a:avLst/>
+          </a:prstGeom>
+          <a:noFill/>
+        </p:spPr>
+        <p:txBody>
+          <a:bodyPr wrap="square">
+            <a:spAutoFit/>
+          </a:bodyPr>
+          <a:lstStyle/>
+          <a:p>
+            <a:r>
+              <a:rPr sz="1150" b="0">
+                <a:solidFill>
+                  <a:srgbClr val="5A6472"/>
+                </a:solidFill>
+                <a:latin typeface="Calibri"/>
+              </a:rPr>
+              <a:t>O diário completo, incluindo o que deu errado — não uma seleção.</a:t>
+            </a:r>
+          </a:p>
+        </p:txBody>
+      </p:sp>
+      <p:sp>
+        <p:nvSpPr>
+          <p:cNvPr id="12" name="TextBox 11"/>
+          <p:cNvSpPr txBox="1"/>
+          <p:nvPr/>
+        </p:nvSpPr>
+        <p:spPr>
+          <a:xfrm>
+            <a:off x="6309360" y="2286000"/>
+            <a:ext cx="5394960" cy="320040"/>
+          </a:xfrm>
+          <a:prstGeom prst="rect">
+            <a:avLst/>
+          </a:prstGeom>
+          <a:noFill/>
+        </p:spPr>
+        <p:txBody>
+          <a:bodyPr wrap="square">
+            <a:spAutoFit/>
+          </a:bodyPr>
+          <a:lstStyle/>
+          <a:p>
+            <a:r>
+              <a:rPr sz="1400" b="1">
+                <a:solidFill>
+                  <a:srgbClr val="1B2A4A"/>
+                </a:solidFill>
+                <a:latin typeface="Calibri"/>
+              </a:rPr>
+              <a:t>Prometer acurácia que não medimos</a:t>
+            </a:r>
+          </a:p>
+        </p:txBody>
+      </p:sp>
+      <p:sp>
+        <p:nvSpPr>
+          <p:cNvPr id="13" name="TextBox 12"/>
+          <p:cNvSpPr txBox="1"/>
+          <p:nvPr/>
+        </p:nvSpPr>
+        <p:spPr>
+          <a:xfrm>
+            <a:off x="6309360" y="2633472"/>
+            <a:ext cx="5394960" cy="822960"/>
+          </a:xfrm>
+          <a:prstGeom prst="rect">
+            <a:avLst/>
+          </a:prstGeom>
+          <a:noFill/>
+        </p:spPr>
+        <p:txBody>
+          <a:bodyPr wrap="square">
+            <a:spAutoFit/>
+          </a:bodyPr>
+          <a:lstStyle/>
+          <a:p>
+            <a:r>
+              <a:rPr sz="1150" b="0">
+                <a:solidFill>
+                  <a:srgbClr val="5A6472"/>
+                </a:solidFill>
+                <a:latin typeface="Calibri"/>
+              </a:rPr>
+              <a:t>Um número que não temos destruiria a única coisa que não se recompra: a credibilidade.</a:t>
+            </a:r>
+          </a:p>
+        </p:txBody>
+      </p:sp>
+      <p:sp>
+        <p:nvSpPr>
+          <p:cNvPr id="14" name="TextBox 13"/>
+          <p:cNvSpPr txBox="1"/>
+          <p:nvPr/>
+        </p:nvSpPr>
+        <p:spPr>
+          <a:xfrm>
+            <a:off x="6309360" y="3611880"/>
+            <a:ext cx="5394960" cy="320040"/>
+          </a:xfrm>
+          <a:prstGeom prst="rect">
+            <a:avLst/>
+          </a:prstGeom>
+          <a:noFill/>
+        </p:spPr>
+        <p:txBody>
+          <a:bodyPr wrap="square">
+            <a:spAutoFit/>
+          </a:bodyPr>
+          <a:lstStyle/>
+          <a:p>
+            <a:r>
+              <a:rPr sz="1400" b="1">
+                <a:solidFill>
+                  <a:srgbClr val="1B2A4A"/>
+                </a:solidFill>
+                <a:latin typeface="Calibri"/>
+              </a:rPr>
+              <a:t>Prever o imprevisível</a:t>
+            </a:r>
+          </a:p>
+        </p:txBody>
+      </p:sp>
+      <p:sp>
+        <p:nvSpPr>
+          <p:cNvPr id="15" name="TextBox 14"/>
+          <p:cNvSpPr txBox="1"/>
+          <p:nvPr/>
+        </p:nvSpPr>
+        <p:spPr>
+          <a:xfrm>
+            <a:off x="6309360" y="3959352"/>
+            <a:ext cx="5394960" cy="822960"/>
+          </a:xfrm>
+          <a:prstGeom prst="rect">
+            <a:avLst/>
+          </a:prstGeom>
+          <a:noFill/>
+        </p:spPr>
+        <p:txBody>
+          <a:bodyPr wrap="square">
+            <a:spAutoFit/>
+          </a:bodyPr>
+          <a:lstStyle/>
+          <a:p>
+            <a:r>
+              <a:rPr sz="1150" b="0">
+                <a:solidFill>
+                  <a:srgbClr val="5A6472"/>
+                </a:solidFill>
+                <a:latin typeface="Calibri"/>
+              </a:rPr>
+              <a:t>A evidência é clara: IA prevê mal mudanças de regime e "o que acontece se fizermos X". Não vendemos oráculo.</a:t>
+            </a:r>
+          </a:p>
+        </p:txBody>
+      </p:sp>
+      <p:sp>
+        <p:nvSpPr>
+          <p:cNvPr id="16" name="TextBox 15"/>
+          <p:cNvSpPr txBox="1"/>
+          <p:nvPr/>
+        </p:nvSpPr>
+        <p:spPr>
+          <a:xfrm>
+            <a:off x="6309360" y="4937760"/>
+            <a:ext cx="5394960" cy="320040"/>
+          </a:xfrm>
+          <a:prstGeom prst="rect">
+            <a:avLst/>
+          </a:prstGeom>
+          <a:noFill/>
+        </p:spPr>
+        <p:txBody>
+          <a:bodyPr wrap="square">
+            <a:spAutoFit/>
+          </a:bodyPr>
+          <a:lstStyle/>
+          <a:p>
+            <a:r>
+              <a:rPr sz="1400" b="1">
+                <a:solidFill>
+                  <a:srgbClr val="1B2A4A"/>
+                </a:solidFill>
+                <a:latin typeface="Calibri"/>
+              </a:rPr>
+              <a:t>Piloto sem métrica</a:t>
+            </a:r>
+          </a:p>
+        </p:txBody>
+      </p:sp>
+      <p:sp>
+        <p:nvSpPr>
+          <p:cNvPr id="17" name="TextBox 16"/>
+          <p:cNvSpPr txBox="1"/>
+          <p:nvPr/>
+        </p:nvSpPr>
+        <p:spPr>
+          <a:xfrm>
+            <a:off x="6309360" y="5285232"/>
+            <a:ext cx="5394960" cy="822960"/>
+          </a:xfrm>
+          <a:prstGeom prst="rect">
+            <a:avLst/>
+          </a:prstGeom>
+          <a:noFill/>
+        </p:spPr>
+        <p:txBody>
+          <a:bodyPr wrap="square">
+            <a:spAutoFit/>
+          </a:bodyPr>
+          <a:lstStyle/>
+          <a:p>
+            <a:r>
+              <a:rPr sz="1150" b="0">
+                <a:solidFill>
+                  <a:srgbClr val="5A6472"/>
+                </a:solidFill>
+                <a:latin typeface="Calibri"/>
+              </a:rPr>
+              <a:t>É a receita documentada do fracasso — e aceitar seria vender uma derrota.</a:t>
+            </a:r>
+          </a:p>
+        </p:txBody>
+      </p:sp>
+      <p:sp>
+        <p:nvSpPr>
+          <p:cNvPr id="18" name="TextBox 17"/>
+          <p:cNvSpPr txBox="1"/>
+          <p:nvPr/>
+        </p:nvSpPr>
+        <p:spPr>
+          <a:xfrm>
+            <a:off x="548640" y="5806440"/>
+            <a:ext cx="11064240" cy="365760"/>
+          </a:xfrm>
+          <a:prstGeom prst="rect">
+            <a:avLst/>
+          </a:prstGeom>
+          <a:noFill/>
+        </p:spPr>
+        <p:txBody>
+          <a:bodyPr wrap="square">
+            <a:spAutoFit/>
+          </a:bodyPr>
+          <a:lstStyle/>
+          <a:p>
+            <a:r>
+              <a:rPr sz="1400" b="1">
+                <a:solidFill>
+                  <a:srgbClr val="C2A35B"/>
+                </a:solidFill>
+                <a:latin typeface="Calibri"/>
+              </a:rPr>
+              <a:t>Num mercado onde todos prometem prever, publicar o limite é o que torna o resto crível.</a:t>
+            </a:r>
+          </a:p>
+        </p:txBody>
+      </p:sp>
+      <p:sp>
+        <p:nvSpPr>
+          <p:cNvPr id="19" name="TextBox 18"/>
+          <p:cNvSpPr txBox="1"/>
+          <p:nvPr/>
+        </p:nvSpPr>
+        <p:spPr>
+          <a:xfrm>
+            <a:off x="548640" y="6492240"/>
+            <a:ext cx="5486400" cy="274320"/>
+          </a:xfrm>
+          <a:prstGeom prst="rect">
+            <a:avLst/>
+          </a:prstGeom>
+          <a:noFill/>
+        </p:spPr>
+        <p:txBody>
+          <a:bodyPr wrap="square">
+            <a:spAutoFit/>
+          </a:bodyPr>
+          <a:lstStyle/>
+          <a:p>
+            <a:r>
+              <a:rPr sz="900" b="0">
+                <a:solidFill>
+                  <a:srgbClr val="5A6472"/>
+                </a:solidFill>
+                <a:latin typeface="Calibri"/>
+              </a:rPr>
+              <a:t>ABBA · abbaservices.com.br</a:t>
+            </a:r>
           </a:p>
         </p:txBody>
       </p:sp>
@@ -4915,7 +5539,7 @@
                 <a:ea typeface="Calibri" pitchFamily="34" charset="-122"/>
                 <a:cs typeface="Calibri" pitchFamily="34" charset="-120"/>
               </a:rPr>
-              <a:t>A ABBA é uma consultoria de transformação em IA para empresas brasileiras. Não vendemos treinamento, ferramenta ou piloto: instalamos capacidade — soluções em produção E uma organização que sabe trabalhar com elas.</a:t>
+              <a:t>A ABBA é uma consultoria de transformação em IA para empresas brasileiras. Não vendemos treinamento, ferramenta ou piloto: instalamos capacidade de IA e provamos o que ela mudou — número combinado antes, medido depois, assinado por gente.</a:t>
             </a:r>
             <a:endParaRPr lang="en-US" sz="1700" dirty="0"/>
           </a:p>
@@ -5662,6 +6286,10 @@
             <a:prstDash val="solid"/>
           </a:ln>
         </p:spPr>
+        <p:txBody>
+          <a:bodyPr/>
+          <a:p/>
+        </p:txBody>
       </p:sp>
       <p:sp>
         <p:nvSpPr>
@@ -5724,6 +6352,10 @@
             <a:prstDash val="solid"/>
           </a:ln>
         </p:spPr>
+        <p:txBody>
+          <a:bodyPr/>
+          <a:p/>
+        </p:txBody>
       </p:sp>
       <p:sp>
         <p:nvSpPr>
@@ -5758,7 +6390,7 @@
                 <a:ea typeface="Calibri" pitchFamily="34" charset="-122"/>
                 <a:cs typeface="Calibri" pitchFamily="34" charset="-120"/>
               </a:rPr>
-              <a:t>Degustação</a:t>
+              <a:t>Mapa de Vazamento</a:t>
             </a:r>
             <a:endParaRPr lang="en-US" sz="1500" dirty="0"/>
           </a:p>
@@ -5797,7 +6429,7 @@
                 <a:ea typeface="Calibri" pitchFamily="34" charset="-122"/>
                 <a:cs typeface="Calibri" pitchFamily="34" charset="-120"/>
               </a:rPr>
-              <a:t>Análise gratuita da sua empresa, feita com informação pública</a:t>
+              <a:t>Gratuito: 45 min de conversa + informação pública → 2 páginas com uma faixa em R$</a:t>
             </a:r>
             <a:endParaRPr lang="en-US" sz="1150" dirty="0"/>
           </a:p>
@@ -7376,7 +8008,7 @@
                 <a:ea typeface="Calibri" pitchFamily="34" charset="-122"/>
                 <a:cs typeface="Calibri" pitchFamily="34" charset="-120"/>
               </a:rPr>
-              <a:t>Cada etapa justifica o próprio investimento</a:t>
+              <a:t>Cada etapa deixa um artefato — e produz o insumo da próxima</a:t>
             </a:r>
             <a:endParaRPr lang="en-US" sz="3400" dirty="0"/>
           </a:p>
@@ -7442,6 +8074,10 @@
           </a:solidFill>
           <a:ln/>
         </p:spPr>
+        <p:txBody>
+          <a:bodyPr/>
+          <a:p/>
+        </p:txBody>
       </p:sp>
       <p:sp>
         <p:nvSpPr>
@@ -7554,7 +8190,7 @@
                 <a:ea typeface="Calibri" pitchFamily="34" charset="-122"/>
                 <a:cs typeface="Calibri" pitchFamily="34" charset="-120"/>
               </a:rPr>
-              <a:t>Maturidade, mapa de oportunidades com ROI, arquitetura de referência, plano diretor 6–12 meses</a:t>
+              <a:t>Fica com você: portfólio de oportunidades ranqueado e quantificado (25 dimensões) + plano diretor 6–12 meses</a:t>
             </a:r>
             <a:endParaRPr lang="en-US" sz="1150" dirty="0"/>
           </a:p>
@@ -7581,6 +8217,10 @@
           </a:solidFill>
           <a:ln/>
         </p:spPr>
+        <p:txBody>
+          <a:bodyPr/>
+          <a:p/>
+        </p:txBody>
       </p:sp>
       <p:sp>
         <p:nvSpPr>
@@ -7693,7 +8333,7 @@
                 <a:ea typeface="Calibri" pitchFamily="34" charset="-122"/>
                 <a:cs typeface="Calibri" pitchFamily="34" charset="-120"/>
               </a:rPr>
-              <a:t>Agente funcional com dados reais, validado com usuários-chave — risco reduzido antes de escalar</a:t>
+              <a:t>Fica com você: agente funcional validado com dados reais e usuários-chave — decisão GO/NO-GO com número</a:t>
             </a:r>
             <a:endParaRPr lang="en-US" sz="1150" dirty="0"/>
           </a:p>
@@ -7720,6 +8360,10 @@
           </a:solidFill>
           <a:ln/>
         </p:spPr>
+        <p:txBody>
+          <a:bodyPr/>
+          <a:p/>
+        </p:txBody>
       </p:sp>
       <p:sp>
         <p:nvSpPr>
@@ -7832,7 +8476,7 @@
                 <a:ea typeface="Calibri" pitchFamily="34" charset="-122"/>
                 <a:cs typeface="Calibri" pitchFamily="34" charset="-120"/>
               </a:rPr>
-              <a:t>Cloud gerenciada ou on-premise (soberania de dados), treinamento operacional, handover com SLAs</a:t>
+              <a:t>Fica com você: sistemas em produção (nuvem ou on-premise, soberania de dados) + campeões formados</a:t>
             </a:r>
             <a:endParaRPr lang="en-US" sz="1150" dirty="0"/>
           </a:p>
@@ -7859,6 +8503,10 @@
           </a:solidFill>
           <a:ln/>
         </p:spPr>
+        <p:txBody>
+          <a:bodyPr/>
+          <a:p/>
+        </p:txBody>
       </p:sp>
       <p:sp>
         <p:nvSpPr>
@@ -7971,7 +8619,7 @@
                 <a:ea typeface="Calibri" pitchFamily="34" charset="-122"/>
                 <a:cs typeface="Calibri" pitchFamily="34" charset="-120"/>
               </a:rPr>
-              <a:t>A ABBA opera e evolui a solução — inteligência gerenciada sem exigir time interno especializado</a:t>
+              <a:t>Fica com você: o diário decisão → resultado medido + ritual semanal de 20 min + conselho trimestral</a:t>
             </a:r>
             <a:endParaRPr lang="en-US" sz="1150" dirty="0"/>
           </a:p>
@@ -8010,22 +8658,11 @@
                 <a:ea typeface="Calibri" pitchFamily="34" charset="-122"/>
                 <a:cs typeface="Calibri" pitchFamily="34" charset="-120"/>
               </a:rPr>
-              <a:t>Metodologia em 5 fases com gates de qualidade: </a:t>
-            </a:r>
-            <a:pPr indent="0" marL="0">
-              <a:buNone/>
-            </a:pPr>
-            <a:r>
-              <a:rPr lang="en-US" sz="1400" dirty="0">
-                <a:solidFill>
-                  <a:srgbClr val="5A6472"/>
-                </a:solidFill>
-                <a:latin typeface="Calibri" pitchFamily="34" charset="0"/>
-                <a:ea typeface="Calibri" pitchFamily="34" charset="-122"/>
-                <a:cs typeface="Calibri" pitchFamily="34" charset="-120"/>
-              </a:rPr>
-              <a:t>Discovery → Analysis → Design → Build → Deploy · transparência total, reports semanais, capacitação em paralelo.</a:t>
-            </a:r>
+              <a:t>A regra da escada: cada etapa entrega valor inteiro sozinha — e produz o artefato de que a próxima precisa.</a:t>
+            </a:r>
+            <a:pPr indent="0" marL="0">
+              <a:buNone/>
+            </a:pPr>
             <a:endParaRPr lang="en-US" sz="1400" dirty="0"/>
           </a:p>
         </p:txBody>
@@ -9309,6 +9946,10 @@
           </a:solidFill>
           <a:ln/>
         </p:spPr>
+        <p:txBody>
+          <a:bodyPr/>
+          <a:p/>
+        </p:txBody>
       </p:sp>
       <p:sp>
         <p:nvSpPr>
@@ -9414,6 +10055,10 @@
             <a:prstDash val="solid"/>
           </a:ln>
         </p:spPr>
+        <p:txBody>
+          <a:bodyPr/>
+          <a:p/>
+        </p:txBody>
       </p:sp>
       <p:sp>
         <p:nvSpPr>
@@ -9514,6 +10159,10 @@
           </a:solidFill>
           <a:ln/>
         </p:spPr>
+        <p:txBody>
+          <a:bodyPr/>
+          <a:p/>
+        </p:txBody>
       </p:sp>
       <p:sp>
         <p:nvSpPr>
@@ -9548,7 +10197,7 @@
                 <a:ea typeface="Calibri" pitchFamily="34" charset="-122"/>
                 <a:cs typeface="Calibri" pitchFamily="34" charset="-120"/>
               </a:rPr>
-              <a:t>Agentes com conhecimento institucional</a:t>
+              <a:t>O diário decisão → resultado</a:t>
             </a:r>
             <a:endParaRPr lang="en-US" sz="1450" dirty="0"/>
           </a:p>
@@ -9587,7 +10236,7 @@
                 <a:ea typeface="Calibri" pitchFamily="34" charset="-122"/>
                 <a:cs typeface="Calibri" pitchFamily="34" charset="-120"/>
               </a:rPr>
-              <a:t>O operador pergunta sobre o processo, o gestor pede análise, o executivo pede impacto — o mesmo cérebro responde nas três altitudes.</a:t>
+              <a:t>Nenhuma decisão entra sem métrica combinada ANTES; toda decisão vira resultado medido DEPOIS; vocês veem o registro inteiro — incluindo o que não funcionou.</a:t>
             </a:r>
             <a:endParaRPr lang="en-US" sz="1200" dirty="0"/>
           </a:p>

--- a/08-materiais/modelos/abba-deck-institucional.pptx
+++ b/08-materiais/modelos/abba-deck-institucional.pptx
@@ -2060,6 +2060,636 @@
 </file>
 
 <file path=ppt/slides/slide10.xml><?xml version="1.0" encoding="utf-8"?>
+<p:sld xmlns:a="http://schemas.openxmlformats.org/drawingml/2006/main" xmlns:p="http://schemas.openxmlformats.org/presentationml/2006/main" xmlns:r="http://schemas.openxmlformats.org/officeDocument/2006/relationships">
+  <p:cSld>
+    <p:spTree>
+      <p:nvGrpSpPr>
+        <p:cNvPr id="1" name=""/>
+        <p:cNvGrpSpPr/>
+        <p:nvPr/>
+      </p:nvGrpSpPr>
+      <p:grpSpPr/>
+      <p:sp>
+        <p:nvSpPr>
+          <p:cNvPr id="2" name="TextBox 1"/>
+          <p:cNvSpPr txBox="1"/>
+          <p:nvPr/>
+        </p:nvSpPr>
+        <p:spPr>
+          <a:xfrm>
+            <a:off x="548640" y="365760"/>
+            <a:ext cx="11064240" cy="274320"/>
+          </a:xfrm>
+          <a:prstGeom prst="rect">
+            <a:avLst/>
+          </a:prstGeom>
+          <a:noFill/>
+        </p:spPr>
+        <p:txBody>
+          <a:bodyPr wrap="square">
+            <a:spAutoFit/>
+          </a:bodyPr>
+          <a:lstStyle/>
+          <a:p>
+            <a:r>
+              <a:rPr sz="1200" b="1">
+                <a:solidFill>
+                  <a:srgbClr val="C2A35B"/>
+                </a:solidFill>
+                <a:latin typeface="Calibri"/>
+              </a:rPr>
+              <a:t>A NOSSA PALAVRA</a:t>
+            </a:r>
+          </a:p>
+        </p:txBody>
+      </p:sp>
+      <p:sp>
+        <p:nvSpPr>
+          <p:cNvPr id="3" name="TextBox 2"/>
+          <p:cNvSpPr txBox="1"/>
+          <p:nvPr/>
+        </p:nvSpPr>
+        <p:spPr>
+          <a:xfrm>
+            <a:off x="548640" y="640080"/>
+            <a:ext cx="11064240" cy="731520"/>
+          </a:xfrm>
+          <a:prstGeom prst="rect">
+            <a:avLst/>
+          </a:prstGeom>
+          <a:noFill/>
+        </p:spPr>
+        <p:txBody>
+          <a:bodyPr wrap="square">
+            <a:spAutoFit/>
+          </a:bodyPr>
+          <a:lstStyle/>
+          <a:p>
+            <a:r>
+              <a:rPr sz="3400" b="1">
+                <a:solidFill>
+                  <a:srgbClr val="1B2A4A"/>
+                </a:solidFill>
+                <a:latin typeface="Calibri"/>
+              </a:rPr>
+              <a:t>O que prometemos — e o que nos recusamos a prometer</a:t>
+            </a:r>
+          </a:p>
+        </p:txBody>
+      </p:sp>
+      <p:sp>
+        <p:nvSpPr>
+          <p:cNvPr id="4" name="TextBox 3"/>
+          <p:cNvSpPr txBox="1"/>
+          <p:nvPr/>
+        </p:nvSpPr>
+        <p:spPr>
+          <a:xfrm>
+            <a:off x="548640" y="1737360"/>
+            <a:ext cx="5394960" cy="365760"/>
+          </a:xfrm>
+          <a:prstGeom prst="rect">
+            <a:avLst/>
+          </a:prstGeom>
+          <a:noFill/>
+        </p:spPr>
+        <p:txBody>
+          <a:bodyPr wrap="square">
+            <a:spAutoFit/>
+          </a:bodyPr>
+          <a:lstStyle/>
+          <a:p>
+            <a:r>
+              <a:rPr sz="1600" b="1">
+                <a:solidFill>
+                  <a:srgbClr val="1B2A4A"/>
+                </a:solidFill>
+                <a:latin typeface="Calibri"/>
+              </a:rPr>
+              <a:t>Prometemos</a:t>
+            </a:r>
+          </a:p>
+        </p:txBody>
+      </p:sp>
+      <p:sp>
+        <p:nvSpPr>
+          <p:cNvPr id="5" name="TextBox 4"/>
+          <p:cNvSpPr txBox="1"/>
+          <p:nvPr/>
+        </p:nvSpPr>
+        <p:spPr>
+          <a:xfrm>
+            <a:off x="6309360" y="1737360"/>
+            <a:ext cx="5394960" cy="365760"/>
+          </a:xfrm>
+          <a:prstGeom prst="rect">
+            <a:avLst/>
+          </a:prstGeom>
+          <a:noFill/>
+        </p:spPr>
+        <p:txBody>
+          <a:bodyPr wrap="square">
+            <a:spAutoFit/>
+          </a:bodyPr>
+          <a:lstStyle/>
+          <a:p>
+            <a:r>
+              <a:rPr sz="1600" b="1">
+                <a:solidFill>
+                  <a:srgbClr val="1B2A4A"/>
+                </a:solidFill>
+                <a:latin typeface="Calibri"/>
+              </a:rPr>
+              <a:t>Recusamos</a:t>
+            </a:r>
+          </a:p>
+        </p:txBody>
+      </p:sp>
+      <p:sp>
+        <p:nvSpPr>
+          <p:cNvPr id="6" name="TextBox 5"/>
+          <p:cNvSpPr txBox="1"/>
+          <p:nvPr/>
+        </p:nvSpPr>
+        <p:spPr>
+          <a:xfrm>
+            <a:off x="548640" y="2286000"/>
+            <a:ext cx="5394960" cy="320040"/>
+          </a:xfrm>
+          <a:prstGeom prst="rect">
+            <a:avLst/>
+          </a:prstGeom>
+          <a:noFill/>
+        </p:spPr>
+        <p:txBody>
+          <a:bodyPr wrap="square">
+            <a:spAutoFit/>
+          </a:bodyPr>
+          <a:lstStyle/>
+          <a:p>
+            <a:r>
+              <a:rPr sz="1400" b="1">
+                <a:solidFill>
+                  <a:srgbClr val="1B2A4A"/>
+                </a:solidFill>
+                <a:latin typeface="Calibri"/>
+              </a:rPr>
+              <a:t>Nada entra sem métrica</a:t>
+            </a:r>
+          </a:p>
+        </p:txBody>
+      </p:sp>
+      <p:sp>
+        <p:nvSpPr>
+          <p:cNvPr id="7" name="TextBox 6"/>
+          <p:cNvSpPr txBox="1"/>
+          <p:nvPr/>
+        </p:nvSpPr>
+        <p:spPr>
+          <a:xfrm>
+            <a:off x="548640" y="2633472"/>
+            <a:ext cx="5394960" cy="822960"/>
+          </a:xfrm>
+          <a:prstGeom prst="rect">
+            <a:avLst/>
+          </a:prstGeom>
+          <a:noFill/>
+        </p:spPr>
+        <p:txBody>
+          <a:bodyPr wrap="square">
+            <a:spAutoFit/>
+          </a:bodyPr>
+          <a:lstStyle/>
+          <a:p>
+            <a:r>
+              <a:rPr sz="1150" b="0">
+                <a:solidFill>
+                  <a:srgbClr val="5A6472"/>
+                </a:solidFill>
+                <a:latin typeface="Calibri"/>
+              </a:rPr>
+              <a:t>Toda recomendação nasce com o número que dirá se deu certo — acordado com vocês antes da execução começar.</a:t>
+            </a:r>
+          </a:p>
+        </p:txBody>
+      </p:sp>
+      <p:sp>
+        <p:nvSpPr>
+          <p:cNvPr id="8" name="TextBox 7"/>
+          <p:cNvSpPr txBox="1"/>
+          <p:nvPr/>
+        </p:nvSpPr>
+        <p:spPr>
+          <a:xfrm>
+            <a:off x="548640" y="3611880"/>
+            <a:ext cx="5394960" cy="320040"/>
+          </a:xfrm>
+          <a:prstGeom prst="rect">
+            <a:avLst/>
+          </a:prstGeom>
+          <a:noFill/>
+        </p:spPr>
+        <p:txBody>
+          <a:bodyPr wrap="square">
+            <a:spAutoFit/>
+          </a:bodyPr>
+          <a:lstStyle/>
+          <a:p>
+            <a:r>
+              <a:rPr sz="1400" b="1">
+                <a:solidFill>
+                  <a:srgbClr val="1B2A4A"/>
+                </a:solidFill>
+                <a:latin typeface="Calibri"/>
+              </a:rPr>
+              <a:t>Tudo sai medido</a:t>
+            </a:r>
+          </a:p>
+        </p:txBody>
+      </p:sp>
+      <p:sp>
+        <p:nvSpPr>
+          <p:cNvPr id="9" name="TextBox 8"/>
+          <p:cNvSpPr txBox="1"/>
+          <p:nvPr/>
+        </p:nvSpPr>
+        <p:spPr>
+          <a:xfrm>
+            <a:off x="548640" y="3959352"/>
+            <a:ext cx="5394960" cy="822960"/>
+          </a:xfrm>
+          <a:prstGeom prst="rect">
+            <a:avLst/>
+          </a:prstGeom>
+          <a:noFill/>
+        </p:spPr>
+        <p:txBody>
+          <a:bodyPr wrap="square">
+            <a:spAutoFit/>
+          </a:bodyPr>
+          <a:lstStyle/>
+          <a:p>
+            <a:r>
+              <a:rPr sz="1150" b="0">
+                <a:solidFill>
+                  <a:srgbClr val="5A6472"/>
+                </a:solidFill>
+                <a:latin typeface="Calibri"/>
+              </a:rPr>
+              <a:t>Terminado o prazo, o número é remedido e o veredito registrado: melhor, pior, neutro ou inconclusivo.</a:t>
+            </a:r>
+          </a:p>
+        </p:txBody>
+      </p:sp>
+      <p:sp>
+        <p:nvSpPr>
+          <p:cNvPr id="10" name="TextBox 9"/>
+          <p:cNvSpPr txBox="1"/>
+          <p:nvPr/>
+        </p:nvSpPr>
+        <p:spPr>
+          <a:xfrm>
+            <a:off x="548640" y="4937760"/>
+            <a:ext cx="5394960" cy="320040"/>
+          </a:xfrm>
+          <a:prstGeom prst="rect">
+            <a:avLst/>
+          </a:prstGeom>
+          <a:noFill/>
+        </p:spPr>
+        <p:txBody>
+          <a:bodyPr wrap="square">
+            <a:spAutoFit/>
+          </a:bodyPr>
+          <a:lstStyle/>
+          <a:p>
+            <a:r>
+              <a:rPr sz="1400" b="1">
+                <a:solidFill>
+                  <a:srgbClr val="1B2A4A"/>
+                </a:solidFill>
+                <a:latin typeface="Calibri"/>
+              </a:rPr>
+              <a:t>Vocês veem o registro inteiro</a:t>
+            </a:r>
+          </a:p>
+        </p:txBody>
+      </p:sp>
+      <p:sp>
+        <p:nvSpPr>
+          <p:cNvPr id="11" name="TextBox 10"/>
+          <p:cNvSpPr txBox="1"/>
+          <p:nvPr/>
+        </p:nvSpPr>
+        <p:spPr>
+          <a:xfrm>
+            <a:off x="548640" y="5285232"/>
+            <a:ext cx="5394960" cy="822960"/>
+          </a:xfrm>
+          <a:prstGeom prst="rect">
+            <a:avLst/>
+          </a:prstGeom>
+          <a:noFill/>
+        </p:spPr>
+        <p:txBody>
+          <a:bodyPr wrap="square">
+            <a:spAutoFit/>
+          </a:bodyPr>
+          <a:lstStyle/>
+          <a:p>
+            <a:r>
+              <a:rPr sz="1150" b="0">
+                <a:solidFill>
+                  <a:srgbClr val="5A6472"/>
+                </a:solidFill>
+                <a:latin typeface="Calibri"/>
+              </a:rPr>
+              <a:t>O diário completo, incluindo o que deu errado — não uma seleção.</a:t>
+            </a:r>
+          </a:p>
+        </p:txBody>
+      </p:sp>
+      <p:sp>
+        <p:nvSpPr>
+          <p:cNvPr id="12" name="TextBox 11"/>
+          <p:cNvSpPr txBox="1"/>
+          <p:nvPr/>
+        </p:nvSpPr>
+        <p:spPr>
+          <a:xfrm>
+            <a:off x="6309360" y="2286000"/>
+            <a:ext cx="5394960" cy="320040"/>
+          </a:xfrm>
+          <a:prstGeom prst="rect">
+            <a:avLst/>
+          </a:prstGeom>
+          <a:noFill/>
+        </p:spPr>
+        <p:txBody>
+          <a:bodyPr wrap="square">
+            <a:spAutoFit/>
+          </a:bodyPr>
+          <a:lstStyle/>
+          <a:p>
+            <a:r>
+              <a:rPr sz="1400" b="1">
+                <a:solidFill>
+                  <a:srgbClr val="1B2A4A"/>
+                </a:solidFill>
+                <a:latin typeface="Calibri"/>
+              </a:rPr>
+              <a:t>Prometer acurácia que não medimos</a:t>
+            </a:r>
+          </a:p>
+        </p:txBody>
+      </p:sp>
+      <p:sp>
+        <p:nvSpPr>
+          <p:cNvPr id="13" name="TextBox 12"/>
+          <p:cNvSpPr txBox="1"/>
+          <p:nvPr/>
+        </p:nvSpPr>
+        <p:spPr>
+          <a:xfrm>
+            <a:off x="6309360" y="2633472"/>
+            <a:ext cx="5394960" cy="822960"/>
+          </a:xfrm>
+          <a:prstGeom prst="rect">
+            <a:avLst/>
+          </a:prstGeom>
+          <a:noFill/>
+        </p:spPr>
+        <p:txBody>
+          <a:bodyPr wrap="square">
+            <a:spAutoFit/>
+          </a:bodyPr>
+          <a:lstStyle/>
+          <a:p>
+            <a:r>
+              <a:rPr sz="1150" b="0">
+                <a:solidFill>
+                  <a:srgbClr val="5A6472"/>
+                </a:solidFill>
+                <a:latin typeface="Calibri"/>
+              </a:rPr>
+              <a:t>Um número que não temos destruiria a única coisa que não se recompra: a credibilidade.</a:t>
+            </a:r>
+          </a:p>
+        </p:txBody>
+      </p:sp>
+      <p:sp>
+        <p:nvSpPr>
+          <p:cNvPr id="14" name="TextBox 13"/>
+          <p:cNvSpPr txBox="1"/>
+          <p:nvPr/>
+        </p:nvSpPr>
+        <p:spPr>
+          <a:xfrm>
+            <a:off x="6309360" y="3611880"/>
+            <a:ext cx="5394960" cy="320040"/>
+          </a:xfrm>
+          <a:prstGeom prst="rect">
+            <a:avLst/>
+          </a:prstGeom>
+          <a:noFill/>
+        </p:spPr>
+        <p:txBody>
+          <a:bodyPr wrap="square">
+            <a:spAutoFit/>
+          </a:bodyPr>
+          <a:lstStyle/>
+          <a:p>
+            <a:r>
+              <a:rPr sz="1400" b="1">
+                <a:solidFill>
+                  <a:srgbClr val="1B2A4A"/>
+                </a:solidFill>
+                <a:latin typeface="Calibri"/>
+              </a:rPr>
+              <a:t>Prever o imprevisível</a:t>
+            </a:r>
+          </a:p>
+        </p:txBody>
+      </p:sp>
+      <p:sp>
+        <p:nvSpPr>
+          <p:cNvPr id="15" name="TextBox 14"/>
+          <p:cNvSpPr txBox="1"/>
+          <p:nvPr/>
+        </p:nvSpPr>
+        <p:spPr>
+          <a:xfrm>
+            <a:off x="6309360" y="3959352"/>
+            <a:ext cx="5394960" cy="822960"/>
+          </a:xfrm>
+          <a:prstGeom prst="rect">
+            <a:avLst/>
+          </a:prstGeom>
+          <a:noFill/>
+        </p:spPr>
+        <p:txBody>
+          <a:bodyPr wrap="square">
+            <a:spAutoFit/>
+          </a:bodyPr>
+          <a:lstStyle/>
+          <a:p>
+            <a:r>
+              <a:rPr sz="1150" b="0">
+                <a:solidFill>
+                  <a:srgbClr val="5A6472"/>
+                </a:solidFill>
+                <a:latin typeface="Calibri"/>
+              </a:rPr>
+              <a:t>A evidência é clara: IA prevê mal mudanças de regime e "o que acontece se fizermos X". Não vendemos oráculo.</a:t>
+            </a:r>
+          </a:p>
+        </p:txBody>
+      </p:sp>
+      <p:sp>
+        <p:nvSpPr>
+          <p:cNvPr id="16" name="TextBox 15"/>
+          <p:cNvSpPr txBox="1"/>
+          <p:nvPr/>
+        </p:nvSpPr>
+        <p:spPr>
+          <a:xfrm>
+            <a:off x="6309360" y="4937760"/>
+            <a:ext cx="5394960" cy="320040"/>
+          </a:xfrm>
+          <a:prstGeom prst="rect">
+            <a:avLst/>
+          </a:prstGeom>
+          <a:noFill/>
+        </p:spPr>
+        <p:txBody>
+          <a:bodyPr wrap="square">
+            <a:spAutoFit/>
+          </a:bodyPr>
+          <a:lstStyle/>
+          <a:p>
+            <a:r>
+              <a:rPr sz="1400" b="1">
+                <a:solidFill>
+                  <a:srgbClr val="1B2A4A"/>
+                </a:solidFill>
+                <a:latin typeface="Calibri"/>
+              </a:rPr>
+              <a:t>Piloto sem métrica</a:t>
+            </a:r>
+          </a:p>
+        </p:txBody>
+      </p:sp>
+      <p:sp>
+        <p:nvSpPr>
+          <p:cNvPr id="17" name="TextBox 16"/>
+          <p:cNvSpPr txBox="1"/>
+          <p:nvPr/>
+        </p:nvSpPr>
+        <p:spPr>
+          <a:xfrm>
+            <a:off x="6309360" y="5285232"/>
+            <a:ext cx="5394960" cy="822960"/>
+          </a:xfrm>
+          <a:prstGeom prst="rect">
+            <a:avLst/>
+          </a:prstGeom>
+          <a:noFill/>
+        </p:spPr>
+        <p:txBody>
+          <a:bodyPr wrap="square">
+            <a:spAutoFit/>
+          </a:bodyPr>
+          <a:lstStyle/>
+          <a:p>
+            <a:r>
+              <a:rPr sz="1150" b="0">
+                <a:solidFill>
+                  <a:srgbClr val="5A6472"/>
+                </a:solidFill>
+                <a:latin typeface="Calibri"/>
+              </a:rPr>
+              <a:t>É a receita documentada do fracasso — e aceitar seria vender uma derrota.</a:t>
+            </a:r>
+          </a:p>
+        </p:txBody>
+      </p:sp>
+      <p:sp>
+        <p:nvSpPr>
+          <p:cNvPr id="18" name="TextBox 17"/>
+          <p:cNvSpPr txBox="1"/>
+          <p:nvPr/>
+        </p:nvSpPr>
+        <p:spPr>
+          <a:xfrm>
+            <a:off x="548640" y="5806440"/>
+            <a:ext cx="11064240" cy="365760"/>
+          </a:xfrm>
+          <a:prstGeom prst="rect">
+            <a:avLst/>
+          </a:prstGeom>
+          <a:noFill/>
+        </p:spPr>
+        <p:txBody>
+          <a:bodyPr wrap="square">
+            <a:spAutoFit/>
+          </a:bodyPr>
+          <a:lstStyle/>
+          <a:p>
+            <a:r>
+              <a:rPr sz="1400" b="1">
+                <a:solidFill>
+                  <a:srgbClr val="C2A35B"/>
+                </a:solidFill>
+                <a:latin typeface="Calibri"/>
+              </a:rPr>
+              <a:t>Num mercado onde todos prometem prever, publicar o limite é o que torna o resto crível.</a:t>
+            </a:r>
+          </a:p>
+        </p:txBody>
+      </p:sp>
+      <p:sp>
+        <p:nvSpPr>
+          <p:cNvPr id="19" name="TextBox 18"/>
+          <p:cNvSpPr txBox="1"/>
+          <p:nvPr/>
+        </p:nvSpPr>
+        <p:spPr>
+          <a:xfrm>
+            <a:off x="548640" y="6492240"/>
+            <a:ext cx="5486400" cy="274320"/>
+          </a:xfrm>
+          <a:prstGeom prst="rect">
+            <a:avLst/>
+          </a:prstGeom>
+          <a:noFill/>
+        </p:spPr>
+        <p:txBody>
+          <a:bodyPr wrap="square">
+            <a:spAutoFit/>
+          </a:bodyPr>
+          <a:lstStyle/>
+          <a:p>
+            <a:r>
+              <a:rPr sz="900" b="0">
+                <a:solidFill>
+                  <a:srgbClr val="5A6472"/>
+                </a:solidFill>
+                <a:latin typeface="Calibri"/>
+              </a:rPr>
+              <a:t>ABBA · abbaservices.com.br</a:t>
+            </a:r>
+          </a:p>
+        </p:txBody>
+      </p:sp>
+    </p:spTree>
+  </p:cSld>
+  <p:clrMapOvr>
+    <a:masterClrMapping/>
+  </p:clrMapOvr>
+</p:sld>
+</file>
+
+<file path=ppt/slides/slide11.xml><?xml version="1.0" encoding="utf-8"?>
 <p:sld xmlns:a="http://schemas.openxmlformats.org/drawingml/2006/main" xmlns:r="http://schemas.openxmlformats.org/officeDocument/2006/relationships" xmlns:p="http://schemas.openxmlformats.org/presentationml/2006/main">
   <p:cSld name="Slide 10">
     <p:bg>
@@ -2604,7 +3234,7 @@
 </p:sld>
 </file>
 
-<file path=ppt/slides/slide11.xml><?xml version="1.0" encoding="utf-8"?>
+<file path=ppt/slides/slide12.xml><?xml version="1.0" encoding="utf-8"?>
 <p:sld xmlns:a="http://schemas.openxmlformats.org/drawingml/2006/main" xmlns:r="http://schemas.openxmlformats.org/officeDocument/2006/relationships" xmlns:p="http://schemas.openxmlformats.org/presentationml/2006/main">
   <p:cSld name="Slide 11">
     <p:bg>
@@ -3526,7 +4156,7 @@
 </p:sld>
 </file>
 
-<file path=ppt/slides/slide12.xml><?xml version="1.0" encoding="utf-8"?>
+<file path=ppt/slides/slide13.xml><?xml version="1.0" encoding="utf-8"?>
 <p:sld xmlns:a="http://schemas.openxmlformats.org/drawingml/2006/main" xmlns:r="http://schemas.openxmlformats.org/officeDocument/2006/relationships" xmlns:p="http://schemas.openxmlformats.org/presentationml/2006/main">
   <p:cSld name="Slide 12">
     <p:bg>
@@ -3768,636 +4398,6 @@
               <a:t>ABBA · Consultoria de IA · Confidencial</a:t>
             </a:r>
             <a:endParaRPr lang="en-US" sz="1000" dirty="0"/>
-          </a:p>
-        </p:txBody>
-      </p:sp>
-    </p:spTree>
-  </p:cSld>
-  <p:clrMapOvr>
-    <a:masterClrMapping/>
-  </p:clrMapOvr>
-</p:sld>
-</file>
-
-<file path=ppt/slides/slide13.xml><?xml version="1.0" encoding="utf-8"?>
-<p:sld xmlns:a="http://schemas.openxmlformats.org/drawingml/2006/main" xmlns:p="http://schemas.openxmlformats.org/presentationml/2006/main" xmlns:r="http://schemas.openxmlformats.org/officeDocument/2006/relationships">
-  <p:cSld>
-    <p:spTree>
-      <p:nvGrpSpPr>
-        <p:cNvPr id="1" name=""/>
-        <p:cNvGrpSpPr/>
-        <p:nvPr/>
-      </p:nvGrpSpPr>
-      <p:grpSpPr/>
-      <p:sp>
-        <p:nvSpPr>
-          <p:cNvPr id="2" name="TextBox 1"/>
-          <p:cNvSpPr txBox="1"/>
-          <p:nvPr/>
-        </p:nvSpPr>
-        <p:spPr>
-          <a:xfrm>
-            <a:off x="548640" y="365760"/>
-            <a:ext cx="11064240" cy="274320"/>
-          </a:xfrm>
-          <a:prstGeom prst="rect">
-            <a:avLst/>
-          </a:prstGeom>
-          <a:noFill/>
-        </p:spPr>
-        <p:txBody>
-          <a:bodyPr wrap="square">
-            <a:spAutoFit/>
-          </a:bodyPr>
-          <a:lstStyle/>
-          <a:p>
-            <a:r>
-              <a:rPr sz="1200" b="1">
-                <a:solidFill>
-                  <a:srgbClr val="C2A35B"/>
-                </a:solidFill>
-                <a:latin typeface="Calibri"/>
-              </a:rPr>
-              <a:t>A NOSSA PALAVRA</a:t>
-            </a:r>
-          </a:p>
-        </p:txBody>
-      </p:sp>
-      <p:sp>
-        <p:nvSpPr>
-          <p:cNvPr id="3" name="TextBox 2"/>
-          <p:cNvSpPr txBox="1"/>
-          <p:nvPr/>
-        </p:nvSpPr>
-        <p:spPr>
-          <a:xfrm>
-            <a:off x="548640" y="640080"/>
-            <a:ext cx="11064240" cy="731520"/>
-          </a:xfrm>
-          <a:prstGeom prst="rect">
-            <a:avLst/>
-          </a:prstGeom>
-          <a:noFill/>
-        </p:spPr>
-        <p:txBody>
-          <a:bodyPr wrap="square">
-            <a:spAutoFit/>
-          </a:bodyPr>
-          <a:lstStyle/>
-          <a:p>
-            <a:r>
-              <a:rPr sz="3400" b="1">
-                <a:solidFill>
-                  <a:srgbClr val="1B2A4A"/>
-                </a:solidFill>
-                <a:latin typeface="Calibri"/>
-              </a:rPr>
-              <a:t>O que prometemos — e o que nos recusamos a prometer</a:t>
-            </a:r>
-          </a:p>
-        </p:txBody>
-      </p:sp>
-      <p:sp>
-        <p:nvSpPr>
-          <p:cNvPr id="4" name="TextBox 3"/>
-          <p:cNvSpPr txBox="1"/>
-          <p:nvPr/>
-        </p:nvSpPr>
-        <p:spPr>
-          <a:xfrm>
-            <a:off x="548640" y="1737360"/>
-            <a:ext cx="5394960" cy="365760"/>
-          </a:xfrm>
-          <a:prstGeom prst="rect">
-            <a:avLst/>
-          </a:prstGeom>
-          <a:noFill/>
-        </p:spPr>
-        <p:txBody>
-          <a:bodyPr wrap="square">
-            <a:spAutoFit/>
-          </a:bodyPr>
-          <a:lstStyle/>
-          <a:p>
-            <a:r>
-              <a:rPr sz="1600" b="1">
-                <a:solidFill>
-                  <a:srgbClr val="1B2A4A"/>
-                </a:solidFill>
-                <a:latin typeface="Calibri"/>
-              </a:rPr>
-              <a:t>Prometemos</a:t>
-            </a:r>
-          </a:p>
-        </p:txBody>
-      </p:sp>
-      <p:sp>
-        <p:nvSpPr>
-          <p:cNvPr id="5" name="TextBox 4"/>
-          <p:cNvSpPr txBox="1"/>
-          <p:nvPr/>
-        </p:nvSpPr>
-        <p:spPr>
-          <a:xfrm>
-            <a:off x="6309360" y="1737360"/>
-            <a:ext cx="5394960" cy="365760"/>
-          </a:xfrm>
-          <a:prstGeom prst="rect">
-            <a:avLst/>
-          </a:prstGeom>
-          <a:noFill/>
-        </p:spPr>
-        <p:txBody>
-          <a:bodyPr wrap="square">
-            <a:spAutoFit/>
-          </a:bodyPr>
-          <a:lstStyle/>
-          <a:p>
-            <a:r>
-              <a:rPr sz="1600" b="1">
-                <a:solidFill>
-                  <a:srgbClr val="1B2A4A"/>
-                </a:solidFill>
-                <a:latin typeface="Calibri"/>
-              </a:rPr>
-              <a:t>Recusamos</a:t>
-            </a:r>
-          </a:p>
-        </p:txBody>
-      </p:sp>
-      <p:sp>
-        <p:nvSpPr>
-          <p:cNvPr id="6" name="TextBox 5"/>
-          <p:cNvSpPr txBox="1"/>
-          <p:nvPr/>
-        </p:nvSpPr>
-        <p:spPr>
-          <a:xfrm>
-            <a:off x="548640" y="2286000"/>
-            <a:ext cx="5394960" cy="320040"/>
-          </a:xfrm>
-          <a:prstGeom prst="rect">
-            <a:avLst/>
-          </a:prstGeom>
-          <a:noFill/>
-        </p:spPr>
-        <p:txBody>
-          <a:bodyPr wrap="square">
-            <a:spAutoFit/>
-          </a:bodyPr>
-          <a:lstStyle/>
-          <a:p>
-            <a:r>
-              <a:rPr sz="1400" b="1">
-                <a:solidFill>
-                  <a:srgbClr val="1B2A4A"/>
-                </a:solidFill>
-                <a:latin typeface="Calibri"/>
-              </a:rPr>
-              <a:t>Nada entra sem métrica</a:t>
-            </a:r>
-          </a:p>
-        </p:txBody>
-      </p:sp>
-      <p:sp>
-        <p:nvSpPr>
-          <p:cNvPr id="7" name="TextBox 6"/>
-          <p:cNvSpPr txBox="1"/>
-          <p:nvPr/>
-        </p:nvSpPr>
-        <p:spPr>
-          <a:xfrm>
-            <a:off x="548640" y="2633472"/>
-            <a:ext cx="5394960" cy="822960"/>
-          </a:xfrm>
-          <a:prstGeom prst="rect">
-            <a:avLst/>
-          </a:prstGeom>
-          <a:noFill/>
-        </p:spPr>
-        <p:txBody>
-          <a:bodyPr wrap="square">
-            <a:spAutoFit/>
-          </a:bodyPr>
-          <a:lstStyle/>
-          <a:p>
-            <a:r>
-              <a:rPr sz="1150" b="0">
-                <a:solidFill>
-                  <a:srgbClr val="5A6472"/>
-                </a:solidFill>
-                <a:latin typeface="Calibri"/>
-              </a:rPr>
-              <a:t>Toda recomendação nasce com o número que dirá se deu certo — acordado com vocês antes da execução começar.</a:t>
-            </a:r>
-          </a:p>
-        </p:txBody>
-      </p:sp>
-      <p:sp>
-        <p:nvSpPr>
-          <p:cNvPr id="8" name="TextBox 7"/>
-          <p:cNvSpPr txBox="1"/>
-          <p:nvPr/>
-        </p:nvSpPr>
-        <p:spPr>
-          <a:xfrm>
-            <a:off x="548640" y="3611880"/>
-            <a:ext cx="5394960" cy="320040"/>
-          </a:xfrm>
-          <a:prstGeom prst="rect">
-            <a:avLst/>
-          </a:prstGeom>
-          <a:noFill/>
-        </p:spPr>
-        <p:txBody>
-          <a:bodyPr wrap="square">
-            <a:spAutoFit/>
-          </a:bodyPr>
-          <a:lstStyle/>
-          <a:p>
-            <a:r>
-              <a:rPr sz="1400" b="1">
-                <a:solidFill>
-                  <a:srgbClr val="1B2A4A"/>
-                </a:solidFill>
-                <a:latin typeface="Calibri"/>
-              </a:rPr>
-              <a:t>Tudo sai medido</a:t>
-            </a:r>
-          </a:p>
-        </p:txBody>
-      </p:sp>
-      <p:sp>
-        <p:nvSpPr>
-          <p:cNvPr id="9" name="TextBox 8"/>
-          <p:cNvSpPr txBox="1"/>
-          <p:nvPr/>
-        </p:nvSpPr>
-        <p:spPr>
-          <a:xfrm>
-            <a:off x="548640" y="3959352"/>
-            <a:ext cx="5394960" cy="822960"/>
-          </a:xfrm>
-          <a:prstGeom prst="rect">
-            <a:avLst/>
-          </a:prstGeom>
-          <a:noFill/>
-        </p:spPr>
-        <p:txBody>
-          <a:bodyPr wrap="square">
-            <a:spAutoFit/>
-          </a:bodyPr>
-          <a:lstStyle/>
-          <a:p>
-            <a:r>
-              <a:rPr sz="1150" b="0">
-                <a:solidFill>
-                  <a:srgbClr val="5A6472"/>
-                </a:solidFill>
-                <a:latin typeface="Calibri"/>
-              </a:rPr>
-              <a:t>Terminado o prazo, o número é remedido e o veredito registrado: melhor, pior, neutro ou inconclusivo.</a:t>
-            </a:r>
-          </a:p>
-        </p:txBody>
-      </p:sp>
-      <p:sp>
-        <p:nvSpPr>
-          <p:cNvPr id="10" name="TextBox 9"/>
-          <p:cNvSpPr txBox="1"/>
-          <p:nvPr/>
-        </p:nvSpPr>
-        <p:spPr>
-          <a:xfrm>
-            <a:off x="548640" y="4937760"/>
-            <a:ext cx="5394960" cy="320040"/>
-          </a:xfrm>
-          <a:prstGeom prst="rect">
-            <a:avLst/>
-          </a:prstGeom>
-          <a:noFill/>
-        </p:spPr>
-        <p:txBody>
-          <a:bodyPr wrap="square">
-            <a:spAutoFit/>
-          </a:bodyPr>
-          <a:lstStyle/>
-          <a:p>
-            <a:r>
-              <a:rPr sz="1400" b="1">
-                <a:solidFill>
-                  <a:srgbClr val="1B2A4A"/>
-                </a:solidFill>
-                <a:latin typeface="Calibri"/>
-              </a:rPr>
-              <a:t>Vocês veem o registro inteiro</a:t>
-            </a:r>
-          </a:p>
-        </p:txBody>
-      </p:sp>
-      <p:sp>
-        <p:nvSpPr>
-          <p:cNvPr id="11" name="TextBox 10"/>
-          <p:cNvSpPr txBox="1"/>
-          <p:nvPr/>
-        </p:nvSpPr>
-        <p:spPr>
-          <a:xfrm>
-            <a:off x="548640" y="5285232"/>
-            <a:ext cx="5394960" cy="822960"/>
-          </a:xfrm>
-          <a:prstGeom prst="rect">
-            <a:avLst/>
-          </a:prstGeom>
-          <a:noFill/>
-        </p:spPr>
-        <p:txBody>
-          <a:bodyPr wrap="square">
-            <a:spAutoFit/>
-          </a:bodyPr>
-          <a:lstStyle/>
-          <a:p>
-            <a:r>
-              <a:rPr sz="1150" b="0">
-                <a:solidFill>
-                  <a:srgbClr val="5A6472"/>
-                </a:solidFill>
-                <a:latin typeface="Calibri"/>
-              </a:rPr>
-              <a:t>O diário completo, incluindo o que deu errado — não uma seleção.</a:t>
-            </a:r>
-          </a:p>
-        </p:txBody>
-      </p:sp>
-      <p:sp>
-        <p:nvSpPr>
-          <p:cNvPr id="12" name="TextBox 11"/>
-          <p:cNvSpPr txBox="1"/>
-          <p:nvPr/>
-        </p:nvSpPr>
-        <p:spPr>
-          <a:xfrm>
-            <a:off x="6309360" y="2286000"/>
-            <a:ext cx="5394960" cy="320040"/>
-          </a:xfrm>
-          <a:prstGeom prst="rect">
-            <a:avLst/>
-          </a:prstGeom>
-          <a:noFill/>
-        </p:spPr>
-        <p:txBody>
-          <a:bodyPr wrap="square">
-            <a:spAutoFit/>
-          </a:bodyPr>
-          <a:lstStyle/>
-          <a:p>
-            <a:r>
-              <a:rPr sz="1400" b="1">
-                <a:solidFill>
-                  <a:srgbClr val="1B2A4A"/>
-                </a:solidFill>
-                <a:latin typeface="Calibri"/>
-              </a:rPr>
-              <a:t>Prometer acurácia que não medimos</a:t>
-            </a:r>
-          </a:p>
-        </p:txBody>
-      </p:sp>
-      <p:sp>
-        <p:nvSpPr>
-          <p:cNvPr id="13" name="TextBox 12"/>
-          <p:cNvSpPr txBox="1"/>
-          <p:nvPr/>
-        </p:nvSpPr>
-        <p:spPr>
-          <a:xfrm>
-            <a:off x="6309360" y="2633472"/>
-            <a:ext cx="5394960" cy="822960"/>
-          </a:xfrm>
-          <a:prstGeom prst="rect">
-            <a:avLst/>
-          </a:prstGeom>
-          <a:noFill/>
-        </p:spPr>
-        <p:txBody>
-          <a:bodyPr wrap="square">
-            <a:spAutoFit/>
-          </a:bodyPr>
-          <a:lstStyle/>
-          <a:p>
-            <a:r>
-              <a:rPr sz="1150" b="0">
-                <a:solidFill>
-                  <a:srgbClr val="5A6472"/>
-                </a:solidFill>
-                <a:latin typeface="Calibri"/>
-              </a:rPr>
-              <a:t>Um número que não temos destruiria a única coisa que não se recompra: a credibilidade.</a:t>
-            </a:r>
-          </a:p>
-        </p:txBody>
-      </p:sp>
-      <p:sp>
-        <p:nvSpPr>
-          <p:cNvPr id="14" name="TextBox 13"/>
-          <p:cNvSpPr txBox="1"/>
-          <p:nvPr/>
-        </p:nvSpPr>
-        <p:spPr>
-          <a:xfrm>
-            <a:off x="6309360" y="3611880"/>
-            <a:ext cx="5394960" cy="320040"/>
-          </a:xfrm>
-          <a:prstGeom prst="rect">
-            <a:avLst/>
-          </a:prstGeom>
-          <a:noFill/>
-        </p:spPr>
-        <p:txBody>
-          <a:bodyPr wrap="square">
-            <a:spAutoFit/>
-          </a:bodyPr>
-          <a:lstStyle/>
-          <a:p>
-            <a:r>
-              <a:rPr sz="1400" b="1">
-                <a:solidFill>
-                  <a:srgbClr val="1B2A4A"/>
-                </a:solidFill>
-                <a:latin typeface="Calibri"/>
-              </a:rPr>
-              <a:t>Prever o imprevisível</a:t>
-            </a:r>
-          </a:p>
-        </p:txBody>
-      </p:sp>
-      <p:sp>
-        <p:nvSpPr>
-          <p:cNvPr id="15" name="TextBox 14"/>
-          <p:cNvSpPr txBox="1"/>
-          <p:nvPr/>
-        </p:nvSpPr>
-        <p:spPr>
-          <a:xfrm>
-            <a:off x="6309360" y="3959352"/>
-            <a:ext cx="5394960" cy="822960"/>
-          </a:xfrm>
-          <a:prstGeom prst="rect">
-            <a:avLst/>
-          </a:prstGeom>
-          <a:noFill/>
-        </p:spPr>
-        <p:txBody>
-          <a:bodyPr wrap="square">
-            <a:spAutoFit/>
-          </a:bodyPr>
-          <a:lstStyle/>
-          <a:p>
-            <a:r>
-              <a:rPr sz="1150" b="0">
-                <a:solidFill>
-                  <a:srgbClr val="5A6472"/>
-                </a:solidFill>
-                <a:latin typeface="Calibri"/>
-              </a:rPr>
-              <a:t>A evidência é clara: IA prevê mal mudanças de regime e "o que acontece se fizermos X". Não vendemos oráculo.</a:t>
-            </a:r>
-          </a:p>
-        </p:txBody>
-      </p:sp>
-      <p:sp>
-        <p:nvSpPr>
-          <p:cNvPr id="16" name="TextBox 15"/>
-          <p:cNvSpPr txBox="1"/>
-          <p:nvPr/>
-        </p:nvSpPr>
-        <p:spPr>
-          <a:xfrm>
-            <a:off x="6309360" y="4937760"/>
-            <a:ext cx="5394960" cy="320040"/>
-          </a:xfrm>
-          <a:prstGeom prst="rect">
-            <a:avLst/>
-          </a:prstGeom>
-          <a:noFill/>
-        </p:spPr>
-        <p:txBody>
-          <a:bodyPr wrap="square">
-            <a:spAutoFit/>
-          </a:bodyPr>
-          <a:lstStyle/>
-          <a:p>
-            <a:r>
-              <a:rPr sz="1400" b="1">
-                <a:solidFill>
-                  <a:srgbClr val="1B2A4A"/>
-                </a:solidFill>
-                <a:latin typeface="Calibri"/>
-              </a:rPr>
-              <a:t>Piloto sem métrica</a:t>
-            </a:r>
-          </a:p>
-        </p:txBody>
-      </p:sp>
-      <p:sp>
-        <p:nvSpPr>
-          <p:cNvPr id="17" name="TextBox 16"/>
-          <p:cNvSpPr txBox="1"/>
-          <p:nvPr/>
-        </p:nvSpPr>
-        <p:spPr>
-          <a:xfrm>
-            <a:off x="6309360" y="5285232"/>
-            <a:ext cx="5394960" cy="822960"/>
-          </a:xfrm>
-          <a:prstGeom prst="rect">
-            <a:avLst/>
-          </a:prstGeom>
-          <a:noFill/>
-        </p:spPr>
-        <p:txBody>
-          <a:bodyPr wrap="square">
-            <a:spAutoFit/>
-          </a:bodyPr>
-          <a:lstStyle/>
-          <a:p>
-            <a:r>
-              <a:rPr sz="1150" b="0">
-                <a:solidFill>
-                  <a:srgbClr val="5A6472"/>
-                </a:solidFill>
-                <a:latin typeface="Calibri"/>
-              </a:rPr>
-              <a:t>É a receita documentada do fracasso — e aceitar seria vender uma derrota.</a:t>
-            </a:r>
-          </a:p>
-        </p:txBody>
-      </p:sp>
-      <p:sp>
-        <p:nvSpPr>
-          <p:cNvPr id="18" name="TextBox 17"/>
-          <p:cNvSpPr txBox="1"/>
-          <p:nvPr/>
-        </p:nvSpPr>
-        <p:spPr>
-          <a:xfrm>
-            <a:off x="548640" y="5806440"/>
-            <a:ext cx="11064240" cy="365760"/>
-          </a:xfrm>
-          <a:prstGeom prst="rect">
-            <a:avLst/>
-          </a:prstGeom>
-          <a:noFill/>
-        </p:spPr>
-        <p:txBody>
-          <a:bodyPr wrap="square">
-            <a:spAutoFit/>
-          </a:bodyPr>
-          <a:lstStyle/>
-          <a:p>
-            <a:r>
-              <a:rPr sz="1400" b="1">
-                <a:solidFill>
-                  <a:srgbClr val="C2A35B"/>
-                </a:solidFill>
-                <a:latin typeface="Calibri"/>
-              </a:rPr>
-              <a:t>Num mercado onde todos prometem prever, publicar o limite é o que torna o resto crível.</a:t>
-            </a:r>
-          </a:p>
-        </p:txBody>
-      </p:sp>
-      <p:sp>
-        <p:nvSpPr>
-          <p:cNvPr id="19" name="TextBox 18"/>
-          <p:cNvSpPr txBox="1"/>
-          <p:nvPr/>
-        </p:nvSpPr>
-        <p:spPr>
-          <a:xfrm>
-            <a:off x="548640" y="6492240"/>
-            <a:ext cx="5486400" cy="274320"/>
-          </a:xfrm>
-          <a:prstGeom prst="rect">
-            <a:avLst/>
-          </a:prstGeom>
-          <a:noFill/>
-        </p:spPr>
-        <p:txBody>
-          <a:bodyPr wrap="square">
-            <a:spAutoFit/>
-          </a:bodyPr>
-          <a:lstStyle/>
-          <a:p>
-            <a:r>
-              <a:rPr sz="900" b="0">
-                <a:solidFill>
-                  <a:srgbClr val="5A6472"/>
-                </a:solidFill>
-                <a:latin typeface="Calibri"/>
-              </a:rPr>
-              <a:t>ABBA · abbaservices.com.br</a:t>
-            </a:r>
           </a:p>
         </p:txBody>
       </p:sp>
@@ -5539,7 +5539,7 @@
                 <a:ea typeface="Calibri" pitchFamily="34" charset="-122"/>
                 <a:cs typeface="Calibri" pitchFamily="34" charset="-120"/>
               </a:rPr>
-              <a:t>A ABBA é uma consultoria de transformação em IA para empresas brasileiras. Não vendemos treinamento, ferramenta ou piloto: instalamos capacidade de IA e provamos o que ela mudou — número combinado antes, medido depois, assinado por gente.</a:t>
+              <a:t>A ABBA é uma consultoria de transformação em IA para empresas brasileiras. Não vendemos treinamento, ferramenta ou piloto solto que morre em slide — validamos com protótipo real e GO/NO-GO: instalamos capacidade de IA e provamos o que ela mudou — número combinado antes, medido depois, assinado por gente.</a:t>
             </a:r>
             <a:endParaRPr lang="en-US" sz="1700" dirty="0"/>
           </a:p>
@@ -5569,6 +5569,10 @@
             <a:prstDash val="solid"/>
           </a:ln>
         </p:spPr>
+        <p:txBody>
+          <a:bodyPr/>
+          <a:p/>
+        </p:txBody>
       </p:sp>
       <p:sp>
         <p:nvSpPr>
@@ -5711,6 +5715,10 @@
             <a:prstDash val="solid"/>
           </a:ln>
         </p:spPr>
+        <p:txBody>
+          <a:bodyPr/>
+          <a:p/>
+        </p:txBody>
       </p:sp>
       <p:sp>
         <p:nvSpPr>
@@ -5853,6 +5861,10 @@
             <a:prstDash val="solid"/>
           </a:ln>
         </p:spPr>
+        <p:txBody>
+          <a:bodyPr/>
+          <a:p/>
+        </p:txBody>
       </p:sp>
       <p:sp>
         <p:nvSpPr>
@@ -5995,6 +6007,10 @@
             <a:prstDash val="solid"/>
           </a:ln>
         </p:spPr>
+        <p:txBody>
+          <a:bodyPr/>
+          <a:p/>
+        </p:txBody>
       </p:sp>
       <p:sp>
         <p:nvSpPr>

--- a/08-materiais/modelos/abba-deck-institucional.pptx
+++ b/08-materiais/modelos/abba-deck-institucional.pptx
@@ -5685,7 +5685,7 @@
                 <a:ea typeface="Calibri" pitchFamily="34" charset="-122"/>
                 <a:cs typeface="Calibri" pitchFamily="34" charset="-120"/>
               </a:rPr>
-              <a:t>Avaliação da empresa em 25 dimensões, com dado e quantificação por trás de cada recomendação.</a:t>
+              <a:t>Avaliação profunda da empresa, do conselho à linha de frente, com dado e quantificação por trás de cada recomendação.</a:t>
             </a:r>
             <a:endParaRPr lang="en-US" sz="1300" dirty="0"/>
           </a:p>
@@ -5977,7 +5977,7 @@
                 <a:ea typeface="Calibri" pitchFamily="34" charset="-122"/>
                 <a:cs typeface="Calibri" pitchFamily="34" charset="-120"/>
               </a:rPr>
-              <a:t>Agentes sob medida em produção, com pontos de aprovação humana — na sua infraestrutura ou em nuvem.</a:t>
+              <a:t>Engenharia sob medida — arquitetura, integrações e agentes de IA em produção, com pontos de aprovação humana; na sua infraestrutura ou em nuvem.</a:t>
             </a:r>
             <a:endParaRPr lang="en-US" sz="1300" dirty="0"/>
           </a:p>
@@ -6610,7 +6610,7 @@
                 <a:ea typeface="Calibri" pitchFamily="34" charset="-122"/>
                 <a:cs typeface="Calibri" pitchFamily="34" charset="-120"/>
               </a:rPr>
-              <a:t>25 dimensões, do conselho à linha de frente, com quantificação</a:t>
+              <a:t>Mergulho profundo, do conselho à linha de frente, com quantificação</a:t>
             </a:r>
             <a:endParaRPr lang="en-US" sz="1150" dirty="0"/>
           </a:p>
@@ -6775,7 +6775,7 @@
                 <a:ea typeface="Calibri" pitchFamily="34" charset="-122"/>
                 <a:cs typeface="Calibri" pitchFamily="34" charset="-120"/>
               </a:rPr>
-              <a:t>Agentes sob medida, on-premises ou nuvem gerenciada</a:t>
+              <a:t>Engenharia sob medida: arquitetura, integrações e agentes, on-premises ou nuvem</a:t>
             </a:r>
             <a:endParaRPr lang="en-US" sz="1150" dirty="0"/>
           </a:p>
@@ -8206,7 +8206,7 @@
                 <a:ea typeface="Calibri" pitchFamily="34" charset="-122"/>
                 <a:cs typeface="Calibri" pitchFamily="34" charset="-120"/>
               </a:rPr>
-              <a:t>Fica com você: portfólio de oportunidades ranqueado e quantificado (25 dimensões) + plano diretor 6–12 meses</a:t>
+              <a:t>Fica com você: portfólio de oportunidades ranqueado e quantificado + plano diretor 6–12 meses</a:t>
             </a:r>
             <a:endParaRPr lang="en-US" sz="1150" dirty="0"/>
           </a:p>
@@ -8349,7 +8349,7 @@
                 <a:ea typeface="Calibri" pitchFamily="34" charset="-122"/>
                 <a:cs typeface="Calibri" pitchFamily="34" charset="-120"/>
               </a:rPr>
-              <a:t>Fica com você: agente funcional validado com dados reais e usuários-chave — decisão GO/NO-GO com número</a:t>
+              <a:t>Fica com você: solução funcional validada com dados reais e usuários-chave — decisão GO/NO-GO com número</a:t>
             </a:r>
             <a:endParaRPr lang="en-US" sz="1150" dirty="0"/>
           </a:p>
@@ -10000,7 +10000,7 @@
                 <a:ea typeface="Calibri" pitchFamily="34" charset="-122"/>
                 <a:cs typeface="Calibri" pitchFamily="34" charset="-120"/>
               </a:rPr>
-              <a:t>Avaliação em 25 dimensões</a:t>
+              <a:t>Avaliação profunda da empresa inteira</a:t>
             </a:r>
             <a:endParaRPr lang="en-US" sz="1450" dirty="0"/>
           </a:p>

--- a/08-materiais/modelos/abba-deck-institucional.pptx
+++ b/08-materiais/modelos/abba-deck-institucional.pptx
@@ -1991,7 +1991,7 @@
                 <a:ea typeface="Cambria" pitchFamily="34" charset="-122"/>
                 <a:cs typeface="Cambria" pitchFamily="34" charset="-120"/>
               </a:rPr>
-              <a:t>Capacidade de IA construída em escala — e provada, como terceiro, com o número combinado antes e medido depois.</a:t>
+              <a:t>Capacidade de IA construída em escala. E provada, como terceiro: número combinado antes, medido depois.</a:t>
             </a:r>
             <a:endParaRPr lang="en-US" sz="1700" dirty="0"/>
           </a:p>
@@ -2062,7 +2062,7 @@
                 <a:ea typeface="Calibri" pitchFamily="34" charset="-122"/>
                 <a:cs typeface="Calibri" pitchFamily="34" charset="-120"/>
               </a:rPr>
-              <a:t>POR QUE UM TERCEIRO</a:t>
+              <a:t>DEPOIS DO PRIMEIRO ANO</a:t>
             </a:r>
             <a:endParaRPr lang="en-US" sz="1100" dirty="0"/>
           </a:p>
@@ -2104,7 +2104,7 @@
                 <a:ea typeface="Cambria" pitchFamily="34" charset="-122"/>
                 <a:cs typeface="Cambria" pitchFamily="34" charset="-120"/>
               </a:rPr>
-              <a:t>Nenhum time interno pode ser a própria prova.</a:t>
+              <a:t>A relação não termina: ela passa a ser medida todo ano.</a:t>
             </a:r>
             <a:endParaRPr lang="en-US" sz="2800" dirty="0"/>
           </a:p>
@@ -2118,24 +2118,27 @@
         </p:nvSpPr>
         <p:spPr>
           <a:xfrm>
-            <a:off x="822960" y="6400800"/>
-            <a:ext cx="10543032" cy="274320"/>
-          </a:xfrm>
-          <a:prstGeom prst="rect">
-            <a:avLst/>
-          </a:prstGeom>
-          <a:noFill/>
-          <a:ln/>
-        </p:spPr>
-        <p:txBody>
-          <a:bodyPr wrap="square" rtlCol="0" anchor="ctr"/>
-          <a:lstStyle/>
-          <a:p>
-            <a:pPr algn="ctr" indent="0" marL="0">
-              <a:buNone/>
-            </a:pPr>
-            <a:r>
-              <a:rPr lang="en-US" sz="900" spc="100" kern="0" dirty="0">
+            <a:off x="822960" y="1920240"/>
+            <a:ext cx="10543032" cy="640080"/>
+          </a:xfrm>
+          <a:prstGeom prst="rect">
+            <a:avLst/>
+          </a:prstGeom>
+          <a:noFill/>
+          <a:ln/>
+        </p:spPr>
+        <p:txBody>
+          <a:bodyPr wrap="square" rtlCol="0" anchor="ctr"/>
+          <a:lstStyle/>
+          <a:p>
+            <a:pPr algn="l" indent="0" marL="0">
+              <a:lnSpc>
+                <a:spcPts val="2000"/>
+              </a:lnSpc>
+              <a:buNone/>
+            </a:pPr>
+            <a:r>
+              <a:rPr lang="en-US" sz="1300" dirty="0">
                 <a:solidFill>
                   <a:srgbClr val="6E6858"/>
                 </a:solidFill>
@@ -2143,9 +2146,9 @@
                 <a:ea typeface="Calibri" pitchFamily="34" charset="-122"/>
                 <a:cs typeface="Calibri" pitchFamily="34" charset="-120"/>
               </a:rPr>
-              <a:t>ABBA Consultoria de IA · contato@abbaservices.com.br</a:t>
-            </a:r>
-            <a:endParaRPr lang="en-US" sz="900" dirty="0"/>
+              <a:t>Do segundo ano em diante, a empresa opera sozinha e nós ficamos com o que não dá para fazer de dentro:</a:t>
+            </a:r>
+            <a:endParaRPr lang="en-US" sz="1300" dirty="0"/>
           </a:p>
         </p:txBody>
       </p:sp>
@@ -2157,37 +2160,34 @@
         </p:nvSpPr>
         <p:spPr>
           <a:xfrm>
-            <a:off x="822960" y="2103120"/>
-            <a:ext cx="10543032" cy="1828800"/>
-          </a:xfrm>
-          <a:prstGeom prst="rect">
-            <a:avLst/>
-          </a:prstGeom>
-          <a:noFill/>
-          <a:ln/>
-        </p:spPr>
-        <p:txBody>
-          <a:bodyPr wrap="square" rtlCol="0" anchor="ctr"/>
-          <a:lstStyle/>
-          <a:p>
-            <a:pPr algn="l" indent="0" marL="0">
-              <a:lnSpc>
-                <a:spcPts val="2400"/>
-              </a:lnSpc>
-              <a:buNone/>
-            </a:pPr>
-            <a:r>
-              <a:rPr lang="en-US" sz="1500" dirty="0">
-                <a:solidFill>
-                  <a:srgbClr val="33394A"/>
+            <a:off x="822960" y="6400800"/>
+            <a:ext cx="10543032" cy="274320"/>
+          </a:xfrm>
+          <a:prstGeom prst="rect">
+            <a:avLst/>
+          </a:prstGeom>
+          <a:noFill/>
+          <a:ln/>
+        </p:spPr>
+        <p:txBody>
+          <a:bodyPr wrap="square" rtlCol="0" anchor="ctr"/>
+          <a:lstStyle/>
+          <a:p>
+            <a:pPr algn="ctr" indent="0" marL="0">
+              <a:buNone/>
+            </a:pPr>
+            <a:r>
+              <a:rPr lang="en-US" sz="900" spc="100" kern="0" dirty="0">
+                <a:solidFill>
+                  <a:srgbClr val="6E6858"/>
                 </a:solidFill>
                 <a:latin typeface="Calibri" pitchFamily="34" charset="0"/>
                 <a:ea typeface="Calibri" pitchFamily="34" charset="-122"/>
                 <a:cs typeface="Calibri" pitchFamily="34" charset="-120"/>
               </a:rPr>
-              <a:t>É a razão pela qual empresas com um ótimo CFO ainda contratam quem verifique as contas de fora: quem executa não pode atestar o próprio resultado. Na ABBA, a prova é de terceiro por construção — a expectativa é declarada antes e fica imutável, o resultado só entra medido e assinado por uma pessoa nomeada da sua empresa, e o histórico nunca se apaga. O melhor diretor de IA do mundo não substitui isso; ele usa isso.</a:t>
-            </a:r>
-            <a:endParaRPr lang="en-US" sz="1500" dirty="0"/>
+              <a:t>ABBA Consultoria de IA · contato@abbaservices.com.br</a:t>
+            </a:r>
+            <a:endParaRPr lang="en-US" sz="900" dirty="0"/>
           </a:p>
         </p:txBody>
       </p:sp>
@@ -2199,7 +2199,7 @@
         </p:nvSpPr>
         <p:spPr>
           <a:xfrm>
-            <a:off x="822960" y="4206240"/>
+            <a:off x="822960" y="2651760"/>
             <a:ext cx="10543032" cy="0"/>
           </a:xfrm>
           <a:prstGeom prst="line">
@@ -2222,8 +2222,8 @@
         </p:nvSpPr>
         <p:spPr>
           <a:xfrm>
-            <a:off x="822960" y="4389120"/>
-            <a:ext cx="5486400" cy="292608"/>
+            <a:off x="822960" y="2761488"/>
+            <a:ext cx="3108960" cy="292608"/>
           </a:xfrm>
           <a:prstGeom prst="rect">
             <a:avLst/>
@@ -2239,7 +2239,7 @@
               <a:buNone/>
             </a:pPr>
             <a:r>
-              <a:rPr lang="en-US" sz="1100" b="1" spc="300" kern="0" dirty="0">
+              <a:rPr lang="en-US" sz="1050" b="1" spc="300" kern="0" dirty="0">
                 <a:solidFill>
                   <a:srgbClr val="C2A35B"/>
                 </a:solidFill>
@@ -2247,9 +2247,9 @@
                 <a:ea typeface="Calibri" pitchFamily="34" charset="-122"/>
                 <a:cs typeface="Calibri" pitchFamily="34" charset="-120"/>
               </a:rPr>
-              <a:t>FERRAMENTAS PRÓPRIAS E PARCEIROS</a:t>
-            </a:r>
-            <a:endParaRPr lang="en-US" sz="1100" dirty="0"/>
+              <a:t>OPERAÇÃO ACOMPANHADA</a:t>
+            </a:r>
+            <a:endParaRPr lang="en-US" sz="1050" dirty="0"/>
           </a:p>
         </p:txBody>
       </p:sp>
@@ -2261,8 +2261,8 @@
         </p:nvSpPr>
         <p:spPr>
           <a:xfrm>
-            <a:off x="822960" y="4709160"/>
-            <a:ext cx="10543032" cy="685800"/>
+            <a:off x="4114800" y="2743200"/>
+            <a:ext cx="7251192" cy="914400"/>
           </a:xfrm>
           <a:prstGeom prst="rect">
             <a:avLst/>
@@ -2276,12 +2276,12 @@
           <a:p>
             <a:pPr algn="l" indent="0" marL="0">
               <a:lnSpc>
-                <a:spcPts val="1800"/>
+                <a:spcPts val="1900"/>
               </a:lnSpc>
               <a:buNone/>
             </a:pPr>
             <a:r>
-              <a:rPr lang="en-US" sz="1250" dirty="0">
+              <a:rPr lang="en-US" sz="1300" dirty="0">
                 <a:solidFill>
                   <a:srgbClr val="33394A"/>
                 </a:solidFill>
@@ -2289,60 +2289,262 @@
                 <a:ea typeface="Calibri" pitchFamily="34" charset="-122"/>
                 <a:cs typeface="Calibri" pitchFamily="34" charset="-120"/>
               </a:rPr>
-              <a:t>A avaliação roda sobre tecnologia construída por nós; a capacitação, sobre plataforma própria. Na construção, a sua equipe usa ferramentas dos nossos parceiros para construir as próprias soluções.</a:t>
+              <a:t>SLA, presença semanal e relatório mensal de projetado versus realizado.</a:t>
+            </a:r>
+            <a:endParaRPr lang="en-US" sz="1300" dirty="0"/>
+          </a:p>
+        </p:txBody>
+      </p:sp>
+      <p:sp>
+        <p:nvSpPr>
+          <p:cNvPr id="9" name="Shape 7"/>
+          <p:cNvSpPr/>
+          <p:nvPr/>
+        </p:nvSpPr>
+        <p:spPr>
+          <a:xfrm>
+            <a:off x="822960" y="3794760"/>
+            <a:ext cx="10543032" cy="0"/>
+          </a:xfrm>
+          <a:prstGeom prst="line">
+            <a:avLst/>
+          </a:prstGeom>
+          <a:noFill/>
+          <a:ln w="9525">
+            <a:solidFill>
+              <a:srgbClr val="E5E0D4"/>
+            </a:solidFill>
+            <a:prstDash val="solid"/>
+          </a:ln>
+        </p:spPr>
+      </p:sp>
+      <p:sp>
+        <p:nvSpPr>
+          <p:cNvPr id="10" name="Text 8"/>
+          <p:cNvSpPr/>
+          <p:nvPr/>
+        </p:nvSpPr>
+        <p:spPr>
+          <a:xfrm>
+            <a:off x="822960" y="3904488"/>
+            <a:ext cx="3108960" cy="292608"/>
+          </a:xfrm>
+          <a:prstGeom prst="rect">
+            <a:avLst/>
+          </a:prstGeom>
+          <a:noFill/>
+          <a:ln/>
+        </p:spPr>
+        <p:txBody>
+          <a:bodyPr wrap="square" rtlCol="0" anchor="ctr"/>
+          <a:lstStyle/>
+          <a:p>
+            <a:pPr algn="l" indent="0" marL="0">
+              <a:buNone/>
+            </a:pPr>
+            <a:r>
+              <a:rPr lang="en-US" sz="1050" b="1" spc="300" kern="0" dirty="0">
+                <a:solidFill>
+                  <a:srgbClr val="C2A35B"/>
+                </a:solidFill>
+                <a:latin typeface="Calibri" pitchFamily="34" charset="0"/>
+                <a:ea typeface="Calibri" pitchFamily="34" charset="-122"/>
+                <a:cs typeface="Calibri" pitchFamily="34" charset="-120"/>
+              </a:rPr>
+              <a:t>CONSELHO TRIMESTRAL</a:t>
+            </a:r>
+            <a:endParaRPr lang="en-US" sz="1050" dirty="0"/>
+          </a:p>
+        </p:txBody>
+      </p:sp>
+      <p:sp>
+        <p:nvSpPr>
+          <p:cNvPr id="11" name="Text 9"/>
+          <p:cNvSpPr/>
+          <p:nvPr/>
+        </p:nvSpPr>
+        <p:spPr>
+          <a:xfrm>
+            <a:off x="4114800" y="3886200"/>
+            <a:ext cx="7251192" cy="914400"/>
+          </a:xfrm>
+          <a:prstGeom prst="rect">
+            <a:avLst/>
+          </a:prstGeom>
+          <a:noFill/>
+          <a:ln/>
+        </p:spPr>
+        <p:txBody>
+          <a:bodyPr wrap="square" rtlCol="0" anchor="ctr"/>
+          <a:lstStyle/>
+          <a:p>
+            <a:pPr algn="l" indent="0" marL="0">
+              <a:lnSpc>
+                <a:spcPts val="1900"/>
+              </a:lnSpc>
+              <a:buNone/>
+            </a:pPr>
+            <a:r>
+              <a:rPr lang="en-US" sz="1300" dirty="0">
+                <a:solidFill>
+                  <a:srgbClr val="33394A"/>
+                </a:solidFill>
+                <a:latin typeface="Calibri" pitchFamily="34" charset="0"/>
+                <a:ea typeface="Calibri" pitchFamily="34" charset="-122"/>
+                <a:cs typeface="Calibri" pitchFamily="34" charset="-120"/>
+              </a:rPr>
+              <a:t>A pauta de IA da diretoria, preparada e defendida por quem mediu o ano inteiro.</a:t>
+            </a:r>
+            <a:endParaRPr lang="en-US" sz="1300" dirty="0"/>
+          </a:p>
+        </p:txBody>
+      </p:sp>
+      <p:sp>
+        <p:nvSpPr>
+          <p:cNvPr id="12" name="Shape 10"/>
+          <p:cNvSpPr/>
+          <p:nvPr/>
+        </p:nvSpPr>
+        <p:spPr>
+          <a:xfrm>
+            <a:off x="822960" y="4937760"/>
+            <a:ext cx="10543032" cy="0"/>
+          </a:xfrm>
+          <a:prstGeom prst="line">
+            <a:avLst/>
+          </a:prstGeom>
+          <a:noFill/>
+          <a:ln w="9525">
+            <a:solidFill>
+              <a:srgbClr val="E5E0D4"/>
+            </a:solidFill>
+            <a:prstDash val="solid"/>
+          </a:ln>
+        </p:spPr>
+      </p:sp>
+      <p:sp>
+        <p:nvSpPr>
+          <p:cNvPr id="13" name="Text 11"/>
+          <p:cNvSpPr/>
+          <p:nvPr/>
+        </p:nvSpPr>
+        <p:spPr>
+          <a:xfrm>
+            <a:off x="822960" y="5047488"/>
+            <a:ext cx="3108960" cy="292608"/>
+          </a:xfrm>
+          <a:prstGeom prst="rect">
+            <a:avLst/>
+          </a:prstGeom>
+          <a:noFill/>
+          <a:ln/>
+        </p:spPr>
+        <p:txBody>
+          <a:bodyPr wrap="square" rtlCol="0" anchor="ctr"/>
+          <a:lstStyle/>
+          <a:p>
+            <a:pPr algn="l" indent="0" marL="0">
+              <a:buNone/>
+            </a:pPr>
+            <a:r>
+              <a:rPr lang="en-US" sz="1050" b="1" spc="300" kern="0" dirty="0">
+                <a:solidFill>
+                  <a:srgbClr val="C2A35B"/>
+                </a:solidFill>
+                <a:latin typeface="Calibri" pitchFamily="34" charset="0"/>
+                <a:ea typeface="Calibri" pitchFamily="34" charset="-122"/>
+                <a:cs typeface="Calibri" pitchFamily="34" charset="-120"/>
+              </a:rPr>
+              <a:t>O EXAME ANUAL DE IA</a:t>
+            </a:r>
+            <a:endParaRPr lang="en-US" sz="1050" dirty="0"/>
+          </a:p>
+        </p:txBody>
+      </p:sp>
+      <p:sp>
+        <p:nvSpPr>
+          <p:cNvPr id="14" name="Text 12"/>
+          <p:cNvSpPr/>
+          <p:nvPr/>
+        </p:nvSpPr>
+        <p:spPr>
+          <a:xfrm>
+            <a:off x="4114800" y="5029200"/>
+            <a:ext cx="7251192" cy="914400"/>
+          </a:xfrm>
+          <a:prstGeom prst="rect">
+            <a:avLst/>
+          </a:prstGeom>
+          <a:noFill/>
+          <a:ln/>
+        </p:spPr>
+        <p:txBody>
+          <a:bodyPr wrap="square" rtlCol="0" anchor="ctr"/>
+          <a:lstStyle/>
+          <a:p>
+            <a:pPr algn="l" indent="0" marL="0">
+              <a:lnSpc>
+                <a:spcPts val="1900"/>
+              </a:lnSpc>
+              <a:buNone/>
+            </a:pPr>
+            <a:r>
+              <a:rPr lang="en-US" sz="1300" dirty="0">
+                <a:solidFill>
+                  <a:srgbClr val="33394A"/>
+                </a:solidFill>
+                <a:latin typeface="Calibri" pitchFamily="34" charset="0"/>
+                <a:ea typeface="Calibri" pitchFamily="34" charset="-122"/>
+                <a:cs typeface="Calibri" pitchFamily="34" charset="-120"/>
+              </a:rPr>
+              <a:t>A re-medição completa da maturidade, comparada ano contra ano: a série histórica que só existe aqui e vale mais a cada ano.</a:t>
+            </a:r>
+            <a:endParaRPr lang="en-US" sz="1300" dirty="0"/>
+          </a:p>
+        </p:txBody>
+      </p:sp>
+      <p:sp>
+        <p:nvSpPr>
+          <p:cNvPr id="15" name="Text 13"/>
+          <p:cNvSpPr/>
+          <p:nvPr/>
+        </p:nvSpPr>
+        <p:spPr>
+          <a:xfrm>
+            <a:off x="822960" y="6035040"/>
+            <a:ext cx="10543032" cy="457200"/>
+          </a:xfrm>
+          <a:prstGeom prst="rect">
+            <a:avLst/>
+          </a:prstGeom>
+          <a:noFill/>
+          <a:ln/>
+        </p:spPr>
+        <p:txBody>
+          <a:bodyPr wrap="square" rtlCol="0" anchor="ctr"/>
+          <a:lstStyle/>
+          <a:p>
+            <a:pPr algn="ctr" indent="0" marL="0">
+              <a:lnSpc>
+                <a:spcPts val="2000"/>
+              </a:lnSpc>
+              <a:buNone/>
+            </a:pPr>
+            <a:r>
+              <a:rPr lang="en-US" sz="1250" i="1" dirty="0">
+                <a:solidFill>
+                  <a:srgbClr val="1B2A4A"/>
+                </a:solidFill>
+                <a:latin typeface="Cambria" pitchFamily="34" charset="0"/>
+                <a:ea typeface="Cambria" pitchFamily="34" charset="-122"/>
+                <a:cs typeface="Cambria" pitchFamily="34" charset="-120"/>
+              </a:rPr>
+              <a:t>É do Exame que sai a fila de oportunidades do ano seguinte: melhorias que só aparecem depois que o fluxo novo existe.</a:t>
             </a:r>
             <a:endParaRPr lang="en-US" sz="1250" dirty="0"/>
           </a:p>
         </p:txBody>
       </p:sp>
-      <p:pic>
-        <p:nvPicPr>
-          <p:cNvPr id="9" name="Image 0" descr="/home/user/abba-ops/08-materiais/assets/marca/logo-microsoft.png">    </p:cNvPr>
-          <p:cNvPicPr>
-            <a:picLocks noChangeAspect="1"/>
-          </p:cNvPicPr>
-          <p:nvPr/>
-        </p:nvPicPr>
-        <p:blipFill>
-          <a:blip r:embed="rId1"/>
-          <a:stretch>
-            <a:fillRect/>
-          </a:stretch>
-        </p:blipFill>
-        <p:spPr>
-          <a:xfrm>
-            <a:off x="822960" y="5577840"/>
-            <a:ext cx="1435608" cy="310896"/>
-          </a:xfrm>
-          <a:prstGeom prst="rect">
-            <a:avLst/>
-          </a:prstGeom>
-        </p:spPr>
-      </p:pic>
-      <p:pic>
-        <p:nvPicPr>
-          <p:cNvPr id="10" name="Image 1" descr="/home/user/abba-ops/08-materiais/assets/marca/logo-crewai.png">    </p:cNvPr>
-          <p:cNvPicPr>
-            <a:picLocks noChangeAspect="1"/>
-          </p:cNvPicPr>
-          <p:nvPr/>
-        </p:nvPicPr>
-        <p:blipFill>
-          <a:blip r:embed="rId2"/>
-          <a:stretch>
-            <a:fillRect/>
-          </a:stretch>
-        </p:blipFill>
-        <p:spPr>
-          <a:xfrm>
-            <a:off x="2651760" y="5522976"/>
-            <a:ext cx="1325880" cy="402336"/>
-          </a:xfrm>
-          <a:prstGeom prst="rect">
-            <a:avLst/>
-          </a:prstGeom>
-        </p:spPr>
-      </p:pic>
     </p:spTree>
   </p:cSld>
   <p:clrMapOvr>
@@ -2383,7 +2585,7 @@
         </p:nvSpPr>
         <p:spPr>
           <a:xfrm>
-            <a:off x="822960" y="685800"/>
+            <a:off x="822960" y="594360"/>
             <a:ext cx="5486400" cy="292608"/>
           </a:xfrm>
           <a:prstGeom prst="rect">
@@ -2408,7 +2610,7 @@
                 <a:ea typeface="Calibri" pitchFamily="34" charset="-122"/>
                 <a:cs typeface="Calibri" pitchFamily="34" charset="-120"/>
               </a:rPr>
-              <a:t>AS NOSSAS RAÍZES</a:t>
+              <a:t>JÁ TEM IA RODANDO?</a:t>
             </a:r>
             <a:endParaRPr lang="en-US" sz="1100" dirty="0"/>
           </a:p>
@@ -2422,8 +2624,8 @@
         </p:nvSpPr>
         <p:spPr>
           <a:xfrm>
-            <a:off x="822960" y="1371600"/>
-            <a:ext cx="10543032" cy="2743200"/>
+            <a:off x="822960" y="960120"/>
+            <a:ext cx="10543032" cy="914400"/>
           </a:xfrm>
           <a:prstGeom prst="rect">
             <a:avLst/>
@@ -2437,12 +2639,12 @@
           <a:p>
             <a:pPr indent="0" marL="0">
               <a:lnSpc>
-                <a:spcPts val="4600"/>
+                <a:spcPts val="3400"/>
               </a:lnSpc>
               <a:buNone/>
             </a:pPr>
             <a:r>
-              <a:rPr lang="en-US" sz="2700" b="1" dirty="0">
+              <a:rPr lang="en-US" sz="2800" b="1" dirty="0">
                 <a:solidFill>
                   <a:srgbClr val="1B2A4A"/>
                 </a:solidFill>
@@ -2450,19 +2652,604 @@
                 <a:ea typeface="Cambria" pitchFamily="34" charset="-122"/>
                 <a:cs typeface="Cambria" pitchFamily="34" charset="-120"/>
               </a:rPr>
-              <a:t>Verdade dita mesmo quando custa.</a:t>
-            </a:r>
-            <a:endParaRPr lang="en-US" sz="2700" dirty="0"/>
-          </a:p>
-          <a:p>
-            <a:pPr indent="0" marL="0">
+              <a:t>O Conselheiro de IA: a cadeira do seu lado da mesa.</a:t>
+            </a:r>
+            <a:endParaRPr lang="en-US" sz="2800" dirty="0"/>
+          </a:p>
+        </p:txBody>
+      </p:sp>
+      <p:sp>
+        <p:nvSpPr>
+          <p:cNvPr id="4" name="Text 2"/>
+          <p:cNvSpPr/>
+          <p:nvPr/>
+        </p:nvSpPr>
+        <p:spPr>
+          <a:xfrm>
+            <a:off x="822960" y="1920240"/>
+            <a:ext cx="10543032" cy="640080"/>
+          </a:xfrm>
+          <a:prstGeom prst="rect">
+            <a:avLst/>
+          </a:prstGeom>
+          <a:noFill/>
+          <a:ln/>
+        </p:spPr>
+        <p:txBody>
+          <a:bodyPr wrap="square" rtlCol="0" anchor="ctr"/>
+          <a:lstStyle/>
+          <a:p>
+            <a:pPr algn="l" indent="0" marL="0">
               <a:lnSpc>
-                <a:spcPts val="4600"/>
+                <a:spcPts val="2000"/>
               </a:lnSpc>
               <a:buNone/>
             </a:pPr>
             <a:r>
-              <a:rPr lang="en-US" sz="2700" b="1" dirty="0">
+              <a:rPr lang="en-US" sz="1300" dirty="0">
+                <a:solidFill>
+                  <a:srgbClr val="6E6858"/>
+                </a:solidFill>
+                <a:latin typeface="Calibri" pitchFamily="34" charset="0"/>
+                <a:ea typeface="Calibri" pitchFamily="34" charset="-122"/>
+                <a:cs typeface="Calibri" pitchFamily="34" charset="-120"/>
+              </a:rPr>
+              <a:t>Para quem já construiu: direção de IA em fração, sem o custo nem o conflito de mais um diretor em folha. Funciona em quatro movimentos:</a:t>
+            </a:r>
+            <a:endParaRPr lang="en-US" sz="1300" dirty="0"/>
+          </a:p>
+        </p:txBody>
+      </p:sp>
+      <p:sp>
+        <p:nvSpPr>
+          <p:cNvPr id="5" name="Text 3"/>
+          <p:cNvSpPr/>
+          <p:nvPr/>
+        </p:nvSpPr>
+        <p:spPr>
+          <a:xfrm>
+            <a:off x="822960" y="6400800"/>
+            <a:ext cx="10543032" cy="274320"/>
+          </a:xfrm>
+          <a:prstGeom prst="rect">
+            <a:avLst/>
+          </a:prstGeom>
+          <a:noFill/>
+          <a:ln/>
+        </p:spPr>
+        <p:txBody>
+          <a:bodyPr wrap="square" rtlCol="0" anchor="ctr"/>
+          <a:lstStyle/>
+          <a:p>
+            <a:pPr algn="ctr" indent="0" marL="0">
+              <a:buNone/>
+            </a:pPr>
+            <a:r>
+              <a:rPr lang="en-US" sz="900" spc="100" kern="0" dirty="0">
+                <a:solidFill>
+                  <a:srgbClr val="6E6858"/>
+                </a:solidFill>
+                <a:latin typeface="Calibri" pitchFamily="34" charset="0"/>
+                <a:ea typeface="Calibri" pitchFamily="34" charset="-122"/>
+                <a:cs typeface="Calibri" pitchFamily="34" charset="-120"/>
+              </a:rPr>
+              <a:t>ABBA Consultoria de IA · contato@abbaservices.com.br</a:t>
+            </a:r>
+            <a:endParaRPr lang="en-US" sz="900" dirty="0"/>
+          </a:p>
+        </p:txBody>
+      </p:sp>
+      <p:pic>
+        <p:nvPicPr>
+          <p:cNvPr id="6" name="Image 0" descr="/home/user/abba-ops/08-materiais/assets/fotos/conselheiro--parecer-arbitragem.jpg">    </p:cNvPr>
+          <p:cNvPicPr>
+            <a:picLocks noChangeAspect="1"/>
+          </p:cNvPicPr>
+          <p:nvPr/>
+        </p:nvPicPr>
+        <p:blipFill>
+          <a:blip r:embed="rId1"/>
+          <a:stretch>
+            <a:fillRect/>
+          </a:stretch>
+        </p:blipFill>
+        <p:spPr>
+          <a:xfrm>
+            <a:off x="8970264" y="2697480"/>
+            <a:ext cx="2395728" cy="3383280"/>
+          </a:xfrm>
+          <a:prstGeom prst="rect">
+            <a:avLst/>
+          </a:prstGeom>
+        </p:spPr>
+      </p:pic>
+      <p:sp>
+        <p:nvSpPr>
+          <p:cNvPr id="7" name="Text 4"/>
+          <p:cNvSpPr/>
+          <p:nvPr/>
+        </p:nvSpPr>
+        <p:spPr>
+          <a:xfrm>
+            <a:off x="8970264" y="6108192"/>
+            <a:ext cx="2395728" cy="274320"/>
+          </a:xfrm>
+          <a:prstGeom prst="rect">
+            <a:avLst/>
+          </a:prstGeom>
+          <a:noFill/>
+          <a:ln/>
+        </p:spPr>
+        <p:txBody>
+          <a:bodyPr wrap="square" rtlCol="0" anchor="ctr"/>
+          <a:lstStyle/>
+          <a:p>
+            <a:pPr algn="l" indent="0" marL="0">
+              <a:lnSpc>
+                <a:spcPts val="1300"/>
+              </a:lnSpc>
+              <a:buNone/>
+            </a:pPr>
+            <a:r>
+              <a:rPr lang="en-US" sz="950" i="1" dirty="0">
+                <a:solidFill>
+                  <a:srgbClr val="6E6858"/>
+                </a:solidFill>
+                <a:latin typeface="Calibri" pitchFamily="34" charset="0"/>
+                <a:ea typeface="Calibri" pitchFamily="34" charset="-122"/>
+                <a:cs typeface="Calibri" pitchFamily="34" charset="-120"/>
+              </a:rPr>
+              <a:t>Um parecer de arbitragem real (empresa preservada).</a:t>
+            </a:r>
+            <a:endParaRPr lang="en-US" sz="950" dirty="0"/>
+          </a:p>
+        </p:txBody>
+      </p:sp>
+      <p:sp>
+        <p:nvSpPr>
+          <p:cNvPr id="8" name="Shape 5"/>
+          <p:cNvSpPr/>
+          <p:nvPr/>
+        </p:nvSpPr>
+        <p:spPr>
+          <a:xfrm>
+            <a:off x="822960" y="2743200"/>
+            <a:ext cx="7525512" cy="0"/>
+          </a:xfrm>
+          <a:prstGeom prst="line">
+            <a:avLst/>
+          </a:prstGeom>
+          <a:noFill/>
+          <a:ln w="9525">
+            <a:solidFill>
+              <a:srgbClr val="E5E0D4"/>
+            </a:solidFill>
+            <a:prstDash val="solid"/>
+          </a:ln>
+        </p:spPr>
+      </p:sp>
+      <p:sp>
+        <p:nvSpPr>
+          <p:cNvPr id="9" name="Text 6"/>
+          <p:cNvSpPr/>
+          <p:nvPr/>
+        </p:nvSpPr>
+        <p:spPr>
+          <a:xfrm>
+            <a:off x="822960" y="2834640"/>
+            <a:ext cx="2011680" cy="292608"/>
+          </a:xfrm>
+          <a:prstGeom prst="rect">
+            <a:avLst/>
+          </a:prstGeom>
+          <a:noFill/>
+          <a:ln/>
+        </p:spPr>
+        <p:txBody>
+          <a:bodyPr wrap="square" rtlCol="0" anchor="ctr"/>
+          <a:lstStyle/>
+          <a:p>
+            <a:pPr algn="l" indent="0" marL="0">
+              <a:buNone/>
+            </a:pPr>
+            <a:r>
+              <a:rPr lang="en-US" sz="1050" b="1" spc="300" kern="0" dirty="0">
+                <a:solidFill>
+                  <a:srgbClr val="C2A35B"/>
+                </a:solidFill>
+                <a:latin typeface="Calibri" pitchFamily="34" charset="0"/>
+                <a:ea typeface="Calibri" pitchFamily="34" charset="-122"/>
+                <a:cs typeface="Calibri" pitchFamily="34" charset="-120"/>
+              </a:rPr>
+              <a:t>PRESENÇA</a:t>
+            </a:r>
+            <a:endParaRPr lang="en-US" sz="1050" dirty="0"/>
+          </a:p>
+        </p:txBody>
+      </p:sp>
+      <p:sp>
+        <p:nvSpPr>
+          <p:cNvPr id="10" name="Text 7"/>
+          <p:cNvSpPr/>
+          <p:nvPr/>
+        </p:nvSpPr>
+        <p:spPr>
+          <a:xfrm>
+            <a:off x="3017520" y="2816352"/>
+            <a:ext cx="5330952" cy="731520"/>
+          </a:xfrm>
+          <a:prstGeom prst="rect">
+            <a:avLst/>
+          </a:prstGeom>
+          <a:noFill/>
+          <a:ln/>
+        </p:spPr>
+        <p:txBody>
+          <a:bodyPr wrap="square" rtlCol="0" anchor="ctr"/>
+          <a:lstStyle/>
+          <a:p>
+            <a:pPr algn="l" indent="0" marL="0">
+              <a:lnSpc>
+                <a:spcPts val="1750"/>
+              </a:lnSpc>
+              <a:buNone/>
+            </a:pPr>
+            <a:r>
+              <a:rPr lang="en-US" sz="1250" dirty="0">
+                <a:solidFill>
+                  <a:srgbClr val="33394A"/>
+                </a:solidFill>
+                <a:latin typeface="Calibri" pitchFamily="34" charset="0"/>
+                <a:ea typeface="Calibri" pitchFamily="34" charset="-122"/>
+                <a:cs typeface="Calibri" pitchFamily="34" charset="-120"/>
+              </a:rPr>
+              <a:t>na diretoria, com a pauta de IA preparada e defendida.</a:t>
+            </a:r>
+            <a:endParaRPr lang="en-US" sz="1250" dirty="0"/>
+          </a:p>
+        </p:txBody>
+      </p:sp>
+      <p:sp>
+        <p:nvSpPr>
+          <p:cNvPr id="11" name="Shape 8"/>
+          <p:cNvSpPr/>
+          <p:nvPr/>
+        </p:nvSpPr>
+        <p:spPr>
+          <a:xfrm>
+            <a:off x="822960" y="3611880"/>
+            <a:ext cx="7525512" cy="0"/>
+          </a:xfrm>
+          <a:prstGeom prst="line">
+            <a:avLst/>
+          </a:prstGeom>
+          <a:noFill/>
+          <a:ln w="9525">
+            <a:solidFill>
+              <a:srgbClr val="E5E0D4"/>
+            </a:solidFill>
+            <a:prstDash val="solid"/>
+          </a:ln>
+        </p:spPr>
+      </p:sp>
+      <p:sp>
+        <p:nvSpPr>
+          <p:cNvPr id="12" name="Text 9"/>
+          <p:cNvSpPr/>
+          <p:nvPr/>
+        </p:nvSpPr>
+        <p:spPr>
+          <a:xfrm>
+            <a:off x="822960" y="3703320"/>
+            <a:ext cx="2011680" cy="292608"/>
+          </a:xfrm>
+          <a:prstGeom prst="rect">
+            <a:avLst/>
+          </a:prstGeom>
+          <a:noFill/>
+          <a:ln/>
+        </p:spPr>
+        <p:txBody>
+          <a:bodyPr wrap="square" rtlCol="0" anchor="ctr"/>
+          <a:lstStyle/>
+          <a:p>
+            <a:pPr algn="l" indent="0" marL="0">
+              <a:buNone/>
+            </a:pPr>
+            <a:r>
+              <a:rPr lang="en-US" sz="1050" b="1" spc="300" kern="0" dirty="0">
+                <a:solidFill>
+                  <a:srgbClr val="C2A35B"/>
+                </a:solidFill>
+                <a:latin typeface="Calibri" pitchFamily="34" charset="0"/>
+                <a:ea typeface="Calibri" pitchFamily="34" charset="-122"/>
+                <a:cs typeface="Calibri" pitchFamily="34" charset="-120"/>
+              </a:rPr>
+              <a:t>ROADMAP VIVO</a:t>
+            </a:r>
+            <a:endParaRPr lang="en-US" sz="1050" dirty="0"/>
+          </a:p>
+        </p:txBody>
+      </p:sp>
+      <p:sp>
+        <p:nvSpPr>
+          <p:cNvPr id="13" name="Text 10"/>
+          <p:cNvSpPr/>
+          <p:nvPr/>
+        </p:nvSpPr>
+        <p:spPr>
+          <a:xfrm>
+            <a:off x="3017520" y="3685032"/>
+            <a:ext cx="5330952" cy="731520"/>
+          </a:xfrm>
+          <a:prstGeom prst="rect">
+            <a:avLst/>
+          </a:prstGeom>
+          <a:noFill/>
+          <a:ln/>
+        </p:spPr>
+        <p:txBody>
+          <a:bodyPr wrap="square" rtlCol="0" anchor="ctr"/>
+          <a:lstStyle/>
+          <a:p>
+            <a:pPr algn="l" indent="0" marL="0">
+              <a:lnSpc>
+                <a:spcPts val="1750"/>
+              </a:lnSpc>
+              <a:buNone/>
+            </a:pPr>
+            <a:r>
+              <a:rPr lang="en-US" sz="1250" dirty="0">
+                <a:solidFill>
+                  <a:srgbClr val="33394A"/>
+                </a:solidFill>
+                <a:latin typeface="Calibri" pitchFamily="34" charset="0"/>
+                <a:ea typeface="Calibri" pitchFamily="34" charset="-122"/>
+                <a:cs typeface="Calibri" pitchFamily="34" charset="-120"/>
+              </a:rPr>
+              <a:t>re-ranqueado conforme os números chegam. Nunca um PDF parado.</a:t>
+            </a:r>
+            <a:endParaRPr lang="en-US" sz="1250" dirty="0"/>
+          </a:p>
+        </p:txBody>
+      </p:sp>
+      <p:sp>
+        <p:nvSpPr>
+          <p:cNvPr id="14" name="Shape 11"/>
+          <p:cNvSpPr/>
+          <p:nvPr/>
+        </p:nvSpPr>
+        <p:spPr>
+          <a:xfrm>
+            <a:off x="822960" y="4480560"/>
+            <a:ext cx="7525512" cy="0"/>
+          </a:xfrm>
+          <a:prstGeom prst="line">
+            <a:avLst/>
+          </a:prstGeom>
+          <a:noFill/>
+          <a:ln w="9525">
+            <a:solidFill>
+              <a:srgbClr val="E5E0D4"/>
+            </a:solidFill>
+            <a:prstDash val="solid"/>
+          </a:ln>
+        </p:spPr>
+      </p:sp>
+      <p:sp>
+        <p:nvSpPr>
+          <p:cNvPr id="15" name="Text 12"/>
+          <p:cNvSpPr/>
+          <p:nvPr/>
+        </p:nvSpPr>
+        <p:spPr>
+          <a:xfrm>
+            <a:off x="822960" y="4572000"/>
+            <a:ext cx="2011680" cy="292608"/>
+          </a:xfrm>
+          <a:prstGeom prst="rect">
+            <a:avLst/>
+          </a:prstGeom>
+          <a:noFill/>
+          <a:ln/>
+        </p:spPr>
+        <p:txBody>
+          <a:bodyPr wrap="square" rtlCol="0" anchor="ctr"/>
+          <a:lstStyle/>
+          <a:p>
+            <a:pPr algn="l" indent="0" marL="0">
+              <a:buNone/>
+            </a:pPr>
+            <a:r>
+              <a:rPr lang="en-US" sz="1050" b="1" spc="300" kern="0" dirty="0">
+                <a:solidFill>
+                  <a:srgbClr val="C2A35B"/>
+                </a:solidFill>
+                <a:latin typeface="Calibri" pitchFamily="34" charset="0"/>
+                <a:ea typeface="Calibri" pitchFamily="34" charset="-122"/>
+                <a:cs typeface="Calibri" pitchFamily="34" charset="-120"/>
+              </a:rPr>
+              <a:t>ARBITRAGEM</a:t>
+            </a:r>
+            <a:endParaRPr lang="en-US" sz="1050" dirty="0"/>
+          </a:p>
+        </p:txBody>
+      </p:sp>
+      <p:sp>
+        <p:nvSpPr>
+          <p:cNvPr id="16" name="Text 13"/>
+          <p:cNvSpPr/>
+          <p:nvPr/>
+        </p:nvSpPr>
+        <p:spPr>
+          <a:xfrm>
+            <a:off x="3017520" y="4553712"/>
+            <a:ext cx="5330952" cy="731520"/>
+          </a:xfrm>
+          <a:prstGeom prst="rect">
+            <a:avLst/>
+          </a:prstGeom>
+          <a:noFill/>
+          <a:ln/>
+        </p:spPr>
+        <p:txBody>
+          <a:bodyPr wrap="square" rtlCol="0" anchor="ctr"/>
+          <a:lstStyle/>
+          <a:p>
+            <a:pPr algn="l" indent="0" marL="0">
+              <a:lnSpc>
+                <a:spcPts val="1750"/>
+              </a:lnSpc>
+              <a:buNone/>
+            </a:pPr>
+            <a:r>
+              <a:rPr lang="en-US" sz="1250" dirty="0">
+                <a:solidFill>
+                  <a:srgbClr val="33394A"/>
+                </a:solidFill>
+                <a:latin typeface="Calibri" pitchFamily="34" charset="0"/>
+                <a:ea typeface="Calibri" pitchFamily="34" charset="-122"/>
+                <a:cs typeface="Calibri" pitchFamily="34" charset="-120"/>
+              </a:rPr>
+              <a:t>parecer por escrito sobre cada fornecedor que chega à mesa: o que é real, o que é caro, o que é risco.</a:t>
+            </a:r>
+            <a:endParaRPr lang="en-US" sz="1250" dirty="0"/>
+          </a:p>
+        </p:txBody>
+      </p:sp>
+      <p:sp>
+        <p:nvSpPr>
+          <p:cNvPr id="17" name="Shape 14"/>
+          <p:cNvSpPr/>
+          <p:nvPr/>
+        </p:nvSpPr>
+        <p:spPr>
+          <a:xfrm>
+            <a:off x="822960" y="5349240"/>
+            <a:ext cx="7525512" cy="0"/>
+          </a:xfrm>
+          <a:prstGeom prst="line">
+            <a:avLst/>
+          </a:prstGeom>
+          <a:noFill/>
+          <a:ln w="9525">
+            <a:solidFill>
+              <a:srgbClr val="E5E0D4"/>
+            </a:solidFill>
+            <a:prstDash val="solid"/>
+          </a:ln>
+        </p:spPr>
+      </p:sp>
+      <p:sp>
+        <p:nvSpPr>
+          <p:cNvPr id="18" name="Text 15"/>
+          <p:cNvSpPr/>
+          <p:nvPr/>
+        </p:nvSpPr>
+        <p:spPr>
+          <a:xfrm>
+            <a:off x="822960" y="5440680"/>
+            <a:ext cx="2011680" cy="292608"/>
+          </a:xfrm>
+          <a:prstGeom prst="rect">
+            <a:avLst/>
+          </a:prstGeom>
+          <a:noFill/>
+          <a:ln/>
+        </p:spPr>
+        <p:txBody>
+          <a:bodyPr wrap="square" rtlCol="0" anchor="ctr"/>
+          <a:lstStyle/>
+          <a:p>
+            <a:pPr algn="l" indent="0" marL="0">
+              <a:buNone/>
+            </a:pPr>
+            <a:r>
+              <a:rPr lang="en-US" sz="1050" b="1" spc="300" kern="0" dirty="0">
+                <a:solidFill>
+                  <a:srgbClr val="C2A35B"/>
+                </a:solidFill>
+                <a:latin typeface="Calibri" pitchFamily="34" charset="0"/>
+                <a:ea typeface="Calibri" pitchFamily="34" charset="-122"/>
+                <a:cs typeface="Calibri" pitchFamily="34" charset="-120"/>
+              </a:rPr>
+              <a:t>MEMÓRIA</a:t>
+            </a:r>
+            <a:endParaRPr lang="en-US" sz="1050" dirty="0"/>
+          </a:p>
+        </p:txBody>
+      </p:sp>
+      <p:sp>
+        <p:nvSpPr>
+          <p:cNvPr id="19" name="Text 16"/>
+          <p:cNvSpPr/>
+          <p:nvPr/>
+        </p:nvSpPr>
+        <p:spPr>
+          <a:xfrm>
+            <a:off x="3017520" y="5422392"/>
+            <a:ext cx="5330952" cy="731520"/>
+          </a:xfrm>
+          <a:prstGeom prst="rect">
+            <a:avLst/>
+          </a:prstGeom>
+          <a:noFill/>
+          <a:ln/>
+        </p:spPr>
+        <p:txBody>
+          <a:bodyPr wrap="square" rtlCol="0" anchor="ctr"/>
+          <a:lstStyle/>
+          <a:p>
+            <a:pPr algn="l" indent="0" marL="0">
+              <a:lnSpc>
+                <a:spcPts val="1750"/>
+              </a:lnSpc>
+              <a:buNone/>
+            </a:pPr>
+            <a:r>
+              <a:rPr lang="en-US" sz="1250" dirty="0">
+                <a:solidFill>
+                  <a:srgbClr val="33394A"/>
+                </a:solidFill>
+                <a:latin typeface="Calibri" pitchFamily="34" charset="0"/>
+                <a:ea typeface="Calibri" pitchFamily="34" charset="-122"/>
+                <a:cs typeface="Calibri" pitchFamily="34" charset="-120"/>
+              </a:rPr>
+              <a:t>cada decisão registrada com a expectativa declarada antes e o resultado medido depois. Imutável por construção.</a:t>
+            </a:r>
+            <a:endParaRPr lang="en-US" sz="1250" dirty="0"/>
+          </a:p>
+        </p:txBody>
+      </p:sp>
+      <p:sp>
+        <p:nvSpPr>
+          <p:cNvPr id="20" name="Text 17"/>
+          <p:cNvSpPr/>
+          <p:nvPr/>
+        </p:nvSpPr>
+        <p:spPr>
+          <a:xfrm>
+            <a:off x="822960" y="6236208"/>
+            <a:ext cx="7525512" cy="274320"/>
+          </a:xfrm>
+          <a:prstGeom prst="rect">
+            <a:avLst/>
+          </a:prstGeom>
+          <a:noFill/>
+          <a:ln/>
+        </p:spPr>
+        <p:txBody>
+          <a:bodyPr wrap="square" rtlCol="0" anchor="ctr"/>
+          <a:lstStyle/>
+          <a:p>
+            <a:pPr algn="l" indent="0" marL="0">
+              <a:lnSpc>
+                <a:spcPts val="1300"/>
+              </a:lnSpc>
+              <a:buNone/>
+            </a:pPr>
+            <a:r>
+              <a:rPr lang="en-US" sz="1050" i="1" dirty="0">
                 <a:solidFill>
                   <a:srgbClr val="1B2A4A"/>
                 </a:solidFill>
@@ -2470,133 +3257,9 @@
                 <a:ea typeface="Cambria" pitchFamily="34" charset="-122"/>
                 <a:cs typeface="Cambria" pitchFamily="34" charset="-120"/>
               </a:rPr>
-              <a:t>Número antes de opinião.</a:t>
-            </a:r>
-            <a:endParaRPr lang="en-US" sz="2700" dirty="0"/>
-          </a:p>
-          <a:p>
-            <a:pPr indent="0" marL="0">
-              <a:lnSpc>
-                <a:spcPts val="4600"/>
-              </a:lnSpc>
-              <a:buNone/>
-            </a:pPr>
-            <a:r>
-              <a:rPr lang="en-US" sz="2700" b="1" dirty="0">
-                <a:solidFill>
-                  <a:srgbClr val="1B2A4A"/>
-                </a:solidFill>
-                <a:latin typeface="Cambria" pitchFamily="34" charset="0"/>
-                <a:ea typeface="Cambria" pitchFamily="34" charset="-122"/>
-                <a:cs typeface="Cambria" pitchFamily="34" charset="-120"/>
-              </a:rPr>
-              <a:t>Tornar-nos desnecessários no operacional.</a:t>
-            </a:r>
-            <a:endParaRPr lang="en-US" sz="2700" dirty="0"/>
-          </a:p>
-        </p:txBody>
-      </p:sp>
-      <p:sp>
-        <p:nvSpPr>
-          <p:cNvPr id="4" name="Shape 2"/>
-          <p:cNvSpPr/>
-          <p:nvPr/>
-        </p:nvSpPr>
-        <p:spPr>
-          <a:xfrm>
-            <a:off x="822960" y="4343400"/>
-            <a:ext cx="2011680" cy="0"/>
-          </a:xfrm>
-          <a:prstGeom prst="line">
-            <a:avLst/>
-          </a:prstGeom>
-          <a:noFill/>
-          <a:ln w="19050">
-            <a:solidFill>
-              <a:srgbClr val="C2A35B"/>
-            </a:solidFill>
-            <a:prstDash val="solid"/>
-          </a:ln>
-        </p:spPr>
-      </p:sp>
-      <p:sp>
-        <p:nvSpPr>
-          <p:cNvPr id="5" name="Text 3"/>
-          <p:cNvSpPr/>
-          <p:nvPr/>
-        </p:nvSpPr>
-        <p:spPr>
-          <a:xfrm>
-            <a:off x="822960" y="4572000"/>
-            <a:ext cx="10543032" cy="731520"/>
-          </a:xfrm>
-          <a:prstGeom prst="rect">
-            <a:avLst/>
-          </a:prstGeom>
-          <a:noFill/>
-          <a:ln/>
-        </p:spPr>
-        <p:txBody>
-          <a:bodyPr wrap="square" rtlCol="0" anchor="ctr"/>
-          <a:lstStyle/>
-          <a:p>
-            <a:pPr algn="l" indent="0" marL="0">
-              <a:lnSpc>
-                <a:spcPts val="2300"/>
-              </a:lnSpc>
-              <a:buNone/>
-            </a:pPr>
-            <a:r>
-              <a:rPr lang="en-US" sz="1500" i="1" dirty="0">
-                <a:solidFill>
-                  <a:srgbClr val="33394A"/>
-                </a:solidFill>
-                <a:latin typeface="Cambria" pitchFamily="34" charset="0"/>
-                <a:ea typeface="Cambria" pitchFamily="34" charset="-122"/>
-                <a:cs typeface="Cambria" pitchFamily="34" charset="-120"/>
-              </a:rPr>
-              <a:t>O que instalamos fica com você: os sistemas, as pessoas formadas e o registro de tudo o que foi decidido e medido.</a:t>
-            </a:r>
-            <a:endParaRPr lang="en-US" sz="1500" dirty="0"/>
-          </a:p>
-        </p:txBody>
-      </p:sp>
-      <p:sp>
-        <p:nvSpPr>
-          <p:cNvPr id="6" name="Text 4"/>
-          <p:cNvSpPr/>
-          <p:nvPr/>
-        </p:nvSpPr>
-        <p:spPr>
-          <a:xfrm>
-            <a:off x="822960" y="6400800"/>
-            <a:ext cx="10543032" cy="274320"/>
-          </a:xfrm>
-          <a:prstGeom prst="rect">
-            <a:avLst/>
-          </a:prstGeom>
-          <a:noFill/>
-          <a:ln/>
-        </p:spPr>
-        <p:txBody>
-          <a:bodyPr wrap="square" rtlCol="0" anchor="ctr"/>
-          <a:lstStyle/>
-          <a:p>
-            <a:pPr algn="ctr" indent="0" marL="0">
-              <a:buNone/>
-            </a:pPr>
-            <a:r>
-              <a:rPr lang="en-US" sz="900" spc="100" kern="0" dirty="0">
-                <a:solidFill>
-                  <a:srgbClr val="6E6858"/>
-                </a:solidFill>
-                <a:latin typeface="Calibri" pitchFamily="34" charset="0"/>
-                <a:ea typeface="Calibri" pitchFamily="34" charset="-122"/>
-                <a:cs typeface="Calibri" pitchFamily="34" charset="-120"/>
-              </a:rPr>
-              <a:t>ABBA Consultoria de IA · contato@abbaservices.com.br</a:t>
-            </a:r>
-            <a:endParaRPr lang="en-US" sz="900" dirty="0"/>
+              <a:t>Nenhum time interno pode ser a própria prova: por isso empresa com um ótimo CFO ainda contrata verificação de fora.</a:t>
+            </a:r>
+            <a:endParaRPr lang="en-US" sz="1050" dirty="0"/>
           </a:p>
         </p:txBody>
       </p:sp>
@@ -2640,7 +3303,7 @@
         </p:nvSpPr>
         <p:spPr>
           <a:xfrm>
-            <a:off x="822960" y="2103120"/>
+            <a:off x="822960" y="1234440"/>
             <a:ext cx="5486400" cy="292608"/>
           </a:xfrm>
           <a:prstGeom prst="rect">
@@ -2665,7 +3328,7 @@
                 <a:ea typeface="Calibri" pitchFamily="34" charset="-122"/>
                 <a:cs typeface="Calibri" pitchFamily="34" charset="-120"/>
               </a:rPr>
-              <a:t>O PRÓXIMO PASSO</a:t>
+              <a:t>AS NOSSAS RAÍZES · O PRÓXIMO PASSO</a:t>
             </a:r>
             <a:endParaRPr lang="en-US" sz="1200" dirty="0"/>
           </a:p>
@@ -2679,8 +3342,8 @@
         </p:nvSpPr>
         <p:spPr>
           <a:xfrm>
-            <a:off x="822960" y="2606040"/>
-            <a:ext cx="10543032" cy="1737360"/>
+            <a:off x="822960" y="1691640"/>
+            <a:ext cx="10543032" cy="2103120"/>
           </a:xfrm>
           <a:prstGeom prst="rect">
             <a:avLst/>
@@ -2694,12 +3357,12 @@
           <a:p>
             <a:pPr indent="0" marL="0">
               <a:lnSpc>
-                <a:spcPts val="4200"/>
+                <a:spcPts val="3800"/>
               </a:lnSpc>
               <a:buNone/>
             </a:pPr>
             <a:r>
-              <a:rPr lang="en-US" sz="3000" b="1" dirty="0">
+              <a:rPr lang="en-US" sz="2400" b="1" dirty="0">
                 <a:solidFill>
                   <a:srgbClr val="FFFFFF"/>
                 </a:solidFill>
@@ -2707,19 +3370,19 @@
                 <a:ea typeface="Cambria" pitchFamily="34" charset="-122"/>
                 <a:cs typeface="Cambria" pitchFamily="34" charset="-120"/>
               </a:rPr>
-              <a:t>Não custa nada e cabe em 45 minutos:</a:t>
-            </a:r>
-            <a:endParaRPr lang="en-US" sz="3000" dirty="0"/>
+              <a:t>Verdade dita mesmo quando custa.</a:t>
+            </a:r>
+            <a:endParaRPr lang="en-US" sz="2400" dirty="0"/>
           </a:p>
           <a:p>
             <a:pPr indent="0" marL="0">
               <a:lnSpc>
-                <a:spcPts val="4200"/>
+                <a:spcPts val="3800"/>
               </a:lnSpc>
               <a:buNone/>
             </a:pPr>
             <a:r>
-              <a:rPr lang="en-US" sz="3000" b="1" dirty="0">
+              <a:rPr lang="en-US" sz="2400" b="1" dirty="0">
                 <a:solidFill>
                   <a:srgbClr val="FFFFFF"/>
                 </a:solidFill>
@@ -2727,9 +3390,29 @@
                 <a:ea typeface="Cambria" pitchFamily="34" charset="-122"/>
                 <a:cs typeface="Cambria" pitchFamily="34" charset="-120"/>
               </a:rPr>
-              <a:t>o Mapa de Vazamento da sua operação.</a:t>
-            </a:r>
-            <a:endParaRPr lang="en-US" sz="3000" dirty="0"/>
+              <a:t>Número antes de opinião.</a:t>
+            </a:r>
+            <a:endParaRPr lang="en-US" sz="2400" dirty="0"/>
+          </a:p>
+          <a:p>
+            <a:pPr indent="0" marL="0">
+              <a:lnSpc>
+                <a:spcPts val="3800"/>
+              </a:lnSpc>
+              <a:buNone/>
+            </a:pPr>
+            <a:r>
+              <a:rPr lang="en-US" sz="2400" b="1" dirty="0">
+                <a:solidFill>
+                  <a:srgbClr val="FFFFFF"/>
+                </a:solidFill>
+                <a:latin typeface="Cambria" pitchFamily="34" charset="0"/>
+                <a:ea typeface="Cambria" pitchFamily="34" charset="-122"/>
+                <a:cs typeface="Cambria" pitchFamily="34" charset="-120"/>
+              </a:rPr>
+              <a:t>Terminar com a sua empresa mais capaz, não mais dependente.</a:t>
+            </a:r>
+            <a:endParaRPr lang="en-US" sz="2400" dirty="0"/>
           </a:p>
         </p:txBody>
       </p:sp>
@@ -2741,7 +3424,7 @@
         </p:nvSpPr>
         <p:spPr>
           <a:xfrm>
-            <a:off x="822960" y="4526280"/>
+            <a:off x="822960" y="3977640"/>
             <a:ext cx="2011680" cy="0"/>
           </a:xfrm>
           <a:prstGeom prst="line">
@@ -2764,7 +3447,49 @@
         </p:nvSpPr>
         <p:spPr>
           <a:xfrm>
-            <a:off x="822960" y="4800600"/>
+            <a:off x="822960" y="4251960"/>
+            <a:ext cx="10543032" cy="1005840"/>
+          </a:xfrm>
+          <a:prstGeom prst="rect">
+            <a:avLst/>
+          </a:prstGeom>
+          <a:noFill/>
+          <a:ln/>
+        </p:spPr>
+        <p:txBody>
+          <a:bodyPr wrap="square" rtlCol="0" anchor="ctr"/>
+          <a:lstStyle/>
+          <a:p>
+            <a:pPr indent="0" marL="0">
+              <a:lnSpc>
+                <a:spcPts val="2500"/>
+              </a:lnSpc>
+              <a:buNone/>
+            </a:pPr>
+            <a:r>
+              <a:rPr lang="en-US" sz="1600" i="1" dirty="0">
+                <a:solidFill>
+                  <a:srgbClr val="D8DCE8"/>
+                </a:solidFill>
+                <a:latin typeface="Cambria" pitchFamily="34" charset="0"/>
+                <a:ea typeface="Cambria" pitchFamily="34" charset="-122"/>
+                <a:cs typeface="Cambria" pitchFamily="34" charset="-120"/>
+              </a:rPr>
+              <a:t>Adiar isso não é ficar parado: é pagar juro composto na moeda errada. O próximo passo não custa nada e cabe em 45 minutos: o Mapa de Vazamento da sua operação.</a:t>
+            </a:r>
+            <a:endParaRPr lang="en-US" sz="1600" dirty="0"/>
+          </a:p>
+        </p:txBody>
+      </p:sp>
+      <p:sp>
+        <p:nvSpPr>
+          <p:cNvPr id="6" name="Text 4"/>
+          <p:cNvSpPr/>
+          <p:nvPr/>
+        </p:nvSpPr>
+        <p:spPr>
+          <a:xfrm>
+            <a:off x="822960" y="5440680"/>
             <a:ext cx="10543032" cy="365760"/>
           </a:xfrm>
           <a:prstGeom prst="rect">
@@ -2835,7 +3560,7 @@
         </p:nvSpPr>
         <p:spPr>
           <a:xfrm>
-            <a:off x="822960" y="594360"/>
+            <a:off x="822960" y="822960"/>
             <a:ext cx="5486400" cy="292608"/>
           </a:xfrm>
           <a:prstGeom prst="rect">
@@ -2860,7 +3585,7 @@
                 <a:ea typeface="Calibri" pitchFamily="34" charset="-122"/>
                 <a:cs typeface="Calibri" pitchFamily="34" charset="-120"/>
               </a:rPr>
-              <a:t>O PROBLEMA</a:t>
+              <a:t>UMA COISA QUE NINGUÉM FALA EM VOZ ALTA</a:t>
             </a:r>
             <a:endParaRPr lang="en-US" sz="1100" dirty="0"/>
           </a:p>
@@ -2874,8 +3599,8 @@
         </p:nvSpPr>
         <p:spPr>
           <a:xfrm>
-            <a:off x="822960" y="960120"/>
-            <a:ext cx="10543032" cy="914400"/>
+            <a:off x="822960" y="1371600"/>
+            <a:ext cx="10543032" cy="1645920"/>
           </a:xfrm>
           <a:prstGeom prst="rect">
             <a:avLst/>
@@ -2889,12 +3614,12 @@
           <a:p>
             <a:pPr indent="0" marL="0">
               <a:lnSpc>
-                <a:spcPts val="3400"/>
+                <a:spcPts val="4000"/>
               </a:lnSpc>
               <a:buNone/>
             </a:pPr>
             <a:r>
-              <a:rPr lang="en-US" sz="2800" b="1" dirty="0">
+              <a:rPr lang="en-US" sz="2900" b="1" dirty="0">
                 <a:solidFill>
                   <a:srgbClr val="1B2A4A"/>
                 </a:solidFill>
@@ -2902,73 +3627,76 @@
                 <a:ea typeface="Cambria" pitchFamily="34" charset="-122"/>
                 <a:cs typeface="Cambria" pitchFamily="34" charset="-120"/>
               </a:rPr>
-              <a:t>A maioria dos projetos de IA não falha na tecnologia.</a:t>
-            </a:r>
-            <a:endParaRPr lang="en-US" sz="2800" dirty="0"/>
-          </a:p>
-        </p:txBody>
-      </p:sp>
-      <p:sp>
-        <p:nvSpPr>
-          <p:cNvPr id="4" name="Text 2"/>
-          <p:cNvSpPr/>
-          <p:nvPr/>
-        </p:nvSpPr>
-        <p:spPr>
-          <a:xfrm>
-            <a:off x="822960" y="6400800"/>
-            <a:ext cx="10543032" cy="274320"/>
-          </a:xfrm>
-          <a:prstGeom prst="rect">
-            <a:avLst/>
-          </a:prstGeom>
-          <a:noFill/>
-          <a:ln/>
-        </p:spPr>
-        <p:txBody>
-          <a:bodyPr wrap="square" rtlCol="0" anchor="ctr"/>
-          <a:lstStyle/>
-          <a:p>
-            <a:pPr algn="ctr" indent="0" marL="0">
-              <a:buNone/>
-            </a:pPr>
-            <a:r>
-              <a:rPr lang="en-US" sz="900" spc="100" kern="0" dirty="0">
-                <a:solidFill>
-                  <a:srgbClr val="6E6858"/>
+              <a:t>De cada dez empresas que decidiram usar IA este ano, mais de oito não vão conseguir mostrar um número no fim.</a:t>
+            </a:r>
+            <a:endParaRPr lang="en-US" sz="2900" dirty="0"/>
+          </a:p>
+        </p:txBody>
+      </p:sp>
+      <p:sp>
+        <p:nvSpPr>
+          <p:cNvPr id="4" name="Shape 2"/>
+          <p:cNvSpPr/>
+          <p:nvPr/>
+        </p:nvSpPr>
+        <p:spPr>
+          <a:xfrm>
+            <a:off x="822960" y="3200400"/>
+            <a:ext cx="2011680" cy="0"/>
+          </a:xfrm>
+          <a:prstGeom prst="line">
+            <a:avLst/>
+          </a:prstGeom>
+          <a:noFill/>
+          <a:ln w="19050">
+            <a:solidFill>
+              <a:srgbClr val="C2A35B"/>
+            </a:solidFill>
+            <a:prstDash val="solid"/>
+          </a:ln>
+        </p:spPr>
+      </p:sp>
+      <p:sp>
+        <p:nvSpPr>
+          <p:cNvPr id="5" name="Text 3"/>
+          <p:cNvSpPr/>
+          <p:nvPr/>
+        </p:nvSpPr>
+        <p:spPr>
+          <a:xfrm>
+            <a:off x="822960" y="3474720"/>
+            <a:ext cx="10543032" cy="1097280"/>
+          </a:xfrm>
+          <a:prstGeom prst="rect">
+            <a:avLst/>
+          </a:prstGeom>
+          <a:noFill/>
+          <a:ln/>
+        </p:spPr>
+        <p:txBody>
+          <a:bodyPr wrap="square" rtlCol="0" anchor="ctr"/>
+          <a:lstStyle/>
+          <a:p>
+            <a:pPr algn="l" indent="0" marL="0">
+              <a:lnSpc>
+                <a:spcPts val="2300"/>
+              </a:lnSpc>
+              <a:buNone/>
+            </a:pPr>
+            <a:r>
+              <a:rPr lang="en-US" sz="1500" dirty="0">
+                <a:solidFill>
+                  <a:srgbClr val="33394A"/>
                 </a:solidFill>
                 <a:latin typeface="Calibri" pitchFamily="34" charset="0"/>
                 <a:ea typeface="Calibri" pitchFamily="34" charset="-122"/>
                 <a:cs typeface="Calibri" pitchFamily="34" charset="-120"/>
               </a:rPr>
-              <a:t>ABBA Consultoria de IA · contato@abbaservices.com.br</a:t>
-            </a:r>
-            <a:endParaRPr lang="en-US" sz="900" dirty="0"/>
-          </a:p>
-        </p:txBody>
-      </p:sp>
-      <p:sp>
-        <p:nvSpPr>
-          <p:cNvPr id="5" name="Shape 3"/>
-          <p:cNvSpPr/>
-          <p:nvPr/>
-        </p:nvSpPr>
-        <p:spPr>
-          <a:xfrm>
-            <a:off x="822960" y="2148840"/>
-            <a:ext cx="10543032" cy="0"/>
-          </a:xfrm>
-          <a:prstGeom prst="line">
-            <a:avLst/>
-          </a:prstGeom>
-          <a:noFill/>
-          <a:ln w="9525">
-            <a:solidFill>
-              <a:srgbClr val="E5E0D4"/>
-            </a:solidFill>
-            <a:prstDash val="solid"/>
-          </a:ln>
-        </p:spPr>
+              <a:t>E não é por falta de tecnologia. Se entrarmos em dez empresas hoje e perguntarmos se usam inteligência artificial, dez dizem que sim. E estão falando a verdade: tem licença, tem gente usando, tem gente feliz. Só que quando se olha o resultado da empresa, não mudou nada.</a:t>
+            </a:r>
+            <a:endParaRPr lang="en-US" sz="1500" dirty="0"/>
+          </a:p>
+        </p:txBody>
       </p:sp>
       <p:sp>
         <p:nvSpPr>
@@ -2978,8 +3706,8 @@
         </p:nvSpPr>
         <p:spPr>
           <a:xfrm>
-            <a:off x="822960" y="2258568"/>
-            <a:ext cx="1463040" cy="292608"/>
+            <a:off x="822960" y="4754880"/>
+            <a:ext cx="10543032" cy="548640"/>
           </a:xfrm>
           <a:prstGeom prst="rect">
             <a:avLst/>
@@ -2992,270 +3720,62 @@
           <a:lstStyle/>
           <a:p>
             <a:pPr algn="l" indent="0" marL="0">
-              <a:buNone/>
-            </a:pPr>
-            <a:r>
-              <a:rPr lang="en-US" sz="1100" b="1" spc="300" kern="0" dirty="0">
-                <a:solidFill>
-                  <a:srgbClr val="C2A35B"/>
+              <a:lnSpc>
+                <a:spcPts val="2400"/>
+              </a:lnSpc>
+              <a:buNone/>
+            </a:pPr>
+            <a:r>
+              <a:rPr lang="en-US" sz="1600" i="1" dirty="0">
+                <a:solidFill>
+                  <a:srgbClr val="1B2A4A"/>
+                </a:solidFill>
+                <a:latin typeface="Cambria" pitchFamily="34" charset="0"/>
+                <a:ea typeface="Cambria" pitchFamily="34" charset="-122"/>
+                <a:cs typeface="Cambria" pitchFamily="34" charset="-120"/>
+              </a:rPr>
+              <a:t>Não é porque a IA não funciona. É porque ela entrou pelo lugar errado.</a:t>
+            </a:r>
+            <a:endParaRPr lang="en-US" sz="1600" dirty="0"/>
+          </a:p>
+        </p:txBody>
+      </p:sp>
+      <p:sp>
+        <p:nvSpPr>
+          <p:cNvPr id="7" name="Text 5"/>
+          <p:cNvSpPr/>
+          <p:nvPr/>
+        </p:nvSpPr>
+        <p:spPr>
+          <a:xfrm>
+            <a:off x="822960" y="6400800"/>
+            <a:ext cx="10543032" cy="274320"/>
+          </a:xfrm>
+          <a:prstGeom prst="rect">
+            <a:avLst/>
+          </a:prstGeom>
+          <a:noFill/>
+          <a:ln/>
+        </p:spPr>
+        <p:txBody>
+          <a:bodyPr wrap="square" rtlCol="0" anchor="ctr"/>
+          <a:lstStyle/>
+          <a:p>
+            <a:pPr algn="ctr" indent="0" marL="0">
+              <a:buNone/>
+            </a:pPr>
+            <a:r>
+              <a:rPr lang="en-US" sz="900" spc="100" kern="0" dirty="0">
+                <a:solidFill>
+                  <a:srgbClr val="6E6858"/>
                 </a:solidFill>
                 <a:latin typeface="Calibri" pitchFamily="34" charset="0"/>
                 <a:ea typeface="Calibri" pitchFamily="34" charset="-122"/>
                 <a:cs typeface="Calibri" pitchFamily="34" charset="-120"/>
               </a:rPr>
-              <a:t>RAND</a:t>
-            </a:r>
-            <a:endParaRPr lang="en-US" sz="1100" dirty="0"/>
-          </a:p>
-        </p:txBody>
-      </p:sp>
-      <p:sp>
-        <p:nvSpPr>
-          <p:cNvPr id="7" name="Text 5"/>
-          <p:cNvSpPr/>
-          <p:nvPr/>
-        </p:nvSpPr>
-        <p:spPr>
-          <a:xfrm>
-            <a:off x="2468880" y="2240280"/>
-            <a:ext cx="8897112" cy="1097280"/>
-          </a:xfrm>
-          <a:prstGeom prst="rect">
-            <a:avLst/>
-          </a:prstGeom>
-          <a:noFill/>
-          <a:ln/>
-        </p:spPr>
-        <p:txBody>
-          <a:bodyPr wrap="square" rtlCol="0" anchor="ctr"/>
-          <a:lstStyle/>
-          <a:p>
-            <a:pPr algn="l" indent="0" marL="0">
-              <a:lnSpc>
-                <a:spcPts val="1900"/>
-              </a:lnSpc>
-              <a:buNone/>
-            </a:pPr>
-            <a:r>
-              <a:rPr lang="en-US" sz="1300" dirty="0">
-                <a:solidFill>
-                  <a:srgbClr val="33394A"/>
-                </a:solidFill>
-                <a:latin typeface="Calibri" pitchFamily="34" charset="0"/>
-                <a:ea typeface="Calibri" pitchFamily="34" charset="-122"/>
-                <a:cs typeface="Calibri" pitchFamily="34" charset="-120"/>
-              </a:rPr>
-              <a:t>Mais de 80% dos projetos de IA falham — o dobro dos projetos comuns de TI. A causa número um: começar sem combinar o que seria dar certo.</a:t>
-            </a:r>
-            <a:endParaRPr lang="en-US" sz="1300" dirty="0"/>
-          </a:p>
-        </p:txBody>
-      </p:sp>
-      <p:sp>
-        <p:nvSpPr>
-          <p:cNvPr id="8" name="Shape 6"/>
-          <p:cNvSpPr/>
-          <p:nvPr/>
-        </p:nvSpPr>
-        <p:spPr>
-          <a:xfrm>
-            <a:off x="822960" y="3474720"/>
-            <a:ext cx="10543032" cy="0"/>
-          </a:xfrm>
-          <a:prstGeom prst="line">
-            <a:avLst/>
-          </a:prstGeom>
-          <a:noFill/>
-          <a:ln w="9525">
-            <a:solidFill>
-              <a:srgbClr val="E5E0D4"/>
-            </a:solidFill>
-            <a:prstDash val="solid"/>
-          </a:ln>
-        </p:spPr>
-      </p:sp>
-      <p:sp>
-        <p:nvSpPr>
-          <p:cNvPr id="9" name="Text 7"/>
-          <p:cNvSpPr/>
-          <p:nvPr/>
-        </p:nvSpPr>
-        <p:spPr>
-          <a:xfrm>
-            <a:off x="822960" y="3584448"/>
-            <a:ext cx="1463040" cy="292608"/>
-          </a:xfrm>
-          <a:prstGeom prst="rect">
-            <a:avLst/>
-          </a:prstGeom>
-          <a:noFill/>
-          <a:ln/>
-        </p:spPr>
-        <p:txBody>
-          <a:bodyPr wrap="square" rtlCol="0" anchor="ctr"/>
-          <a:lstStyle/>
-          <a:p>
-            <a:pPr algn="l" indent="0" marL="0">
-              <a:buNone/>
-            </a:pPr>
-            <a:r>
-              <a:rPr lang="en-US" sz="1100" b="1" spc="300" kern="0" dirty="0">
-                <a:solidFill>
-                  <a:srgbClr val="C2A35B"/>
-                </a:solidFill>
-                <a:latin typeface="Calibri" pitchFamily="34" charset="0"/>
-                <a:ea typeface="Calibri" pitchFamily="34" charset="-122"/>
-                <a:cs typeface="Calibri" pitchFamily="34" charset="-120"/>
-              </a:rPr>
-              <a:t>METR</a:t>
-            </a:r>
-            <a:endParaRPr lang="en-US" sz="1100" dirty="0"/>
-          </a:p>
-        </p:txBody>
-      </p:sp>
-      <p:sp>
-        <p:nvSpPr>
-          <p:cNvPr id="10" name="Text 8"/>
-          <p:cNvSpPr/>
-          <p:nvPr/>
-        </p:nvSpPr>
-        <p:spPr>
-          <a:xfrm>
-            <a:off x="2468880" y="3566160"/>
-            <a:ext cx="8897112" cy="1097280"/>
-          </a:xfrm>
-          <a:prstGeom prst="rect">
-            <a:avLst/>
-          </a:prstGeom>
-          <a:noFill/>
-          <a:ln/>
-        </p:spPr>
-        <p:txBody>
-          <a:bodyPr wrap="square" rtlCol="0" anchor="ctr"/>
-          <a:lstStyle/>
-          <a:p>
-            <a:pPr algn="l" indent="0" marL="0">
-              <a:lnSpc>
-                <a:spcPts val="1900"/>
-              </a:lnSpc>
-              <a:buNone/>
-            </a:pPr>
-            <a:r>
-              <a:rPr lang="en-US" sz="1300" dirty="0">
-                <a:solidFill>
-                  <a:srgbClr val="33394A"/>
-                </a:solidFill>
-                <a:latin typeface="Calibri" pitchFamily="34" charset="0"/>
-                <a:ea typeface="Calibri" pitchFamily="34" charset="-122"/>
-                <a:cs typeface="Calibri" pitchFamily="34" charset="-120"/>
-              </a:rPr>
-              <a:t>Desenvolvedores experientes com IA ficaram 19% mais lentos — convencidos de que estavam 20% mais rápidos. Autoavaliação erra por ~40 pontos: sem medição externa, ninguém sabe o que tem.</a:t>
-            </a:r>
-            <a:endParaRPr lang="en-US" sz="1300" dirty="0"/>
-          </a:p>
-        </p:txBody>
-      </p:sp>
-      <p:sp>
-        <p:nvSpPr>
-          <p:cNvPr id="11" name="Shape 9"/>
-          <p:cNvSpPr/>
-          <p:nvPr/>
-        </p:nvSpPr>
-        <p:spPr>
-          <a:xfrm>
-            <a:off x="822960" y="4800600"/>
-            <a:ext cx="10543032" cy="0"/>
-          </a:xfrm>
-          <a:prstGeom prst="line">
-            <a:avLst/>
-          </a:prstGeom>
-          <a:noFill/>
-          <a:ln w="9525">
-            <a:solidFill>
-              <a:srgbClr val="E5E0D4"/>
-            </a:solidFill>
-            <a:prstDash val="solid"/>
-          </a:ln>
-        </p:spPr>
-      </p:sp>
-      <p:sp>
-        <p:nvSpPr>
-          <p:cNvPr id="12" name="Text 10"/>
-          <p:cNvSpPr/>
-          <p:nvPr/>
-        </p:nvSpPr>
-        <p:spPr>
-          <a:xfrm>
-            <a:off x="822960" y="4910328"/>
-            <a:ext cx="1463040" cy="292608"/>
-          </a:xfrm>
-          <a:prstGeom prst="rect">
-            <a:avLst/>
-          </a:prstGeom>
-          <a:noFill/>
-          <a:ln/>
-        </p:spPr>
-        <p:txBody>
-          <a:bodyPr wrap="square" rtlCol="0" anchor="ctr"/>
-          <a:lstStyle/>
-          <a:p>
-            <a:pPr algn="l" indent="0" marL="0">
-              <a:buNone/>
-            </a:pPr>
-            <a:r>
-              <a:rPr lang="en-US" sz="1100" b="1" spc="300" kern="0" dirty="0">
-                <a:solidFill>
-                  <a:srgbClr val="C2A35B"/>
-                </a:solidFill>
-                <a:latin typeface="Calibri" pitchFamily="34" charset="0"/>
-                <a:ea typeface="Calibri" pitchFamily="34" charset="-122"/>
-                <a:cs typeface="Calibri" pitchFamily="34" charset="-120"/>
-              </a:rPr>
-              <a:t>DORA</a:t>
-            </a:r>
-            <a:endParaRPr lang="en-US" sz="1100" dirty="0"/>
-          </a:p>
-        </p:txBody>
-      </p:sp>
-      <p:sp>
-        <p:nvSpPr>
-          <p:cNvPr id="13" name="Text 11"/>
-          <p:cNvSpPr/>
-          <p:nvPr/>
-        </p:nvSpPr>
-        <p:spPr>
-          <a:xfrm>
-            <a:off x="2468880" y="4892040"/>
-            <a:ext cx="8897112" cy="1097280"/>
-          </a:xfrm>
-          <a:prstGeom prst="rect">
-            <a:avLst/>
-          </a:prstGeom>
-          <a:noFill/>
-          <a:ln/>
-        </p:spPr>
-        <p:txBody>
-          <a:bodyPr wrap="square" rtlCol="0" anchor="ctr"/>
-          <a:lstStyle/>
-          <a:p>
-            <a:pPr algn="l" indent="0" marL="0">
-              <a:lnSpc>
-                <a:spcPts val="1900"/>
-              </a:lnSpc>
-              <a:buNone/>
-            </a:pPr>
-            <a:r>
-              <a:rPr lang="en-US" sz="1300" dirty="0">
-                <a:solidFill>
-                  <a:srgbClr val="33394A"/>
-                </a:solidFill>
-                <a:latin typeface="Calibri" pitchFamily="34" charset="0"/>
-                <a:ea typeface="Calibri" pitchFamily="34" charset="-122"/>
-                <a:cs typeface="Calibri" pitchFamily="34" charset="-120"/>
-              </a:rPr>
-              <a:t>IA amplifica o que já existe: base organizada rende; base bagunçada piora mais rápido. Arrumar a base não é atraso — é a condição do ganho.</a:t>
-            </a:r>
-            <a:endParaRPr lang="en-US" sz="1300" dirty="0"/>
+              <a:t>ABBA Consultoria de IA · contato@abbaservices.com.br</a:t>
+            </a:r>
+            <a:endParaRPr lang="en-US" sz="900" dirty="0"/>
           </a:p>
         </p:txBody>
       </p:sp>
@@ -3324,7 +3844,7 @@
                 <a:ea typeface="Calibri" pitchFamily="34" charset="-122"/>
                 <a:cs typeface="Calibri" pitchFamily="34" charset="-120"/>
               </a:rPr>
-              <a:t>A NOSSA TESE</a:t>
+              <a:t>POR ONDE A IA ENTRA</a:t>
             </a:r>
             <a:endParaRPr lang="en-US" sz="1100" dirty="0"/>
           </a:p>
@@ -3366,7 +3886,7 @@
                 <a:ea typeface="Cambria" pitchFamily="34" charset="-122"/>
                 <a:cs typeface="Cambria" pitchFamily="34" charset="-120"/>
               </a:rPr>
-              <a:t>O valor está 70% em pessoas, processos e governança.</a:t>
+              <a:t>Na ponta, ou na veia?</a:t>
             </a:r>
             <a:endParaRPr lang="en-US" sz="2800" dirty="0"/>
           </a:p>
@@ -3380,8 +3900,109 @@
         </p:nvSpPr>
         <p:spPr>
           <a:xfrm>
-            <a:off x="822960" y="1920240"/>
-            <a:ext cx="10543032" cy="640080"/>
+            <a:off x="822960" y="6400800"/>
+            <a:ext cx="10543032" cy="274320"/>
+          </a:xfrm>
+          <a:prstGeom prst="rect">
+            <a:avLst/>
+          </a:prstGeom>
+          <a:noFill/>
+          <a:ln/>
+        </p:spPr>
+        <p:txBody>
+          <a:bodyPr wrap="square" rtlCol="0" anchor="ctr"/>
+          <a:lstStyle/>
+          <a:p>
+            <a:pPr algn="ctr" indent="0" marL="0">
+              <a:buNone/>
+            </a:pPr>
+            <a:r>
+              <a:rPr lang="en-US" sz="900" spc="100" kern="0" dirty="0">
+                <a:solidFill>
+                  <a:srgbClr val="6E6858"/>
+                </a:solidFill>
+                <a:latin typeface="Calibri" pitchFamily="34" charset="0"/>
+                <a:ea typeface="Calibri" pitchFamily="34" charset="-122"/>
+                <a:cs typeface="Calibri" pitchFamily="34" charset="-120"/>
+              </a:rPr>
+              <a:t>ABBA Consultoria de IA · contato@abbaservices.com.br</a:t>
+            </a:r>
+            <a:endParaRPr lang="en-US" sz="900" dirty="0"/>
+          </a:p>
+        </p:txBody>
+      </p:sp>
+      <p:sp>
+        <p:nvSpPr>
+          <p:cNvPr id="5" name="Shape 3"/>
+          <p:cNvSpPr/>
+          <p:nvPr/>
+        </p:nvSpPr>
+        <p:spPr>
+          <a:xfrm>
+            <a:off x="822960" y="2286000"/>
+            <a:ext cx="4997196" cy="0"/>
+          </a:xfrm>
+          <a:prstGeom prst="line">
+            <a:avLst/>
+          </a:prstGeom>
+          <a:noFill/>
+          <a:ln w="15240">
+            <a:solidFill>
+              <a:srgbClr val="C2A35B"/>
+            </a:solidFill>
+            <a:prstDash val="solid"/>
+          </a:ln>
+        </p:spPr>
+      </p:sp>
+      <p:sp>
+        <p:nvSpPr>
+          <p:cNvPr id="6" name="Text 4"/>
+          <p:cNvSpPr/>
+          <p:nvPr/>
+        </p:nvSpPr>
+        <p:spPr>
+          <a:xfrm>
+            <a:off x="822960" y="2432304"/>
+            <a:ext cx="4997196" cy="292608"/>
+          </a:xfrm>
+          <a:prstGeom prst="rect">
+            <a:avLst/>
+          </a:prstGeom>
+          <a:noFill/>
+          <a:ln/>
+        </p:spPr>
+        <p:txBody>
+          <a:bodyPr wrap="square" rtlCol="0" anchor="ctr"/>
+          <a:lstStyle/>
+          <a:p>
+            <a:pPr algn="l" indent="0" marL="0">
+              <a:buNone/>
+            </a:pPr>
+            <a:r>
+              <a:rPr lang="en-US" sz="1100" b="1" spc="300" kern="0" dirty="0">
+                <a:solidFill>
+                  <a:srgbClr val="C2A35B"/>
+                </a:solidFill>
+                <a:latin typeface="Calibri" pitchFamily="34" charset="0"/>
+                <a:ea typeface="Calibri" pitchFamily="34" charset="-122"/>
+                <a:cs typeface="Calibri" pitchFamily="34" charset="-120"/>
+              </a:rPr>
+              <a:t>IA NA PONTA</a:t>
+            </a:r>
+            <a:endParaRPr lang="en-US" sz="1100" dirty="0"/>
+          </a:p>
+        </p:txBody>
+      </p:sp>
+      <p:sp>
+        <p:nvSpPr>
+          <p:cNvPr id="7" name="Text 5"/>
+          <p:cNvSpPr/>
+          <p:nvPr/>
+        </p:nvSpPr>
+        <p:spPr>
+          <a:xfrm>
+            <a:off x="822960" y="2788920"/>
+            <a:ext cx="4997196" cy="2103120"/>
           </a:xfrm>
           <a:prstGeom prst="rect">
             <a:avLst/>
@@ -3400,92 +4021,92 @@
               <a:buNone/>
             </a:pPr>
             <a:r>
-              <a:rPr lang="en-US" sz="1300" dirty="0">
-                <a:solidFill>
-                  <a:srgbClr val="6E6858"/>
+              <a:rPr lang="en-US" sz="1350" dirty="0">
+                <a:solidFill>
+                  <a:srgbClr val="33394A"/>
                 </a:solidFill>
                 <a:latin typeface="Calibri" pitchFamily="34" charset="0"/>
                 <a:ea typeface="Calibri" pitchFamily="34" charset="-122"/>
                 <a:cs typeface="Calibri" pitchFamily="34" charset="-120"/>
               </a:rPr>
-              <a:t>O mercado vende os outros 30% — ferramentas, pilotos sem métrica, cursos soltos. Nós instalamos os 70%: o critério de sucesso, a base arrumada, as pessoas formadas e a medição de terceiro que sustenta cada decisão.</a:t>
-            </a:r>
-            <a:endParaRPr lang="en-US" sz="1300" dirty="0"/>
-          </a:p>
-        </p:txBody>
-      </p:sp>
-      <p:sp>
-        <p:nvSpPr>
-          <p:cNvPr id="5" name="Text 3"/>
-          <p:cNvSpPr/>
-          <p:nvPr/>
-        </p:nvSpPr>
-        <p:spPr>
-          <a:xfrm>
-            <a:off x="822960" y="6400800"/>
-            <a:ext cx="10543032" cy="274320"/>
-          </a:xfrm>
-          <a:prstGeom prst="rect">
-            <a:avLst/>
-          </a:prstGeom>
-          <a:noFill/>
-          <a:ln/>
-        </p:spPr>
-        <p:txBody>
-          <a:bodyPr wrap="square" rtlCol="0" anchor="ctr"/>
-          <a:lstStyle/>
-          <a:p>
-            <a:pPr algn="ctr" indent="0" marL="0">
-              <a:buNone/>
-            </a:pPr>
-            <a:r>
-              <a:rPr lang="en-US" sz="900" spc="100" kern="0" dirty="0">
-                <a:solidFill>
-                  <a:srgbClr val="6E6858"/>
+              <a:t>Uma pessoa pega uma tarefa, pede para a ferramenta, recebe o resultado. Começo, meio e fim na mão dela. O ganho fica com a pessoa: se ela sai amanhã, o ganho sai junto pela porta. É remédio que a pessoa toma.</a:t>
+            </a:r>
+            <a:endParaRPr lang="en-US" sz="1350" dirty="0"/>
+          </a:p>
+        </p:txBody>
+      </p:sp>
+      <p:sp>
+        <p:nvSpPr>
+          <p:cNvPr id="8" name="Shape 6"/>
+          <p:cNvSpPr/>
+          <p:nvPr/>
+        </p:nvSpPr>
+        <p:spPr>
+          <a:xfrm>
+            <a:off x="6368796" y="2286000"/>
+            <a:ext cx="4997196" cy="0"/>
+          </a:xfrm>
+          <a:prstGeom prst="line">
+            <a:avLst/>
+          </a:prstGeom>
+          <a:noFill/>
+          <a:ln w="15240">
+            <a:solidFill>
+              <a:srgbClr val="C2A35B"/>
+            </a:solidFill>
+            <a:prstDash val="solid"/>
+          </a:ln>
+        </p:spPr>
+      </p:sp>
+      <p:sp>
+        <p:nvSpPr>
+          <p:cNvPr id="9" name="Text 7"/>
+          <p:cNvSpPr/>
+          <p:nvPr/>
+        </p:nvSpPr>
+        <p:spPr>
+          <a:xfrm>
+            <a:off x="6368796" y="2432304"/>
+            <a:ext cx="4997196" cy="292608"/>
+          </a:xfrm>
+          <a:prstGeom prst="rect">
+            <a:avLst/>
+          </a:prstGeom>
+          <a:noFill/>
+          <a:ln/>
+        </p:spPr>
+        <p:txBody>
+          <a:bodyPr wrap="square" rtlCol="0" anchor="ctr"/>
+          <a:lstStyle/>
+          <a:p>
+            <a:pPr algn="l" indent="0" marL="0">
+              <a:buNone/>
+            </a:pPr>
+            <a:r>
+              <a:rPr lang="en-US" sz="1100" b="1" spc="300" kern="0" dirty="0">
+                <a:solidFill>
+                  <a:srgbClr val="C2A35B"/>
                 </a:solidFill>
                 <a:latin typeface="Calibri" pitchFamily="34" charset="0"/>
                 <a:ea typeface="Calibri" pitchFamily="34" charset="-122"/>
                 <a:cs typeface="Calibri" pitchFamily="34" charset="-120"/>
               </a:rPr>
-              <a:t>ABBA Consultoria de IA · contato@abbaservices.com.br</a:t>
-            </a:r>
-            <a:endParaRPr lang="en-US" sz="900" dirty="0"/>
-          </a:p>
-        </p:txBody>
-      </p:sp>
-      <p:sp>
-        <p:nvSpPr>
-          <p:cNvPr id="6" name="Shape 4"/>
-          <p:cNvSpPr/>
-          <p:nvPr/>
-        </p:nvSpPr>
-        <p:spPr>
-          <a:xfrm>
-            <a:off x="822960" y="3017520"/>
-            <a:ext cx="10543032" cy="0"/>
-          </a:xfrm>
-          <a:prstGeom prst="line">
-            <a:avLst/>
-          </a:prstGeom>
-          <a:noFill/>
-          <a:ln w="9525">
-            <a:solidFill>
-              <a:srgbClr val="E5E0D4"/>
-            </a:solidFill>
-            <a:prstDash val="solid"/>
-          </a:ln>
-        </p:spPr>
-      </p:sp>
-      <p:sp>
-        <p:nvSpPr>
-          <p:cNvPr id="7" name="Text 5"/>
-          <p:cNvSpPr/>
-          <p:nvPr/>
-        </p:nvSpPr>
-        <p:spPr>
-          <a:xfrm>
-            <a:off x="822960" y="3291840"/>
-            <a:ext cx="10543032" cy="822960"/>
+              <a:t>IA NA VEIA</a:t>
+            </a:r>
+            <a:endParaRPr lang="en-US" sz="1100" dirty="0"/>
+          </a:p>
+        </p:txBody>
+      </p:sp>
+      <p:sp>
+        <p:nvSpPr>
+          <p:cNvPr id="10" name="Text 8"/>
+          <p:cNvSpPr/>
+          <p:nvPr/>
+        </p:nvSpPr>
+        <p:spPr>
+          <a:xfrm>
+            <a:off x="6368796" y="2788920"/>
+            <a:ext cx="4997196" cy="2103120"/>
           </a:xfrm>
           <a:prstGeom prst="rect">
             <a:avLst/>
@@ -3498,23 +4119,65 @@
           <a:lstStyle/>
           <a:p>
             <a:pPr algn="l" indent="0" marL="0">
+              <a:lnSpc>
+                <a:spcPts val="2000"/>
+              </a:lnSpc>
+              <a:buNone/>
+            </a:pPr>
+            <a:r>
+              <a:rPr lang="en-US" sz="1350" dirty="0">
+                <a:solidFill>
+                  <a:srgbClr val="33394A"/>
+                </a:solidFill>
+                <a:latin typeface="Calibri" pitchFamily="34" charset="0"/>
+                <a:ea typeface="Calibri" pitchFamily="34" charset="-122"/>
+                <a:cs typeface="Calibri" pitchFamily="34" charset="-120"/>
+              </a:rPr>
+              <a:t>A IA roda dentro do processo, com integrações, aprovações humanas nos pontos certos e um número acompanhando. O organismo funciona diferente. O ganho fica na empresa, mesmo quando as pessoas mudam.</a:t>
+            </a:r>
+            <a:endParaRPr lang="en-US" sz="1350" dirty="0"/>
+          </a:p>
+        </p:txBody>
+      </p:sp>
+      <p:sp>
+        <p:nvSpPr>
+          <p:cNvPr id="11" name="Text 9"/>
+          <p:cNvSpPr/>
+          <p:nvPr/>
+        </p:nvSpPr>
+        <p:spPr>
+          <a:xfrm>
+            <a:off x="822960" y="5257800"/>
+            <a:ext cx="10543032" cy="777240"/>
+          </a:xfrm>
+          <a:prstGeom prst="rect">
+            <a:avLst/>
+          </a:prstGeom>
+          <a:noFill/>
+          <a:ln/>
+        </p:spPr>
+        <p:txBody>
+          <a:bodyPr wrap="square" rtlCol="0" anchor="ctr"/>
+          <a:lstStyle/>
+          <a:p>
+            <a:pPr algn="ctr" indent="0" marL="0">
               <a:lnSpc>
                 <a:spcPts val="2200"/>
               </a:lnSpc>
               <a:buNone/>
             </a:pPr>
             <a:r>
-              <a:rPr lang="en-US" sz="1450" i="1" dirty="0">
-                <a:solidFill>
-                  <a:srgbClr val="33394A"/>
+              <a:rPr lang="en-US" sz="1500" i="1" dirty="0">
+                <a:solidFill>
+                  <a:srgbClr val="1B2A4A"/>
                 </a:solidFill>
                 <a:latin typeface="Cambria" pitchFamily="34" charset="0"/>
                 <a:ea typeface="Cambria" pitchFamily="34" charset="-122"/>
                 <a:cs typeface="Cambria" pitchFamily="34" charset="-120"/>
               </a:rPr>
-              <a:t>Por isso não vendemos ferramenta, nem piloto, nem curso: vendemos um caminho de um ano com porta de saída limpa em cada fase — e a prova, medida, de que ele funcionou.</a:t>
-            </a:r>
-            <a:endParaRPr lang="en-US" sz="1450" dirty="0"/>
+              <a:t>A pergunta que separa quem colhe de quem não colhe não é qual ferramenta comprar. É por onde a IA está entrando na sua empresa.</a:t>
+            </a:r>
+            <a:endParaRPr lang="en-US" sz="1500" dirty="0"/>
           </a:p>
         </p:txBody>
       </p:sp>
@@ -3583,7 +4246,7 @@
                 <a:ea typeface="Calibri" pitchFamily="34" charset="-122"/>
                 <a:cs typeface="Calibri" pitchFamily="34" charset="-120"/>
               </a:rPr>
-              <a:t>COMO TODA CONVERSA COMEÇA</a:t>
+              <a:t>NÃO É IMPRESSÃO NOSSA</a:t>
             </a:r>
             <a:endParaRPr lang="en-US" sz="1100" dirty="0"/>
           </a:p>
@@ -3625,7 +4288,7 @@
                 <a:ea typeface="Cambria" pitchFamily="34" charset="-122"/>
                 <a:cs typeface="Cambria" pitchFamily="34" charset="-120"/>
               </a:rPr>
-              <a:t>O Mapa de Vazamento — grátis, feito de fora, com um número dentro.</a:t>
+              <a:t>Três medições independentes, dizendo a mesma coisa.</a:t>
             </a:r>
             <a:endParaRPr lang="en-US" sz="2800" dirty="0"/>
           </a:p>
@@ -3639,27 +4302,24 @@
         </p:nvSpPr>
         <p:spPr>
           <a:xfrm>
-            <a:off x="822960" y="1920240"/>
-            <a:ext cx="10543032" cy="640080"/>
-          </a:xfrm>
-          <a:prstGeom prst="rect">
-            <a:avLst/>
-          </a:prstGeom>
-          <a:noFill/>
-          <a:ln/>
-        </p:spPr>
-        <p:txBody>
-          <a:bodyPr wrap="square" rtlCol="0" anchor="ctr"/>
-          <a:lstStyle/>
-          <a:p>
-            <a:pPr algn="l" indent="0" marL="0">
-              <a:lnSpc>
-                <a:spcPts val="2000"/>
-              </a:lnSpc>
-              <a:buNone/>
-            </a:pPr>
-            <a:r>
-              <a:rPr lang="en-US" sz="1300" dirty="0">
+            <a:off x="822960" y="6400800"/>
+            <a:ext cx="10543032" cy="274320"/>
+          </a:xfrm>
+          <a:prstGeom prst="rect">
+            <a:avLst/>
+          </a:prstGeom>
+          <a:noFill/>
+          <a:ln/>
+        </p:spPr>
+        <p:txBody>
+          <a:bodyPr wrap="square" rtlCol="0" anchor="ctr"/>
+          <a:lstStyle/>
+          <a:p>
+            <a:pPr algn="ctr" indent="0" marL="0">
+              <a:buNone/>
+            </a:pPr>
+            <a:r>
+              <a:rPr lang="en-US" sz="900" spc="100" kern="0" dirty="0">
                 <a:solidFill>
                   <a:srgbClr val="6E6858"/>
                 </a:solidFill>
@@ -3667,75 +4327,324 @@
                 <a:ea typeface="Calibri" pitchFamily="34" charset="-122"/>
                 <a:cs typeface="Calibri" pitchFamily="34" charset="-120"/>
               </a:rPr>
-              <a:t>Antes de qualquer contrato, entregamos um mapa do que estimamos estar vazando na sua operação: onde, quanto por mês, e o que faríamos primeiro. Se o número não convencer, a conversa termina ali — sem custo e sem compromisso.</a:t>
-            </a:r>
-            <a:endParaRPr lang="en-US" sz="1300" dirty="0"/>
-          </a:p>
-        </p:txBody>
-      </p:sp>
-      <p:sp>
-        <p:nvSpPr>
-          <p:cNvPr id="5" name="Text 3"/>
-          <p:cNvSpPr/>
-          <p:nvPr/>
-        </p:nvSpPr>
-        <p:spPr>
-          <a:xfrm>
-            <a:off x="822960" y="6400800"/>
-            <a:ext cx="10543032" cy="274320"/>
-          </a:xfrm>
-          <a:prstGeom prst="rect">
-            <a:avLst/>
-          </a:prstGeom>
-          <a:noFill/>
-          <a:ln/>
-        </p:spPr>
-        <p:txBody>
-          <a:bodyPr wrap="square" rtlCol="0" anchor="ctr"/>
-          <a:lstStyle/>
-          <a:p>
-            <a:pPr algn="ctr" indent="0" marL="0">
-              <a:buNone/>
-            </a:pPr>
-            <a:r>
-              <a:rPr lang="en-US" sz="900" spc="100" kern="0" dirty="0">
-                <a:solidFill>
-                  <a:srgbClr val="6E6858"/>
+              <a:t>ABBA Consultoria de IA · contato@abbaservices.com.br</a:t>
+            </a:r>
+            <a:endParaRPr lang="en-US" sz="900" dirty="0"/>
+          </a:p>
+        </p:txBody>
+      </p:sp>
+      <p:sp>
+        <p:nvSpPr>
+          <p:cNvPr id="5" name="Shape 3"/>
+          <p:cNvSpPr/>
+          <p:nvPr/>
+        </p:nvSpPr>
+        <p:spPr>
+          <a:xfrm>
+            <a:off x="822960" y="2148840"/>
+            <a:ext cx="10543032" cy="0"/>
+          </a:xfrm>
+          <a:prstGeom prst="line">
+            <a:avLst/>
+          </a:prstGeom>
+          <a:noFill/>
+          <a:ln w="9525">
+            <a:solidFill>
+              <a:srgbClr val="E5E0D4"/>
+            </a:solidFill>
+            <a:prstDash val="solid"/>
+          </a:ln>
+        </p:spPr>
+      </p:sp>
+      <p:sp>
+        <p:nvSpPr>
+          <p:cNvPr id="6" name="Text 4"/>
+          <p:cNvSpPr/>
+          <p:nvPr/>
+        </p:nvSpPr>
+        <p:spPr>
+          <a:xfrm>
+            <a:off x="822960" y="2258568"/>
+            <a:ext cx="1463040" cy="292608"/>
+          </a:xfrm>
+          <a:prstGeom prst="rect">
+            <a:avLst/>
+          </a:prstGeom>
+          <a:noFill/>
+          <a:ln/>
+        </p:spPr>
+        <p:txBody>
+          <a:bodyPr wrap="square" rtlCol="0" anchor="ctr"/>
+          <a:lstStyle/>
+          <a:p>
+            <a:pPr algn="l" indent="0" marL="0">
+              <a:buNone/>
+            </a:pPr>
+            <a:r>
+              <a:rPr lang="en-US" sz="1100" b="1" spc="300" kern="0" dirty="0">
+                <a:solidFill>
+                  <a:srgbClr val="C2A35B"/>
                 </a:solidFill>
                 <a:latin typeface="Calibri" pitchFamily="34" charset="0"/>
                 <a:ea typeface="Calibri" pitchFamily="34" charset="-122"/>
                 <a:cs typeface="Calibri" pitchFamily="34" charset="-120"/>
               </a:rPr>
-              <a:t>ABBA Consultoria de IA · contato@abbaservices.com.br</a:t>
-            </a:r>
-            <a:endParaRPr lang="en-US" sz="900" dirty="0"/>
-          </a:p>
-        </p:txBody>
-      </p:sp>
-      <p:pic>
-        <p:nvPicPr>
-          <p:cNvPr id="6" name="Image 0" descr="/home/user/abba-ops/08-materiais/assets/fotos/mapa-de-vazamento--pagina-real.jpg">    </p:cNvPr>
-          <p:cNvPicPr>
-            <a:picLocks noChangeAspect="1"/>
-          </p:cNvPicPr>
-          <p:nvPr/>
-        </p:nvPicPr>
-        <p:blipFill>
-          <a:blip r:embed="rId1"/>
-          <a:stretch>
-            <a:fillRect/>
-          </a:stretch>
-        </p:blipFill>
-        <p:spPr>
-          <a:xfrm>
-            <a:off x="4494276" y="2834640"/>
-            <a:ext cx="3200400" cy="3520440"/>
-          </a:xfrm>
-          <a:prstGeom prst="rect">
-            <a:avLst/>
-          </a:prstGeom>
-        </p:spPr>
-      </p:pic>
+              <a:t>RAND</a:t>
+            </a:r>
+            <a:endParaRPr lang="en-US" sz="1100" dirty="0"/>
+          </a:p>
+        </p:txBody>
+      </p:sp>
+      <p:sp>
+        <p:nvSpPr>
+          <p:cNvPr id="7" name="Text 5"/>
+          <p:cNvSpPr/>
+          <p:nvPr/>
+        </p:nvSpPr>
+        <p:spPr>
+          <a:xfrm>
+            <a:off x="2468880" y="2240280"/>
+            <a:ext cx="8897112" cy="1097280"/>
+          </a:xfrm>
+          <a:prstGeom prst="rect">
+            <a:avLst/>
+          </a:prstGeom>
+          <a:noFill/>
+          <a:ln/>
+        </p:spPr>
+        <p:txBody>
+          <a:bodyPr wrap="square" rtlCol="0" anchor="ctr"/>
+          <a:lstStyle/>
+          <a:p>
+            <a:pPr algn="l" indent="0" marL="0">
+              <a:lnSpc>
+                <a:spcPts val="1900"/>
+              </a:lnSpc>
+              <a:buNone/>
+            </a:pPr>
+            <a:r>
+              <a:rPr lang="en-US" sz="1300" dirty="0">
+                <a:solidFill>
+                  <a:srgbClr val="33394A"/>
+                </a:solidFill>
+                <a:latin typeface="Calibri" pitchFamily="34" charset="0"/>
+                <a:ea typeface="Calibri" pitchFamily="34" charset="-122"/>
+                <a:cs typeface="Calibri" pitchFamily="34" charset="-120"/>
+              </a:rPr>
+              <a:t>Mais de 80% dos projetos de IA falham. O dobro dos projetos comuns de tecnologia. E a causa número um não foi a qualidade do modelo: foi começar sem ninguém combinar o que seria dar certo.</a:t>
+            </a:r>
+            <a:endParaRPr lang="en-US" sz="1300" dirty="0"/>
+          </a:p>
+        </p:txBody>
+      </p:sp>
+      <p:sp>
+        <p:nvSpPr>
+          <p:cNvPr id="8" name="Shape 6"/>
+          <p:cNvSpPr/>
+          <p:nvPr/>
+        </p:nvSpPr>
+        <p:spPr>
+          <a:xfrm>
+            <a:off x="822960" y="3474720"/>
+            <a:ext cx="10543032" cy="0"/>
+          </a:xfrm>
+          <a:prstGeom prst="line">
+            <a:avLst/>
+          </a:prstGeom>
+          <a:noFill/>
+          <a:ln w="9525">
+            <a:solidFill>
+              <a:srgbClr val="E5E0D4"/>
+            </a:solidFill>
+            <a:prstDash val="solid"/>
+          </a:ln>
+        </p:spPr>
+      </p:sp>
+      <p:sp>
+        <p:nvSpPr>
+          <p:cNvPr id="9" name="Text 7"/>
+          <p:cNvSpPr/>
+          <p:nvPr/>
+        </p:nvSpPr>
+        <p:spPr>
+          <a:xfrm>
+            <a:off x="822960" y="3584448"/>
+            <a:ext cx="1463040" cy="292608"/>
+          </a:xfrm>
+          <a:prstGeom prst="rect">
+            <a:avLst/>
+          </a:prstGeom>
+          <a:noFill/>
+          <a:ln/>
+        </p:spPr>
+        <p:txBody>
+          <a:bodyPr wrap="square" rtlCol="0" anchor="ctr"/>
+          <a:lstStyle/>
+          <a:p>
+            <a:pPr algn="l" indent="0" marL="0">
+              <a:buNone/>
+            </a:pPr>
+            <a:r>
+              <a:rPr lang="en-US" sz="1100" b="1" spc="300" kern="0" dirty="0">
+                <a:solidFill>
+                  <a:srgbClr val="C2A35B"/>
+                </a:solidFill>
+                <a:latin typeface="Calibri" pitchFamily="34" charset="0"/>
+                <a:ea typeface="Calibri" pitchFamily="34" charset="-122"/>
+                <a:cs typeface="Calibri" pitchFamily="34" charset="-120"/>
+              </a:rPr>
+              <a:t>METR</a:t>
+            </a:r>
+            <a:endParaRPr lang="en-US" sz="1100" dirty="0"/>
+          </a:p>
+        </p:txBody>
+      </p:sp>
+      <p:sp>
+        <p:nvSpPr>
+          <p:cNvPr id="10" name="Text 8"/>
+          <p:cNvSpPr/>
+          <p:nvPr/>
+        </p:nvSpPr>
+        <p:spPr>
+          <a:xfrm>
+            <a:off x="2468880" y="3566160"/>
+            <a:ext cx="8897112" cy="1097280"/>
+          </a:xfrm>
+          <a:prstGeom prst="rect">
+            <a:avLst/>
+          </a:prstGeom>
+          <a:noFill/>
+          <a:ln/>
+        </p:spPr>
+        <p:txBody>
+          <a:bodyPr wrap="square" rtlCol="0" anchor="ctr"/>
+          <a:lstStyle/>
+          <a:p>
+            <a:pPr algn="l" indent="0" marL="0">
+              <a:lnSpc>
+                <a:spcPts val="1900"/>
+              </a:lnSpc>
+              <a:buNone/>
+            </a:pPr>
+            <a:r>
+              <a:rPr lang="en-US" sz="1300" dirty="0">
+                <a:solidFill>
+                  <a:srgbClr val="33394A"/>
+                </a:solidFill>
+                <a:latin typeface="Calibri" pitchFamily="34" charset="0"/>
+                <a:ea typeface="Calibri" pitchFamily="34" charset="-122"/>
+                <a:cs typeface="Calibri" pitchFamily="34" charset="-120"/>
+              </a:rPr>
+              <a:t>Programadores experientes ficaram 19% mais lentos usando IA, e saíram convencidos de que tinham ficado 20% mais rápidos. Ninguém sabe o próprio ganho sem medir de fora.</a:t>
+            </a:r>
+            <a:endParaRPr lang="en-US" sz="1300" dirty="0"/>
+          </a:p>
+        </p:txBody>
+      </p:sp>
+      <p:sp>
+        <p:nvSpPr>
+          <p:cNvPr id="11" name="Shape 9"/>
+          <p:cNvSpPr/>
+          <p:nvPr/>
+        </p:nvSpPr>
+        <p:spPr>
+          <a:xfrm>
+            <a:off x="822960" y="4800600"/>
+            <a:ext cx="10543032" cy="0"/>
+          </a:xfrm>
+          <a:prstGeom prst="line">
+            <a:avLst/>
+          </a:prstGeom>
+          <a:noFill/>
+          <a:ln w="9525">
+            <a:solidFill>
+              <a:srgbClr val="E5E0D4"/>
+            </a:solidFill>
+            <a:prstDash val="solid"/>
+          </a:ln>
+        </p:spPr>
+      </p:sp>
+      <p:sp>
+        <p:nvSpPr>
+          <p:cNvPr id="12" name="Text 10"/>
+          <p:cNvSpPr/>
+          <p:nvPr/>
+        </p:nvSpPr>
+        <p:spPr>
+          <a:xfrm>
+            <a:off x="822960" y="4910328"/>
+            <a:ext cx="1463040" cy="292608"/>
+          </a:xfrm>
+          <a:prstGeom prst="rect">
+            <a:avLst/>
+          </a:prstGeom>
+          <a:noFill/>
+          <a:ln/>
+        </p:spPr>
+        <p:txBody>
+          <a:bodyPr wrap="square" rtlCol="0" anchor="ctr"/>
+          <a:lstStyle/>
+          <a:p>
+            <a:pPr algn="l" indent="0" marL="0">
+              <a:buNone/>
+            </a:pPr>
+            <a:r>
+              <a:rPr lang="en-US" sz="1100" b="1" spc="300" kern="0" dirty="0">
+                <a:solidFill>
+                  <a:srgbClr val="C2A35B"/>
+                </a:solidFill>
+                <a:latin typeface="Calibri" pitchFamily="34" charset="0"/>
+                <a:ea typeface="Calibri" pitchFamily="34" charset="-122"/>
+                <a:cs typeface="Calibri" pitchFamily="34" charset="-120"/>
+              </a:rPr>
+              <a:t>DORA</a:t>
+            </a:r>
+            <a:endParaRPr lang="en-US" sz="1100" dirty="0"/>
+          </a:p>
+        </p:txBody>
+      </p:sp>
+      <p:sp>
+        <p:nvSpPr>
+          <p:cNvPr id="13" name="Text 11"/>
+          <p:cNvSpPr/>
+          <p:nvPr/>
+        </p:nvSpPr>
+        <p:spPr>
+          <a:xfrm>
+            <a:off x="2468880" y="4892040"/>
+            <a:ext cx="8897112" cy="1097280"/>
+          </a:xfrm>
+          <a:prstGeom prst="rect">
+            <a:avLst/>
+          </a:prstGeom>
+          <a:noFill/>
+          <a:ln/>
+        </p:spPr>
+        <p:txBody>
+          <a:bodyPr wrap="square" rtlCol="0" anchor="ctr"/>
+          <a:lstStyle/>
+          <a:p>
+            <a:pPr algn="l" indent="0" marL="0">
+              <a:lnSpc>
+                <a:spcPts val="1900"/>
+              </a:lnSpc>
+              <a:buNone/>
+            </a:pPr>
+            <a:r>
+              <a:rPr lang="en-US" sz="1300" dirty="0">
+                <a:solidFill>
+                  <a:srgbClr val="33394A"/>
+                </a:solidFill>
+                <a:latin typeface="Calibri" pitchFamily="34" charset="0"/>
+                <a:ea typeface="Calibri" pitchFamily="34" charset="-122"/>
+                <a:cs typeface="Calibri" pitchFamily="34" charset="-120"/>
+              </a:rPr>
+              <a:t>A IA amplifica o que já existe: time com base arrumada acelera, base bagunçada piora mais rápido. Arrumar a base não é atraso. É a condição do ganho.</a:t>
+            </a:r>
+            <a:endParaRPr lang="en-US" sz="1300" dirty="0"/>
+          </a:p>
+        </p:txBody>
+      </p:sp>
     </p:spTree>
   </p:cSld>
   <p:clrMapOvr>
@@ -3801,7 +4710,7 @@
                 <a:ea typeface="Calibri" pitchFamily="34" charset="-122"/>
                 <a:cs typeface="Calibri" pitchFamily="34" charset="-120"/>
               </a:rPr>
-              <a:t>O CAMINHO</a:t>
+              <a:t>A NOSSA TESE</a:t>
             </a:r>
             <a:endParaRPr lang="en-US" sz="1100" dirty="0"/>
           </a:p>
@@ -3843,7 +4752,7 @@
                 <a:ea typeface="Cambria" pitchFamily="34" charset="-122"/>
                 <a:cs typeface="Cambria" pitchFamily="34" charset="-120"/>
               </a:rPr>
-              <a:t>Um programa, um ano, três fases — e três portas de saída.</a:t>
+              <a:t>Isto é uma mesa de três pés.</a:t>
             </a:r>
             <a:endParaRPr lang="en-US" sz="2800" dirty="0"/>
           </a:p>
@@ -3857,8 +4766,89 @@
         </p:nvSpPr>
         <p:spPr>
           <a:xfrm>
-            <a:off x="822960" y="1920240"/>
-            <a:ext cx="10543032" cy="640080"/>
+            <a:off x="822960" y="6400800"/>
+            <a:ext cx="10543032" cy="274320"/>
+          </a:xfrm>
+          <a:prstGeom prst="rect">
+            <a:avLst/>
+          </a:prstGeom>
+          <a:noFill/>
+          <a:ln/>
+        </p:spPr>
+        <p:txBody>
+          <a:bodyPr wrap="square" rtlCol="0" anchor="ctr"/>
+          <a:lstStyle/>
+          <a:p>
+            <a:pPr algn="ctr" indent="0" marL="0">
+              <a:buNone/>
+            </a:pPr>
+            <a:r>
+              <a:rPr lang="en-US" sz="900" spc="100" kern="0" dirty="0">
+                <a:solidFill>
+                  <a:srgbClr val="6E6858"/>
+                </a:solidFill>
+                <a:latin typeface="Calibri" pitchFamily="34" charset="0"/>
+                <a:ea typeface="Calibri" pitchFamily="34" charset="-122"/>
+                <a:cs typeface="Calibri" pitchFamily="34" charset="-120"/>
+              </a:rPr>
+              <a:t>ABBA Consultoria de IA · contato@abbaservices.com.br</a:t>
+            </a:r>
+            <a:endParaRPr lang="en-US" sz="900" dirty="0"/>
+          </a:p>
+        </p:txBody>
+      </p:sp>
+      <p:sp>
+        <p:nvSpPr>
+          <p:cNvPr id="5" name="Text 3"/>
+          <p:cNvSpPr/>
+          <p:nvPr/>
+        </p:nvSpPr>
+        <p:spPr>
+          <a:xfrm>
+            <a:off x="822960" y="2103120"/>
+            <a:ext cx="10543032" cy="1188720"/>
+          </a:xfrm>
+          <a:prstGeom prst="rect">
+            <a:avLst/>
+          </a:prstGeom>
+          <a:noFill/>
+          <a:ln/>
+        </p:spPr>
+        <p:txBody>
+          <a:bodyPr wrap="square" rtlCol="0" anchor="ctr"/>
+          <a:lstStyle/>
+          <a:p>
+            <a:pPr algn="l" indent="0" marL="0">
+              <a:lnSpc>
+                <a:spcPts val="2400"/>
+              </a:lnSpc>
+              <a:buNone/>
+            </a:pPr>
+            <a:r>
+              <a:rPr lang="en-US" sz="1550" dirty="0">
+                <a:solidFill>
+                  <a:srgbClr val="33394A"/>
+                </a:solidFill>
+                <a:latin typeface="Calibri" pitchFamily="34" charset="0"/>
+                <a:ea typeface="Calibri" pitchFamily="34" charset="-122"/>
+                <a:cs typeface="Calibri" pitchFamily="34" charset="-120"/>
+              </a:rPr>
+              <a:t>Tecnologia, processo e gente. Se um pé fica mais curto que os outros, o problema não é o pé: é a mesa inteira. E aí a empresa passa o resto da vida enfiando papelzinho embaixo. Papelzinho não é solução. É convivência com o defeito.</a:t>
+            </a:r>
+            <a:endParaRPr lang="en-US" sz="1550" dirty="0"/>
+          </a:p>
+        </p:txBody>
+      </p:sp>
+      <p:sp>
+        <p:nvSpPr>
+          <p:cNvPr id="6" name="Text 4"/>
+          <p:cNvSpPr/>
+          <p:nvPr/>
+        </p:nvSpPr>
+        <p:spPr>
+          <a:xfrm>
+            <a:off x="822960" y="3429000"/>
+            <a:ext cx="10543032" cy="1051560"/>
           </a:xfrm>
           <a:prstGeom prst="rect">
             <a:avLst/>
@@ -3877,7 +4867,7 @@
               <a:buNone/>
             </a:pPr>
             <a:r>
-              <a:rPr lang="en-US" sz="1300" dirty="0">
+              <a:rPr lang="en-US" sz="1350" dirty="0">
                 <a:solidFill>
                   <a:srgbClr val="6E6858"/>
                 </a:solidFill>
@@ -3885,69 +4875,30 @@
                 <a:ea typeface="Calibri" pitchFamily="34" charset="-122"/>
                 <a:cs typeface="Calibri" pitchFamily="34" charset="-120"/>
               </a:rPr>
-              <a:t>A decisão do ano é tomada uma vez, mas o risco não: cada fase termina num portão onde a decisão volta para a sua mão.</a:t>
-            </a:r>
-            <a:endParaRPr lang="en-US" sz="1300" dirty="0"/>
-          </a:p>
-        </p:txBody>
-      </p:sp>
-      <p:sp>
-        <p:nvSpPr>
-          <p:cNvPr id="5" name="Text 3"/>
-          <p:cNvSpPr/>
-          <p:nvPr/>
-        </p:nvSpPr>
-        <p:spPr>
-          <a:xfrm>
-            <a:off x="822960" y="6400800"/>
-            <a:ext cx="10543032" cy="274320"/>
-          </a:xfrm>
-          <a:prstGeom prst="rect">
-            <a:avLst/>
-          </a:prstGeom>
-          <a:noFill/>
-          <a:ln/>
-        </p:spPr>
-        <p:txBody>
-          <a:bodyPr wrap="square" rtlCol="0" anchor="ctr"/>
-          <a:lstStyle/>
-          <a:p>
-            <a:pPr algn="ctr" indent="0" marL="0">
-              <a:buNone/>
-            </a:pPr>
-            <a:r>
-              <a:rPr lang="en-US" sz="900" spc="100" kern="0" dirty="0">
-                <a:solidFill>
-                  <a:srgbClr val="6E6858"/>
-                </a:solidFill>
-                <a:latin typeface="Calibri" pitchFamily="34" charset="0"/>
-                <a:ea typeface="Calibri" pitchFamily="34" charset="-122"/>
-                <a:cs typeface="Calibri" pitchFamily="34" charset="-120"/>
-              </a:rPr>
-              <a:t>ABBA Consultoria de IA · contato@abbaservices.com.br</a:t>
-            </a:r>
-            <a:endParaRPr lang="en-US" sz="900" dirty="0"/>
-          </a:p>
-        </p:txBody>
-      </p:sp>
-      <p:sp>
-        <p:nvSpPr>
-          <p:cNvPr id="6" name="Shape 4"/>
-          <p:cNvSpPr/>
-          <p:nvPr/>
-        </p:nvSpPr>
-        <p:spPr>
-          <a:xfrm>
-            <a:off x="822960" y="2788920"/>
-            <a:ext cx="3270504" cy="0"/>
+              <a:t>O mercado vende um pé de cada vez: licença para todo mundo, software de prateleira, curso que vira aplauso e segunda-feira igual. Nenhum desses caminhos é burro. Todos foram escolhidos por gente inteligente. Eles só não seguram a mesa.</a:t>
+            </a:r>
+            <a:endParaRPr lang="en-US" sz="1350" dirty="0"/>
+          </a:p>
+        </p:txBody>
+      </p:sp>
+      <p:sp>
+        <p:nvSpPr>
+          <p:cNvPr id="7" name="Shape 5"/>
+          <p:cNvSpPr/>
+          <p:nvPr/>
+        </p:nvSpPr>
+        <p:spPr>
+          <a:xfrm>
+            <a:off x="822960" y="4663440"/>
+            <a:ext cx="10543032" cy="0"/>
           </a:xfrm>
           <a:prstGeom prst="line">
             <a:avLst/>
           </a:prstGeom>
           <a:noFill/>
-          <a:ln w="15240">
+          <a:ln w="9525">
             <a:solidFill>
-              <a:srgbClr val="C2A35B"/>
+              <a:srgbClr val="E5E0D4"/>
             </a:solidFill>
             <a:prstDash val="solid"/>
           </a:ln>
@@ -3955,14 +4906,14 @@
       </p:sp>
       <p:sp>
         <p:nvSpPr>
-          <p:cNvPr id="7" name="Text 5"/>
-          <p:cNvSpPr/>
-          <p:nvPr/>
-        </p:nvSpPr>
-        <p:spPr>
-          <a:xfrm>
-            <a:off x="822960" y="2926080"/>
-            <a:ext cx="3270504" cy="292608"/>
+          <p:cNvPr id="8" name="Text 6"/>
+          <p:cNvSpPr/>
+          <p:nvPr/>
+        </p:nvSpPr>
+        <p:spPr>
+          <a:xfrm>
+            <a:off x="822960" y="4892040"/>
+            <a:ext cx="10543032" cy="868680"/>
           </a:xfrm>
           <a:prstGeom prst="rect">
             <a:avLst/>
@@ -3975,387 +4926,23 @@
           <a:lstStyle/>
           <a:p>
             <a:pPr algn="l" indent="0" marL="0">
-              <a:buNone/>
-            </a:pPr>
-            <a:r>
-              <a:rPr lang="en-US" sz="1050" b="1" spc="300" kern="0" dirty="0">
-                <a:solidFill>
-                  <a:srgbClr val="C2A35B"/>
-                </a:solidFill>
-                <a:latin typeface="Calibri" pitchFamily="34" charset="0"/>
-                <a:ea typeface="Calibri" pitchFamily="34" charset="-122"/>
-                <a:cs typeface="Calibri" pitchFamily="34" charset="-120"/>
-              </a:rPr>
-              <a:t>FASE 1 · A PROVA</a:t>
-            </a:r>
-            <a:endParaRPr lang="en-US" sz="1050" dirty="0"/>
-          </a:p>
-        </p:txBody>
-      </p:sp>
-      <p:sp>
-        <p:nvSpPr>
-          <p:cNvPr id="8" name="Text 6"/>
-          <p:cNvSpPr/>
-          <p:nvPr/>
-        </p:nvSpPr>
-        <p:spPr>
-          <a:xfrm>
-            <a:off x="822960" y="3200400"/>
-            <a:ext cx="3270504" cy="274320"/>
-          </a:xfrm>
-          <a:prstGeom prst="rect">
-            <a:avLst/>
-          </a:prstGeom>
-          <a:noFill/>
-          <a:ln/>
-        </p:spPr>
-        <p:txBody>
-          <a:bodyPr wrap="square" rtlCol="0" anchor="ctr"/>
-          <a:lstStyle/>
-          <a:p>
-            <a:pPr indent="0" marL="0">
-              <a:buNone/>
-            </a:pPr>
-            <a:r>
-              <a:rPr lang="en-US" sz="1200" i="1" dirty="0">
-                <a:solidFill>
-                  <a:srgbClr val="6E6858"/>
+              <a:lnSpc>
+                <a:spcPts val="2200"/>
+              </a:lnSpc>
+              <a:buNone/>
+            </a:pPr>
+            <a:r>
+              <a:rPr lang="en-US" sz="1450" i="1" dirty="0">
+                <a:solidFill>
+                  <a:srgbClr val="1B2A4A"/>
                 </a:solidFill>
                 <a:latin typeface="Cambria" pitchFamily="34" charset="0"/>
                 <a:ea typeface="Cambria" pitchFamily="34" charset="-122"/>
                 <a:cs typeface="Cambria" pitchFamily="34" charset="-120"/>
               </a:rPr>
-              <a:t>seis semanas</a:t>
-            </a:r>
-            <a:endParaRPr lang="en-US" sz="1200" dirty="0"/>
-          </a:p>
-        </p:txBody>
-      </p:sp>
-      <p:sp>
-        <p:nvSpPr>
-          <p:cNvPr id="9" name="Text 7"/>
-          <p:cNvSpPr/>
-          <p:nvPr/>
-        </p:nvSpPr>
-        <p:spPr>
-          <a:xfrm>
-            <a:off x="822960" y="3520440"/>
-            <a:ext cx="3270504" cy="2011680"/>
-          </a:xfrm>
-          <a:prstGeom prst="rect">
-            <a:avLst/>
-          </a:prstGeom>
-          <a:noFill/>
-          <a:ln/>
-        </p:spPr>
-        <p:txBody>
-          <a:bodyPr wrap="square" rtlCol="0" anchor="ctr"/>
-          <a:lstStyle/>
-          <a:p>
-            <a:pPr algn="l" indent="0" marL="0">
-              <a:lnSpc>
-                <a:spcPts val="1650"/>
-              </a:lnSpc>
-              <a:buNone/>
-            </a:pPr>
-            <a:r>
-              <a:rPr lang="en-US" sz="1150" dirty="0">
-                <a:solidFill>
-                  <a:srgbClr val="33394A"/>
-                </a:solidFill>
-                <a:latin typeface="Calibri" pitchFamily="34" charset="0"/>
-                <a:ea typeface="Calibri" pitchFamily="34" charset="-122"/>
-                <a:cs typeface="Calibri" pitchFamily="34" charset="-120"/>
-              </a:rPr>
-              <a:t>Um caso construído com os seus dados, rodando e medido contra a métrica combinada por escrito na primeira semana — mais o portfólio completo de oportunidades, ranqueado.</a:t>
-            </a:r>
-            <a:endParaRPr lang="en-US" sz="1150" dirty="0"/>
-          </a:p>
-        </p:txBody>
-      </p:sp>
-      <p:sp>
-        <p:nvSpPr>
-          <p:cNvPr id="10" name="Shape 8"/>
-          <p:cNvSpPr/>
-          <p:nvPr/>
-        </p:nvSpPr>
-        <p:spPr>
-          <a:xfrm>
-            <a:off x="4459224" y="2788920"/>
-            <a:ext cx="3270504" cy="0"/>
-          </a:xfrm>
-          <a:prstGeom prst="line">
-            <a:avLst/>
-          </a:prstGeom>
-          <a:noFill/>
-          <a:ln w="15240">
-            <a:solidFill>
-              <a:srgbClr val="C2A35B"/>
-            </a:solidFill>
-            <a:prstDash val="solid"/>
-          </a:ln>
-        </p:spPr>
-      </p:sp>
-      <p:sp>
-        <p:nvSpPr>
-          <p:cNvPr id="11" name="Text 9"/>
-          <p:cNvSpPr/>
-          <p:nvPr/>
-        </p:nvSpPr>
-        <p:spPr>
-          <a:xfrm>
-            <a:off x="4459224" y="2926080"/>
-            <a:ext cx="3270504" cy="292608"/>
-          </a:xfrm>
-          <a:prstGeom prst="rect">
-            <a:avLst/>
-          </a:prstGeom>
-          <a:noFill/>
-          <a:ln/>
-        </p:spPr>
-        <p:txBody>
-          <a:bodyPr wrap="square" rtlCol="0" anchor="ctr"/>
-          <a:lstStyle/>
-          <a:p>
-            <a:pPr algn="l" indent="0" marL="0">
-              <a:buNone/>
-            </a:pPr>
-            <a:r>
-              <a:rPr lang="en-US" sz="1050" b="1" spc="300" kern="0" dirty="0">
-                <a:solidFill>
-                  <a:srgbClr val="C2A35B"/>
-                </a:solidFill>
-                <a:latin typeface="Calibri" pitchFamily="34" charset="0"/>
-                <a:ea typeface="Calibri" pitchFamily="34" charset="-122"/>
-                <a:cs typeface="Calibri" pitchFamily="34" charset="-120"/>
-              </a:rPr>
-              <a:t>FASE 2 · A CONSTRUÇÃO</a:t>
-            </a:r>
-            <a:endParaRPr lang="en-US" sz="1050" dirty="0"/>
-          </a:p>
-        </p:txBody>
-      </p:sp>
-      <p:sp>
-        <p:nvSpPr>
-          <p:cNvPr id="12" name="Text 10"/>
-          <p:cNvSpPr/>
-          <p:nvPr/>
-        </p:nvSpPr>
-        <p:spPr>
-          <a:xfrm>
-            <a:off x="4459224" y="3200400"/>
-            <a:ext cx="3270504" cy="274320"/>
-          </a:xfrm>
-          <a:prstGeom prst="rect">
-            <a:avLst/>
-          </a:prstGeom>
-          <a:noFill/>
-          <a:ln/>
-        </p:spPr>
-        <p:txBody>
-          <a:bodyPr wrap="square" rtlCol="0" anchor="ctr"/>
-          <a:lstStyle/>
-          <a:p>
-            <a:pPr indent="0" marL="0">
-              <a:buNone/>
-            </a:pPr>
-            <a:r>
-              <a:rPr lang="en-US" sz="1200" i="1" dirty="0">
-                <a:solidFill>
-                  <a:srgbClr val="6E6858"/>
-                </a:solidFill>
-                <a:latin typeface="Cambria" pitchFamily="34" charset="0"/>
-                <a:ea typeface="Cambria" pitchFamily="34" charset="-122"/>
-                <a:cs typeface="Cambria" pitchFamily="34" charset="-120"/>
-              </a:rPr>
-              <a:t>meses 2–6</a:t>
-            </a:r>
-            <a:endParaRPr lang="en-US" sz="1200" dirty="0"/>
-          </a:p>
-        </p:txBody>
-      </p:sp>
-      <p:sp>
-        <p:nvSpPr>
-          <p:cNvPr id="13" name="Text 11"/>
-          <p:cNvSpPr/>
-          <p:nvPr/>
-        </p:nvSpPr>
-        <p:spPr>
-          <a:xfrm>
-            <a:off x="4459224" y="3520440"/>
-            <a:ext cx="3270504" cy="2011680"/>
-          </a:xfrm>
-          <a:prstGeom prst="rect">
-            <a:avLst/>
-          </a:prstGeom>
-          <a:noFill/>
-          <a:ln/>
-        </p:spPr>
-        <p:txBody>
-          <a:bodyPr wrap="square" rtlCol="0" anchor="ctr"/>
-          <a:lstStyle/>
-          <a:p>
-            <a:pPr algn="l" indent="0" marL="0">
-              <a:lnSpc>
-                <a:spcPts val="1650"/>
-              </a:lnSpc>
-              <a:buNone/>
-            </a:pPr>
-            <a:r>
-              <a:rPr lang="en-US" sz="1150" dirty="0">
-                <a:solidFill>
-                  <a:srgbClr val="33394A"/>
-                </a:solidFill>
-                <a:latin typeface="Calibri" pitchFamily="34" charset="0"/>
-                <a:ea typeface="Calibri" pitchFamily="34" charset="-122"/>
-                <a:cs typeface="Calibri" pitchFamily="34" charset="-120"/>
-              </a:rPr>
-              <a:t>Os casos aprovados em produção, com integrações e pontos de aprovação humana — e a sua equipe formada em turma própria, com fluência medida em 30, 60 e 90 dias.</a:t>
-            </a:r>
-            <a:endParaRPr lang="en-US" sz="1150" dirty="0"/>
-          </a:p>
-        </p:txBody>
-      </p:sp>
-      <p:sp>
-        <p:nvSpPr>
-          <p:cNvPr id="14" name="Shape 12"/>
-          <p:cNvSpPr/>
-          <p:nvPr/>
-        </p:nvSpPr>
-        <p:spPr>
-          <a:xfrm>
-            <a:off x="8095488" y="2788920"/>
-            <a:ext cx="3270504" cy="0"/>
-          </a:xfrm>
-          <a:prstGeom prst="line">
-            <a:avLst/>
-          </a:prstGeom>
-          <a:noFill/>
-          <a:ln w="15240">
-            <a:solidFill>
-              <a:srgbClr val="C2A35B"/>
-            </a:solidFill>
-            <a:prstDash val="solid"/>
-          </a:ln>
-        </p:spPr>
-      </p:sp>
-      <p:sp>
-        <p:nvSpPr>
-          <p:cNvPr id="15" name="Text 13"/>
-          <p:cNvSpPr/>
-          <p:nvPr/>
-        </p:nvSpPr>
-        <p:spPr>
-          <a:xfrm>
-            <a:off x="8095488" y="2926080"/>
-            <a:ext cx="3270504" cy="292608"/>
-          </a:xfrm>
-          <a:prstGeom prst="rect">
-            <a:avLst/>
-          </a:prstGeom>
-          <a:noFill/>
-          <a:ln/>
-        </p:spPr>
-        <p:txBody>
-          <a:bodyPr wrap="square" rtlCol="0" anchor="ctr"/>
-          <a:lstStyle/>
-          <a:p>
-            <a:pPr algn="l" indent="0" marL="0">
-              <a:buNone/>
-            </a:pPr>
-            <a:r>
-              <a:rPr lang="en-US" sz="1050" b="1" spc="300" kern="0" dirty="0">
-                <a:solidFill>
-                  <a:srgbClr val="C2A35B"/>
-                </a:solidFill>
-                <a:latin typeface="Calibri" pitchFamily="34" charset="0"/>
-                <a:ea typeface="Calibri" pitchFamily="34" charset="-122"/>
-                <a:cs typeface="Calibri" pitchFamily="34" charset="-120"/>
-              </a:rPr>
-              <a:t>FASE 3 · A DURABILIDADE</a:t>
-            </a:r>
-            <a:endParaRPr lang="en-US" sz="1050" dirty="0"/>
-          </a:p>
-        </p:txBody>
-      </p:sp>
-      <p:sp>
-        <p:nvSpPr>
-          <p:cNvPr id="16" name="Text 14"/>
-          <p:cNvSpPr/>
-          <p:nvPr/>
-        </p:nvSpPr>
-        <p:spPr>
-          <a:xfrm>
-            <a:off x="8095488" y="3200400"/>
-            <a:ext cx="3270504" cy="274320"/>
-          </a:xfrm>
-          <a:prstGeom prst="rect">
-            <a:avLst/>
-          </a:prstGeom>
-          <a:noFill/>
-          <a:ln/>
-        </p:spPr>
-        <p:txBody>
-          <a:bodyPr wrap="square" rtlCol="0" anchor="ctr"/>
-          <a:lstStyle/>
-          <a:p>
-            <a:pPr indent="0" marL="0">
-              <a:buNone/>
-            </a:pPr>
-            <a:r>
-              <a:rPr lang="en-US" sz="1200" i="1" dirty="0">
-                <a:solidFill>
-                  <a:srgbClr val="6E6858"/>
-                </a:solidFill>
-                <a:latin typeface="Cambria" pitchFamily="34" charset="0"/>
-                <a:ea typeface="Cambria" pitchFamily="34" charset="-122"/>
-                <a:cs typeface="Cambria" pitchFamily="34" charset="-120"/>
-              </a:rPr>
-              <a:t>meses 7–12</a:t>
-            </a:r>
-            <a:endParaRPr lang="en-US" sz="1200" dirty="0"/>
-          </a:p>
-        </p:txBody>
-      </p:sp>
-      <p:sp>
-        <p:nvSpPr>
-          <p:cNvPr id="17" name="Text 15"/>
-          <p:cNvSpPr/>
-          <p:nvPr/>
-        </p:nvSpPr>
-        <p:spPr>
-          <a:xfrm>
-            <a:off x="8095488" y="3520440"/>
-            <a:ext cx="3270504" cy="2011680"/>
-          </a:xfrm>
-          <a:prstGeom prst="rect">
-            <a:avLst/>
-          </a:prstGeom>
-          <a:noFill/>
-          <a:ln/>
-        </p:spPr>
-        <p:txBody>
-          <a:bodyPr wrap="square" rtlCol="0" anchor="ctr"/>
-          <a:lstStyle/>
-          <a:p>
-            <a:pPr algn="l" indent="0" marL="0">
-              <a:lnSpc>
-                <a:spcPts val="1650"/>
-              </a:lnSpc>
-              <a:buNone/>
-            </a:pPr>
-            <a:r>
-              <a:rPr lang="en-US" sz="1150" dirty="0">
-                <a:solidFill>
-                  <a:srgbClr val="33394A"/>
-                </a:solidFill>
-                <a:latin typeface="Calibri" pitchFamily="34" charset="0"/>
-                <a:ea typeface="Calibri" pitchFamily="34" charset="-122"/>
-                <a:cs typeface="Calibri" pitchFamily="34" charset="-120"/>
-              </a:rPr>
-              <a:t>Operação acompanhada, presença semanal, relatório de projetado versus realizado — a capacidade funcionando sem consultor no meio.</a:t>
-            </a:r>
-            <a:endParaRPr lang="en-US" sz="1150" dirty="0"/>
+              <a:t>Por isso não vendemos ferramenta, nem piloto, nem curso: instalamos os três pés juntos, num caminho de um ano com porta de saída limpa em cada fase. E provamos que a mesa parou de balançar.</a:t>
+            </a:r>
+            <a:endParaRPr lang="en-US" sz="1450" dirty="0"/>
           </a:p>
         </p:txBody>
       </p:sp>
@@ -4373,7 +4960,7 @@
     <p:bg>
       <p:bgPr>
         <a:solidFill>
-          <a:srgbClr val="1B2A4A"/>
+          <a:srgbClr val="FFFFFF"/>
         </a:solidFill>
       </p:bgPr>
     </p:bg>
@@ -4399,7 +4986,7 @@
         </p:nvSpPr>
         <p:spPr>
           <a:xfrm>
-            <a:off x="822960" y="1828800"/>
+            <a:off x="822960" y="594360"/>
             <a:ext cx="5486400" cy="292608"/>
           </a:xfrm>
           <a:prstGeom prst="rect">
@@ -4416,7 +5003,7 @@
               <a:buNone/>
             </a:pPr>
             <a:r>
-              <a:rPr lang="en-US" sz="1200" b="1" spc="300" kern="0" dirty="0">
+              <a:rPr lang="en-US" sz="1100" b="1" spc="300" kern="0" dirty="0">
                 <a:solidFill>
                   <a:srgbClr val="C2A35B"/>
                 </a:solidFill>
@@ -4424,9 +5011,9 @@
                 <a:ea typeface="Calibri" pitchFamily="34" charset="-122"/>
                 <a:cs typeface="Calibri" pitchFamily="34" charset="-120"/>
               </a:rPr>
-              <a:t>O PORTÃO DA PROVA</a:t>
-            </a:r>
-            <a:endParaRPr lang="en-US" sz="1200" dirty="0"/>
+              <a:t>COMO TODA CONVERSA COMEÇA</a:t>
+            </a:r>
+            <a:endParaRPr lang="en-US" sz="1100" dirty="0"/>
           </a:p>
         </p:txBody>
       </p:sp>
@@ -4438,8 +5025,8 @@
         </p:nvSpPr>
         <p:spPr>
           <a:xfrm>
-            <a:off x="822960" y="2286000"/>
-            <a:ext cx="10543032" cy="2011680"/>
+            <a:off x="822960" y="960120"/>
+            <a:ext cx="10543032" cy="914400"/>
           </a:xfrm>
           <a:prstGeom prst="rect">
             <a:avLst/>
@@ -4458,42 +5045,61 @@
               <a:buNone/>
             </a:pPr>
             <a:r>
-              <a:rPr lang="en-US" sz="2400" b="1" dirty="0">
-                <a:solidFill>
-                  <a:srgbClr val="FFFFFF"/>
+              <a:rPr lang="en-US" sz="2800" b="1" dirty="0">
+                <a:solidFill>
+                  <a:srgbClr val="1B2A4A"/>
                 </a:solidFill>
                 <a:latin typeface="Cambria" pitchFamily="34" charset="0"/>
                 <a:ea typeface="Cambria" pitchFamily="34" charset="-122"/>
                 <a:cs typeface="Cambria" pitchFamily="34" charset="-120"/>
               </a:rPr>
-              <a:t>Se em seis semanas o número combinado não apareceu — ou se você simplesmente mudar de ideia — você sai levando tudo o que foi produzido. Sem multa. Sem constrangimento.</a:t>
-            </a:r>
-            <a:endParaRPr lang="en-US" sz="2400" dirty="0"/>
-          </a:p>
-        </p:txBody>
-      </p:sp>
-      <p:sp>
-        <p:nvSpPr>
-          <p:cNvPr id="4" name="Shape 2"/>
-          <p:cNvSpPr/>
-          <p:nvPr/>
-        </p:nvSpPr>
-        <p:spPr>
-          <a:xfrm>
-            <a:off x="822960" y="4480560"/>
-            <a:ext cx="2011680" cy="0"/>
-          </a:xfrm>
-          <a:prstGeom prst="line">
-            <a:avLst/>
-          </a:prstGeom>
-          <a:noFill/>
-          <a:ln w="19050">
-            <a:solidFill>
-              <a:srgbClr val="C2A35B"/>
-            </a:solidFill>
-            <a:prstDash val="solid"/>
-          </a:ln>
-        </p:spPr>
+              <a:t>O Mapa de Vazamento: grátis, feito de fora, com um número dentro.</a:t>
+            </a:r>
+            <a:endParaRPr lang="en-US" sz="2800" dirty="0"/>
+          </a:p>
+        </p:txBody>
+      </p:sp>
+      <p:sp>
+        <p:nvSpPr>
+          <p:cNvPr id="4" name="Text 2"/>
+          <p:cNvSpPr/>
+          <p:nvPr/>
+        </p:nvSpPr>
+        <p:spPr>
+          <a:xfrm>
+            <a:off x="822960" y="1920240"/>
+            <a:ext cx="10543032" cy="640080"/>
+          </a:xfrm>
+          <a:prstGeom prst="rect">
+            <a:avLst/>
+          </a:prstGeom>
+          <a:noFill/>
+          <a:ln/>
+        </p:spPr>
+        <p:txBody>
+          <a:bodyPr wrap="square" rtlCol="0" anchor="ctr"/>
+          <a:lstStyle/>
+          <a:p>
+            <a:pPr algn="l" indent="0" marL="0">
+              <a:lnSpc>
+                <a:spcPts val="2000"/>
+              </a:lnSpc>
+              <a:buNone/>
+            </a:pPr>
+            <a:r>
+              <a:rPr lang="en-US" sz="1300" dirty="0">
+                <a:solidFill>
+                  <a:srgbClr val="6E6858"/>
+                </a:solidFill>
+                <a:latin typeface="Calibri" pitchFamily="34" charset="0"/>
+                <a:ea typeface="Calibri" pitchFamily="34" charset="-122"/>
+                <a:cs typeface="Calibri" pitchFamily="34" charset="-120"/>
+              </a:rPr>
+              <a:t>Antes de qualquer contrato, entregamos um mapa do que estimamos estar vazando na sua operação: onde, quanto por mês, e o que faríamos primeiro. Se o número não convencer, a conversa termina ali. Sem custo e sem compromisso.</a:t>
+            </a:r>
+            <a:endParaRPr lang="en-US" sz="1300" dirty="0"/>
+          </a:p>
+        </p:txBody>
       </p:sp>
       <p:sp>
         <p:nvSpPr>
@@ -4503,40 +5109,61 @@
         </p:nvSpPr>
         <p:spPr>
           <a:xfrm>
-            <a:off x="822960" y="4709160"/>
-            <a:ext cx="10543032" cy="640080"/>
-          </a:xfrm>
-          <a:prstGeom prst="rect">
-            <a:avLst/>
-          </a:prstGeom>
-          <a:noFill/>
-          <a:ln/>
-        </p:spPr>
-        <p:txBody>
-          <a:bodyPr wrap="square" rtlCol="0" anchor="ctr"/>
-          <a:lstStyle/>
-          <a:p>
-            <a:pPr indent="0" marL="0">
-              <a:lnSpc>
-                <a:spcPts val="2200"/>
-              </a:lnSpc>
-              <a:buNone/>
-            </a:pPr>
-            <a:r>
-              <a:rPr lang="en-US" sz="1500" i="1" dirty="0">
-                <a:solidFill>
-                  <a:srgbClr val="D8DCE8"/>
-                </a:solidFill>
-                <a:latin typeface="Cambria" pitchFamily="34" charset="0"/>
-                <a:ea typeface="Cambria" pitchFamily="34" charset="-122"/>
-                <a:cs typeface="Cambria" pitchFamily="34" charset="-120"/>
-              </a:rPr>
-              <a:t>O portão retém execução, nunca informação: o portfólio ranqueado da fase 1 é seu, fique ou não.</a:t>
-            </a:r>
-            <a:endParaRPr lang="en-US" sz="1500" dirty="0"/>
-          </a:p>
-        </p:txBody>
-      </p:sp>
+            <a:off x="822960" y="6400800"/>
+            <a:ext cx="10543032" cy="274320"/>
+          </a:xfrm>
+          <a:prstGeom prst="rect">
+            <a:avLst/>
+          </a:prstGeom>
+          <a:noFill/>
+          <a:ln/>
+        </p:spPr>
+        <p:txBody>
+          <a:bodyPr wrap="square" rtlCol="0" anchor="ctr"/>
+          <a:lstStyle/>
+          <a:p>
+            <a:pPr algn="ctr" indent="0" marL="0">
+              <a:buNone/>
+            </a:pPr>
+            <a:r>
+              <a:rPr lang="en-US" sz="900" spc="100" kern="0" dirty="0">
+                <a:solidFill>
+                  <a:srgbClr val="6E6858"/>
+                </a:solidFill>
+                <a:latin typeface="Calibri" pitchFamily="34" charset="0"/>
+                <a:ea typeface="Calibri" pitchFamily="34" charset="-122"/>
+                <a:cs typeface="Calibri" pitchFamily="34" charset="-120"/>
+              </a:rPr>
+              <a:t>ABBA Consultoria de IA · contato@abbaservices.com.br</a:t>
+            </a:r>
+            <a:endParaRPr lang="en-US" sz="900" dirty="0"/>
+          </a:p>
+        </p:txBody>
+      </p:sp>
+      <p:pic>
+        <p:nvPicPr>
+          <p:cNvPr id="6" name="Image 0" descr="/home/user/abba-ops/08-materiais/assets/fotos/mapa-de-vazamento--pagina-real.jpg">    </p:cNvPr>
+          <p:cNvPicPr>
+            <a:picLocks noChangeAspect="1"/>
+          </p:cNvPicPr>
+          <p:nvPr/>
+        </p:nvPicPr>
+        <p:blipFill>
+          <a:blip r:embed="rId1"/>
+          <a:stretch>
+            <a:fillRect/>
+          </a:stretch>
+        </p:blipFill>
+        <p:spPr>
+          <a:xfrm>
+            <a:off x="4494276" y="2834640"/>
+            <a:ext cx="3200400" cy="3520440"/>
+          </a:xfrm>
+          <a:prstGeom prst="rect">
+            <a:avLst/>
+          </a:prstGeom>
+        </p:spPr>
+      </p:pic>
     </p:spTree>
   </p:cSld>
   <p:clrMapOvr>
@@ -4602,7 +5229,7 @@
                 <a:ea typeface="Calibri" pitchFamily="34" charset="-122"/>
                 <a:cs typeface="Calibri" pitchFamily="34" charset="-120"/>
               </a:rPr>
-              <a:t>DENTRO DA CONSTRUÇÃO</a:t>
+              <a:t>O CAMINHO</a:t>
             </a:r>
             <a:endParaRPr lang="en-US" sz="1100" dirty="0"/>
           </a:p>
@@ -4644,7 +5271,7 @@
                 <a:ea typeface="Cambria" pitchFamily="34" charset="-122"/>
                 <a:cs typeface="Cambria" pitchFamily="34" charset="-120"/>
               </a:rPr>
-              <a:t>Engenharia de verdade, não demo de feira.</a:t>
+              <a:t>Um programa, um ano, três fases. E três portas de saída.</a:t>
             </a:r>
             <a:endParaRPr lang="en-US" sz="2800" dirty="0"/>
           </a:p>
@@ -4686,7 +5313,7 @@
                 <a:ea typeface="Calibri" pitchFamily="34" charset="-122"/>
                 <a:cs typeface="Calibri" pitchFamily="34" charset="-120"/>
               </a:rPr>
-              <a:t>Arquitetura, integrações com os seus sistemas, agentes de IA com pontos de aprovação humana desenhados — e cada entrega com dono, prazo e critério de aceite.</a:t>
+              <a:t>Ninguém espera o terreno ficar perfeito para começar a obra: escolhemos juntos a primeira parede, e é ela que paga a fundação do resto.</a:t>
             </a:r>
             <a:endParaRPr lang="en-US" sz="1300" dirty="0"/>
           </a:p>
@@ -4731,64 +5358,39 @@
           </a:p>
         </p:txBody>
       </p:sp>
-      <p:pic>
-        <p:nvPicPr>
-          <p:cNvPr id="6" name="Image 0" descr="/home/user/abba-ops/08-materiais/assets/fotos/construcao--relatorio-deployment.jpg">    </p:cNvPr>
-          <p:cNvPicPr>
-            <a:picLocks noChangeAspect="1"/>
-          </p:cNvPicPr>
-          <p:nvPr/>
-        </p:nvPicPr>
-        <p:blipFill>
-          <a:blip r:embed="rId1"/>
-          <a:stretch>
-            <a:fillRect/>
-          </a:stretch>
-        </p:blipFill>
-        <p:spPr>
-          <a:xfrm>
-            <a:off x="1188720" y="2834640"/>
-            <a:ext cx="2423160" cy="3429000"/>
-          </a:xfrm>
-          <a:prstGeom prst="rect">
-            <a:avLst/>
-          </a:prstGeom>
-        </p:spPr>
-      </p:pic>
-      <p:pic>
-        <p:nvPicPr>
-          <p:cNvPr id="7" name="Image 1" descr="/home/user/abba-ops/08-materiais/assets/fotos/portal--painel-real.jpg">    </p:cNvPr>
-          <p:cNvPicPr>
-            <a:picLocks noChangeAspect="1"/>
-          </p:cNvPicPr>
-          <p:nvPr/>
-        </p:nvPicPr>
-        <p:blipFill>
-          <a:blip r:embed="rId2"/>
-          <a:stretch>
-            <a:fillRect/>
-          </a:stretch>
-        </p:blipFill>
-        <p:spPr>
-          <a:xfrm>
-            <a:off x="4206240" y="3063240"/>
-            <a:ext cx="5166360" cy="2916936"/>
-          </a:xfrm>
-          <a:prstGeom prst="rect">
-            <a:avLst/>
-          </a:prstGeom>
-        </p:spPr>
-      </p:pic>
-      <p:sp>
-        <p:nvSpPr>
-          <p:cNvPr id="8" name="Text 4"/>
-          <p:cNvSpPr/>
-          <p:nvPr/>
-        </p:nvSpPr>
-        <p:spPr>
-          <a:xfrm>
-            <a:off x="4206240" y="6016752"/>
-            <a:ext cx="5166360" cy="274320"/>
+      <p:sp>
+        <p:nvSpPr>
+          <p:cNvPr id="6" name="Shape 4"/>
+          <p:cNvSpPr/>
+          <p:nvPr/>
+        </p:nvSpPr>
+        <p:spPr>
+          <a:xfrm>
+            <a:off x="822960" y="2788920"/>
+            <a:ext cx="3270504" cy="0"/>
+          </a:xfrm>
+          <a:prstGeom prst="line">
+            <a:avLst/>
+          </a:prstGeom>
+          <a:noFill/>
+          <a:ln w="15240">
+            <a:solidFill>
+              <a:srgbClr val="C2A35B"/>
+            </a:solidFill>
+            <a:prstDash val="solid"/>
+          </a:ln>
+        </p:spPr>
+      </p:sp>
+      <p:sp>
+        <p:nvSpPr>
+          <p:cNvPr id="7" name="Text 5"/>
+          <p:cNvSpPr/>
+          <p:nvPr/>
+        </p:nvSpPr>
+        <p:spPr>
+          <a:xfrm>
+            <a:off x="822960" y="2926080"/>
+            <a:ext cx="3270504" cy="292608"/>
           </a:xfrm>
           <a:prstGeom prst="rect">
             <a:avLst/>
@@ -4801,23 +5403,387 @@
           <a:lstStyle/>
           <a:p>
             <a:pPr algn="l" indent="0" marL="0">
-              <a:lnSpc>
-                <a:spcPts val="2000"/>
-              </a:lnSpc>
-              <a:buNone/>
-            </a:pPr>
-            <a:r>
-              <a:rPr lang="en-US" sz="1000" i="1" dirty="0">
-                <a:solidFill>
-                  <a:srgbClr val="6E6858"/>
+              <a:buNone/>
+            </a:pPr>
+            <a:r>
+              <a:rPr lang="en-US" sz="1050" b="1" spc="300" kern="0" dirty="0">
+                <a:solidFill>
+                  <a:srgbClr val="C2A35B"/>
                 </a:solidFill>
                 <a:latin typeface="Calibri" pitchFamily="34" charset="0"/>
                 <a:ea typeface="Calibri" pitchFamily="34" charset="-122"/>
                 <a:cs typeface="Calibri" pitchFamily="34" charset="-120"/>
               </a:rPr>
-              <a:t>Relatório de implantação real (empresa preservada) e o portal da turma.</a:t>
-            </a:r>
-            <a:endParaRPr lang="en-US" sz="1000" dirty="0"/>
+              <a:t>FASE 1 · A PROVA</a:t>
+            </a:r>
+            <a:endParaRPr lang="en-US" sz="1050" dirty="0"/>
+          </a:p>
+        </p:txBody>
+      </p:sp>
+      <p:sp>
+        <p:nvSpPr>
+          <p:cNvPr id="8" name="Text 6"/>
+          <p:cNvSpPr/>
+          <p:nvPr/>
+        </p:nvSpPr>
+        <p:spPr>
+          <a:xfrm>
+            <a:off x="822960" y="3200400"/>
+            <a:ext cx="3270504" cy="274320"/>
+          </a:xfrm>
+          <a:prstGeom prst="rect">
+            <a:avLst/>
+          </a:prstGeom>
+          <a:noFill/>
+          <a:ln/>
+        </p:spPr>
+        <p:txBody>
+          <a:bodyPr wrap="square" rtlCol="0" anchor="ctr"/>
+          <a:lstStyle/>
+          <a:p>
+            <a:pPr indent="0" marL="0">
+              <a:buNone/>
+            </a:pPr>
+            <a:r>
+              <a:rPr lang="en-US" sz="1200" i="1" dirty="0">
+                <a:solidFill>
+                  <a:srgbClr val="6E6858"/>
+                </a:solidFill>
+                <a:latin typeface="Cambria" pitchFamily="34" charset="0"/>
+                <a:ea typeface="Cambria" pitchFamily="34" charset="-122"/>
+                <a:cs typeface="Cambria" pitchFamily="34" charset="-120"/>
+              </a:rPr>
+              <a:t>seis semanas</a:t>
+            </a:r>
+            <a:endParaRPr lang="en-US" sz="1200" dirty="0"/>
+          </a:p>
+        </p:txBody>
+      </p:sp>
+      <p:sp>
+        <p:nvSpPr>
+          <p:cNvPr id="9" name="Text 7"/>
+          <p:cNvSpPr/>
+          <p:nvPr/>
+        </p:nvSpPr>
+        <p:spPr>
+          <a:xfrm>
+            <a:off x="822960" y="3520440"/>
+            <a:ext cx="3270504" cy="2377440"/>
+          </a:xfrm>
+          <a:prstGeom prst="rect">
+            <a:avLst/>
+          </a:prstGeom>
+          <a:noFill/>
+          <a:ln/>
+        </p:spPr>
+        <p:txBody>
+          <a:bodyPr wrap="square" rtlCol="0" anchor="ctr"/>
+          <a:lstStyle/>
+          <a:p>
+            <a:pPr algn="l" indent="0" marL="0">
+              <a:lnSpc>
+                <a:spcPts val="1650"/>
+              </a:lnSpc>
+              <a:buNone/>
+            </a:pPr>
+            <a:r>
+              <a:rPr lang="en-US" sz="1150" dirty="0">
+                <a:solidFill>
+                  <a:srgbClr val="33394A"/>
+                </a:solidFill>
+                <a:latin typeface="Calibri" pitchFamily="34" charset="0"/>
+                <a:ea typeface="Calibri" pitchFamily="34" charset="-122"/>
+                <a:cs typeface="Calibri" pitchFamily="34" charset="-120"/>
+              </a:rPr>
+              <a:t>Um caso construído com os seus dados, rodando e medido contra a métrica combinada por escrito na primeira semana. Dentro dela: a avaliação profunda, o protótipo em uso real e o retrato completo de oportunidades, ranqueado.</a:t>
+            </a:r>
+            <a:endParaRPr lang="en-US" sz="1150" dirty="0"/>
+          </a:p>
+        </p:txBody>
+      </p:sp>
+      <p:sp>
+        <p:nvSpPr>
+          <p:cNvPr id="10" name="Shape 8"/>
+          <p:cNvSpPr/>
+          <p:nvPr/>
+        </p:nvSpPr>
+        <p:spPr>
+          <a:xfrm>
+            <a:off x="4459224" y="2788920"/>
+            <a:ext cx="3270504" cy="0"/>
+          </a:xfrm>
+          <a:prstGeom prst="line">
+            <a:avLst/>
+          </a:prstGeom>
+          <a:noFill/>
+          <a:ln w="15240">
+            <a:solidFill>
+              <a:srgbClr val="C2A35B"/>
+            </a:solidFill>
+            <a:prstDash val="solid"/>
+          </a:ln>
+        </p:spPr>
+      </p:sp>
+      <p:sp>
+        <p:nvSpPr>
+          <p:cNvPr id="11" name="Text 9"/>
+          <p:cNvSpPr/>
+          <p:nvPr/>
+        </p:nvSpPr>
+        <p:spPr>
+          <a:xfrm>
+            <a:off x="4459224" y="2926080"/>
+            <a:ext cx="3270504" cy="292608"/>
+          </a:xfrm>
+          <a:prstGeom prst="rect">
+            <a:avLst/>
+          </a:prstGeom>
+          <a:noFill/>
+          <a:ln/>
+        </p:spPr>
+        <p:txBody>
+          <a:bodyPr wrap="square" rtlCol="0" anchor="ctr"/>
+          <a:lstStyle/>
+          <a:p>
+            <a:pPr algn="l" indent="0" marL="0">
+              <a:buNone/>
+            </a:pPr>
+            <a:r>
+              <a:rPr lang="en-US" sz="1050" b="1" spc="300" kern="0" dirty="0">
+                <a:solidFill>
+                  <a:srgbClr val="C2A35B"/>
+                </a:solidFill>
+                <a:latin typeface="Calibri" pitchFamily="34" charset="0"/>
+                <a:ea typeface="Calibri" pitchFamily="34" charset="-122"/>
+                <a:cs typeface="Calibri" pitchFamily="34" charset="-120"/>
+              </a:rPr>
+              <a:t>FASE 2 · A CONSTRUÇÃO</a:t>
+            </a:r>
+            <a:endParaRPr lang="en-US" sz="1050" dirty="0"/>
+          </a:p>
+        </p:txBody>
+      </p:sp>
+      <p:sp>
+        <p:nvSpPr>
+          <p:cNvPr id="12" name="Text 10"/>
+          <p:cNvSpPr/>
+          <p:nvPr/>
+        </p:nvSpPr>
+        <p:spPr>
+          <a:xfrm>
+            <a:off x="4459224" y="3200400"/>
+            <a:ext cx="3270504" cy="274320"/>
+          </a:xfrm>
+          <a:prstGeom prst="rect">
+            <a:avLst/>
+          </a:prstGeom>
+          <a:noFill/>
+          <a:ln/>
+        </p:spPr>
+        <p:txBody>
+          <a:bodyPr wrap="square" rtlCol="0" anchor="ctr"/>
+          <a:lstStyle/>
+          <a:p>
+            <a:pPr indent="0" marL="0">
+              <a:buNone/>
+            </a:pPr>
+            <a:r>
+              <a:rPr lang="en-US" sz="1200" i="1" dirty="0">
+                <a:solidFill>
+                  <a:srgbClr val="6E6858"/>
+                </a:solidFill>
+                <a:latin typeface="Cambria" pitchFamily="34" charset="0"/>
+                <a:ea typeface="Cambria" pitchFamily="34" charset="-122"/>
+                <a:cs typeface="Cambria" pitchFamily="34" charset="-120"/>
+              </a:rPr>
+              <a:t>meses 2 a 6</a:t>
+            </a:r>
+            <a:endParaRPr lang="en-US" sz="1200" dirty="0"/>
+          </a:p>
+        </p:txBody>
+      </p:sp>
+      <p:sp>
+        <p:nvSpPr>
+          <p:cNvPr id="13" name="Text 11"/>
+          <p:cNvSpPr/>
+          <p:nvPr/>
+        </p:nvSpPr>
+        <p:spPr>
+          <a:xfrm>
+            <a:off x="4459224" y="3520440"/>
+            <a:ext cx="3270504" cy="2377440"/>
+          </a:xfrm>
+          <a:prstGeom prst="rect">
+            <a:avLst/>
+          </a:prstGeom>
+          <a:noFill/>
+          <a:ln/>
+        </p:spPr>
+        <p:txBody>
+          <a:bodyPr wrap="square" rtlCol="0" anchor="ctr"/>
+          <a:lstStyle/>
+          <a:p>
+            <a:pPr algn="l" indent="0" marL="0">
+              <a:lnSpc>
+                <a:spcPts val="1650"/>
+              </a:lnSpc>
+              <a:buNone/>
+            </a:pPr>
+            <a:r>
+              <a:rPr lang="en-US" sz="1150" dirty="0">
+                <a:solidFill>
+                  <a:srgbClr val="33394A"/>
+                </a:solidFill>
+                <a:latin typeface="Calibri" pitchFamily="34" charset="0"/>
+                <a:ea typeface="Calibri" pitchFamily="34" charset="-122"/>
+                <a:cs typeface="Calibri" pitchFamily="34" charset="-120"/>
+              </a:rPr>
+              <a:t>Os casos aprovados em produção. Dentro dela: arquitetura, integrações e agentes com aprovação humana nos pontos certos, e a turma da sua equipe no nosso portal, com fluência medida em 30, 60 e 90 dias.</a:t>
+            </a:r>
+            <a:endParaRPr lang="en-US" sz="1150" dirty="0"/>
+          </a:p>
+        </p:txBody>
+      </p:sp>
+      <p:sp>
+        <p:nvSpPr>
+          <p:cNvPr id="14" name="Shape 12"/>
+          <p:cNvSpPr/>
+          <p:nvPr/>
+        </p:nvSpPr>
+        <p:spPr>
+          <a:xfrm>
+            <a:off x="8095488" y="2788920"/>
+            <a:ext cx="3270504" cy="0"/>
+          </a:xfrm>
+          <a:prstGeom prst="line">
+            <a:avLst/>
+          </a:prstGeom>
+          <a:noFill/>
+          <a:ln w="15240">
+            <a:solidFill>
+              <a:srgbClr val="C2A35B"/>
+            </a:solidFill>
+            <a:prstDash val="solid"/>
+          </a:ln>
+        </p:spPr>
+      </p:sp>
+      <p:sp>
+        <p:nvSpPr>
+          <p:cNvPr id="15" name="Text 13"/>
+          <p:cNvSpPr/>
+          <p:nvPr/>
+        </p:nvSpPr>
+        <p:spPr>
+          <a:xfrm>
+            <a:off x="8095488" y="2926080"/>
+            <a:ext cx="3270504" cy="292608"/>
+          </a:xfrm>
+          <a:prstGeom prst="rect">
+            <a:avLst/>
+          </a:prstGeom>
+          <a:noFill/>
+          <a:ln/>
+        </p:spPr>
+        <p:txBody>
+          <a:bodyPr wrap="square" rtlCol="0" anchor="ctr"/>
+          <a:lstStyle/>
+          <a:p>
+            <a:pPr algn="l" indent="0" marL="0">
+              <a:buNone/>
+            </a:pPr>
+            <a:r>
+              <a:rPr lang="en-US" sz="1050" b="1" spc="300" kern="0" dirty="0">
+                <a:solidFill>
+                  <a:srgbClr val="C2A35B"/>
+                </a:solidFill>
+                <a:latin typeface="Calibri" pitchFamily="34" charset="0"/>
+                <a:ea typeface="Calibri" pitchFamily="34" charset="-122"/>
+                <a:cs typeface="Calibri" pitchFamily="34" charset="-120"/>
+              </a:rPr>
+              <a:t>FASE 3 · A DURABILIDADE</a:t>
+            </a:r>
+            <a:endParaRPr lang="en-US" sz="1050" dirty="0"/>
+          </a:p>
+        </p:txBody>
+      </p:sp>
+      <p:sp>
+        <p:nvSpPr>
+          <p:cNvPr id="16" name="Text 14"/>
+          <p:cNvSpPr/>
+          <p:nvPr/>
+        </p:nvSpPr>
+        <p:spPr>
+          <a:xfrm>
+            <a:off x="8095488" y="3200400"/>
+            <a:ext cx="3270504" cy="274320"/>
+          </a:xfrm>
+          <a:prstGeom prst="rect">
+            <a:avLst/>
+          </a:prstGeom>
+          <a:noFill/>
+          <a:ln/>
+        </p:spPr>
+        <p:txBody>
+          <a:bodyPr wrap="square" rtlCol="0" anchor="ctr"/>
+          <a:lstStyle/>
+          <a:p>
+            <a:pPr indent="0" marL="0">
+              <a:buNone/>
+            </a:pPr>
+            <a:r>
+              <a:rPr lang="en-US" sz="1200" i="1" dirty="0">
+                <a:solidFill>
+                  <a:srgbClr val="6E6858"/>
+                </a:solidFill>
+                <a:latin typeface="Cambria" pitchFamily="34" charset="0"/>
+                <a:ea typeface="Cambria" pitchFamily="34" charset="-122"/>
+                <a:cs typeface="Cambria" pitchFamily="34" charset="-120"/>
+              </a:rPr>
+              <a:t>meses 7 a 12</a:t>
+            </a:r>
+            <a:endParaRPr lang="en-US" sz="1200" dirty="0"/>
+          </a:p>
+        </p:txBody>
+      </p:sp>
+      <p:sp>
+        <p:nvSpPr>
+          <p:cNvPr id="17" name="Text 15"/>
+          <p:cNvSpPr/>
+          <p:nvPr/>
+        </p:nvSpPr>
+        <p:spPr>
+          <a:xfrm>
+            <a:off x="8095488" y="3520440"/>
+            <a:ext cx="3270504" cy="2377440"/>
+          </a:xfrm>
+          <a:prstGeom prst="rect">
+            <a:avLst/>
+          </a:prstGeom>
+          <a:noFill/>
+          <a:ln/>
+        </p:spPr>
+        <p:txBody>
+          <a:bodyPr wrap="square" rtlCol="0" anchor="ctr"/>
+          <a:lstStyle/>
+          <a:p>
+            <a:pPr algn="l" indent="0" marL="0">
+              <a:lnSpc>
+                <a:spcPts val="1650"/>
+              </a:lnSpc>
+              <a:buNone/>
+            </a:pPr>
+            <a:r>
+              <a:rPr lang="en-US" sz="1150" dirty="0">
+                <a:solidFill>
+                  <a:srgbClr val="33394A"/>
+                </a:solidFill>
+                <a:latin typeface="Calibri" pitchFamily="34" charset="0"/>
+                <a:ea typeface="Calibri" pitchFamily="34" charset="-122"/>
+                <a:cs typeface="Calibri" pitchFamily="34" charset="-120"/>
+              </a:rPr>
+              <a:t>A capacidade rodando sem consultor no meio. Dentro dela: operação sob SLA com presença semanal, relatório de projetado versus realizado e o ritual com a diretoria.</a:t>
+            </a:r>
+            <a:endParaRPr lang="en-US" sz="1150" dirty="0"/>
           </a:p>
         </p:txBody>
       </p:sp>
@@ -4835,7 +5801,7 @@
     <p:bg>
       <p:bgPr>
         <a:solidFill>
-          <a:srgbClr val="FFFFFF"/>
+          <a:srgbClr val="1B2A4A"/>
         </a:solidFill>
       </p:bgPr>
     </p:bg>
@@ -4861,7 +5827,7 @@
         </p:nvSpPr>
         <p:spPr>
           <a:xfrm>
-            <a:off x="822960" y="594360"/>
+            <a:off x="822960" y="1828800"/>
             <a:ext cx="5486400" cy="292608"/>
           </a:xfrm>
           <a:prstGeom prst="rect">
@@ -4878,7 +5844,7 @@
               <a:buNone/>
             </a:pPr>
             <a:r>
-              <a:rPr lang="en-US" sz="1100" b="1" spc="300" kern="0" dirty="0">
+              <a:rPr lang="en-US" sz="1200" b="1" spc="300" kern="0" dirty="0">
                 <a:solidFill>
                   <a:srgbClr val="C2A35B"/>
                 </a:solidFill>
@@ -4886,9 +5852,9 @@
                 <a:ea typeface="Calibri" pitchFamily="34" charset="-122"/>
                 <a:cs typeface="Calibri" pitchFamily="34" charset="-120"/>
               </a:rPr>
-              <a:t>DEPOIS DO PRIMEIRO ANO</a:t>
-            </a:r>
-            <a:endParaRPr lang="en-US" sz="1100" dirty="0"/>
+              <a:t>O PORTÃO DA PROVA</a:t>
+            </a:r>
+            <a:endParaRPr lang="en-US" sz="1200" dirty="0"/>
           </a:p>
         </p:txBody>
       </p:sp>
@@ -4900,8 +5866,8 @@
         </p:nvSpPr>
         <p:spPr>
           <a:xfrm>
-            <a:off x="822960" y="960120"/>
-            <a:ext cx="10543032" cy="914400"/>
+            <a:off x="822960" y="2286000"/>
+            <a:ext cx="10543032" cy="2011680"/>
           </a:xfrm>
           <a:prstGeom prst="rect">
             <a:avLst/>
@@ -4920,119 +5886,38 @@
               <a:buNone/>
             </a:pPr>
             <a:r>
-              <a:rPr lang="en-US" sz="2800" b="1" dirty="0">
-                <a:solidFill>
-                  <a:srgbClr val="1B2A4A"/>
+              <a:rPr lang="en-US" sz="2400" b="1" dirty="0">
+                <a:solidFill>
+                  <a:srgbClr val="FFFFFF"/>
                 </a:solidFill>
                 <a:latin typeface="Cambria" pitchFamily="34" charset="0"/>
                 <a:ea typeface="Cambria" pitchFamily="34" charset="-122"/>
                 <a:cs typeface="Cambria" pitchFamily="34" charset="-120"/>
               </a:rPr>
-              <a:t>A relação não termina: ela passa a ser medida todo ano.</a:t>
-            </a:r>
-            <a:endParaRPr lang="en-US" sz="2800" dirty="0"/>
-          </a:p>
-        </p:txBody>
-      </p:sp>
-      <p:sp>
-        <p:nvSpPr>
-          <p:cNvPr id="4" name="Text 2"/>
-          <p:cNvSpPr/>
-          <p:nvPr/>
-        </p:nvSpPr>
-        <p:spPr>
-          <a:xfrm>
-            <a:off x="822960" y="1920240"/>
-            <a:ext cx="10543032" cy="640080"/>
-          </a:xfrm>
-          <a:prstGeom prst="rect">
-            <a:avLst/>
-          </a:prstGeom>
-          <a:noFill/>
-          <a:ln/>
-        </p:spPr>
-        <p:txBody>
-          <a:bodyPr wrap="square" rtlCol="0" anchor="ctr"/>
-          <a:lstStyle/>
-          <a:p>
-            <a:pPr algn="l" indent="0" marL="0">
-              <a:lnSpc>
-                <a:spcPts val="2000"/>
-              </a:lnSpc>
-              <a:buNone/>
-            </a:pPr>
-            <a:r>
-              <a:rPr lang="en-US" sz="1300" dirty="0">
-                <a:solidFill>
-                  <a:srgbClr val="6E6858"/>
-                </a:solidFill>
-                <a:latin typeface="Calibri" pitchFamily="34" charset="0"/>
-                <a:ea typeface="Calibri" pitchFamily="34" charset="-122"/>
-                <a:cs typeface="Calibri" pitchFamily="34" charset="-120"/>
-              </a:rPr>
-              <a:t>Do segundo ano em diante, a empresa opera sozinha e nós ficamos com o que não dá para fazer de dentro:</a:t>
-            </a:r>
-            <a:endParaRPr lang="en-US" sz="1300" dirty="0"/>
-          </a:p>
-        </p:txBody>
-      </p:sp>
-      <p:sp>
-        <p:nvSpPr>
-          <p:cNvPr id="5" name="Text 3"/>
-          <p:cNvSpPr/>
-          <p:nvPr/>
-        </p:nvSpPr>
-        <p:spPr>
-          <a:xfrm>
-            <a:off x="822960" y="6400800"/>
-            <a:ext cx="10543032" cy="274320"/>
-          </a:xfrm>
-          <a:prstGeom prst="rect">
-            <a:avLst/>
-          </a:prstGeom>
-          <a:noFill/>
-          <a:ln/>
-        </p:spPr>
-        <p:txBody>
-          <a:bodyPr wrap="square" rtlCol="0" anchor="ctr"/>
-          <a:lstStyle/>
-          <a:p>
-            <a:pPr algn="ctr" indent="0" marL="0">
-              <a:buNone/>
-            </a:pPr>
-            <a:r>
-              <a:rPr lang="en-US" sz="900" spc="100" kern="0" dirty="0">
-                <a:solidFill>
-                  <a:srgbClr val="6E6858"/>
-                </a:solidFill>
-                <a:latin typeface="Calibri" pitchFamily="34" charset="0"/>
-                <a:ea typeface="Calibri" pitchFamily="34" charset="-122"/>
-                <a:cs typeface="Calibri" pitchFamily="34" charset="-120"/>
-              </a:rPr>
-              <a:t>ABBA Consultoria de IA · contato@abbaservices.com.br</a:t>
-            </a:r>
-            <a:endParaRPr lang="en-US" sz="900" dirty="0"/>
-          </a:p>
-        </p:txBody>
-      </p:sp>
-      <p:sp>
-        <p:nvSpPr>
-          <p:cNvPr id="6" name="Shape 4"/>
-          <p:cNvSpPr/>
-          <p:nvPr/>
-        </p:nvSpPr>
-        <p:spPr>
-          <a:xfrm>
-            <a:off x="822960" y="2651760"/>
-            <a:ext cx="10543032" cy="0"/>
+              <a:t>Se em seis semanas o número combinado não apareceu, ou se você simplesmente mudar de ideia, você sai levando tudo o que foi produzido. Sem multa. Sem constrangimento.</a:t>
+            </a:r>
+            <a:endParaRPr lang="en-US" sz="2400" dirty="0"/>
+          </a:p>
+        </p:txBody>
+      </p:sp>
+      <p:sp>
+        <p:nvSpPr>
+          <p:cNvPr id="4" name="Shape 2"/>
+          <p:cNvSpPr/>
+          <p:nvPr/>
+        </p:nvSpPr>
+        <p:spPr>
+          <a:xfrm>
+            <a:off x="822960" y="4480560"/>
+            <a:ext cx="2011680" cy="0"/>
           </a:xfrm>
           <a:prstGeom prst="line">
             <a:avLst/>
           </a:prstGeom>
           <a:noFill/>
-          <a:ln w="9525">
+          <a:ln w="19050">
             <a:solidFill>
-              <a:srgbClr val="E5E0D4"/>
+              <a:srgbClr val="C2A35B"/>
             </a:solidFill>
             <a:prstDash val="solid"/>
           </a:ln>
@@ -5040,332 +5925,43 @@
       </p:sp>
       <p:sp>
         <p:nvSpPr>
-          <p:cNvPr id="7" name="Text 5"/>
-          <p:cNvSpPr/>
-          <p:nvPr/>
-        </p:nvSpPr>
-        <p:spPr>
-          <a:xfrm>
-            <a:off x="822960" y="2761488"/>
-            <a:ext cx="3108960" cy="292608"/>
-          </a:xfrm>
-          <a:prstGeom prst="rect">
-            <a:avLst/>
-          </a:prstGeom>
-          <a:noFill/>
-          <a:ln/>
-        </p:spPr>
-        <p:txBody>
-          <a:bodyPr wrap="square" rtlCol="0" anchor="ctr"/>
-          <a:lstStyle/>
-          <a:p>
-            <a:pPr algn="l" indent="0" marL="0">
-              <a:buNone/>
-            </a:pPr>
-            <a:r>
-              <a:rPr lang="en-US" sz="1050" b="1" spc="300" kern="0" dirty="0">
-                <a:solidFill>
-                  <a:srgbClr val="C2A35B"/>
-                </a:solidFill>
-                <a:latin typeface="Calibri" pitchFamily="34" charset="0"/>
-                <a:ea typeface="Calibri" pitchFamily="34" charset="-122"/>
-                <a:cs typeface="Calibri" pitchFamily="34" charset="-120"/>
-              </a:rPr>
-              <a:t>OPERAÇÃO ACOMPANHADA</a:t>
-            </a:r>
-            <a:endParaRPr lang="en-US" sz="1050" dirty="0"/>
-          </a:p>
-        </p:txBody>
-      </p:sp>
-      <p:sp>
-        <p:nvSpPr>
-          <p:cNvPr id="8" name="Text 6"/>
-          <p:cNvSpPr/>
-          <p:nvPr/>
-        </p:nvSpPr>
-        <p:spPr>
-          <a:xfrm>
-            <a:off x="4114800" y="2743200"/>
-            <a:ext cx="7251192" cy="914400"/>
-          </a:xfrm>
-          <a:prstGeom prst="rect">
-            <a:avLst/>
-          </a:prstGeom>
-          <a:noFill/>
-          <a:ln/>
-        </p:spPr>
-        <p:txBody>
-          <a:bodyPr wrap="square" rtlCol="0" anchor="ctr"/>
-          <a:lstStyle/>
-          <a:p>
-            <a:pPr algn="l" indent="0" marL="0">
+          <p:cNvPr id="5" name="Text 3"/>
+          <p:cNvSpPr/>
+          <p:nvPr/>
+        </p:nvSpPr>
+        <p:spPr>
+          <a:xfrm>
+            <a:off x="822960" y="4709160"/>
+            <a:ext cx="10543032" cy="822960"/>
+          </a:xfrm>
+          <a:prstGeom prst="rect">
+            <a:avLst/>
+          </a:prstGeom>
+          <a:noFill/>
+          <a:ln/>
+        </p:spPr>
+        <p:txBody>
+          <a:bodyPr wrap="square" rtlCol="0" anchor="ctr"/>
+          <a:lstStyle/>
+          <a:p>
+            <a:pPr indent="0" marL="0">
               <a:lnSpc>
-                <a:spcPts val="1900"/>
+                <a:spcPts val="2200"/>
               </a:lnSpc>
               <a:buNone/>
             </a:pPr>
             <a:r>
-              <a:rPr lang="en-US" sz="1300" dirty="0">
-                <a:solidFill>
-                  <a:srgbClr val="33394A"/>
-                </a:solidFill>
-                <a:latin typeface="Calibri" pitchFamily="34" charset="0"/>
-                <a:ea typeface="Calibri" pitchFamily="34" charset="-122"/>
-                <a:cs typeface="Calibri" pitchFamily="34" charset="-120"/>
-              </a:rPr>
-              <a:t>SLA, presença semanal e relatório mensal de projetado versus realizado.</a:t>
-            </a:r>
-            <a:endParaRPr lang="en-US" sz="1300" dirty="0"/>
-          </a:p>
-        </p:txBody>
-      </p:sp>
-      <p:sp>
-        <p:nvSpPr>
-          <p:cNvPr id="9" name="Shape 7"/>
-          <p:cNvSpPr/>
-          <p:nvPr/>
-        </p:nvSpPr>
-        <p:spPr>
-          <a:xfrm>
-            <a:off x="822960" y="3794760"/>
-            <a:ext cx="10543032" cy="0"/>
-          </a:xfrm>
-          <a:prstGeom prst="line">
-            <a:avLst/>
-          </a:prstGeom>
-          <a:noFill/>
-          <a:ln w="9525">
-            <a:solidFill>
-              <a:srgbClr val="E5E0D4"/>
-            </a:solidFill>
-            <a:prstDash val="solid"/>
-          </a:ln>
-        </p:spPr>
-      </p:sp>
-      <p:sp>
-        <p:nvSpPr>
-          <p:cNvPr id="10" name="Text 8"/>
-          <p:cNvSpPr/>
-          <p:nvPr/>
-        </p:nvSpPr>
-        <p:spPr>
-          <a:xfrm>
-            <a:off x="822960" y="3904488"/>
-            <a:ext cx="3108960" cy="292608"/>
-          </a:xfrm>
-          <a:prstGeom prst="rect">
-            <a:avLst/>
-          </a:prstGeom>
-          <a:noFill/>
-          <a:ln/>
-        </p:spPr>
-        <p:txBody>
-          <a:bodyPr wrap="square" rtlCol="0" anchor="ctr"/>
-          <a:lstStyle/>
-          <a:p>
-            <a:pPr algn="l" indent="0" marL="0">
-              <a:buNone/>
-            </a:pPr>
-            <a:r>
-              <a:rPr lang="en-US" sz="1050" b="1" spc="300" kern="0" dirty="0">
-                <a:solidFill>
-                  <a:srgbClr val="C2A35B"/>
-                </a:solidFill>
-                <a:latin typeface="Calibri" pitchFamily="34" charset="0"/>
-                <a:ea typeface="Calibri" pitchFamily="34" charset="-122"/>
-                <a:cs typeface="Calibri" pitchFamily="34" charset="-120"/>
-              </a:rPr>
-              <a:t>CONSELHO TRIMESTRAL</a:t>
-            </a:r>
-            <a:endParaRPr lang="en-US" sz="1050" dirty="0"/>
-          </a:p>
-        </p:txBody>
-      </p:sp>
-      <p:sp>
-        <p:nvSpPr>
-          <p:cNvPr id="11" name="Text 9"/>
-          <p:cNvSpPr/>
-          <p:nvPr/>
-        </p:nvSpPr>
-        <p:spPr>
-          <a:xfrm>
-            <a:off x="4114800" y="3886200"/>
-            <a:ext cx="7251192" cy="914400"/>
-          </a:xfrm>
-          <a:prstGeom prst="rect">
-            <a:avLst/>
-          </a:prstGeom>
-          <a:noFill/>
-          <a:ln/>
-        </p:spPr>
-        <p:txBody>
-          <a:bodyPr wrap="square" rtlCol="0" anchor="ctr"/>
-          <a:lstStyle/>
-          <a:p>
-            <a:pPr algn="l" indent="0" marL="0">
-              <a:lnSpc>
-                <a:spcPts val="1900"/>
-              </a:lnSpc>
-              <a:buNone/>
-            </a:pPr>
-            <a:r>
-              <a:rPr lang="en-US" sz="1300" dirty="0">
-                <a:solidFill>
-                  <a:srgbClr val="33394A"/>
-                </a:solidFill>
-                <a:latin typeface="Calibri" pitchFamily="34" charset="0"/>
-                <a:ea typeface="Calibri" pitchFamily="34" charset="-122"/>
-                <a:cs typeface="Calibri" pitchFamily="34" charset="-120"/>
-              </a:rPr>
-              <a:t>A pauta de IA da diretoria, preparada e defendida por quem mediu o ano inteiro.</a:t>
-            </a:r>
-            <a:endParaRPr lang="en-US" sz="1300" dirty="0"/>
-          </a:p>
-        </p:txBody>
-      </p:sp>
-      <p:sp>
-        <p:nvSpPr>
-          <p:cNvPr id="12" name="Shape 10"/>
-          <p:cNvSpPr/>
-          <p:nvPr/>
-        </p:nvSpPr>
-        <p:spPr>
-          <a:xfrm>
-            <a:off x="822960" y="4937760"/>
-            <a:ext cx="10543032" cy="0"/>
-          </a:xfrm>
-          <a:prstGeom prst="line">
-            <a:avLst/>
-          </a:prstGeom>
-          <a:noFill/>
-          <a:ln w="9525">
-            <a:solidFill>
-              <a:srgbClr val="E5E0D4"/>
-            </a:solidFill>
-            <a:prstDash val="solid"/>
-          </a:ln>
-        </p:spPr>
-      </p:sp>
-      <p:sp>
-        <p:nvSpPr>
-          <p:cNvPr id="13" name="Text 11"/>
-          <p:cNvSpPr/>
-          <p:nvPr/>
-        </p:nvSpPr>
-        <p:spPr>
-          <a:xfrm>
-            <a:off x="822960" y="5047488"/>
-            <a:ext cx="3108960" cy="292608"/>
-          </a:xfrm>
-          <a:prstGeom prst="rect">
-            <a:avLst/>
-          </a:prstGeom>
-          <a:noFill/>
-          <a:ln/>
-        </p:spPr>
-        <p:txBody>
-          <a:bodyPr wrap="square" rtlCol="0" anchor="ctr"/>
-          <a:lstStyle/>
-          <a:p>
-            <a:pPr algn="l" indent="0" marL="0">
-              <a:buNone/>
-            </a:pPr>
-            <a:r>
-              <a:rPr lang="en-US" sz="1050" b="1" spc="300" kern="0" dirty="0">
-                <a:solidFill>
-                  <a:srgbClr val="C2A35B"/>
-                </a:solidFill>
-                <a:latin typeface="Calibri" pitchFamily="34" charset="0"/>
-                <a:ea typeface="Calibri" pitchFamily="34" charset="-122"/>
-                <a:cs typeface="Calibri" pitchFamily="34" charset="-120"/>
-              </a:rPr>
-              <a:t>O EXAME ANUAL DE IA</a:t>
-            </a:r>
-            <a:endParaRPr lang="en-US" sz="1050" dirty="0"/>
-          </a:p>
-        </p:txBody>
-      </p:sp>
-      <p:sp>
-        <p:nvSpPr>
-          <p:cNvPr id="14" name="Text 12"/>
-          <p:cNvSpPr/>
-          <p:nvPr/>
-        </p:nvSpPr>
-        <p:spPr>
-          <a:xfrm>
-            <a:off x="4114800" y="5029200"/>
-            <a:ext cx="7251192" cy="914400"/>
-          </a:xfrm>
-          <a:prstGeom prst="rect">
-            <a:avLst/>
-          </a:prstGeom>
-          <a:noFill/>
-          <a:ln/>
-        </p:spPr>
-        <p:txBody>
-          <a:bodyPr wrap="square" rtlCol="0" anchor="ctr"/>
-          <a:lstStyle/>
-          <a:p>
-            <a:pPr algn="l" indent="0" marL="0">
-              <a:lnSpc>
-                <a:spcPts val="1900"/>
-              </a:lnSpc>
-              <a:buNone/>
-            </a:pPr>
-            <a:r>
-              <a:rPr lang="en-US" sz="1300" dirty="0">
-                <a:solidFill>
-                  <a:srgbClr val="33394A"/>
-                </a:solidFill>
-                <a:latin typeface="Calibri" pitchFamily="34" charset="0"/>
-                <a:ea typeface="Calibri" pitchFamily="34" charset="-122"/>
-                <a:cs typeface="Calibri" pitchFamily="34" charset="-120"/>
-              </a:rPr>
-              <a:t>A re-medição completa da maturidade, comparada ano contra ano — a série histórica que só existe aqui e vale mais a cada ano.</a:t>
-            </a:r>
-            <a:endParaRPr lang="en-US" sz="1300" dirty="0"/>
-          </a:p>
-        </p:txBody>
-      </p:sp>
-      <p:sp>
-        <p:nvSpPr>
-          <p:cNvPr id="15" name="Text 13"/>
-          <p:cNvSpPr/>
-          <p:nvPr/>
-        </p:nvSpPr>
-        <p:spPr>
-          <a:xfrm>
-            <a:off x="822960" y="6035040"/>
-            <a:ext cx="10543032" cy="457200"/>
-          </a:xfrm>
-          <a:prstGeom prst="rect">
-            <a:avLst/>
-          </a:prstGeom>
-          <a:noFill/>
-          <a:ln/>
-        </p:spPr>
-        <p:txBody>
-          <a:bodyPr wrap="square" rtlCol="0" anchor="ctr"/>
-          <a:lstStyle/>
-          <a:p>
-            <a:pPr algn="ctr" indent="0" marL="0">
-              <a:lnSpc>
-                <a:spcPts val="2000"/>
-              </a:lnSpc>
-              <a:buNone/>
-            </a:pPr>
-            <a:r>
-              <a:rPr lang="en-US" sz="1250" i="1" dirty="0">
-                <a:solidFill>
-                  <a:srgbClr val="1B2A4A"/>
+              <a:rPr lang="en-US" sz="1500" i="1" dirty="0">
+                <a:solidFill>
+                  <a:srgbClr val="D8DCE8"/>
                 </a:solidFill>
                 <a:latin typeface="Cambria" pitchFamily="34" charset="0"/>
                 <a:ea typeface="Cambria" pitchFamily="34" charset="-122"/>
                 <a:cs typeface="Cambria" pitchFamily="34" charset="-120"/>
               </a:rPr>
-              <a:t>É do Exame que sai a fila de oportunidades do ano seguinte — melhorias que só aparecem depois que o fluxo novo existe.</a:t>
-            </a:r>
-            <a:endParaRPr lang="en-US" sz="1250" dirty="0"/>
+              <a:t>Se a gente não bater o número, a gente não segue para a próxima fase. O portão retém execução, nunca informação: o retrato de oportunidades é seu, fique ou não.</a:t>
+            </a:r>
+            <a:endParaRPr lang="en-US" sz="1500" dirty="0"/>
           </a:p>
         </p:txBody>
       </p:sp>
@@ -5434,7 +6030,7 @@
                 <a:ea typeface="Calibri" pitchFamily="34" charset="-122"/>
                 <a:cs typeface="Calibri" pitchFamily="34" charset="-120"/>
               </a:rPr>
-              <a:t>JÁ TEM IA RODANDO?</a:t>
+              <a:t>DENTRO DA CONSTRUÇÃO</a:t>
             </a:r>
             <a:endParaRPr lang="en-US" sz="1100" dirty="0"/>
           </a:p>
@@ -5476,7 +6072,7 @@
                 <a:ea typeface="Cambria" pitchFamily="34" charset="-122"/>
                 <a:cs typeface="Cambria" pitchFamily="34" charset="-120"/>
               </a:rPr>
-              <a:t>O Conselheiro de IA — a cadeira do seu lado da mesa.</a:t>
+              <a:t>Engenharia de verdade. E gente formada de verdade.</a:t>
             </a:r>
             <a:endParaRPr lang="en-US" sz="2800" dirty="0"/>
           </a:p>
@@ -5518,7 +6114,7 @@
                 <a:ea typeface="Calibri" pitchFamily="34" charset="-122"/>
                 <a:cs typeface="Calibri" pitchFamily="34" charset="-120"/>
               </a:rPr>
-              <a:t>Para quem já construiu: presença fracionária na diretoria, roadmap vivo, parecer por escrito sobre cada fornecedor e a memória do que foi decidido e medido — sem custo de um diretor em folha.</a:t>
+              <a:t>Arquitetura, integrações com os seus sistemas e agentes com aprovação humana nos pontos certos: erro caro passa por gente antes de acontecer. Em paralelo, a sua equipe estuda em turma própria no nosso portal, uma prática por dia, no trabalho real.</a:t>
             </a:r>
             <a:endParaRPr lang="en-US" sz="1300" dirty="0"/>
           </a:p>
@@ -5565,7 +6161,7 @@
       </p:sp>
       <p:pic>
         <p:nvPicPr>
-          <p:cNvPr id="6" name="Image 0" descr="/home/user/abba-ops/08-materiais/assets/fotos/conselheiro--parecer-arbitragem.jpg">    </p:cNvPr>
+          <p:cNvPr id="6" name="Image 0" descr="/home/user/abba-ops/08-materiais/assets/fotos/portal--inicio-atual.png">    </p:cNvPr>
           <p:cNvPicPr>
             <a:picLocks noChangeAspect="1"/>
           </p:cNvPicPr>
@@ -5579,14 +6175,80 @@
         </p:blipFill>
         <p:spPr>
           <a:xfrm>
-            <a:off x="4814316" y="2880360"/>
-            <a:ext cx="2560320" cy="3621024"/>
+            <a:off x="1325880" y="2926080"/>
+            <a:ext cx="5394960" cy="3044952"/>
           </a:xfrm>
           <a:prstGeom prst="rect">
             <a:avLst/>
           </a:prstGeom>
         </p:spPr>
       </p:pic>
+      <p:pic>
+        <p:nvPicPr>
+          <p:cNvPr id="7" name="Image 1" descr="/home/user/abba-ops/08-materiais/assets/fotos/portal--aula-atual.png">    </p:cNvPr>
+          <p:cNvPicPr>
+            <a:picLocks noChangeAspect="1"/>
+          </p:cNvPicPr>
+          <p:nvPr/>
+        </p:nvPicPr>
+        <p:blipFill>
+          <a:blip r:embed="rId2"/>
+          <a:stretch>
+            <a:fillRect/>
+          </a:stretch>
+        </p:blipFill>
+        <p:spPr>
+          <a:xfrm>
+            <a:off x="6995160" y="2926080"/>
+            <a:ext cx="5394960" cy="3044952"/>
+          </a:xfrm>
+          <a:prstGeom prst="rect">
+            <a:avLst/>
+          </a:prstGeom>
+        </p:spPr>
+      </p:pic>
+      <p:sp>
+        <p:nvSpPr>
+          <p:cNvPr id="8" name="Text 4"/>
+          <p:cNvSpPr/>
+          <p:nvPr/>
+        </p:nvSpPr>
+        <p:spPr>
+          <a:xfrm>
+            <a:off x="1325880" y="6035040"/>
+            <a:ext cx="9537192" cy="274320"/>
+          </a:xfrm>
+          <a:prstGeom prst="rect">
+            <a:avLst/>
+          </a:prstGeom>
+          <a:noFill/>
+          <a:ln/>
+        </p:spPr>
+        <p:txBody>
+          <a:bodyPr wrap="square" rtlCol="0" anchor="ctr"/>
+          <a:lstStyle/>
+          <a:p>
+            <a:pPr algn="ctr" indent="0" marL="0">
+              <a:lnSpc>
+                <a:spcPts val="2000"/>
+              </a:lnSpc>
+              <a:buNone/>
+            </a:pPr>
+            <a:r>
+              <a:rPr lang="en-US" sz="1000" i="1" dirty="0">
+                <a:solidFill>
+                  <a:srgbClr val="6E6858"/>
+                </a:solidFill>
+                <a:latin typeface="Calibri" pitchFamily="34" charset="0"/>
+                <a:ea typeface="Calibri" pitchFamily="34" charset="-122"/>
+                <a:cs typeface="Calibri" pitchFamily="34" charset="-120"/>
+              </a:rPr>
+              <a:t>O portal da turma, como o seu time vê: o início com a prática do dia e uma aula real da formação.</a:t>
+            </a:r>
+            <a:endParaRPr lang="en-US" sz="1000" dirty="0"/>
+          </a:p>
+        </p:txBody>
+      </p:sp>
     </p:spTree>
   </p:cSld>
   <p:clrMapOvr>

--- a/08-materiais/modelos/abba-deck-institucional.pptx
+++ b/08-materiais/modelos/abba-deck-institucional.pptx
@@ -17,9 +17,12 @@
     <p:sldId id="265" r:id="rId11"/>
     <p:sldId id="266" r:id="rId12"/>
     <p:sldId id="267" r:id="rId13"/>
+    <p:sldId id="268" r:id="rId14"/>
+    <p:sldId id="269" r:id="rId15"/>
+    <p:sldId id="270" r:id="rId16"/>
   </p:sldIdLst>
   <p:notesMasterIdLst>
-    <p:notesMasterId r:id="rId14"/>
+    <p:notesMasterId r:id="rId17"/>
   </p:notesMasterIdLst>
   <p:sldSz cx="12188952" cy="6858000"/>
   <p:notesSz cx="6858000" cy="12188952"/>
@@ -801,6 +804,270 @@
             <a:fld id="{F7021451-1387-4CA6-816F-3879F97B5CBC}" type="slidenum">
               <a:rPr lang="en-US"/>
               <a:t>12</a:t>
+            </a:fld>
+            <a:endParaRPr lang="en-US"/>
+          </a:p>
+        </p:txBody>
+      </p:sp>
+    </p:spTree>
+    <p:extLst>
+      <p:ext uri="{BB962C8B-B14F-4D97-AF65-F5344CB8AC3E}">
+        <p14:creationId xmlns:p14="http://schemas.microsoft.com/office/powerpoint/2010/main" val="1024086991"/>
+      </p:ext>
+    </p:extLst>
+  </p:cSld>
+  <p:clrMapOvr>
+    <a:masterClrMapping/>
+  </p:clrMapOvr>
+</p:notes>
+</file>
+
+<file path=ppt/notesSlides/notesSlide13.xml><?xml version="1.0" encoding="utf-8"?>
+<p:notes xmlns:a="http://schemas.openxmlformats.org/drawingml/2006/main" xmlns:r="http://schemas.openxmlformats.org/officeDocument/2006/relationships" xmlns:p="http://schemas.openxmlformats.org/presentationml/2006/main">
+  <p:cSld>
+    <p:spTree>
+      <p:nvGrpSpPr>
+        <p:cNvPr id="1" name=""/>
+        <p:cNvGrpSpPr/>
+        <p:nvPr/>
+      </p:nvGrpSpPr>
+      <p:grpSpPr>
+        <a:xfrm>
+          <a:off x="0" y="0"/>
+          <a:ext cx="0" cy="0"/>
+          <a:chOff x="0" y="0"/>
+          <a:chExt cx="0" cy="0"/>
+        </a:xfrm>
+      </p:grpSpPr>
+      <p:sp>
+        <p:nvSpPr>
+          <p:cNvPr id="2" name="Slide Image Placeholder 1"/>
+          <p:cNvSpPr>
+            <a:spLocks noGrp="1" noRot="1" noChangeAspect="1"/>
+          </p:cNvSpPr>
+          <p:nvPr>
+            <p:ph type="sldImg"/>
+          </p:nvPr>
+        </p:nvSpPr>
+        <p:spPr/>
+      </p:sp>
+      <p:sp>
+        <p:nvSpPr>
+          <p:cNvPr id="3" name="Notes Placeholder 2"/>
+          <p:cNvSpPr>
+            <a:spLocks noGrp="1"/>
+          </p:cNvSpPr>
+          <p:nvPr>
+            <p:ph type="body" idx="1"/>
+          </p:nvPr>
+        </p:nvSpPr>
+        <p:spPr/>
+        <p:txBody>
+          <a:bodyPr/>
+          <a:lstStyle/>
+          <a:p>
+            <a:r>
+              <a:rPr lang="en-US" dirty="0"/>
+              <a:t/>
+            </a:r>
+            <a:endParaRPr lang="en-US" dirty="0"/>
+          </a:p>
+        </p:txBody>
+      </p:sp>
+      <p:sp>
+        <p:nvSpPr>
+          <p:cNvPr id="4" name="Slide Number Placeholder 3"/>
+          <p:cNvSpPr>
+            <a:spLocks noGrp="1"/>
+          </p:cNvSpPr>
+          <p:nvPr>
+            <p:ph type="sldNum" sz="quarter" idx="10"/>
+          </p:nvPr>
+        </p:nvSpPr>
+        <p:spPr/>
+        <p:txBody>
+          <a:bodyPr/>
+          <a:lstStyle/>
+          <a:p>
+            <a:fld id="{F7021451-1387-4CA6-816F-3879F97B5CBC}" type="slidenum">
+              <a:rPr lang="en-US"/>
+              <a:t>13</a:t>
+            </a:fld>
+            <a:endParaRPr lang="en-US"/>
+          </a:p>
+        </p:txBody>
+      </p:sp>
+    </p:spTree>
+    <p:extLst>
+      <p:ext uri="{BB962C8B-B14F-4D97-AF65-F5344CB8AC3E}">
+        <p14:creationId xmlns:p14="http://schemas.microsoft.com/office/powerpoint/2010/main" val="1024086991"/>
+      </p:ext>
+    </p:extLst>
+  </p:cSld>
+  <p:clrMapOvr>
+    <a:masterClrMapping/>
+  </p:clrMapOvr>
+</p:notes>
+</file>
+
+<file path=ppt/notesSlides/notesSlide14.xml><?xml version="1.0" encoding="utf-8"?>
+<p:notes xmlns:a="http://schemas.openxmlformats.org/drawingml/2006/main" xmlns:r="http://schemas.openxmlformats.org/officeDocument/2006/relationships" xmlns:p="http://schemas.openxmlformats.org/presentationml/2006/main">
+  <p:cSld>
+    <p:spTree>
+      <p:nvGrpSpPr>
+        <p:cNvPr id="1" name=""/>
+        <p:cNvGrpSpPr/>
+        <p:nvPr/>
+      </p:nvGrpSpPr>
+      <p:grpSpPr>
+        <a:xfrm>
+          <a:off x="0" y="0"/>
+          <a:ext cx="0" cy="0"/>
+          <a:chOff x="0" y="0"/>
+          <a:chExt cx="0" cy="0"/>
+        </a:xfrm>
+      </p:grpSpPr>
+      <p:sp>
+        <p:nvSpPr>
+          <p:cNvPr id="2" name="Slide Image Placeholder 1"/>
+          <p:cNvSpPr>
+            <a:spLocks noGrp="1" noRot="1" noChangeAspect="1"/>
+          </p:cNvSpPr>
+          <p:nvPr>
+            <p:ph type="sldImg"/>
+          </p:nvPr>
+        </p:nvSpPr>
+        <p:spPr/>
+      </p:sp>
+      <p:sp>
+        <p:nvSpPr>
+          <p:cNvPr id="3" name="Notes Placeholder 2"/>
+          <p:cNvSpPr>
+            <a:spLocks noGrp="1"/>
+          </p:cNvSpPr>
+          <p:nvPr>
+            <p:ph type="body" idx="1"/>
+          </p:nvPr>
+        </p:nvSpPr>
+        <p:spPr/>
+        <p:txBody>
+          <a:bodyPr/>
+          <a:lstStyle/>
+          <a:p>
+            <a:r>
+              <a:rPr lang="en-US" dirty="0"/>
+              <a:t/>
+            </a:r>
+            <a:endParaRPr lang="en-US" dirty="0"/>
+          </a:p>
+        </p:txBody>
+      </p:sp>
+      <p:sp>
+        <p:nvSpPr>
+          <p:cNvPr id="4" name="Slide Number Placeholder 3"/>
+          <p:cNvSpPr>
+            <a:spLocks noGrp="1"/>
+          </p:cNvSpPr>
+          <p:nvPr>
+            <p:ph type="sldNum" sz="quarter" idx="10"/>
+          </p:nvPr>
+        </p:nvSpPr>
+        <p:spPr/>
+        <p:txBody>
+          <a:bodyPr/>
+          <a:lstStyle/>
+          <a:p>
+            <a:fld id="{F7021451-1387-4CA6-816F-3879F97B5CBC}" type="slidenum">
+              <a:rPr lang="en-US"/>
+              <a:t>14</a:t>
+            </a:fld>
+            <a:endParaRPr lang="en-US"/>
+          </a:p>
+        </p:txBody>
+      </p:sp>
+    </p:spTree>
+    <p:extLst>
+      <p:ext uri="{BB962C8B-B14F-4D97-AF65-F5344CB8AC3E}">
+        <p14:creationId xmlns:p14="http://schemas.microsoft.com/office/powerpoint/2010/main" val="1024086991"/>
+      </p:ext>
+    </p:extLst>
+  </p:cSld>
+  <p:clrMapOvr>
+    <a:masterClrMapping/>
+  </p:clrMapOvr>
+</p:notes>
+</file>
+
+<file path=ppt/notesSlides/notesSlide15.xml><?xml version="1.0" encoding="utf-8"?>
+<p:notes xmlns:a="http://schemas.openxmlformats.org/drawingml/2006/main" xmlns:r="http://schemas.openxmlformats.org/officeDocument/2006/relationships" xmlns:p="http://schemas.openxmlformats.org/presentationml/2006/main">
+  <p:cSld>
+    <p:spTree>
+      <p:nvGrpSpPr>
+        <p:cNvPr id="1" name=""/>
+        <p:cNvGrpSpPr/>
+        <p:nvPr/>
+      </p:nvGrpSpPr>
+      <p:grpSpPr>
+        <a:xfrm>
+          <a:off x="0" y="0"/>
+          <a:ext cx="0" cy="0"/>
+          <a:chOff x="0" y="0"/>
+          <a:chExt cx="0" cy="0"/>
+        </a:xfrm>
+      </p:grpSpPr>
+      <p:sp>
+        <p:nvSpPr>
+          <p:cNvPr id="2" name="Slide Image Placeholder 1"/>
+          <p:cNvSpPr>
+            <a:spLocks noGrp="1" noRot="1" noChangeAspect="1"/>
+          </p:cNvSpPr>
+          <p:nvPr>
+            <p:ph type="sldImg"/>
+          </p:nvPr>
+        </p:nvSpPr>
+        <p:spPr/>
+      </p:sp>
+      <p:sp>
+        <p:nvSpPr>
+          <p:cNvPr id="3" name="Notes Placeholder 2"/>
+          <p:cNvSpPr>
+            <a:spLocks noGrp="1"/>
+          </p:cNvSpPr>
+          <p:nvPr>
+            <p:ph type="body" idx="1"/>
+          </p:nvPr>
+        </p:nvSpPr>
+        <p:spPr/>
+        <p:txBody>
+          <a:bodyPr/>
+          <a:lstStyle/>
+          <a:p>
+            <a:r>
+              <a:rPr lang="en-US" dirty="0"/>
+              <a:t/>
+            </a:r>
+            <a:endParaRPr lang="en-US" dirty="0"/>
+          </a:p>
+        </p:txBody>
+      </p:sp>
+      <p:sp>
+        <p:nvSpPr>
+          <p:cNvPr id="4" name="Slide Number Placeholder 3"/>
+          <p:cNvSpPr>
+            <a:spLocks noGrp="1"/>
+          </p:cNvSpPr>
+          <p:nvPr>
+            <p:ph type="sldNum" sz="quarter" idx="10"/>
+          </p:nvPr>
+        </p:nvSpPr>
+        <p:spPr/>
+        <p:txBody>
+          <a:bodyPr/>
+          <a:lstStyle/>
+          <a:p>
+            <a:fld id="{F7021451-1387-4CA6-816F-3879F97B5CBC}" type="slidenum">
+              <a:rPr lang="en-US"/>
+              <a:t>15</a:t>
             </a:fld>
             <a:endParaRPr lang="en-US"/>
           </a:p>
@@ -1887,7 +2154,7 @@
                 <a:ea typeface="Calibri" pitchFamily="34" charset="-122"/>
                 <a:cs typeface="Calibri" pitchFamily="34" charset="-120"/>
               </a:rPr>
-              <a:t>ABBA · CONSULTORIA DE IA</a:t>
+              <a:t>ABBA · CONSULTORIA DE INTELIGÊNCIA ARTIFICIAL</a:t>
             </a:r>
             <a:endParaRPr lang="en-US" sz="1200" dirty="0"/>
           </a:p>
@@ -2037,7 +2304,7 @@
         </p:nvSpPr>
         <p:spPr>
           <a:xfrm>
-            <a:off x="822960" y="594360"/>
+            <a:off x="822960" y="548640"/>
             <a:ext cx="5486400" cy="292608"/>
           </a:xfrm>
           <a:prstGeom prst="rect">
@@ -2062,7 +2329,7 @@
                 <a:ea typeface="Calibri" pitchFamily="34" charset="-122"/>
                 <a:cs typeface="Calibri" pitchFamily="34" charset="-120"/>
               </a:rPr>
-              <a:t>DEPOIS DO PRIMEIRO ANO</a:t>
+              <a:t>FASE 2 · A PLATAFORMA PRÓPRIA</a:t>
             </a:r>
             <a:endParaRPr lang="en-US" sz="1100" dirty="0"/>
           </a:p>
@@ -2076,8 +2343,8 @@
         </p:nvSpPr>
         <p:spPr>
           <a:xfrm>
-            <a:off x="822960" y="960120"/>
-            <a:ext cx="10543032" cy="914400"/>
+            <a:off x="822960" y="896112"/>
+            <a:ext cx="10543032" cy="868680"/>
           </a:xfrm>
           <a:prstGeom prst="rect">
             <a:avLst/>
@@ -2091,12 +2358,12 @@
           <a:p>
             <a:pPr indent="0" marL="0">
               <a:lnSpc>
-                <a:spcPts val="3400"/>
+                <a:spcPts val="3300"/>
               </a:lnSpc>
               <a:buNone/>
             </a:pPr>
             <a:r>
-              <a:rPr lang="en-US" sz="2800" b="1" dirty="0">
+              <a:rPr lang="en-US" sz="2700" b="1" dirty="0">
                 <a:solidFill>
                   <a:srgbClr val="1B2A4A"/>
                 </a:solidFill>
@@ -2104,9 +2371,9 @@
                 <a:ea typeface="Cambria" pitchFamily="34" charset="-122"/>
                 <a:cs typeface="Cambria" pitchFamily="34" charset="-120"/>
               </a:rPr>
-              <a:t>A relação não termina: ela passa a ser medida todo ano.</a:t>
-            </a:r>
-            <a:endParaRPr lang="en-US" sz="2800" dirty="0"/>
+              <a:t>O portal da turma, como o seu time vê.</a:t>
+            </a:r>
+            <a:endParaRPr lang="en-US" sz="2700" dirty="0"/>
           </a:p>
         </p:txBody>
       </p:sp>
@@ -2118,7 +2385,7 @@
         </p:nvSpPr>
         <p:spPr>
           <a:xfrm>
-            <a:off x="822960" y="1920240"/>
+            <a:off x="822960" y="1810512"/>
             <a:ext cx="10543032" cy="640080"/>
           </a:xfrm>
           <a:prstGeom prst="rect">
@@ -2133,12 +2400,12 @@
           <a:p>
             <a:pPr algn="l" indent="0" marL="0">
               <a:lnSpc>
-                <a:spcPts val="2000"/>
+                <a:spcPts val="1850"/>
               </a:lnSpc>
               <a:buNone/>
             </a:pPr>
             <a:r>
-              <a:rPr lang="en-US" sz="1300" dirty="0">
+              <a:rPr lang="en-US" sz="1250" dirty="0">
                 <a:solidFill>
                   <a:srgbClr val="6E6858"/>
                 </a:solidFill>
@@ -2146,9 +2413,9 @@
                 <a:ea typeface="Calibri" pitchFamily="34" charset="-122"/>
                 <a:cs typeface="Calibri" pitchFamily="34" charset="-120"/>
               </a:rPr>
-              <a:t>Do segundo ano em diante, a empresa opera sozinha e nós ficamos com o que não dá para fazer de dentro:</a:t>
-            </a:r>
-            <a:endParaRPr lang="en-US" sz="1300" dirty="0"/>
+              <a:t>Uma prática por dia, no trabalho real: o início com a prática do dia, e as aulas da formação. O avanço na trilha desbloqueia ferramentas novas, e a fluência é medida semanas depois: se o comportamento mudou de verdade, não se o vídeo foi assistido.</a:t>
+            </a:r>
+            <a:endParaRPr lang="en-US" sz="1250" dirty="0"/>
           </a:p>
         </p:txBody>
       </p:sp>
@@ -2191,360 +2458,54 @@
           </a:p>
         </p:txBody>
       </p:sp>
-      <p:sp>
-        <p:nvSpPr>
-          <p:cNvPr id="6" name="Shape 4"/>
-          <p:cNvSpPr/>
-          <p:nvPr/>
-        </p:nvSpPr>
-        <p:spPr>
-          <a:xfrm>
-            <a:off x="822960" y="2651760"/>
-            <a:ext cx="10543032" cy="0"/>
-          </a:xfrm>
-          <a:prstGeom prst="line">
-            <a:avLst/>
-          </a:prstGeom>
-          <a:noFill/>
-          <a:ln w="9525">
-            <a:solidFill>
-              <a:srgbClr val="E5E0D4"/>
-            </a:solidFill>
-            <a:prstDash val="solid"/>
-          </a:ln>
-        </p:spPr>
-      </p:sp>
-      <p:sp>
-        <p:nvSpPr>
-          <p:cNvPr id="7" name="Text 5"/>
-          <p:cNvSpPr/>
-          <p:nvPr/>
-        </p:nvSpPr>
-        <p:spPr>
-          <a:xfrm>
-            <a:off x="822960" y="2761488"/>
-            <a:ext cx="3108960" cy="292608"/>
-          </a:xfrm>
-          <a:prstGeom prst="rect">
-            <a:avLst/>
-          </a:prstGeom>
-          <a:noFill/>
-          <a:ln/>
-        </p:spPr>
-        <p:txBody>
-          <a:bodyPr wrap="square" rtlCol="0" anchor="ctr"/>
-          <a:lstStyle/>
-          <a:p>
-            <a:pPr algn="l" indent="0" marL="0">
-              <a:buNone/>
-            </a:pPr>
-            <a:r>
-              <a:rPr lang="en-US" sz="1050" b="1" spc="300" kern="0" dirty="0">
-                <a:solidFill>
-                  <a:srgbClr val="C2A35B"/>
-                </a:solidFill>
-                <a:latin typeface="Calibri" pitchFamily="34" charset="0"/>
-                <a:ea typeface="Calibri" pitchFamily="34" charset="-122"/>
-                <a:cs typeface="Calibri" pitchFamily="34" charset="-120"/>
-              </a:rPr>
-              <a:t>OPERAÇÃO ACOMPANHADA</a:t>
-            </a:r>
-            <a:endParaRPr lang="en-US" sz="1050" dirty="0"/>
-          </a:p>
-        </p:txBody>
-      </p:sp>
-      <p:sp>
-        <p:nvSpPr>
-          <p:cNvPr id="8" name="Text 6"/>
-          <p:cNvSpPr/>
-          <p:nvPr/>
-        </p:nvSpPr>
-        <p:spPr>
-          <a:xfrm>
-            <a:off x="4114800" y="2743200"/>
-            <a:ext cx="7251192" cy="914400"/>
-          </a:xfrm>
-          <a:prstGeom prst="rect">
-            <a:avLst/>
-          </a:prstGeom>
-          <a:noFill/>
-          <a:ln/>
-        </p:spPr>
-        <p:txBody>
-          <a:bodyPr wrap="square" rtlCol="0" anchor="ctr"/>
-          <a:lstStyle/>
-          <a:p>
-            <a:pPr algn="l" indent="0" marL="0">
-              <a:lnSpc>
-                <a:spcPts val="1900"/>
-              </a:lnSpc>
-              <a:buNone/>
-            </a:pPr>
-            <a:r>
-              <a:rPr lang="en-US" sz="1300" dirty="0">
-                <a:solidFill>
-                  <a:srgbClr val="33394A"/>
-                </a:solidFill>
-                <a:latin typeface="Calibri" pitchFamily="34" charset="0"/>
-                <a:ea typeface="Calibri" pitchFamily="34" charset="-122"/>
-                <a:cs typeface="Calibri" pitchFamily="34" charset="-120"/>
-              </a:rPr>
-              <a:t>SLA, presença semanal e relatório mensal de projetado versus realizado.</a:t>
-            </a:r>
-            <a:endParaRPr lang="en-US" sz="1300" dirty="0"/>
-          </a:p>
-        </p:txBody>
-      </p:sp>
-      <p:sp>
-        <p:nvSpPr>
-          <p:cNvPr id="9" name="Shape 7"/>
-          <p:cNvSpPr/>
-          <p:nvPr/>
-        </p:nvSpPr>
-        <p:spPr>
-          <a:xfrm>
-            <a:off x="822960" y="3794760"/>
-            <a:ext cx="10543032" cy="0"/>
-          </a:xfrm>
-          <a:prstGeom prst="line">
-            <a:avLst/>
-          </a:prstGeom>
-          <a:noFill/>
-          <a:ln w="9525">
-            <a:solidFill>
-              <a:srgbClr val="E5E0D4"/>
-            </a:solidFill>
-            <a:prstDash val="solid"/>
-          </a:ln>
-        </p:spPr>
-      </p:sp>
-      <p:sp>
-        <p:nvSpPr>
-          <p:cNvPr id="10" name="Text 8"/>
-          <p:cNvSpPr/>
-          <p:nvPr/>
-        </p:nvSpPr>
-        <p:spPr>
-          <a:xfrm>
-            <a:off x="822960" y="3904488"/>
-            <a:ext cx="3108960" cy="292608"/>
-          </a:xfrm>
-          <a:prstGeom prst="rect">
-            <a:avLst/>
-          </a:prstGeom>
-          <a:noFill/>
-          <a:ln/>
-        </p:spPr>
-        <p:txBody>
-          <a:bodyPr wrap="square" rtlCol="0" anchor="ctr"/>
-          <a:lstStyle/>
-          <a:p>
-            <a:pPr algn="l" indent="0" marL="0">
-              <a:buNone/>
-            </a:pPr>
-            <a:r>
-              <a:rPr lang="en-US" sz="1050" b="1" spc="300" kern="0" dirty="0">
-                <a:solidFill>
-                  <a:srgbClr val="C2A35B"/>
-                </a:solidFill>
-                <a:latin typeface="Calibri" pitchFamily="34" charset="0"/>
-                <a:ea typeface="Calibri" pitchFamily="34" charset="-122"/>
-                <a:cs typeface="Calibri" pitchFamily="34" charset="-120"/>
-              </a:rPr>
-              <a:t>CONSELHO TRIMESTRAL</a:t>
-            </a:r>
-            <a:endParaRPr lang="en-US" sz="1050" dirty="0"/>
-          </a:p>
-        </p:txBody>
-      </p:sp>
-      <p:sp>
-        <p:nvSpPr>
-          <p:cNvPr id="11" name="Text 9"/>
-          <p:cNvSpPr/>
-          <p:nvPr/>
-        </p:nvSpPr>
-        <p:spPr>
-          <a:xfrm>
-            <a:off x="4114800" y="3886200"/>
-            <a:ext cx="7251192" cy="914400"/>
-          </a:xfrm>
-          <a:prstGeom prst="rect">
-            <a:avLst/>
-          </a:prstGeom>
-          <a:noFill/>
-          <a:ln/>
-        </p:spPr>
-        <p:txBody>
-          <a:bodyPr wrap="square" rtlCol="0" anchor="ctr"/>
-          <a:lstStyle/>
-          <a:p>
-            <a:pPr algn="l" indent="0" marL="0">
-              <a:lnSpc>
-                <a:spcPts val="1900"/>
-              </a:lnSpc>
-              <a:buNone/>
-            </a:pPr>
-            <a:r>
-              <a:rPr lang="en-US" sz="1300" dirty="0">
-                <a:solidFill>
-                  <a:srgbClr val="33394A"/>
-                </a:solidFill>
-                <a:latin typeface="Calibri" pitchFamily="34" charset="0"/>
-                <a:ea typeface="Calibri" pitchFamily="34" charset="-122"/>
-                <a:cs typeface="Calibri" pitchFamily="34" charset="-120"/>
-              </a:rPr>
-              <a:t>A pauta de IA da diretoria, preparada e defendida por quem mediu o ano inteiro.</a:t>
-            </a:r>
-            <a:endParaRPr lang="en-US" sz="1300" dirty="0"/>
-          </a:p>
-        </p:txBody>
-      </p:sp>
-      <p:sp>
-        <p:nvSpPr>
-          <p:cNvPr id="12" name="Shape 10"/>
-          <p:cNvSpPr/>
-          <p:nvPr/>
-        </p:nvSpPr>
-        <p:spPr>
-          <a:xfrm>
-            <a:off x="822960" y="4937760"/>
-            <a:ext cx="10543032" cy="0"/>
-          </a:xfrm>
-          <a:prstGeom prst="line">
-            <a:avLst/>
-          </a:prstGeom>
-          <a:noFill/>
-          <a:ln w="9525">
-            <a:solidFill>
-              <a:srgbClr val="E5E0D4"/>
-            </a:solidFill>
-            <a:prstDash val="solid"/>
-          </a:ln>
-        </p:spPr>
-      </p:sp>
-      <p:sp>
-        <p:nvSpPr>
-          <p:cNvPr id="13" name="Text 11"/>
-          <p:cNvSpPr/>
-          <p:nvPr/>
-        </p:nvSpPr>
-        <p:spPr>
-          <a:xfrm>
-            <a:off x="822960" y="5047488"/>
-            <a:ext cx="3108960" cy="292608"/>
-          </a:xfrm>
-          <a:prstGeom prst="rect">
-            <a:avLst/>
-          </a:prstGeom>
-          <a:noFill/>
-          <a:ln/>
-        </p:spPr>
-        <p:txBody>
-          <a:bodyPr wrap="square" rtlCol="0" anchor="ctr"/>
-          <a:lstStyle/>
-          <a:p>
-            <a:pPr algn="l" indent="0" marL="0">
-              <a:buNone/>
-            </a:pPr>
-            <a:r>
-              <a:rPr lang="en-US" sz="1050" b="1" spc="300" kern="0" dirty="0">
-                <a:solidFill>
-                  <a:srgbClr val="C2A35B"/>
-                </a:solidFill>
-                <a:latin typeface="Calibri" pitchFamily="34" charset="0"/>
-                <a:ea typeface="Calibri" pitchFamily="34" charset="-122"/>
-                <a:cs typeface="Calibri" pitchFamily="34" charset="-120"/>
-              </a:rPr>
-              <a:t>O EXAME ANUAL DE IA</a:t>
-            </a:r>
-            <a:endParaRPr lang="en-US" sz="1050" dirty="0"/>
-          </a:p>
-        </p:txBody>
-      </p:sp>
-      <p:sp>
-        <p:nvSpPr>
-          <p:cNvPr id="14" name="Text 12"/>
-          <p:cNvSpPr/>
-          <p:nvPr/>
-        </p:nvSpPr>
-        <p:spPr>
-          <a:xfrm>
-            <a:off x="4114800" y="5029200"/>
-            <a:ext cx="7251192" cy="914400"/>
-          </a:xfrm>
-          <a:prstGeom prst="rect">
-            <a:avLst/>
-          </a:prstGeom>
-          <a:noFill/>
-          <a:ln/>
-        </p:spPr>
-        <p:txBody>
-          <a:bodyPr wrap="square" rtlCol="0" anchor="ctr"/>
-          <a:lstStyle/>
-          <a:p>
-            <a:pPr algn="l" indent="0" marL="0">
-              <a:lnSpc>
-                <a:spcPts val="1900"/>
-              </a:lnSpc>
-              <a:buNone/>
-            </a:pPr>
-            <a:r>
-              <a:rPr lang="en-US" sz="1300" dirty="0">
-                <a:solidFill>
-                  <a:srgbClr val="33394A"/>
-                </a:solidFill>
-                <a:latin typeface="Calibri" pitchFamily="34" charset="0"/>
-                <a:ea typeface="Calibri" pitchFamily="34" charset="-122"/>
-                <a:cs typeface="Calibri" pitchFamily="34" charset="-120"/>
-              </a:rPr>
-              <a:t>A re-medição completa da maturidade, comparada ano contra ano: a série histórica que só existe aqui e vale mais a cada ano.</a:t>
-            </a:r>
-            <a:endParaRPr lang="en-US" sz="1300" dirty="0"/>
-          </a:p>
-        </p:txBody>
-      </p:sp>
-      <p:sp>
-        <p:nvSpPr>
-          <p:cNvPr id="15" name="Text 13"/>
-          <p:cNvSpPr/>
-          <p:nvPr/>
-        </p:nvSpPr>
-        <p:spPr>
-          <a:xfrm>
-            <a:off x="822960" y="6035040"/>
-            <a:ext cx="10543032" cy="457200"/>
-          </a:xfrm>
-          <a:prstGeom prst="rect">
-            <a:avLst/>
-          </a:prstGeom>
-          <a:noFill/>
-          <a:ln/>
-        </p:spPr>
-        <p:txBody>
-          <a:bodyPr wrap="square" rtlCol="0" anchor="ctr"/>
-          <a:lstStyle/>
-          <a:p>
-            <a:pPr algn="ctr" indent="0" marL="0">
-              <a:lnSpc>
-                <a:spcPts val="2000"/>
-              </a:lnSpc>
-              <a:buNone/>
-            </a:pPr>
-            <a:r>
-              <a:rPr lang="en-US" sz="1250" i="1" dirty="0">
-                <a:solidFill>
-                  <a:srgbClr val="1B2A4A"/>
-                </a:solidFill>
-                <a:latin typeface="Cambria" pitchFamily="34" charset="0"/>
-                <a:ea typeface="Cambria" pitchFamily="34" charset="-122"/>
-                <a:cs typeface="Cambria" pitchFamily="34" charset="-120"/>
-              </a:rPr>
-              <a:t>É do Exame que sai a fila de oportunidades do ano seguinte: melhorias que só aparecem depois que o fluxo novo existe.</a:t>
-            </a:r>
-            <a:endParaRPr lang="en-US" sz="1250" dirty="0"/>
-          </a:p>
-        </p:txBody>
-      </p:sp>
+      <p:pic>
+        <p:nvPicPr>
+          <p:cNvPr id="6" name="Image 0" descr="/home/user/abba-ops/08-materiais/assets/fotos/portal--inicio-atual.png">    </p:cNvPr>
+          <p:cNvPicPr>
+            <a:picLocks noChangeAspect="1"/>
+          </p:cNvPicPr>
+          <p:nvPr/>
+        </p:nvPicPr>
+        <p:blipFill>
+          <a:blip r:embed="rId1"/>
+          <a:stretch>
+            <a:fillRect/>
+          </a:stretch>
+        </p:blipFill>
+        <p:spPr>
+          <a:xfrm>
+            <a:off x="1325880" y="2880360"/>
+            <a:ext cx="5394960" cy="3044952"/>
+          </a:xfrm>
+          <a:prstGeom prst="rect">
+            <a:avLst/>
+          </a:prstGeom>
+        </p:spPr>
+      </p:pic>
+      <p:pic>
+        <p:nvPicPr>
+          <p:cNvPr id="7" name="Image 1" descr="/home/user/abba-ops/08-materiais/assets/fotos/portal--aula-atual.png">    </p:cNvPr>
+          <p:cNvPicPr>
+            <a:picLocks noChangeAspect="1"/>
+          </p:cNvPicPr>
+          <p:nvPr/>
+        </p:nvPicPr>
+        <p:blipFill>
+          <a:blip r:embed="rId2"/>
+          <a:stretch>
+            <a:fillRect/>
+          </a:stretch>
+        </p:blipFill>
+        <p:spPr>
+          <a:xfrm>
+            <a:off x="6995160" y="2880360"/>
+            <a:ext cx="5394960" cy="3044952"/>
+          </a:xfrm>
+          <a:prstGeom prst="rect">
+            <a:avLst/>
+          </a:prstGeom>
+        </p:spPr>
+      </p:pic>
     </p:spTree>
   </p:cSld>
   <p:clrMapOvr>
@@ -2585,7 +2546,7 @@
         </p:nvSpPr>
         <p:spPr>
           <a:xfrm>
-            <a:off x="822960" y="594360"/>
+            <a:off x="822960" y="548640"/>
             <a:ext cx="5486400" cy="292608"/>
           </a:xfrm>
           <a:prstGeom prst="rect">
@@ -2610,7 +2571,7 @@
                 <a:ea typeface="Calibri" pitchFamily="34" charset="-122"/>
                 <a:cs typeface="Calibri" pitchFamily="34" charset="-120"/>
               </a:rPr>
-              <a:t>JÁ TEM IA RODANDO?</a:t>
+              <a:t>FASE 3 · A DURABILIDADE · POR DENTRO</a:t>
             </a:r>
             <a:endParaRPr lang="en-US" sz="1100" dirty="0"/>
           </a:p>
@@ -2624,8 +2585,8 @@
         </p:nvSpPr>
         <p:spPr>
           <a:xfrm>
-            <a:off x="822960" y="960120"/>
-            <a:ext cx="10543032" cy="914400"/>
+            <a:off x="822960" y="896112"/>
+            <a:ext cx="10543032" cy="868680"/>
           </a:xfrm>
           <a:prstGeom prst="rect">
             <a:avLst/>
@@ -2639,12 +2600,12 @@
           <a:p>
             <a:pPr indent="0" marL="0">
               <a:lnSpc>
-                <a:spcPts val="3400"/>
+                <a:spcPts val="3300"/>
               </a:lnSpc>
               <a:buNone/>
             </a:pPr>
             <a:r>
-              <a:rPr lang="en-US" sz="2800" b="1" dirty="0">
+              <a:rPr lang="en-US" sz="2700" b="1" dirty="0">
                 <a:solidFill>
                   <a:srgbClr val="1B2A4A"/>
                 </a:solidFill>
@@ -2652,57 +2613,15 @@
                 <a:ea typeface="Cambria" pitchFamily="34" charset="-122"/>
                 <a:cs typeface="Cambria" pitchFamily="34" charset="-120"/>
               </a:rPr>
-              <a:t>O Conselheiro de IA: a cadeira do seu lado da mesa.</a:t>
-            </a:r>
-            <a:endParaRPr lang="en-US" sz="2800" dirty="0"/>
+              <a:t>A operação com presença.</a:t>
+            </a:r>
+            <a:endParaRPr lang="en-US" sz="2700" dirty="0"/>
           </a:p>
         </p:txBody>
       </p:sp>
       <p:sp>
         <p:nvSpPr>
           <p:cNvPr id="4" name="Text 2"/>
-          <p:cNvSpPr/>
-          <p:nvPr/>
-        </p:nvSpPr>
-        <p:spPr>
-          <a:xfrm>
-            <a:off x="822960" y="1920240"/>
-            <a:ext cx="10543032" cy="640080"/>
-          </a:xfrm>
-          <a:prstGeom prst="rect">
-            <a:avLst/>
-          </a:prstGeom>
-          <a:noFill/>
-          <a:ln/>
-        </p:spPr>
-        <p:txBody>
-          <a:bodyPr wrap="square" rtlCol="0" anchor="ctr"/>
-          <a:lstStyle/>
-          <a:p>
-            <a:pPr algn="l" indent="0" marL="0">
-              <a:lnSpc>
-                <a:spcPts val="2000"/>
-              </a:lnSpc>
-              <a:buNone/>
-            </a:pPr>
-            <a:r>
-              <a:rPr lang="en-US" sz="1300" dirty="0">
-                <a:solidFill>
-                  <a:srgbClr val="6E6858"/>
-                </a:solidFill>
-                <a:latin typeface="Calibri" pitchFamily="34" charset="0"/>
-                <a:ea typeface="Calibri" pitchFamily="34" charset="-122"/>
-                <a:cs typeface="Calibri" pitchFamily="34" charset="-120"/>
-              </a:rPr>
-              <a:t>Para quem já construiu: direção de IA em fração, sem o custo nem o conflito de mais um diretor em folha. Funciona em quatro movimentos:</a:t>
-            </a:r>
-            <a:endParaRPr lang="en-US" sz="1300" dirty="0"/>
-          </a:p>
-        </p:txBody>
-      </p:sp>
-      <p:sp>
-        <p:nvSpPr>
-          <p:cNvPr id="5" name="Text 3"/>
           <p:cNvSpPr/>
           <p:nvPr/>
         </p:nvSpPr>
@@ -2741,7 +2660,7 @@
       </p:sp>
       <p:pic>
         <p:nvPicPr>
-          <p:cNvPr id="6" name="Image 0" descr="/home/user/abba-ops/08-materiais/assets/fotos/conselheiro--parecer-arbitragem.jpg">    </p:cNvPr>
+          <p:cNvPr id="5" name="Image 0" descr="/home/user/abba-ops/08-materiais/assets/fotos/gerenciados--relatorio-mensal.jpg">    </p:cNvPr>
           <p:cNvPicPr>
             <a:picLocks noChangeAspect="1"/>
           </p:cNvPicPr>
@@ -2755,8 +2674,8 @@
         </p:blipFill>
         <p:spPr>
           <a:xfrm>
-            <a:off x="8970264" y="2697480"/>
-            <a:ext cx="2395728" cy="3383280"/>
+            <a:off x="9217152" y="1965960"/>
+            <a:ext cx="2148840" cy="3035808"/>
           </a:xfrm>
           <a:prstGeom prst="rect">
             <a:avLst/>
@@ -2765,14 +2684,14 @@
       </p:pic>
       <p:sp>
         <p:nvSpPr>
-          <p:cNvPr id="7" name="Text 4"/>
-          <p:cNvSpPr/>
-          <p:nvPr/>
-        </p:nvSpPr>
-        <p:spPr>
-          <a:xfrm>
-            <a:off x="8970264" y="6108192"/>
-            <a:ext cx="2395728" cy="274320"/>
+          <p:cNvPr id="6" name="Text 3"/>
+          <p:cNvSpPr/>
+          <p:nvPr/>
+        </p:nvSpPr>
+        <p:spPr>
+          <a:xfrm>
+            <a:off x="9217152" y="5029200"/>
+            <a:ext cx="2148840" cy="365760"/>
           </a:xfrm>
           <a:prstGeom prst="rect">
             <a:avLst/>
@@ -2786,12 +2705,12 @@
           <a:p>
             <a:pPr algn="l" indent="0" marL="0">
               <a:lnSpc>
-                <a:spcPts val="1300"/>
+                <a:spcPts val="1200"/>
               </a:lnSpc>
               <a:buNone/>
             </a:pPr>
             <a:r>
-              <a:rPr lang="en-US" sz="950" i="1" dirty="0">
+              <a:rPr lang="en-US" sz="900" i="1" dirty="0">
                 <a:solidFill>
                   <a:srgbClr val="6E6858"/>
                 </a:solidFill>
@@ -2799,30 +2718,30 @@
                 <a:ea typeface="Calibri" pitchFamily="34" charset="-122"/>
                 <a:cs typeface="Calibri" pitchFamily="34" charset="-120"/>
               </a:rPr>
-              <a:t>Um parecer de arbitragem real (empresa preservada).</a:t>
-            </a:r>
-            <a:endParaRPr lang="en-US" sz="950" dirty="0"/>
-          </a:p>
-        </p:txBody>
-      </p:sp>
-      <p:sp>
-        <p:nvSpPr>
-          <p:cNvPr id="8" name="Shape 5"/>
-          <p:cNvSpPr/>
-          <p:nvPr/>
-        </p:nvSpPr>
-        <p:spPr>
-          <a:xfrm>
-            <a:off x="822960" y="2743200"/>
-            <a:ext cx="7525512" cy="0"/>
+              <a:t>Relatório mensal real de operação (empresa preservada).</a:t>
+            </a:r>
+            <a:endParaRPr lang="en-US" sz="900" dirty="0"/>
+          </a:p>
+        </p:txBody>
+      </p:sp>
+      <p:sp>
+        <p:nvSpPr>
+          <p:cNvPr id="7" name="Shape 4"/>
+          <p:cNvSpPr/>
+          <p:nvPr/>
+        </p:nvSpPr>
+        <p:spPr>
+          <a:xfrm>
+            <a:off x="822960" y="1965960"/>
+            <a:ext cx="7936992" cy="0"/>
           </a:xfrm>
           <a:prstGeom prst="line">
             <a:avLst/>
           </a:prstGeom>
           <a:noFill/>
-          <a:ln w="9525">
+          <a:ln w="15240">
             <a:solidFill>
-              <a:srgbClr val="E5E0D4"/>
+              <a:srgbClr val="C2A35B"/>
             </a:solidFill>
             <a:prstDash val="solid"/>
           </a:ln>
@@ -2830,30 +2749,69 @@
       </p:sp>
       <p:sp>
         <p:nvSpPr>
+          <p:cNvPr id="8" name="Text 5"/>
+          <p:cNvSpPr/>
+          <p:nvPr/>
+        </p:nvSpPr>
+        <p:spPr>
+          <a:xfrm>
+            <a:off x="822960" y="2084832"/>
+            <a:ext cx="7936992" cy="292608"/>
+          </a:xfrm>
+          <a:prstGeom prst="rect">
+            <a:avLst/>
+          </a:prstGeom>
+          <a:noFill/>
+          <a:ln/>
+        </p:spPr>
+        <p:txBody>
+          <a:bodyPr wrap="square" rtlCol="0" anchor="ctr"/>
+          <a:lstStyle/>
+          <a:p>
+            <a:pPr algn="l" indent="0" marL="0">
+              <a:buNone/>
+            </a:pPr>
+            <a:r>
+              <a:rPr lang="en-US" sz="1050" b="1" spc="300" kern="0" dirty="0">
+                <a:solidFill>
+                  <a:srgbClr val="C2A35B"/>
+                </a:solidFill>
+                <a:latin typeface="Calibri" pitchFamily="34" charset="0"/>
+                <a:ea typeface="Calibri" pitchFamily="34" charset="-122"/>
+                <a:cs typeface="Calibri" pitchFamily="34" charset="-120"/>
+              </a:rPr>
+              <a:t>SISTEMAS GERENCIADOS · A OPERAÇÃO COM PRESENÇA</a:t>
+            </a:r>
+            <a:endParaRPr lang="en-US" sz="1050" dirty="0"/>
+          </a:p>
+        </p:txBody>
+      </p:sp>
+      <p:sp>
+        <p:nvSpPr>
           <p:cNvPr id="9" name="Text 6"/>
           <p:cNvSpPr/>
           <p:nvPr/>
         </p:nvSpPr>
         <p:spPr>
           <a:xfrm>
-            <a:off x="822960" y="2834640"/>
-            <a:ext cx="2011680" cy="292608"/>
-          </a:xfrm>
-          <a:prstGeom prst="rect">
-            <a:avLst/>
-          </a:prstGeom>
-          <a:noFill/>
-          <a:ln/>
-        </p:spPr>
-        <p:txBody>
-          <a:bodyPr wrap="square" rtlCol="0" anchor="ctr"/>
-          <a:lstStyle/>
-          <a:p>
-            <a:pPr algn="l" indent="0" marL="0">
-              <a:buNone/>
-            </a:pPr>
-            <a:r>
-              <a:rPr lang="en-US" sz="1050" b="1" spc="300" kern="0" dirty="0">
+            <a:off x="822960" y="2423160"/>
+            <a:ext cx="960120" cy="256032"/>
+          </a:xfrm>
+          <a:prstGeom prst="rect">
+            <a:avLst/>
+          </a:prstGeom>
+          <a:noFill/>
+          <a:ln/>
+        </p:spPr>
+        <p:txBody>
+          <a:bodyPr wrap="square" rtlCol="0" anchor="ctr"/>
+          <a:lstStyle/>
+          <a:p>
+            <a:pPr indent="0" marL="0">
+              <a:buNone/>
+            </a:pPr>
+            <a:r>
+              <a:rPr lang="en-US" sz="850" b="1" spc="200" kern="0" dirty="0">
                 <a:solidFill>
                   <a:srgbClr val="C2A35B"/>
                 </a:solidFill>
@@ -2861,9 +2819,9 @@
                 <a:ea typeface="Calibri" pitchFamily="34" charset="-122"/>
                 <a:cs typeface="Calibri" pitchFamily="34" charset="-120"/>
               </a:rPr>
-              <a:t>PRESENÇA</a:t>
-            </a:r>
-            <a:endParaRPr lang="en-US" sz="1050" dirty="0"/>
+              <a:t>O QUÊ</a:t>
+            </a:r>
+            <a:endParaRPr lang="en-US" sz="850" dirty="0"/>
           </a:p>
         </p:txBody>
       </p:sp>
@@ -2875,8 +2833,8 @@
         </p:nvSpPr>
         <p:spPr>
           <a:xfrm>
-            <a:off x="3017520" y="2816352"/>
-            <a:ext cx="5330952" cy="731520"/>
+            <a:off x="1828800" y="2404872"/>
+            <a:ext cx="6931152" cy="502920"/>
           </a:xfrm>
           <a:prstGeom prst="rect">
             <a:avLst/>
@@ -2890,12 +2848,12 @@
           <a:p>
             <a:pPr algn="l" indent="0" marL="0">
               <a:lnSpc>
-                <a:spcPts val="1750"/>
+                <a:spcPts val="1450"/>
               </a:lnSpc>
               <a:buNone/>
             </a:pPr>
             <a:r>
-              <a:rPr lang="en-US" sz="1250" dirty="0">
+              <a:rPr lang="en-US" sz="1050" dirty="0">
                 <a:solidFill>
                   <a:srgbClr val="33394A"/>
                 </a:solidFill>
@@ -2903,34 +2861,50 @@
                 <a:ea typeface="Calibri" pitchFamily="34" charset="-122"/>
                 <a:cs typeface="Calibri" pitchFamily="34" charset="-120"/>
               </a:rPr>
-              <a:t>na diretoria, com a pauta de IA preparada e defendida.</a:t>
-            </a:r>
-            <a:endParaRPr lang="en-US" sz="1250" dirty="0"/>
-          </a:p>
-        </p:txBody>
-      </p:sp>
-      <p:sp>
-        <p:nvSpPr>
-          <p:cNvPr id="11" name="Shape 8"/>
-          <p:cNvSpPr/>
-          <p:nvPr/>
-        </p:nvSpPr>
-        <p:spPr>
-          <a:xfrm>
-            <a:off x="822960" y="3611880"/>
-            <a:ext cx="7525512" cy="0"/>
-          </a:xfrm>
-          <a:prstGeom prst="line">
-            <a:avLst/>
-          </a:prstGeom>
-          <a:noFill/>
-          <a:ln w="9525">
-            <a:solidFill>
-              <a:srgbClr val="E5E0D4"/>
-            </a:solidFill>
-            <a:prstDash val="solid"/>
-          </a:ln>
-        </p:spPr>
+              <a:t>Operamos o que construímos: monitoramento contínuo, correção e evolução dos sistemas em produção, e um ritual semanal de 20 minutos com quem decide.</a:t>
+            </a:r>
+            <a:endParaRPr lang="en-US" sz="1050" dirty="0"/>
+          </a:p>
+        </p:txBody>
+      </p:sp>
+      <p:sp>
+        <p:nvSpPr>
+          <p:cNvPr id="11" name="Text 8"/>
+          <p:cNvSpPr/>
+          <p:nvPr/>
+        </p:nvSpPr>
+        <p:spPr>
+          <a:xfrm>
+            <a:off x="822960" y="3035808"/>
+            <a:ext cx="960120" cy="256032"/>
+          </a:xfrm>
+          <a:prstGeom prst="rect">
+            <a:avLst/>
+          </a:prstGeom>
+          <a:noFill/>
+          <a:ln/>
+        </p:spPr>
+        <p:txBody>
+          <a:bodyPr wrap="square" rtlCol="0" anchor="ctr"/>
+          <a:lstStyle/>
+          <a:p>
+            <a:pPr indent="0" marL="0">
+              <a:buNone/>
+            </a:pPr>
+            <a:r>
+              <a:rPr lang="en-US" sz="850" b="1" spc="200" kern="0" dirty="0">
+                <a:solidFill>
+                  <a:srgbClr val="C2A35B"/>
+                </a:solidFill>
+                <a:latin typeface="Calibri" pitchFamily="34" charset="0"/>
+                <a:ea typeface="Calibri" pitchFamily="34" charset="-122"/>
+                <a:cs typeface="Calibri" pitchFamily="34" charset="-120"/>
+              </a:rPr>
+              <a:t>POR QUÊ</a:t>
+            </a:r>
+            <a:endParaRPr lang="en-US" sz="850" dirty="0"/>
+          </a:p>
+        </p:txBody>
       </p:sp>
       <p:sp>
         <p:nvSpPr>
@@ -2940,47 +2914,8 @@
         </p:nvSpPr>
         <p:spPr>
           <a:xfrm>
-            <a:off x="822960" y="3703320"/>
-            <a:ext cx="2011680" cy="292608"/>
-          </a:xfrm>
-          <a:prstGeom prst="rect">
-            <a:avLst/>
-          </a:prstGeom>
-          <a:noFill/>
-          <a:ln/>
-        </p:spPr>
-        <p:txBody>
-          <a:bodyPr wrap="square" rtlCol="0" anchor="ctr"/>
-          <a:lstStyle/>
-          <a:p>
-            <a:pPr algn="l" indent="0" marL="0">
-              <a:buNone/>
-            </a:pPr>
-            <a:r>
-              <a:rPr lang="en-US" sz="1050" b="1" spc="300" kern="0" dirty="0">
-                <a:solidFill>
-                  <a:srgbClr val="C2A35B"/>
-                </a:solidFill>
-                <a:latin typeface="Calibri" pitchFamily="34" charset="0"/>
-                <a:ea typeface="Calibri" pitchFamily="34" charset="-122"/>
-                <a:cs typeface="Calibri" pitchFamily="34" charset="-120"/>
-              </a:rPr>
-              <a:t>ROADMAP VIVO</a:t>
-            </a:r>
-            <a:endParaRPr lang="en-US" sz="1050" dirty="0"/>
-          </a:p>
-        </p:txBody>
-      </p:sp>
-      <p:sp>
-        <p:nvSpPr>
-          <p:cNvPr id="13" name="Text 10"/>
-          <p:cNvSpPr/>
-          <p:nvPr/>
-        </p:nvSpPr>
-        <p:spPr>
-          <a:xfrm>
-            <a:off x="3017520" y="3685032"/>
-            <a:ext cx="5330952" cy="731520"/>
+            <a:off x="1828800" y="3017520"/>
+            <a:ext cx="6931152" cy="713232"/>
           </a:xfrm>
           <a:prstGeom prst="rect">
             <a:avLst/>
@@ -2994,12 +2929,12 @@
           <a:p>
             <a:pPr algn="l" indent="0" marL="0">
               <a:lnSpc>
-                <a:spcPts val="1750"/>
+                <a:spcPts val="1450"/>
               </a:lnSpc>
               <a:buNone/>
             </a:pPr>
             <a:r>
-              <a:rPr lang="en-US" sz="1250" dirty="0">
+              <a:rPr lang="en-US" sz="1050" dirty="0">
                 <a:solidFill>
                   <a:srgbClr val="33394A"/>
                 </a:solidFill>
@@ -3007,61 +2942,38 @@
                 <a:ea typeface="Calibri" pitchFamily="34" charset="-122"/>
                 <a:cs typeface="Calibri" pitchFamily="34" charset="-120"/>
               </a:rPr>
-              <a:t>re-ranqueado conforme os números chegam. Nunca um PDF parado.</a:t>
-            </a:r>
-            <a:endParaRPr lang="en-US" sz="1250" dirty="0"/>
-          </a:p>
-        </p:txBody>
-      </p:sp>
-      <p:sp>
-        <p:nvSpPr>
-          <p:cNvPr id="14" name="Shape 11"/>
-          <p:cNvSpPr/>
-          <p:nvPr/>
-        </p:nvSpPr>
-        <p:spPr>
-          <a:xfrm>
-            <a:off x="822960" y="4480560"/>
-            <a:ext cx="7525512" cy="0"/>
-          </a:xfrm>
-          <a:prstGeom prst="line">
-            <a:avLst/>
-          </a:prstGeom>
-          <a:noFill/>
-          <a:ln w="9525">
-            <a:solidFill>
-              <a:srgbClr val="E5E0D4"/>
-            </a:solidFill>
-            <a:prstDash val="solid"/>
-          </a:ln>
-        </p:spPr>
-      </p:sp>
-      <p:sp>
-        <p:nvSpPr>
-          <p:cNvPr id="15" name="Text 12"/>
-          <p:cNvSpPr/>
-          <p:nvPr/>
-        </p:nvSpPr>
-        <p:spPr>
-          <a:xfrm>
-            <a:off x="822960" y="4572000"/>
-            <a:ext cx="2011680" cy="292608"/>
-          </a:xfrm>
-          <a:prstGeom prst="rect">
-            <a:avLst/>
-          </a:prstGeom>
-          <a:noFill/>
-          <a:ln/>
-        </p:spPr>
-        <p:txBody>
-          <a:bodyPr wrap="square" rtlCol="0" anchor="ctr"/>
-          <a:lstStyle/>
-          <a:p>
-            <a:pPr algn="l" indent="0" marL="0">
-              <a:buNone/>
-            </a:pPr>
-            <a:r>
-              <a:rPr lang="en-US" sz="1050" b="1" spc="300" kern="0" dirty="0">
+              <a:t>Sistema sem dono definha. E a diretoria precisa ver o retorno, não sentir que ele existe: a maioria das empresas que investe em IA não consegue dizer o que mudou, porque ninguém combinou antes o que seria mudança, nem mediu depois.</a:t>
+            </a:r>
+            <a:endParaRPr lang="en-US" sz="1050" dirty="0"/>
+          </a:p>
+        </p:txBody>
+      </p:sp>
+      <p:sp>
+        <p:nvSpPr>
+          <p:cNvPr id="13" name="Text 10"/>
+          <p:cNvSpPr/>
+          <p:nvPr/>
+        </p:nvSpPr>
+        <p:spPr>
+          <a:xfrm>
+            <a:off x="822960" y="3858768"/>
+            <a:ext cx="960120" cy="256032"/>
+          </a:xfrm>
+          <a:prstGeom prst="rect">
+            <a:avLst/>
+          </a:prstGeom>
+          <a:noFill/>
+          <a:ln/>
+        </p:spPr>
+        <p:txBody>
+          <a:bodyPr wrap="square" rtlCol="0" anchor="ctr"/>
+          <a:lstStyle/>
+          <a:p>
+            <a:pPr indent="0" marL="0">
+              <a:buNone/>
+            </a:pPr>
+            <a:r>
+              <a:rPr lang="en-US" sz="850" b="1" spc="200" kern="0" dirty="0">
                 <a:solidFill>
                   <a:srgbClr val="C2A35B"/>
                 </a:solidFill>
@@ -3069,22 +2981,22 @@
                 <a:ea typeface="Calibri" pitchFamily="34" charset="-122"/>
                 <a:cs typeface="Calibri" pitchFamily="34" charset="-120"/>
               </a:rPr>
-              <a:t>ARBITRAGEM</a:t>
-            </a:r>
-            <a:endParaRPr lang="en-US" sz="1050" dirty="0"/>
-          </a:p>
-        </p:txBody>
-      </p:sp>
-      <p:sp>
-        <p:nvSpPr>
-          <p:cNvPr id="16" name="Text 13"/>
-          <p:cNvSpPr/>
-          <p:nvPr/>
-        </p:nvSpPr>
-        <p:spPr>
-          <a:xfrm>
-            <a:off x="3017520" y="4553712"/>
-            <a:ext cx="5330952" cy="731520"/>
+              <a:t>COMO</a:t>
+            </a:r>
+            <a:endParaRPr lang="en-US" sz="850" dirty="0"/>
+          </a:p>
+        </p:txBody>
+      </p:sp>
+      <p:sp>
+        <p:nvSpPr>
+          <p:cNvPr id="14" name="Text 11"/>
+          <p:cNvSpPr/>
+          <p:nvPr/>
+        </p:nvSpPr>
+        <p:spPr>
+          <a:xfrm>
+            <a:off x="1828800" y="3840480"/>
+            <a:ext cx="6931152" cy="658368"/>
           </a:xfrm>
           <a:prstGeom prst="rect">
             <a:avLst/>
@@ -3098,12 +3010,12 @@
           <a:p>
             <a:pPr algn="l" indent="0" marL="0">
               <a:lnSpc>
-                <a:spcPts val="1750"/>
+                <a:spcPts val="1450"/>
               </a:lnSpc>
               <a:buNone/>
             </a:pPr>
             <a:r>
-              <a:rPr lang="en-US" sz="1250" dirty="0">
+              <a:rPr lang="en-US" sz="1050" dirty="0">
                 <a:solidFill>
                   <a:srgbClr val="33394A"/>
                 </a:solidFill>
@@ -3111,61 +3023,38 @@
                 <a:ea typeface="Calibri" pitchFamily="34" charset="-122"/>
                 <a:cs typeface="Calibri" pitchFamily="34" charset="-120"/>
               </a:rPr>
-              <a:t>parecer por escrito sobre cada fornecedor que chega à mesa: o que é real, o que é caro, o que é risco.</a:t>
-            </a:r>
-            <a:endParaRPr lang="en-US" sz="1250" dirty="0"/>
-          </a:p>
-        </p:txBody>
-      </p:sp>
-      <p:sp>
-        <p:nvSpPr>
-          <p:cNvPr id="17" name="Shape 14"/>
-          <p:cNvSpPr/>
-          <p:nvPr/>
-        </p:nvSpPr>
-        <p:spPr>
-          <a:xfrm>
-            <a:off x="822960" y="5349240"/>
-            <a:ext cx="7525512" cy="0"/>
-          </a:xfrm>
-          <a:prstGeom prst="line">
-            <a:avLst/>
-          </a:prstGeom>
-          <a:noFill/>
-          <a:ln w="9525">
-            <a:solidFill>
-              <a:srgbClr val="E5E0D4"/>
-            </a:solidFill>
-            <a:prstDash val="solid"/>
-          </a:ln>
-        </p:spPr>
-      </p:sp>
-      <p:sp>
-        <p:nvSpPr>
-          <p:cNvPr id="18" name="Text 15"/>
-          <p:cNvSpPr/>
-          <p:nvPr/>
-        </p:nvSpPr>
-        <p:spPr>
-          <a:xfrm>
-            <a:off x="822960" y="5440680"/>
-            <a:ext cx="2011680" cy="292608"/>
-          </a:xfrm>
-          <a:prstGeom prst="rect">
-            <a:avLst/>
-          </a:prstGeom>
-          <a:noFill/>
-          <a:ln/>
-        </p:spPr>
-        <p:txBody>
-          <a:bodyPr wrap="square" rtlCol="0" anchor="ctr"/>
-          <a:lstStyle/>
-          <a:p>
-            <a:pPr algn="l" indent="0" marL="0">
-              <a:buNone/>
-            </a:pPr>
-            <a:r>
-              <a:rPr lang="en-US" sz="1050" b="1" spc="300" kern="0" dirty="0">
+              <a:t>Alertas de máquina o tempo todo, com prazos de resposta por severidade. Evolução dentro do combinado; o que exceder é cotado antes, nunca fatura-surpresa. E o relatório mensal: projetado versus realizado, sempre.</a:t>
+            </a:r>
+            <a:endParaRPr lang="en-US" sz="1050" dirty="0"/>
+          </a:p>
+        </p:txBody>
+      </p:sp>
+      <p:sp>
+        <p:nvSpPr>
+          <p:cNvPr id="15" name="Text 12"/>
+          <p:cNvSpPr/>
+          <p:nvPr/>
+        </p:nvSpPr>
+        <p:spPr>
+          <a:xfrm>
+            <a:off x="822960" y="4626864"/>
+            <a:ext cx="960120" cy="256032"/>
+          </a:xfrm>
+          <a:prstGeom prst="rect">
+            <a:avLst/>
+          </a:prstGeom>
+          <a:noFill/>
+          <a:ln/>
+        </p:spPr>
+        <p:txBody>
+          <a:bodyPr wrap="square" rtlCol="0" anchor="ctr"/>
+          <a:lstStyle/>
+          <a:p>
+            <a:pPr indent="0" marL="0">
+              <a:buNone/>
+            </a:pPr>
+            <a:r>
+              <a:rPr lang="en-US" sz="850" b="1" spc="200" kern="0" dirty="0">
                 <a:solidFill>
                   <a:srgbClr val="C2A35B"/>
                 </a:solidFill>
@@ -3173,22 +3062,22 @@
                 <a:ea typeface="Calibri" pitchFamily="34" charset="-122"/>
                 <a:cs typeface="Calibri" pitchFamily="34" charset="-120"/>
               </a:rPr>
-              <a:t>MEMÓRIA</a:t>
-            </a:r>
-            <a:endParaRPr lang="en-US" sz="1050" dirty="0"/>
-          </a:p>
-        </p:txBody>
-      </p:sp>
-      <p:sp>
-        <p:nvSpPr>
-          <p:cNvPr id="19" name="Text 16"/>
-          <p:cNvSpPr/>
-          <p:nvPr/>
-        </p:nvSpPr>
-        <p:spPr>
-          <a:xfrm>
-            <a:off x="3017520" y="5422392"/>
-            <a:ext cx="5330952" cy="731520"/>
+              <a:t>O QUE FICA</a:t>
+            </a:r>
+            <a:endParaRPr lang="en-US" sz="850" dirty="0"/>
+          </a:p>
+        </p:txBody>
+      </p:sp>
+      <p:sp>
+        <p:nvSpPr>
+          <p:cNvPr id="16" name="Text 13"/>
+          <p:cNvSpPr/>
+          <p:nvPr/>
+        </p:nvSpPr>
+        <p:spPr>
+          <a:xfrm>
+            <a:off x="1828800" y="4608576"/>
+            <a:ext cx="6931152" cy="685800"/>
           </a:xfrm>
           <a:prstGeom prst="rect">
             <a:avLst/>
@@ -3202,12 +3091,12 @@
           <a:p>
             <a:pPr algn="l" indent="0" marL="0">
               <a:lnSpc>
-                <a:spcPts val="1750"/>
+                <a:spcPts val="1450"/>
               </a:lnSpc>
               <a:buNone/>
             </a:pPr>
             <a:r>
-              <a:rPr lang="en-US" sz="1250" dirty="0">
+              <a:rPr lang="en-US" sz="1050" dirty="0">
                 <a:solidFill>
                   <a:srgbClr val="33394A"/>
                 </a:solidFill>
@@ -3215,49 +3104,7 @@
                 <a:ea typeface="Calibri" pitchFamily="34" charset="-122"/>
                 <a:cs typeface="Calibri" pitchFamily="34" charset="-120"/>
               </a:rPr>
-              <a:t>cada decisão registrada com a expectativa declarada antes e o resultado medido depois. Imutável por construção.</a:t>
-            </a:r>
-            <a:endParaRPr lang="en-US" sz="1250" dirty="0"/>
-          </a:p>
-        </p:txBody>
-      </p:sp>
-      <p:sp>
-        <p:nvSpPr>
-          <p:cNvPr id="20" name="Text 17"/>
-          <p:cNvSpPr/>
-          <p:nvPr/>
-        </p:nvSpPr>
-        <p:spPr>
-          <a:xfrm>
-            <a:off x="822960" y="6236208"/>
-            <a:ext cx="7525512" cy="274320"/>
-          </a:xfrm>
-          <a:prstGeom prst="rect">
-            <a:avLst/>
-          </a:prstGeom>
-          <a:noFill/>
-          <a:ln/>
-        </p:spPr>
-        <p:txBody>
-          <a:bodyPr wrap="square" rtlCol="0" anchor="ctr"/>
-          <a:lstStyle/>
-          <a:p>
-            <a:pPr algn="l" indent="0" marL="0">
-              <a:lnSpc>
-                <a:spcPts val="1300"/>
-              </a:lnSpc>
-              <a:buNone/>
-            </a:pPr>
-            <a:r>
-              <a:rPr lang="en-US" sz="1050" i="1" dirty="0">
-                <a:solidFill>
-                  <a:srgbClr val="1B2A4A"/>
-                </a:solidFill>
-                <a:latin typeface="Cambria" pitchFamily="34" charset="0"/>
-                <a:ea typeface="Cambria" pitchFamily="34" charset="-122"/>
-                <a:cs typeface="Cambria" pitchFamily="34" charset="-120"/>
-              </a:rPr>
-              <a:t>Nenhum time interno pode ser a própria prova: por isso empresa com um ótimo CFO ainda contrata verificação de fora.</a:t>
+              <a:t>O diário de decisões: métrica combinada antes, resultado medido depois, assinado por gente. Incluindo o que não funcionou. É o registro que transforma a conversa de renovação em leitura de resultados, não em ato de fé.</a:t>
             </a:r>
             <a:endParaRPr lang="en-US" sz="1050" dirty="0"/>
           </a:p>
@@ -3303,7 +3150,7 @@
         </p:nvSpPr>
         <p:spPr>
           <a:xfrm>
-            <a:off x="822960" y="1234440"/>
+            <a:off x="822960" y="1691640"/>
             <a:ext cx="5486400" cy="292608"/>
           </a:xfrm>
           <a:prstGeom prst="rect">
@@ -3328,7 +3175,7 @@
                 <a:ea typeface="Calibri" pitchFamily="34" charset="-122"/>
                 <a:cs typeface="Calibri" pitchFamily="34" charset="-120"/>
               </a:rPr>
-              <a:t>AS NOSSAS RAÍZES · O PRÓXIMO PASSO</a:t>
+              <a:t>O PORTÃO DA PROVA</a:t>
             </a:r>
             <a:endParaRPr lang="en-US" sz="1200" dirty="0"/>
           </a:p>
@@ -3342,8 +3189,8 @@
         </p:nvSpPr>
         <p:spPr>
           <a:xfrm>
-            <a:off x="822960" y="1691640"/>
-            <a:ext cx="10543032" cy="2103120"/>
+            <a:off x="822960" y="2148840"/>
+            <a:ext cx="10543032" cy="1005840"/>
           </a:xfrm>
           <a:prstGeom prst="rect">
             <a:avLst/>
@@ -3357,12 +3204,12 @@
           <a:p>
             <a:pPr indent="0" marL="0">
               <a:lnSpc>
-                <a:spcPts val="3800"/>
+                <a:spcPts val="3600"/>
               </a:lnSpc>
               <a:buNone/>
             </a:pPr>
             <a:r>
-              <a:rPr lang="en-US" sz="2400" b="1" dirty="0">
+              <a:rPr lang="en-US" sz="2600" b="1" dirty="0">
                 <a:solidFill>
                   <a:srgbClr val="FFFFFF"/>
                 </a:solidFill>
@@ -3370,49 +3217,9 @@
                 <a:ea typeface="Cambria" pitchFamily="34" charset="-122"/>
                 <a:cs typeface="Cambria" pitchFamily="34" charset="-120"/>
               </a:rPr>
-              <a:t>Verdade dita mesmo quando custa.</a:t>
-            </a:r>
-            <a:endParaRPr lang="en-US" sz="2400" dirty="0"/>
-          </a:p>
-          <a:p>
-            <a:pPr indent="0" marL="0">
-              <a:lnSpc>
-                <a:spcPts val="3800"/>
-              </a:lnSpc>
-              <a:buNone/>
-            </a:pPr>
-            <a:r>
-              <a:rPr lang="en-US" sz="2400" b="1" dirty="0">
-                <a:solidFill>
-                  <a:srgbClr val="FFFFFF"/>
-                </a:solidFill>
-                <a:latin typeface="Cambria" pitchFamily="34" charset="0"/>
-                <a:ea typeface="Cambria" pitchFamily="34" charset="-122"/>
-                <a:cs typeface="Cambria" pitchFamily="34" charset="-120"/>
-              </a:rPr>
-              <a:t>Número antes de opinião.</a:t>
-            </a:r>
-            <a:endParaRPr lang="en-US" sz="2400" dirty="0"/>
-          </a:p>
-          <a:p>
-            <a:pPr indent="0" marL="0">
-              <a:lnSpc>
-                <a:spcPts val="3800"/>
-              </a:lnSpc>
-              <a:buNone/>
-            </a:pPr>
-            <a:r>
-              <a:rPr lang="en-US" sz="2400" b="1" dirty="0">
-                <a:solidFill>
-                  <a:srgbClr val="FFFFFF"/>
-                </a:solidFill>
-                <a:latin typeface="Cambria" pitchFamily="34" charset="0"/>
-                <a:ea typeface="Cambria" pitchFamily="34" charset="-122"/>
-                <a:cs typeface="Cambria" pitchFamily="34" charset="-120"/>
-              </a:rPr>
-              <a:t>Terminar com a sua empresa mais capaz, não mais dependente.</a:t>
-            </a:r>
-            <a:endParaRPr lang="en-US" sz="2400" dirty="0"/>
+              <a:t>Ao término da fase 1, a decisão de continuar é integralmente sua.</a:t>
+            </a:r>
+            <a:endParaRPr lang="en-US" sz="2600" dirty="0"/>
           </a:p>
         </p:txBody>
       </p:sp>
@@ -3424,7 +3231,7 @@
         </p:nvSpPr>
         <p:spPr>
           <a:xfrm>
-            <a:off x="822960" y="3977640"/>
+            <a:off x="822960" y="3383280"/>
             <a:ext cx="2011680" cy="0"/>
           </a:xfrm>
           <a:prstGeom prst="line">
@@ -3447,8 +3254,8 @@
         </p:nvSpPr>
         <p:spPr>
           <a:xfrm>
-            <a:off x="822960" y="4251960"/>
-            <a:ext cx="10543032" cy="1005840"/>
+            <a:off x="822960" y="3657600"/>
+            <a:ext cx="10543032" cy="1371600"/>
           </a:xfrm>
           <a:prstGeom prst="rect">
             <a:avLst/>
@@ -3467,7 +3274,7 @@
               <a:buNone/>
             </a:pPr>
             <a:r>
-              <a:rPr lang="en-US" sz="1600" i="1" dirty="0">
+              <a:rPr lang="en-US" sz="1550" dirty="0">
                 <a:solidFill>
                   <a:srgbClr val="D8DCE8"/>
                 </a:solidFill>
@@ -3475,22 +3282,93 @@
                 <a:ea typeface="Cambria" pitchFamily="34" charset="-122"/>
                 <a:cs typeface="Cambria" pitchFamily="34" charset="-120"/>
               </a:rPr>
-              <a:t>Adiar isso não é ficar parado: é pagar juro composto na moeda errada. O próximo passo não custa nada e cabe em 45 minutos: o Mapa de Vazamento da sua operação.</a:t>
-            </a:r>
-            <a:endParaRPr lang="en-US" sz="1600" dirty="0"/>
-          </a:p>
-        </p:txBody>
-      </p:sp>
-      <p:sp>
-        <p:nvSpPr>
-          <p:cNvPr id="6" name="Text 4"/>
-          <p:cNvSpPr/>
-          <p:nvPr/>
-        </p:nvSpPr>
-        <p:spPr>
-          <a:xfrm>
-            <a:off x="822960" y="5440680"/>
-            <a:ext cx="10543032" cy="365760"/>
+              <a:t>Se o resultado medido não confirmar o critério combinado em contrato, o Programa se encerra ali: sem multa, sem renegociação, e com todos os entregáveis da fase em suas mãos. Os portões se repetem no mês seis e no mês doze. Nenhuma fase se inicia sem que a anterior tenha comprovado o seu resultado.</a:t>
+            </a:r>
+            <a:endParaRPr lang="en-US" sz="1550" dirty="0"/>
+          </a:p>
+        </p:txBody>
+      </p:sp>
+    </p:spTree>
+  </p:cSld>
+  <p:clrMapOvr>
+    <a:masterClrMapping/>
+  </p:clrMapOvr>
+</p:sld>
+</file>
+
+<file path=ppt/slides/slide13.xml><?xml version="1.0" encoding="utf-8"?>
+<p:sld xmlns:a="http://schemas.openxmlformats.org/drawingml/2006/main" xmlns:r="http://schemas.openxmlformats.org/officeDocument/2006/relationships" xmlns:p="http://schemas.openxmlformats.org/presentationml/2006/main">
+  <p:cSld name="Slide 13">
+    <p:bg>
+      <p:bgPr>
+        <a:solidFill>
+          <a:srgbClr val="FFFFFF"/>
+        </a:solidFill>
+      </p:bgPr>
+    </p:bg>
+    <p:spTree>
+      <p:nvGrpSpPr>
+        <p:cNvPr id="1" name=""/>
+        <p:cNvGrpSpPr/>
+        <p:nvPr/>
+      </p:nvGrpSpPr>
+      <p:grpSpPr>
+        <a:xfrm>
+          <a:off x="0" y="0"/>
+          <a:ext cx="0" cy="0"/>
+          <a:chOff x="0" y="0"/>
+          <a:chExt cx="0" cy="0"/>
+        </a:xfrm>
+      </p:grpSpPr>
+      <p:sp>
+        <p:nvSpPr>
+          <p:cNvPr id="2" name="Text 0"/>
+          <p:cNvSpPr/>
+          <p:nvPr/>
+        </p:nvSpPr>
+        <p:spPr>
+          <a:xfrm>
+            <a:off x="822960" y="548640"/>
+            <a:ext cx="5486400" cy="292608"/>
+          </a:xfrm>
+          <a:prstGeom prst="rect">
+            <a:avLst/>
+          </a:prstGeom>
+          <a:noFill/>
+          <a:ln/>
+        </p:spPr>
+        <p:txBody>
+          <a:bodyPr wrap="square" rtlCol="0" anchor="ctr"/>
+          <a:lstStyle/>
+          <a:p>
+            <a:pPr algn="l" indent="0" marL="0">
+              <a:buNone/>
+            </a:pPr>
+            <a:r>
+              <a:rPr lang="en-US" sz="1100" b="1" spc="300" kern="0" dirty="0">
+                <a:solidFill>
+                  <a:srgbClr val="C2A35B"/>
+                </a:solidFill>
+                <a:latin typeface="Calibri" pitchFamily="34" charset="0"/>
+                <a:ea typeface="Calibri" pitchFamily="34" charset="-122"/>
+                <a:cs typeface="Calibri" pitchFamily="34" charset="-120"/>
+              </a:rPr>
+              <a:t>DEPOIS DO PRIMEIRO ANO</a:t>
+            </a:r>
+            <a:endParaRPr lang="en-US" sz="1100" dirty="0"/>
+          </a:p>
+        </p:txBody>
+      </p:sp>
+      <p:sp>
+        <p:nvSpPr>
+          <p:cNvPr id="3" name="Text 1"/>
+          <p:cNvSpPr/>
+          <p:nvPr/>
+        </p:nvSpPr>
+        <p:spPr>
+          <a:xfrm>
+            <a:off x="822960" y="896112"/>
+            <a:ext cx="10543032" cy="868680"/>
           </a:xfrm>
           <a:prstGeom prst="rect">
             <a:avLst/>
@@ -3503,12 +3381,96 @@
           <a:lstStyle/>
           <a:p>
             <a:pPr indent="0" marL="0">
-              <a:buNone/>
-            </a:pPr>
-            <a:r>
-              <a:rPr lang="en-US" sz="1200" spc="100" kern="0" dirty="0">
-                <a:solidFill>
-                  <a:srgbClr val="D8DCE8"/>
+              <a:lnSpc>
+                <a:spcPts val="3300"/>
+              </a:lnSpc>
+              <a:buNone/>
+            </a:pPr>
+            <a:r>
+              <a:rPr lang="en-US" sz="2700" b="1" dirty="0">
+                <a:solidFill>
+                  <a:srgbClr val="1B2A4A"/>
+                </a:solidFill>
+                <a:latin typeface="Cambria" pitchFamily="34" charset="0"/>
+                <a:ea typeface="Cambria" pitchFamily="34" charset="-122"/>
+                <a:cs typeface="Cambria" pitchFamily="34" charset="-120"/>
+              </a:rPr>
+              <a:t>A relação não termina: ela passa a ser medida todo ano.</a:t>
+            </a:r>
+            <a:endParaRPr lang="en-US" sz="2700" dirty="0"/>
+          </a:p>
+        </p:txBody>
+      </p:sp>
+      <p:sp>
+        <p:nvSpPr>
+          <p:cNvPr id="4" name="Text 2"/>
+          <p:cNvSpPr/>
+          <p:nvPr/>
+        </p:nvSpPr>
+        <p:spPr>
+          <a:xfrm>
+            <a:off x="822960" y="1810512"/>
+            <a:ext cx="10543032" cy="640080"/>
+          </a:xfrm>
+          <a:prstGeom prst="rect">
+            <a:avLst/>
+          </a:prstGeom>
+          <a:noFill/>
+          <a:ln/>
+        </p:spPr>
+        <p:txBody>
+          <a:bodyPr wrap="square" rtlCol="0" anchor="ctr"/>
+          <a:lstStyle/>
+          <a:p>
+            <a:pPr algn="l" indent="0" marL="0">
+              <a:lnSpc>
+                <a:spcPts val="1850"/>
+              </a:lnSpc>
+              <a:buNone/>
+            </a:pPr>
+            <a:r>
+              <a:rPr lang="en-US" sz="1250" dirty="0">
+                <a:solidFill>
+                  <a:srgbClr val="6E6858"/>
+                </a:solidFill>
+                <a:latin typeface="Calibri" pitchFamily="34" charset="0"/>
+                <a:ea typeface="Calibri" pitchFamily="34" charset="-122"/>
+                <a:cs typeface="Calibri" pitchFamily="34" charset="-120"/>
+              </a:rPr>
+              <a:t>Do segundo ano em diante, a empresa opera sozinha e nós ficamos com o que não dá para fazer de dentro:</a:t>
+            </a:r>
+            <a:endParaRPr lang="en-US" sz="1250" dirty="0"/>
+          </a:p>
+        </p:txBody>
+      </p:sp>
+      <p:sp>
+        <p:nvSpPr>
+          <p:cNvPr id="5" name="Text 3"/>
+          <p:cNvSpPr/>
+          <p:nvPr/>
+        </p:nvSpPr>
+        <p:spPr>
+          <a:xfrm>
+            <a:off x="822960" y="6400800"/>
+            <a:ext cx="10543032" cy="274320"/>
+          </a:xfrm>
+          <a:prstGeom prst="rect">
+            <a:avLst/>
+          </a:prstGeom>
+          <a:noFill/>
+          <a:ln/>
+        </p:spPr>
+        <p:txBody>
+          <a:bodyPr wrap="square" rtlCol="0" anchor="ctr"/>
+          <a:lstStyle/>
+          <a:p>
+            <a:pPr algn="ctr" indent="0" marL="0">
+              <a:buNone/>
+            </a:pPr>
+            <a:r>
+              <a:rPr lang="en-US" sz="900" spc="100" kern="0" dirty="0">
+                <a:solidFill>
+                  <a:srgbClr val="6E6858"/>
                 </a:solidFill>
                 <a:latin typeface="Calibri" pitchFamily="34" charset="0"/>
                 <a:ea typeface="Calibri" pitchFamily="34" charset="-122"/>
@@ -3516,7 +3478,1480 @@
               </a:rPr>
               <a:t>ABBA Consultoria de IA · contato@abbaservices.com.br</a:t>
             </a:r>
-            <a:endParaRPr lang="en-US" sz="1200" dirty="0"/>
+            <a:endParaRPr lang="en-US" sz="900" dirty="0"/>
+          </a:p>
+        </p:txBody>
+      </p:sp>
+      <p:sp>
+        <p:nvSpPr>
+          <p:cNvPr id="6" name="Shape 4"/>
+          <p:cNvSpPr/>
+          <p:nvPr/>
+        </p:nvSpPr>
+        <p:spPr>
+          <a:xfrm>
+            <a:off x="822960" y="2651760"/>
+            <a:ext cx="10543032" cy="0"/>
+          </a:xfrm>
+          <a:prstGeom prst="line">
+            <a:avLst/>
+          </a:prstGeom>
+          <a:noFill/>
+          <a:ln w="9525">
+            <a:solidFill>
+              <a:srgbClr val="E5E0D4"/>
+            </a:solidFill>
+            <a:prstDash val="solid"/>
+          </a:ln>
+        </p:spPr>
+      </p:sp>
+      <p:sp>
+        <p:nvSpPr>
+          <p:cNvPr id="7" name="Text 5"/>
+          <p:cNvSpPr/>
+          <p:nvPr/>
+        </p:nvSpPr>
+        <p:spPr>
+          <a:xfrm>
+            <a:off x="822960" y="2761488"/>
+            <a:ext cx="3108960" cy="292608"/>
+          </a:xfrm>
+          <a:prstGeom prst="rect">
+            <a:avLst/>
+          </a:prstGeom>
+          <a:noFill/>
+          <a:ln/>
+        </p:spPr>
+        <p:txBody>
+          <a:bodyPr wrap="square" rtlCol="0" anchor="ctr"/>
+          <a:lstStyle/>
+          <a:p>
+            <a:pPr algn="l" indent="0" marL="0">
+              <a:buNone/>
+            </a:pPr>
+            <a:r>
+              <a:rPr lang="en-US" sz="1050" b="1" spc="300" kern="0" dirty="0">
+                <a:solidFill>
+                  <a:srgbClr val="C2A35B"/>
+                </a:solidFill>
+                <a:latin typeface="Calibri" pitchFamily="34" charset="0"/>
+                <a:ea typeface="Calibri" pitchFamily="34" charset="-122"/>
+                <a:cs typeface="Calibri" pitchFamily="34" charset="-120"/>
+              </a:rPr>
+              <a:t>OPERAÇÃO ACOMPANHADA</a:t>
+            </a:r>
+            <a:endParaRPr lang="en-US" sz="1050" dirty="0"/>
+          </a:p>
+        </p:txBody>
+      </p:sp>
+      <p:sp>
+        <p:nvSpPr>
+          <p:cNvPr id="8" name="Text 6"/>
+          <p:cNvSpPr/>
+          <p:nvPr/>
+        </p:nvSpPr>
+        <p:spPr>
+          <a:xfrm>
+            <a:off x="4114800" y="2743200"/>
+            <a:ext cx="7251192" cy="914400"/>
+          </a:xfrm>
+          <a:prstGeom prst="rect">
+            <a:avLst/>
+          </a:prstGeom>
+          <a:noFill/>
+          <a:ln/>
+        </p:spPr>
+        <p:txBody>
+          <a:bodyPr wrap="square" rtlCol="0" anchor="ctr"/>
+          <a:lstStyle/>
+          <a:p>
+            <a:pPr algn="l" indent="0" marL="0">
+              <a:lnSpc>
+                <a:spcPts val="1900"/>
+              </a:lnSpc>
+              <a:buNone/>
+            </a:pPr>
+            <a:r>
+              <a:rPr lang="en-US" sz="1300" dirty="0">
+                <a:solidFill>
+                  <a:srgbClr val="33394A"/>
+                </a:solidFill>
+                <a:latin typeface="Calibri" pitchFamily="34" charset="0"/>
+                <a:ea typeface="Calibri" pitchFamily="34" charset="-122"/>
+                <a:cs typeface="Calibri" pitchFamily="34" charset="-120"/>
+              </a:rPr>
+              <a:t>SLA, presença semanal e relatório mensal de projetado versus realizado.</a:t>
+            </a:r>
+            <a:endParaRPr lang="en-US" sz="1300" dirty="0"/>
+          </a:p>
+        </p:txBody>
+      </p:sp>
+      <p:sp>
+        <p:nvSpPr>
+          <p:cNvPr id="9" name="Shape 7"/>
+          <p:cNvSpPr/>
+          <p:nvPr/>
+        </p:nvSpPr>
+        <p:spPr>
+          <a:xfrm>
+            <a:off x="822960" y="3794760"/>
+            <a:ext cx="10543032" cy="0"/>
+          </a:xfrm>
+          <a:prstGeom prst="line">
+            <a:avLst/>
+          </a:prstGeom>
+          <a:noFill/>
+          <a:ln w="9525">
+            <a:solidFill>
+              <a:srgbClr val="E5E0D4"/>
+            </a:solidFill>
+            <a:prstDash val="solid"/>
+          </a:ln>
+        </p:spPr>
+      </p:sp>
+      <p:sp>
+        <p:nvSpPr>
+          <p:cNvPr id="10" name="Text 8"/>
+          <p:cNvSpPr/>
+          <p:nvPr/>
+        </p:nvSpPr>
+        <p:spPr>
+          <a:xfrm>
+            <a:off x="822960" y="3904488"/>
+            <a:ext cx="3108960" cy="292608"/>
+          </a:xfrm>
+          <a:prstGeom prst="rect">
+            <a:avLst/>
+          </a:prstGeom>
+          <a:noFill/>
+          <a:ln/>
+        </p:spPr>
+        <p:txBody>
+          <a:bodyPr wrap="square" rtlCol="0" anchor="ctr"/>
+          <a:lstStyle/>
+          <a:p>
+            <a:pPr algn="l" indent="0" marL="0">
+              <a:buNone/>
+            </a:pPr>
+            <a:r>
+              <a:rPr lang="en-US" sz="1050" b="1" spc="300" kern="0" dirty="0">
+                <a:solidFill>
+                  <a:srgbClr val="C2A35B"/>
+                </a:solidFill>
+                <a:latin typeface="Calibri" pitchFamily="34" charset="0"/>
+                <a:ea typeface="Calibri" pitchFamily="34" charset="-122"/>
+                <a:cs typeface="Calibri" pitchFamily="34" charset="-120"/>
+              </a:rPr>
+              <a:t>CONSELHO TRIMESTRAL</a:t>
+            </a:r>
+            <a:endParaRPr lang="en-US" sz="1050" dirty="0"/>
+          </a:p>
+        </p:txBody>
+      </p:sp>
+      <p:sp>
+        <p:nvSpPr>
+          <p:cNvPr id="11" name="Text 9"/>
+          <p:cNvSpPr/>
+          <p:nvPr/>
+        </p:nvSpPr>
+        <p:spPr>
+          <a:xfrm>
+            <a:off x="4114800" y="3886200"/>
+            <a:ext cx="7251192" cy="914400"/>
+          </a:xfrm>
+          <a:prstGeom prst="rect">
+            <a:avLst/>
+          </a:prstGeom>
+          <a:noFill/>
+          <a:ln/>
+        </p:spPr>
+        <p:txBody>
+          <a:bodyPr wrap="square" rtlCol="0" anchor="ctr"/>
+          <a:lstStyle/>
+          <a:p>
+            <a:pPr algn="l" indent="0" marL="0">
+              <a:lnSpc>
+                <a:spcPts val="1900"/>
+              </a:lnSpc>
+              <a:buNone/>
+            </a:pPr>
+            <a:r>
+              <a:rPr lang="en-US" sz="1300" dirty="0">
+                <a:solidFill>
+                  <a:srgbClr val="33394A"/>
+                </a:solidFill>
+                <a:latin typeface="Calibri" pitchFamily="34" charset="0"/>
+                <a:ea typeface="Calibri" pitchFamily="34" charset="-122"/>
+                <a:cs typeface="Calibri" pitchFamily="34" charset="-120"/>
+              </a:rPr>
+              <a:t>A pauta de IA da diretoria, preparada e defendida por quem mediu o ano inteiro.</a:t>
+            </a:r>
+            <a:endParaRPr lang="en-US" sz="1300" dirty="0"/>
+          </a:p>
+        </p:txBody>
+      </p:sp>
+      <p:sp>
+        <p:nvSpPr>
+          <p:cNvPr id="12" name="Shape 10"/>
+          <p:cNvSpPr/>
+          <p:nvPr/>
+        </p:nvSpPr>
+        <p:spPr>
+          <a:xfrm>
+            <a:off x="822960" y="4937760"/>
+            <a:ext cx="10543032" cy="0"/>
+          </a:xfrm>
+          <a:prstGeom prst="line">
+            <a:avLst/>
+          </a:prstGeom>
+          <a:noFill/>
+          <a:ln w="9525">
+            <a:solidFill>
+              <a:srgbClr val="E5E0D4"/>
+            </a:solidFill>
+            <a:prstDash val="solid"/>
+          </a:ln>
+        </p:spPr>
+      </p:sp>
+      <p:sp>
+        <p:nvSpPr>
+          <p:cNvPr id="13" name="Text 11"/>
+          <p:cNvSpPr/>
+          <p:nvPr/>
+        </p:nvSpPr>
+        <p:spPr>
+          <a:xfrm>
+            <a:off x="822960" y="5047488"/>
+            <a:ext cx="3108960" cy="292608"/>
+          </a:xfrm>
+          <a:prstGeom prst="rect">
+            <a:avLst/>
+          </a:prstGeom>
+          <a:noFill/>
+          <a:ln/>
+        </p:spPr>
+        <p:txBody>
+          <a:bodyPr wrap="square" rtlCol="0" anchor="ctr"/>
+          <a:lstStyle/>
+          <a:p>
+            <a:pPr algn="l" indent="0" marL="0">
+              <a:buNone/>
+            </a:pPr>
+            <a:r>
+              <a:rPr lang="en-US" sz="1050" b="1" spc="300" kern="0" dirty="0">
+                <a:solidFill>
+                  <a:srgbClr val="C2A35B"/>
+                </a:solidFill>
+                <a:latin typeface="Calibri" pitchFamily="34" charset="0"/>
+                <a:ea typeface="Calibri" pitchFamily="34" charset="-122"/>
+                <a:cs typeface="Calibri" pitchFamily="34" charset="-120"/>
+              </a:rPr>
+              <a:t>O EXAME ANUAL DE IA</a:t>
+            </a:r>
+            <a:endParaRPr lang="en-US" sz="1050" dirty="0"/>
+          </a:p>
+        </p:txBody>
+      </p:sp>
+      <p:sp>
+        <p:nvSpPr>
+          <p:cNvPr id="14" name="Text 12"/>
+          <p:cNvSpPr/>
+          <p:nvPr/>
+        </p:nvSpPr>
+        <p:spPr>
+          <a:xfrm>
+            <a:off x="4114800" y="5029200"/>
+            <a:ext cx="7251192" cy="914400"/>
+          </a:xfrm>
+          <a:prstGeom prst="rect">
+            <a:avLst/>
+          </a:prstGeom>
+          <a:noFill/>
+          <a:ln/>
+        </p:spPr>
+        <p:txBody>
+          <a:bodyPr wrap="square" rtlCol="0" anchor="ctr"/>
+          <a:lstStyle/>
+          <a:p>
+            <a:pPr algn="l" indent="0" marL="0">
+              <a:lnSpc>
+                <a:spcPts val="1900"/>
+              </a:lnSpc>
+              <a:buNone/>
+            </a:pPr>
+            <a:r>
+              <a:rPr lang="en-US" sz="1300" dirty="0">
+                <a:solidFill>
+                  <a:srgbClr val="33394A"/>
+                </a:solidFill>
+                <a:latin typeface="Calibri" pitchFamily="34" charset="0"/>
+                <a:ea typeface="Calibri" pitchFamily="34" charset="-122"/>
+                <a:cs typeface="Calibri" pitchFamily="34" charset="-120"/>
+              </a:rPr>
+              <a:t>A re-medição completa da maturidade, comparada ano contra ano: a série histórica que só existe aqui e vale mais a cada ano.</a:t>
+            </a:r>
+            <a:endParaRPr lang="en-US" sz="1300" dirty="0"/>
+          </a:p>
+        </p:txBody>
+      </p:sp>
+      <p:sp>
+        <p:nvSpPr>
+          <p:cNvPr id="15" name="Text 13"/>
+          <p:cNvSpPr/>
+          <p:nvPr/>
+        </p:nvSpPr>
+        <p:spPr>
+          <a:xfrm>
+            <a:off x="822960" y="6035040"/>
+            <a:ext cx="10543032" cy="457200"/>
+          </a:xfrm>
+          <a:prstGeom prst="rect">
+            <a:avLst/>
+          </a:prstGeom>
+          <a:noFill/>
+          <a:ln/>
+        </p:spPr>
+        <p:txBody>
+          <a:bodyPr wrap="square" rtlCol="0" anchor="ctr"/>
+          <a:lstStyle/>
+          <a:p>
+            <a:pPr algn="ctr" indent="0" marL="0">
+              <a:lnSpc>
+                <a:spcPts val="2000"/>
+              </a:lnSpc>
+              <a:buNone/>
+            </a:pPr>
+            <a:r>
+              <a:rPr lang="en-US" sz="1250" i="1" dirty="0">
+                <a:solidFill>
+                  <a:srgbClr val="1B2A4A"/>
+                </a:solidFill>
+                <a:latin typeface="Cambria" pitchFamily="34" charset="0"/>
+                <a:ea typeface="Cambria" pitchFamily="34" charset="-122"/>
+                <a:cs typeface="Cambria" pitchFamily="34" charset="-120"/>
+              </a:rPr>
+              <a:t>É do Exame que sai a fila de oportunidades do ano seguinte: melhorias que só aparecem depois que o fluxo novo existe.</a:t>
+            </a:r>
+            <a:endParaRPr lang="en-US" sz="1250" dirty="0"/>
+          </a:p>
+        </p:txBody>
+      </p:sp>
+    </p:spTree>
+  </p:cSld>
+  <p:clrMapOvr>
+    <a:masterClrMapping/>
+  </p:clrMapOvr>
+</p:sld>
+</file>
+
+<file path=ppt/slides/slide14.xml><?xml version="1.0" encoding="utf-8"?>
+<p:sld xmlns:a="http://schemas.openxmlformats.org/drawingml/2006/main" xmlns:r="http://schemas.openxmlformats.org/officeDocument/2006/relationships" xmlns:p="http://schemas.openxmlformats.org/presentationml/2006/main">
+  <p:cSld name="Slide 14">
+    <p:bg>
+      <p:bgPr>
+        <a:solidFill>
+          <a:srgbClr val="FFFFFF"/>
+        </a:solidFill>
+      </p:bgPr>
+    </p:bg>
+    <p:spTree>
+      <p:nvGrpSpPr>
+        <p:cNvPr id="1" name=""/>
+        <p:cNvGrpSpPr/>
+        <p:nvPr/>
+      </p:nvGrpSpPr>
+      <p:grpSpPr>
+        <a:xfrm>
+          <a:off x="0" y="0"/>
+          <a:ext cx="0" cy="0"/>
+          <a:chOff x="0" y="0"/>
+          <a:chExt cx="0" cy="0"/>
+        </a:xfrm>
+      </p:grpSpPr>
+      <p:sp>
+        <p:nvSpPr>
+          <p:cNvPr id="2" name="Text 0"/>
+          <p:cNvSpPr/>
+          <p:nvPr/>
+        </p:nvSpPr>
+        <p:spPr>
+          <a:xfrm>
+            <a:off x="822960" y="548640"/>
+            <a:ext cx="5486400" cy="292608"/>
+          </a:xfrm>
+          <a:prstGeom prst="rect">
+            <a:avLst/>
+          </a:prstGeom>
+          <a:noFill/>
+          <a:ln/>
+        </p:spPr>
+        <p:txBody>
+          <a:bodyPr wrap="square" rtlCol="0" anchor="ctr"/>
+          <a:lstStyle/>
+          <a:p>
+            <a:pPr algn="l" indent="0" marL="0">
+              <a:buNone/>
+            </a:pPr>
+            <a:r>
+              <a:rPr lang="en-US" sz="1100" b="1" spc="300" kern="0" dirty="0">
+                <a:solidFill>
+                  <a:srgbClr val="C2A35B"/>
+                </a:solidFill>
+                <a:latin typeface="Calibri" pitchFamily="34" charset="0"/>
+                <a:ea typeface="Calibri" pitchFamily="34" charset="-122"/>
+                <a:cs typeface="Calibri" pitchFamily="34" charset="-120"/>
+              </a:rPr>
+              <a:t>JÁ TEM IA RODANDO?</a:t>
+            </a:r>
+            <a:endParaRPr lang="en-US" sz="1100" dirty="0"/>
+          </a:p>
+        </p:txBody>
+      </p:sp>
+      <p:sp>
+        <p:nvSpPr>
+          <p:cNvPr id="3" name="Text 1"/>
+          <p:cNvSpPr/>
+          <p:nvPr/>
+        </p:nvSpPr>
+        <p:spPr>
+          <a:xfrm>
+            <a:off x="822960" y="896112"/>
+            <a:ext cx="10543032" cy="868680"/>
+          </a:xfrm>
+          <a:prstGeom prst="rect">
+            <a:avLst/>
+          </a:prstGeom>
+          <a:noFill/>
+          <a:ln/>
+        </p:spPr>
+        <p:txBody>
+          <a:bodyPr wrap="square" rtlCol="0" anchor="ctr"/>
+          <a:lstStyle/>
+          <a:p>
+            <a:pPr indent="0" marL="0">
+              <a:lnSpc>
+                <a:spcPts val="3300"/>
+              </a:lnSpc>
+              <a:buNone/>
+            </a:pPr>
+            <a:r>
+              <a:rPr lang="en-US" sz="2700" b="1" dirty="0">
+                <a:solidFill>
+                  <a:srgbClr val="1B2A4A"/>
+                </a:solidFill>
+                <a:latin typeface="Cambria" pitchFamily="34" charset="0"/>
+                <a:ea typeface="Cambria" pitchFamily="34" charset="-122"/>
+                <a:cs typeface="Cambria" pitchFamily="34" charset="-120"/>
+              </a:rPr>
+              <a:t>O Conselheiro de IA: do seu lado da mesa.</a:t>
+            </a:r>
+            <a:endParaRPr lang="en-US" sz="2700" dirty="0"/>
+          </a:p>
+        </p:txBody>
+      </p:sp>
+      <p:sp>
+        <p:nvSpPr>
+          <p:cNvPr id="4" name="Text 2"/>
+          <p:cNvSpPr/>
+          <p:nvPr/>
+        </p:nvSpPr>
+        <p:spPr>
+          <a:xfrm>
+            <a:off x="822960" y="6400800"/>
+            <a:ext cx="10543032" cy="274320"/>
+          </a:xfrm>
+          <a:prstGeom prst="rect">
+            <a:avLst/>
+          </a:prstGeom>
+          <a:noFill/>
+          <a:ln/>
+        </p:spPr>
+        <p:txBody>
+          <a:bodyPr wrap="square" rtlCol="0" anchor="ctr"/>
+          <a:lstStyle/>
+          <a:p>
+            <a:pPr algn="ctr" indent="0" marL="0">
+              <a:buNone/>
+            </a:pPr>
+            <a:r>
+              <a:rPr lang="en-US" sz="900" spc="100" kern="0" dirty="0">
+                <a:solidFill>
+                  <a:srgbClr val="6E6858"/>
+                </a:solidFill>
+                <a:latin typeface="Calibri" pitchFamily="34" charset="0"/>
+                <a:ea typeface="Calibri" pitchFamily="34" charset="-122"/>
+                <a:cs typeface="Calibri" pitchFamily="34" charset="-120"/>
+              </a:rPr>
+              <a:t>ABBA Consultoria de IA · contato@abbaservices.com.br</a:t>
+            </a:r>
+            <a:endParaRPr lang="en-US" sz="900" dirty="0"/>
+          </a:p>
+        </p:txBody>
+      </p:sp>
+      <p:pic>
+        <p:nvPicPr>
+          <p:cNvPr id="5" name="Image 0" descr="/home/user/abba-ops/08-materiais/assets/fotos/conselheiro--parecer-arbitragem.jpg">    </p:cNvPr>
+          <p:cNvPicPr>
+            <a:picLocks noChangeAspect="1"/>
+          </p:cNvPicPr>
+          <p:nvPr/>
+        </p:nvPicPr>
+        <p:blipFill>
+          <a:blip r:embed="rId1"/>
+          <a:stretch>
+            <a:fillRect/>
+          </a:stretch>
+        </p:blipFill>
+        <p:spPr>
+          <a:xfrm>
+            <a:off x="9262872" y="1965960"/>
+            <a:ext cx="2103120" cy="2971800"/>
+          </a:xfrm>
+          <a:prstGeom prst="rect">
+            <a:avLst/>
+          </a:prstGeom>
+        </p:spPr>
+      </p:pic>
+      <p:sp>
+        <p:nvSpPr>
+          <p:cNvPr id="6" name="Text 3"/>
+          <p:cNvSpPr/>
+          <p:nvPr/>
+        </p:nvSpPr>
+        <p:spPr>
+          <a:xfrm>
+            <a:off x="9262872" y="4965192"/>
+            <a:ext cx="2103120" cy="365760"/>
+          </a:xfrm>
+          <a:prstGeom prst="rect">
+            <a:avLst/>
+          </a:prstGeom>
+          <a:noFill/>
+          <a:ln/>
+        </p:spPr>
+        <p:txBody>
+          <a:bodyPr wrap="square" rtlCol="0" anchor="ctr"/>
+          <a:lstStyle/>
+          <a:p>
+            <a:pPr algn="l" indent="0" marL="0">
+              <a:lnSpc>
+                <a:spcPts val="1200"/>
+              </a:lnSpc>
+              <a:buNone/>
+            </a:pPr>
+            <a:r>
+              <a:rPr lang="en-US" sz="900" i="1" dirty="0">
+                <a:solidFill>
+                  <a:srgbClr val="6E6858"/>
+                </a:solidFill>
+                <a:latin typeface="Calibri" pitchFamily="34" charset="0"/>
+                <a:ea typeface="Calibri" pitchFamily="34" charset="-122"/>
+                <a:cs typeface="Calibri" pitchFamily="34" charset="-120"/>
+              </a:rPr>
+              <a:t>Um parecer de arbitragem real (empresa preservada).</a:t>
+            </a:r>
+            <a:endParaRPr lang="en-US" sz="900" dirty="0"/>
+          </a:p>
+        </p:txBody>
+      </p:sp>
+      <p:sp>
+        <p:nvSpPr>
+          <p:cNvPr id="7" name="Shape 4"/>
+          <p:cNvSpPr/>
+          <p:nvPr/>
+        </p:nvSpPr>
+        <p:spPr>
+          <a:xfrm>
+            <a:off x="822960" y="1965960"/>
+            <a:ext cx="7982712" cy="0"/>
+          </a:xfrm>
+          <a:prstGeom prst="line">
+            <a:avLst/>
+          </a:prstGeom>
+          <a:noFill/>
+          <a:ln w="15240">
+            <a:solidFill>
+              <a:srgbClr val="C2A35B"/>
+            </a:solidFill>
+            <a:prstDash val="solid"/>
+          </a:ln>
+        </p:spPr>
+      </p:sp>
+      <p:sp>
+        <p:nvSpPr>
+          <p:cNvPr id="8" name="Text 5"/>
+          <p:cNvSpPr/>
+          <p:nvPr/>
+        </p:nvSpPr>
+        <p:spPr>
+          <a:xfrm>
+            <a:off x="822960" y="2084832"/>
+            <a:ext cx="7982712" cy="292608"/>
+          </a:xfrm>
+          <a:prstGeom prst="rect">
+            <a:avLst/>
+          </a:prstGeom>
+          <a:noFill/>
+          <a:ln/>
+        </p:spPr>
+        <p:txBody>
+          <a:bodyPr wrap="square" rtlCol="0" anchor="ctr"/>
+          <a:lstStyle/>
+          <a:p>
+            <a:pPr algn="l" indent="0" marL="0">
+              <a:buNone/>
+            </a:pPr>
+            <a:r>
+              <a:rPr lang="en-US" sz="1050" b="1" spc="300" kern="0" dirty="0">
+                <a:solidFill>
+                  <a:srgbClr val="C2A35B"/>
+                </a:solidFill>
+                <a:latin typeface="Calibri" pitchFamily="34" charset="0"/>
+                <a:ea typeface="Calibri" pitchFamily="34" charset="-122"/>
+                <a:cs typeface="Calibri" pitchFamily="34" charset="-120"/>
+              </a:rPr>
+              <a:t>A CADEIRA DE ESTRATEGISTA DE IA DA SUA EMPRESA</a:t>
+            </a:r>
+            <a:endParaRPr lang="en-US" sz="1050" dirty="0"/>
+          </a:p>
+        </p:txBody>
+      </p:sp>
+      <p:sp>
+        <p:nvSpPr>
+          <p:cNvPr id="9" name="Text 6"/>
+          <p:cNvSpPr/>
+          <p:nvPr/>
+        </p:nvSpPr>
+        <p:spPr>
+          <a:xfrm>
+            <a:off x="822960" y="2423160"/>
+            <a:ext cx="960120" cy="256032"/>
+          </a:xfrm>
+          <a:prstGeom prst="rect">
+            <a:avLst/>
+          </a:prstGeom>
+          <a:noFill/>
+          <a:ln/>
+        </p:spPr>
+        <p:txBody>
+          <a:bodyPr wrap="square" rtlCol="0" anchor="ctr"/>
+          <a:lstStyle/>
+          <a:p>
+            <a:pPr indent="0" marL="0">
+              <a:buNone/>
+            </a:pPr>
+            <a:r>
+              <a:rPr lang="en-US" sz="850" b="1" spc="200" kern="0" dirty="0">
+                <a:solidFill>
+                  <a:srgbClr val="C2A35B"/>
+                </a:solidFill>
+                <a:latin typeface="Calibri" pitchFamily="34" charset="0"/>
+                <a:ea typeface="Calibri" pitchFamily="34" charset="-122"/>
+                <a:cs typeface="Calibri" pitchFamily="34" charset="-120"/>
+              </a:rPr>
+              <a:t>O QUÊ</a:t>
+            </a:r>
+            <a:endParaRPr lang="en-US" sz="850" dirty="0"/>
+          </a:p>
+        </p:txBody>
+      </p:sp>
+      <p:sp>
+        <p:nvSpPr>
+          <p:cNvPr id="10" name="Text 7"/>
+          <p:cNvSpPr/>
+          <p:nvPr/>
+        </p:nvSpPr>
+        <p:spPr>
+          <a:xfrm>
+            <a:off x="1828800" y="2404872"/>
+            <a:ext cx="6976872" cy="658368"/>
+          </a:xfrm>
+          <a:prstGeom prst="rect">
+            <a:avLst/>
+          </a:prstGeom>
+          <a:noFill/>
+          <a:ln/>
+        </p:spPr>
+        <p:txBody>
+          <a:bodyPr wrap="square" rtlCol="0" anchor="ctr"/>
+          <a:lstStyle/>
+          <a:p>
+            <a:pPr algn="l" indent="0" marL="0">
+              <a:lnSpc>
+                <a:spcPts val="1450"/>
+              </a:lnSpc>
+              <a:buNone/>
+            </a:pPr>
+            <a:r>
+              <a:rPr lang="en-US" sz="1050" dirty="0">
+                <a:solidFill>
+                  <a:srgbClr val="33394A"/>
+                </a:solidFill>
+                <a:latin typeface="Calibri" pitchFamily="34" charset="0"/>
+                <a:ea typeface="Calibri" pitchFamily="34" charset="-122"/>
+                <a:cs typeface="Calibri" pitchFamily="34" charset="-120"/>
+              </a:rPr>
+              <a:t>Um estrategista presente na sua diretoria, em regime recorrente: o roadmap de IA vivo e revisado a cada ciclo, a governança vigiada, e análise independente de qualquer proposta de fornecedor que chegar à sua mesa.</a:t>
+            </a:r>
+            <a:endParaRPr lang="en-US" sz="1050" dirty="0"/>
+          </a:p>
+        </p:txBody>
+      </p:sp>
+      <p:sp>
+        <p:nvSpPr>
+          <p:cNvPr id="11" name="Text 8"/>
+          <p:cNvSpPr/>
+          <p:nvPr/>
+        </p:nvSpPr>
+        <p:spPr>
+          <a:xfrm>
+            <a:off x="822960" y="3191256"/>
+            <a:ext cx="960120" cy="256032"/>
+          </a:xfrm>
+          <a:prstGeom prst="rect">
+            <a:avLst/>
+          </a:prstGeom>
+          <a:noFill/>
+          <a:ln/>
+        </p:spPr>
+        <p:txBody>
+          <a:bodyPr wrap="square" rtlCol="0" anchor="ctr"/>
+          <a:lstStyle/>
+          <a:p>
+            <a:pPr indent="0" marL="0">
+              <a:buNone/>
+            </a:pPr>
+            <a:r>
+              <a:rPr lang="en-US" sz="850" b="1" spc="200" kern="0" dirty="0">
+                <a:solidFill>
+                  <a:srgbClr val="C2A35B"/>
+                </a:solidFill>
+                <a:latin typeface="Calibri" pitchFamily="34" charset="0"/>
+                <a:ea typeface="Calibri" pitchFamily="34" charset="-122"/>
+                <a:cs typeface="Calibri" pitchFamily="34" charset="-120"/>
+              </a:rPr>
+              <a:t>POR QUÊ</a:t>
+            </a:r>
+            <a:endParaRPr lang="en-US" sz="850" dirty="0"/>
+          </a:p>
+        </p:txBody>
+      </p:sp>
+      <p:sp>
+        <p:nvSpPr>
+          <p:cNvPr id="12" name="Text 9"/>
+          <p:cNvSpPr/>
+          <p:nvPr/>
+        </p:nvSpPr>
+        <p:spPr>
+          <a:xfrm>
+            <a:off x="1828800" y="3172968"/>
+            <a:ext cx="6976872" cy="621792"/>
+          </a:xfrm>
+          <a:prstGeom prst="rect">
+            <a:avLst/>
+          </a:prstGeom>
+          <a:noFill/>
+          <a:ln/>
+        </p:spPr>
+        <p:txBody>
+          <a:bodyPr wrap="square" rtlCol="0" anchor="ctr"/>
+          <a:lstStyle/>
+          <a:p>
+            <a:pPr algn="l" indent="0" marL="0">
+              <a:lnSpc>
+                <a:spcPts val="1450"/>
+              </a:lnSpc>
+              <a:buNone/>
+            </a:pPr>
+            <a:r>
+              <a:rPr lang="en-US" sz="1050" dirty="0">
+                <a:solidFill>
+                  <a:srgbClr val="33394A"/>
+                </a:solidFill>
+                <a:latin typeface="Calibri" pitchFamily="34" charset="0"/>
+                <a:ea typeface="Calibri" pitchFamily="34" charset="-122"/>
+                <a:cs typeface="Calibri" pitchFamily="34" charset="-120"/>
+              </a:rPr>
+              <a:t>Todo fornecedor de IA tem um vendedor. A sua mesa merece alguém do seu lado quando a fatura chega: isso é real? é para nós? qual o preço justo? Por escrito e sem conflito de interesse.</a:t>
+            </a:r>
+            <a:endParaRPr lang="en-US" sz="1050" dirty="0"/>
+          </a:p>
+        </p:txBody>
+      </p:sp>
+      <p:sp>
+        <p:nvSpPr>
+          <p:cNvPr id="13" name="Text 10"/>
+          <p:cNvSpPr/>
+          <p:nvPr/>
+        </p:nvSpPr>
+        <p:spPr>
+          <a:xfrm>
+            <a:off x="822960" y="3922776"/>
+            <a:ext cx="960120" cy="256032"/>
+          </a:xfrm>
+          <a:prstGeom prst="rect">
+            <a:avLst/>
+          </a:prstGeom>
+          <a:noFill/>
+          <a:ln/>
+        </p:spPr>
+        <p:txBody>
+          <a:bodyPr wrap="square" rtlCol="0" anchor="ctr"/>
+          <a:lstStyle/>
+          <a:p>
+            <a:pPr indent="0" marL="0">
+              <a:buNone/>
+            </a:pPr>
+            <a:r>
+              <a:rPr lang="en-US" sz="850" b="1" spc="200" kern="0" dirty="0">
+                <a:solidFill>
+                  <a:srgbClr val="C2A35B"/>
+                </a:solidFill>
+                <a:latin typeface="Calibri" pitchFamily="34" charset="0"/>
+                <a:ea typeface="Calibri" pitchFamily="34" charset="-122"/>
+                <a:cs typeface="Calibri" pitchFamily="34" charset="-120"/>
+              </a:rPr>
+              <a:t>COMO</a:t>
+            </a:r>
+            <a:endParaRPr lang="en-US" sz="850" dirty="0"/>
+          </a:p>
+        </p:txBody>
+      </p:sp>
+      <p:sp>
+        <p:nvSpPr>
+          <p:cNvPr id="14" name="Text 11"/>
+          <p:cNvSpPr/>
+          <p:nvPr/>
+        </p:nvSpPr>
+        <p:spPr>
+          <a:xfrm>
+            <a:off x="1828800" y="3904488"/>
+            <a:ext cx="6976872" cy="658368"/>
+          </a:xfrm>
+          <a:prstGeom prst="rect">
+            <a:avLst/>
+          </a:prstGeom>
+          <a:noFill/>
+          <a:ln/>
+        </p:spPr>
+        <p:txBody>
+          <a:bodyPr wrap="square" rtlCol="0" anchor="ctr"/>
+          <a:lstStyle/>
+          <a:p>
+            <a:pPr algn="l" indent="0" marL="0">
+              <a:lnSpc>
+                <a:spcPts val="1450"/>
+              </a:lnSpc>
+              <a:buNone/>
+            </a:pPr>
+            <a:r>
+              <a:rPr lang="en-US" sz="1050" dirty="0">
+                <a:solidFill>
+                  <a:srgbClr val="33394A"/>
+                </a:solidFill>
+                <a:latin typeface="Calibri" pitchFamily="34" charset="0"/>
+                <a:ea typeface="Calibri" pitchFamily="34" charset="-122"/>
+                <a:cs typeface="Calibri" pitchFamily="34" charset="-120"/>
+              </a:rPr>
+              <a:t>Presença estruturada, com no máximo três recomendações priorizadas por encontro. Cada recomendação entra no registro com o número que dirá, depois, se deu certo. Cada parecer de fornecedor sai em até cinco dias úteis.</a:t>
+            </a:r>
+            <a:endParaRPr lang="en-US" sz="1050" dirty="0"/>
+          </a:p>
+        </p:txBody>
+      </p:sp>
+      <p:sp>
+        <p:nvSpPr>
+          <p:cNvPr id="15" name="Text 12"/>
+          <p:cNvSpPr/>
+          <p:nvPr/>
+        </p:nvSpPr>
+        <p:spPr>
+          <a:xfrm>
+            <a:off x="822960" y="4690872"/>
+            <a:ext cx="960120" cy="256032"/>
+          </a:xfrm>
+          <a:prstGeom prst="rect">
+            <a:avLst/>
+          </a:prstGeom>
+          <a:noFill/>
+          <a:ln/>
+        </p:spPr>
+        <p:txBody>
+          <a:bodyPr wrap="square" rtlCol="0" anchor="ctr"/>
+          <a:lstStyle/>
+          <a:p>
+            <a:pPr indent="0" marL="0">
+              <a:buNone/>
+            </a:pPr>
+            <a:r>
+              <a:rPr lang="en-US" sz="850" b="1" spc="200" kern="0" dirty="0">
+                <a:solidFill>
+                  <a:srgbClr val="C2A35B"/>
+                </a:solidFill>
+                <a:latin typeface="Calibri" pitchFamily="34" charset="0"/>
+                <a:ea typeface="Calibri" pitchFamily="34" charset="-122"/>
+                <a:cs typeface="Calibri" pitchFamily="34" charset="-120"/>
+              </a:rPr>
+              <a:t>AS PORTAS</a:t>
+            </a:r>
+            <a:endParaRPr lang="en-US" sz="850" dirty="0"/>
+          </a:p>
+        </p:txBody>
+      </p:sp>
+      <p:sp>
+        <p:nvSpPr>
+          <p:cNvPr id="16" name="Text 13"/>
+          <p:cNvSpPr/>
+          <p:nvPr/>
+        </p:nvSpPr>
+        <p:spPr>
+          <a:xfrm>
+            <a:off x="1828800" y="4672584"/>
+            <a:ext cx="6976872" cy="621792"/>
+          </a:xfrm>
+          <a:prstGeom prst="rect">
+            <a:avLst/>
+          </a:prstGeom>
+          <a:noFill/>
+          <a:ln/>
+        </p:spPr>
+        <p:txBody>
+          <a:bodyPr wrap="square" rtlCol="0" anchor="ctr"/>
+          <a:lstStyle/>
+          <a:p>
+            <a:pPr algn="l" indent="0" marL="0">
+              <a:lnSpc>
+                <a:spcPts val="1450"/>
+              </a:lnSpc>
+              <a:buNone/>
+            </a:pPr>
+            <a:r>
+              <a:rPr lang="en-US" sz="1050" dirty="0">
+                <a:solidFill>
+                  <a:srgbClr val="33394A"/>
+                </a:solidFill>
+                <a:latin typeface="Calibri" pitchFamily="34" charset="0"/>
+                <a:ea typeface="Calibri" pitchFamily="34" charset="-122"/>
+                <a:cs typeface="Calibri" pitchFamily="34" charset="-120"/>
+              </a:rPr>
+              <a:t>A porta natural: ao fim do Programa, a cadeira dá continuidade ao que foi construído. A porta direta: para quem já tem IA rodando e não tem quem dirija. Não precisa do Programa para ter a cadeira.</a:t>
+            </a:r>
+            <a:endParaRPr lang="en-US" sz="1050" dirty="0"/>
+          </a:p>
+        </p:txBody>
+      </p:sp>
+    </p:spTree>
+  </p:cSld>
+  <p:clrMapOvr>
+    <a:masterClrMapping/>
+  </p:clrMapOvr>
+</p:sld>
+</file>
+
+<file path=ppt/slides/slide15.xml><?xml version="1.0" encoding="utf-8"?>
+<p:sld xmlns:a="http://schemas.openxmlformats.org/drawingml/2006/main" xmlns:r="http://schemas.openxmlformats.org/officeDocument/2006/relationships" xmlns:p="http://schemas.openxmlformats.org/presentationml/2006/main">
+  <p:cSld name="Slide 15">
+    <p:bg>
+      <p:bgPr>
+        <a:solidFill>
+          <a:srgbClr val="FFFFFF"/>
+        </a:solidFill>
+      </p:bgPr>
+    </p:bg>
+    <p:spTree>
+      <p:nvGrpSpPr>
+        <p:cNvPr id="1" name=""/>
+        <p:cNvGrpSpPr/>
+        <p:nvPr/>
+      </p:nvGrpSpPr>
+      <p:grpSpPr>
+        <a:xfrm>
+          <a:off x="0" y="0"/>
+          <a:ext cx="0" cy="0"/>
+          <a:chOff x="0" y="0"/>
+          <a:chExt cx="0" cy="0"/>
+        </a:xfrm>
+      </p:grpSpPr>
+      <p:sp>
+        <p:nvSpPr>
+          <p:cNvPr id="2" name="Text 0"/>
+          <p:cNvSpPr/>
+          <p:nvPr/>
+        </p:nvSpPr>
+        <p:spPr>
+          <a:xfrm>
+            <a:off x="822960" y="548640"/>
+            <a:ext cx="5486400" cy="292608"/>
+          </a:xfrm>
+          <a:prstGeom prst="rect">
+            <a:avLst/>
+          </a:prstGeom>
+          <a:noFill/>
+          <a:ln/>
+        </p:spPr>
+        <p:txBody>
+          <a:bodyPr wrap="square" rtlCol="0" anchor="ctr"/>
+          <a:lstStyle/>
+          <a:p>
+            <a:pPr algn="l" indent="0" marL="0">
+              <a:buNone/>
+            </a:pPr>
+            <a:r>
+              <a:rPr lang="en-US" sz="1100" b="1" spc="300" kern="0" dirty="0">
+                <a:solidFill>
+                  <a:srgbClr val="C2A35B"/>
+                </a:solidFill>
+                <a:latin typeface="Calibri" pitchFamily="34" charset="0"/>
+                <a:ea typeface="Calibri" pitchFamily="34" charset="-122"/>
+                <a:cs typeface="Calibri" pitchFamily="34" charset="-120"/>
+              </a:rPr>
+              <a:t>COMO TRABALHAMOS</a:t>
+            </a:r>
+            <a:endParaRPr lang="en-US" sz="1100" dirty="0"/>
+          </a:p>
+        </p:txBody>
+      </p:sp>
+      <p:sp>
+        <p:nvSpPr>
+          <p:cNvPr id="3" name="Text 1"/>
+          <p:cNvSpPr/>
+          <p:nvPr/>
+        </p:nvSpPr>
+        <p:spPr>
+          <a:xfrm>
+            <a:off x="822960" y="896112"/>
+            <a:ext cx="10543032" cy="868680"/>
+          </a:xfrm>
+          <a:prstGeom prst="rect">
+            <a:avLst/>
+          </a:prstGeom>
+          <a:noFill/>
+          <a:ln/>
+        </p:spPr>
+        <p:txBody>
+          <a:bodyPr wrap="square" rtlCol="0" anchor="ctr"/>
+          <a:lstStyle/>
+          <a:p>
+            <a:pPr indent="0" marL="0">
+              <a:lnSpc>
+                <a:spcPts val="3300"/>
+              </a:lnSpc>
+              <a:buNone/>
+            </a:pPr>
+            <a:r>
+              <a:rPr lang="en-US" sz="2700" b="1" dirty="0">
+                <a:solidFill>
+                  <a:srgbClr val="1B2A4A"/>
+                </a:solidFill>
+                <a:latin typeface="Cambria" pitchFamily="34" charset="0"/>
+                <a:ea typeface="Cambria" pitchFamily="34" charset="-122"/>
+                <a:cs typeface="Cambria" pitchFamily="34" charset="-120"/>
+              </a:rPr>
+              <a:t>Prova, não impressão.</a:t>
+            </a:r>
+            <a:endParaRPr lang="en-US" sz="2700" dirty="0"/>
+          </a:p>
+        </p:txBody>
+      </p:sp>
+      <p:sp>
+        <p:nvSpPr>
+          <p:cNvPr id="4" name="Text 2"/>
+          <p:cNvSpPr/>
+          <p:nvPr/>
+        </p:nvSpPr>
+        <p:spPr>
+          <a:xfrm>
+            <a:off x="822960" y="1810512"/>
+            <a:ext cx="10543032" cy="640080"/>
+          </a:xfrm>
+          <a:prstGeom prst="rect">
+            <a:avLst/>
+          </a:prstGeom>
+          <a:noFill/>
+          <a:ln/>
+        </p:spPr>
+        <p:txBody>
+          <a:bodyPr wrap="square" rtlCol="0" anchor="ctr"/>
+          <a:lstStyle/>
+          <a:p>
+            <a:pPr algn="l" indent="0" marL="0">
+              <a:lnSpc>
+                <a:spcPts val="1850"/>
+              </a:lnSpc>
+              <a:buNone/>
+            </a:pPr>
+            <a:r>
+              <a:rPr lang="en-US" sz="1250" dirty="0">
+                <a:solidFill>
+                  <a:srgbClr val="6E6858"/>
+                </a:solidFill>
+                <a:latin typeface="Calibri" pitchFamily="34" charset="0"/>
+                <a:ea typeface="Calibri" pitchFamily="34" charset="-122"/>
+                <a:cs typeface="Calibri" pitchFamily="34" charset="-120"/>
+              </a:rPr>
+              <a:t>Toda decisão entra num diário: métrica combinada antes, resultado medido depois. E vocês veem o registro inteiro, incluindo o que não funcionou. A IA rascunha, um humano assina, a diretoria decide.</a:t>
+            </a:r>
+            <a:endParaRPr lang="en-US" sz="1250" dirty="0"/>
+          </a:p>
+        </p:txBody>
+      </p:sp>
+      <p:sp>
+        <p:nvSpPr>
+          <p:cNvPr id="5" name="Text 3"/>
+          <p:cNvSpPr/>
+          <p:nvPr/>
+        </p:nvSpPr>
+        <p:spPr>
+          <a:xfrm>
+            <a:off x="822960" y="6400800"/>
+            <a:ext cx="10543032" cy="274320"/>
+          </a:xfrm>
+          <a:prstGeom prst="rect">
+            <a:avLst/>
+          </a:prstGeom>
+          <a:noFill/>
+          <a:ln/>
+        </p:spPr>
+        <p:txBody>
+          <a:bodyPr wrap="square" rtlCol="0" anchor="ctr"/>
+          <a:lstStyle/>
+          <a:p>
+            <a:pPr algn="ctr" indent="0" marL="0">
+              <a:buNone/>
+            </a:pPr>
+            <a:r>
+              <a:rPr lang="en-US" sz="900" spc="100" kern="0" dirty="0">
+                <a:solidFill>
+                  <a:srgbClr val="6E6858"/>
+                </a:solidFill>
+                <a:latin typeface="Calibri" pitchFamily="34" charset="0"/>
+                <a:ea typeface="Calibri" pitchFamily="34" charset="-122"/>
+                <a:cs typeface="Calibri" pitchFamily="34" charset="-120"/>
+              </a:rPr>
+              <a:t>ABBA Consultoria de IA · contato@abbaservices.com.br</a:t>
+            </a:r>
+            <a:endParaRPr lang="en-US" sz="900" dirty="0"/>
+          </a:p>
+        </p:txBody>
+      </p:sp>
+      <p:sp>
+        <p:nvSpPr>
+          <p:cNvPr id="6" name="Shape 4"/>
+          <p:cNvSpPr/>
+          <p:nvPr/>
+        </p:nvSpPr>
+        <p:spPr>
+          <a:xfrm>
+            <a:off x="822960" y="2880360"/>
+            <a:ext cx="4997196" cy="0"/>
+          </a:xfrm>
+          <a:prstGeom prst="line">
+            <a:avLst/>
+          </a:prstGeom>
+          <a:noFill/>
+          <a:ln w="15240">
+            <a:solidFill>
+              <a:srgbClr val="C2A35B"/>
+            </a:solidFill>
+            <a:prstDash val="solid"/>
+          </a:ln>
+        </p:spPr>
+      </p:sp>
+      <p:sp>
+        <p:nvSpPr>
+          <p:cNvPr id="7" name="Text 5"/>
+          <p:cNvSpPr/>
+          <p:nvPr/>
+        </p:nvSpPr>
+        <p:spPr>
+          <a:xfrm>
+            <a:off x="822960" y="3017520"/>
+            <a:ext cx="4997196" cy="292608"/>
+          </a:xfrm>
+          <a:prstGeom prst="rect">
+            <a:avLst/>
+          </a:prstGeom>
+          <a:noFill/>
+          <a:ln/>
+        </p:spPr>
+        <p:txBody>
+          <a:bodyPr wrap="square" rtlCol="0" anchor="ctr"/>
+          <a:lstStyle/>
+          <a:p>
+            <a:pPr algn="l" indent="0" marL="0">
+              <a:buNone/>
+            </a:pPr>
+            <a:r>
+              <a:rPr lang="en-US" sz="1100" b="1" spc="300" kern="0" dirty="0">
+                <a:solidFill>
+                  <a:srgbClr val="C2A35B"/>
+                </a:solidFill>
+                <a:latin typeface="Calibri" pitchFamily="34" charset="0"/>
+                <a:ea typeface="Calibri" pitchFamily="34" charset="-122"/>
+                <a:cs typeface="Calibri" pitchFamily="34" charset="-120"/>
+              </a:rPr>
+              <a:t>PROMETEMOS</a:t>
+            </a:r>
+            <a:endParaRPr lang="en-US" sz="1100" dirty="0"/>
+          </a:p>
+        </p:txBody>
+      </p:sp>
+      <p:sp>
+        <p:nvSpPr>
+          <p:cNvPr id="8" name="Text 6"/>
+          <p:cNvSpPr/>
+          <p:nvPr/>
+        </p:nvSpPr>
+        <p:spPr>
+          <a:xfrm>
+            <a:off x="822960" y="3383280"/>
+            <a:ext cx="4997196" cy="1737360"/>
+          </a:xfrm>
+          <a:prstGeom prst="rect">
+            <a:avLst/>
+          </a:prstGeom>
+          <a:noFill/>
+          <a:ln/>
+        </p:spPr>
+        <p:txBody>
+          <a:bodyPr wrap="square" rtlCol="0" anchor="ctr"/>
+          <a:lstStyle/>
+          <a:p>
+            <a:pPr algn="l" indent="0" marL="0">
+              <a:lnSpc>
+                <a:spcPts val="1700"/>
+              </a:lnSpc>
+              <a:buNone/>
+            </a:pPr>
+            <a:r>
+              <a:rPr lang="en-US" sz="1150" dirty="0">
+                <a:solidFill>
+                  <a:srgbClr val="33394A"/>
+                </a:solidFill>
+                <a:latin typeface="Calibri" pitchFamily="34" charset="0"/>
+                <a:ea typeface="Calibri" pitchFamily="34" charset="-122"/>
+                <a:cs typeface="Calibri" pitchFamily="34" charset="-120"/>
+              </a:rPr>
+              <a:t>O método: métrica combinada antes, medida depois, num registro que vocês veem inteiro. · Presença recorrente de quem decide, não um relatório na gaveta. · Honestidade sobre escopo: o que fazemos, nomeado, e o que fica de fora.</a:t>
+            </a:r>
+            <a:endParaRPr lang="en-US" sz="1150" dirty="0"/>
+          </a:p>
+        </p:txBody>
+      </p:sp>
+      <p:sp>
+        <p:nvSpPr>
+          <p:cNvPr id="9" name="Shape 7"/>
+          <p:cNvSpPr/>
+          <p:nvPr/>
+        </p:nvSpPr>
+        <p:spPr>
+          <a:xfrm>
+            <a:off x="6368796" y="2880360"/>
+            <a:ext cx="4997196" cy="0"/>
+          </a:xfrm>
+          <a:prstGeom prst="line">
+            <a:avLst/>
+          </a:prstGeom>
+          <a:noFill/>
+          <a:ln w="15240">
+            <a:solidFill>
+              <a:srgbClr val="C2A35B"/>
+            </a:solidFill>
+            <a:prstDash val="solid"/>
+          </a:ln>
+        </p:spPr>
+      </p:sp>
+      <p:sp>
+        <p:nvSpPr>
+          <p:cNvPr id="10" name="Text 8"/>
+          <p:cNvSpPr/>
+          <p:nvPr/>
+        </p:nvSpPr>
+        <p:spPr>
+          <a:xfrm>
+            <a:off x="6368796" y="3017520"/>
+            <a:ext cx="4997196" cy="292608"/>
+          </a:xfrm>
+          <a:prstGeom prst="rect">
+            <a:avLst/>
+          </a:prstGeom>
+          <a:noFill/>
+          <a:ln/>
+        </p:spPr>
+        <p:txBody>
+          <a:bodyPr wrap="square" rtlCol="0" anchor="ctr"/>
+          <a:lstStyle/>
+          <a:p>
+            <a:pPr algn="l" indent="0" marL="0">
+              <a:buNone/>
+            </a:pPr>
+            <a:r>
+              <a:rPr lang="en-US" sz="1100" b="1" spc="300" kern="0" dirty="0">
+                <a:solidFill>
+                  <a:srgbClr val="C2A35B"/>
+                </a:solidFill>
+                <a:latin typeface="Calibri" pitchFamily="34" charset="0"/>
+                <a:ea typeface="Calibri" pitchFamily="34" charset="-122"/>
+                <a:cs typeface="Calibri" pitchFamily="34" charset="-120"/>
+              </a:rPr>
+              <a:t>RECUSAMOS</a:t>
+            </a:r>
+            <a:endParaRPr lang="en-US" sz="1100" dirty="0"/>
+          </a:p>
+        </p:txBody>
+      </p:sp>
+      <p:sp>
+        <p:nvSpPr>
+          <p:cNvPr id="11" name="Text 9"/>
+          <p:cNvSpPr/>
+          <p:nvPr/>
+        </p:nvSpPr>
+        <p:spPr>
+          <a:xfrm>
+            <a:off x="6368796" y="3383280"/>
+            <a:ext cx="4997196" cy="1737360"/>
+          </a:xfrm>
+          <a:prstGeom prst="rect">
+            <a:avLst/>
+          </a:prstGeom>
+          <a:noFill/>
+          <a:ln/>
+        </p:spPr>
+        <p:txBody>
+          <a:bodyPr wrap="square" rtlCol="0" anchor="ctr"/>
+          <a:lstStyle/>
+          <a:p>
+            <a:pPr algn="l" indent="0" marL="0">
+              <a:lnSpc>
+                <a:spcPts val="1700"/>
+              </a:lnSpc>
+              <a:buNone/>
+            </a:pPr>
+            <a:r>
+              <a:rPr lang="en-US" sz="1150" dirty="0">
+                <a:solidFill>
+                  <a:srgbClr val="33394A"/>
+                </a:solidFill>
+                <a:latin typeface="Calibri" pitchFamily="34" charset="0"/>
+                <a:ea typeface="Calibri" pitchFamily="34" charset="-122"/>
+                <a:cs typeface="Calibri" pitchFamily="34" charset="-120"/>
+              </a:rPr>
+              <a:t>Prometer acurácia que não medimos. · Prever o imprevisível: não vendemos oráculo. · Piloto sem métrica: é a receita documentada do fracasso. · IA decidindo sozinha: a IA rascunha, um humano assina, a diretoria decide.</a:t>
+            </a:r>
+            <a:endParaRPr lang="en-US" sz="1150" dirty="0"/>
+          </a:p>
+        </p:txBody>
+      </p:sp>
+      <p:sp>
+        <p:nvSpPr>
+          <p:cNvPr id="12" name="Shape 10"/>
+          <p:cNvSpPr/>
+          <p:nvPr/>
+        </p:nvSpPr>
+        <p:spPr>
+          <a:xfrm>
+            <a:off x="822960" y="5303520"/>
+            <a:ext cx="10543032" cy="0"/>
+          </a:xfrm>
+          <a:prstGeom prst="line">
+            <a:avLst/>
+          </a:prstGeom>
+          <a:noFill/>
+          <a:ln w="9525">
+            <a:solidFill>
+              <a:srgbClr val="E5E0D4"/>
+            </a:solidFill>
+            <a:prstDash val="solid"/>
+          </a:ln>
+        </p:spPr>
+      </p:sp>
+      <p:pic>
+        <p:nvPicPr>
+          <p:cNvPr id="13" name="Image 0" descr="/home/user/abba-ops/08-materiais/assets/marca/logo-microsoft.png">    </p:cNvPr>
+          <p:cNvPicPr>
+            <a:picLocks noChangeAspect="1"/>
+          </p:cNvPicPr>
+          <p:nvPr/>
+        </p:nvPicPr>
+        <p:blipFill>
+          <a:blip r:embed="rId1"/>
+          <a:stretch>
+            <a:fillRect/>
+          </a:stretch>
+        </p:blipFill>
+        <p:spPr>
+          <a:xfrm>
+            <a:off x="822960" y="5486400"/>
+            <a:ext cx="1271016" cy="274320"/>
+          </a:xfrm>
+          <a:prstGeom prst="rect">
+            <a:avLst/>
+          </a:prstGeom>
+        </p:spPr>
+      </p:pic>
+      <p:pic>
+        <p:nvPicPr>
+          <p:cNvPr id="14" name="Image 1" descr="/home/user/abba-ops/08-materiais/assets/marca/logo-crewai.png">    </p:cNvPr>
+          <p:cNvPicPr>
+            <a:picLocks noChangeAspect="1"/>
+          </p:cNvPicPr>
+          <p:nvPr/>
+        </p:nvPicPr>
+        <p:blipFill>
+          <a:blip r:embed="rId2"/>
+          <a:stretch>
+            <a:fillRect/>
+          </a:stretch>
+        </p:blipFill>
+        <p:spPr>
+          <a:xfrm>
+            <a:off x="2468880" y="5440680"/>
+            <a:ext cx="1207008" cy="365760"/>
+          </a:xfrm>
+          <a:prstGeom prst="rect">
+            <a:avLst/>
+          </a:prstGeom>
+        </p:spPr>
+      </p:pic>
+      <p:sp>
+        <p:nvSpPr>
+          <p:cNvPr id="15" name="Text 11"/>
+          <p:cNvSpPr/>
+          <p:nvPr/>
+        </p:nvSpPr>
+        <p:spPr>
+          <a:xfrm>
+            <a:off x="4114800" y="5468112"/>
+            <a:ext cx="7251192" cy="502920"/>
+          </a:xfrm>
+          <a:prstGeom prst="rect">
+            <a:avLst/>
+          </a:prstGeom>
+          <a:noFill/>
+          <a:ln/>
+        </p:spPr>
+        <p:txBody>
+          <a:bodyPr wrap="square" rtlCol="0" anchor="ctr"/>
+          <a:lstStyle/>
+          <a:p>
+            <a:pPr algn="l" indent="0" marL="0">
+              <a:lnSpc>
+                <a:spcPts val="1800"/>
+              </a:lnSpc>
+              <a:buNone/>
+            </a:pPr>
+            <a:r>
+              <a:rPr lang="en-US" sz="1250" dirty="0">
+                <a:solidFill>
+                  <a:srgbClr val="1B2A4A"/>
+                </a:solidFill>
+                <a:latin typeface="Cambria" pitchFamily="34" charset="0"/>
+                <a:ea typeface="Cambria" pitchFamily="34" charset="-122"/>
+                <a:cs typeface="Cambria" pitchFamily="34" charset="-120"/>
+              </a:rPr>
+              <a:t>A história começa com uma conversa de 45 minutos, e com o seu Mapa de Vazamento, gratuito. contato@abbaservices.com.br</a:t>
+            </a:r>
+            <a:endParaRPr lang="en-US" sz="1250" dirty="0"/>
           </a:p>
         </p:txBody>
       </p:sp>
@@ -3560,7 +4995,7 @@
         </p:nvSpPr>
         <p:spPr>
           <a:xfrm>
-            <a:off x="822960" y="822960"/>
+            <a:off x="822960" y="548640"/>
             <a:ext cx="5486400" cy="292608"/>
           </a:xfrm>
           <a:prstGeom prst="rect">
@@ -3585,7 +5020,7 @@
                 <a:ea typeface="Calibri" pitchFamily="34" charset="-122"/>
                 <a:cs typeface="Calibri" pitchFamily="34" charset="-120"/>
               </a:rPr>
-              <a:t>UMA COISA QUE NINGUÉM FALA EM VOZ ALTA</a:t>
+              <a:t>QUEM SOMOS</a:t>
             </a:r>
             <a:endParaRPr lang="en-US" sz="1100" dirty="0"/>
           </a:p>
@@ -3599,8 +5034,8 @@
         </p:nvSpPr>
         <p:spPr>
           <a:xfrm>
-            <a:off x="822960" y="1371600"/>
-            <a:ext cx="10543032" cy="1645920"/>
+            <a:off x="822960" y="896112"/>
+            <a:ext cx="10543032" cy="868680"/>
           </a:xfrm>
           <a:prstGeom prst="rect">
             <a:avLst/>
@@ -3614,12 +5049,12 @@
           <a:p>
             <a:pPr indent="0" marL="0">
               <a:lnSpc>
-                <a:spcPts val="4000"/>
+                <a:spcPts val="3300"/>
               </a:lnSpc>
               <a:buNone/>
             </a:pPr>
             <a:r>
-              <a:rPr lang="en-US" sz="2900" b="1" dirty="0">
+              <a:rPr lang="en-US" sz="2700" b="1" dirty="0">
                 <a:solidFill>
                   <a:srgbClr val="1B2A4A"/>
                 </a:solidFill>
@@ -3627,34 +5062,50 @@
                 <a:ea typeface="Cambria" pitchFamily="34" charset="-122"/>
                 <a:cs typeface="Cambria" pitchFamily="34" charset="-120"/>
               </a:rPr>
-              <a:t>De cada dez empresas que decidiram usar IA este ano, mais de oito não vão conseguir mostrar um número no fim.</a:t>
-            </a:r>
-            <a:endParaRPr lang="en-US" sz="2900" dirty="0"/>
-          </a:p>
-        </p:txBody>
-      </p:sp>
-      <p:sp>
-        <p:nvSpPr>
-          <p:cNvPr id="4" name="Shape 2"/>
-          <p:cNvSpPr/>
-          <p:nvPr/>
-        </p:nvSpPr>
-        <p:spPr>
-          <a:xfrm>
-            <a:off x="822960" y="3200400"/>
-            <a:ext cx="2011680" cy="0"/>
-          </a:xfrm>
-          <a:prstGeom prst="line">
-            <a:avLst/>
-          </a:prstGeom>
-          <a:noFill/>
-          <a:ln w="19050">
-            <a:solidFill>
-              <a:srgbClr val="C2A35B"/>
-            </a:solidFill>
-            <a:prstDash val="solid"/>
-          </a:ln>
-        </p:spPr>
+              <a:t>Uma consultoria de inteligência artificial.</a:t>
+            </a:r>
+            <a:endParaRPr lang="en-US" sz="2700" dirty="0"/>
+          </a:p>
+        </p:txBody>
+      </p:sp>
+      <p:sp>
+        <p:nvSpPr>
+          <p:cNvPr id="4" name="Text 2"/>
+          <p:cNvSpPr/>
+          <p:nvPr/>
+        </p:nvSpPr>
+        <p:spPr>
+          <a:xfrm>
+            <a:off x="822960" y="6400800"/>
+            <a:ext cx="10543032" cy="274320"/>
+          </a:xfrm>
+          <a:prstGeom prst="rect">
+            <a:avLst/>
+          </a:prstGeom>
+          <a:noFill/>
+          <a:ln/>
+        </p:spPr>
+        <p:txBody>
+          <a:bodyPr wrap="square" rtlCol="0" anchor="ctr"/>
+          <a:lstStyle/>
+          <a:p>
+            <a:pPr algn="ctr" indent="0" marL="0">
+              <a:buNone/>
+            </a:pPr>
+            <a:r>
+              <a:rPr lang="en-US" sz="900" spc="100" kern="0" dirty="0">
+                <a:solidFill>
+                  <a:srgbClr val="6E6858"/>
+                </a:solidFill>
+                <a:latin typeface="Calibri" pitchFamily="34" charset="0"/>
+                <a:ea typeface="Calibri" pitchFamily="34" charset="-122"/>
+                <a:cs typeface="Calibri" pitchFamily="34" charset="-120"/>
+              </a:rPr>
+              <a:t>ABBA Consultoria de IA · contato@abbaservices.com.br</a:t>
+            </a:r>
+            <a:endParaRPr lang="en-US" sz="900" dirty="0"/>
+          </a:p>
+        </p:txBody>
       </p:sp>
       <p:sp>
         <p:nvSpPr>
@@ -3664,50 +5115,8 @@
         </p:nvSpPr>
         <p:spPr>
           <a:xfrm>
-            <a:off x="822960" y="3474720"/>
-            <a:ext cx="10543032" cy="1097280"/>
-          </a:xfrm>
-          <a:prstGeom prst="rect">
-            <a:avLst/>
-          </a:prstGeom>
-          <a:noFill/>
-          <a:ln/>
-        </p:spPr>
-        <p:txBody>
-          <a:bodyPr wrap="square" rtlCol="0" anchor="ctr"/>
-          <a:lstStyle/>
-          <a:p>
-            <a:pPr algn="l" indent="0" marL="0">
-              <a:lnSpc>
-                <a:spcPts val="2300"/>
-              </a:lnSpc>
-              <a:buNone/>
-            </a:pPr>
-            <a:r>
-              <a:rPr lang="en-US" sz="1500" dirty="0">
-                <a:solidFill>
-                  <a:srgbClr val="33394A"/>
-                </a:solidFill>
-                <a:latin typeface="Calibri" pitchFamily="34" charset="0"/>
-                <a:ea typeface="Calibri" pitchFamily="34" charset="-122"/>
-                <a:cs typeface="Calibri" pitchFamily="34" charset="-120"/>
-              </a:rPr>
-              <a:t>E não é por falta de tecnologia. Se entrarmos em dez empresas hoje e perguntarmos se usam inteligência artificial, dez dizem que sim. E estão falando a verdade: tem licença, tem gente usando, tem gente feliz. Só que quando se olha o resultado da empresa, não mudou nada.</a:t>
-            </a:r>
-            <a:endParaRPr lang="en-US" sz="1500" dirty="0"/>
-          </a:p>
-        </p:txBody>
-      </p:sp>
-      <p:sp>
-        <p:nvSpPr>
-          <p:cNvPr id="6" name="Text 4"/>
-          <p:cNvSpPr/>
-          <p:nvPr/>
-        </p:nvSpPr>
-        <p:spPr>
-          <a:xfrm>
-            <a:off x="822960" y="4754880"/>
-            <a:ext cx="10543032" cy="548640"/>
+            <a:off x="822960" y="2057400"/>
+            <a:ext cx="10543032" cy="1188720"/>
           </a:xfrm>
           <a:prstGeom prst="rect">
             <a:avLst/>
@@ -3726,7 +5135,114 @@
               <a:buNone/>
             </a:pPr>
             <a:r>
-              <a:rPr lang="en-US" sz="1600" i="1" dirty="0">
+              <a:rPr lang="en-US" sz="1550" dirty="0">
+                <a:solidFill>
+                  <a:srgbClr val="33394A"/>
+                </a:solidFill>
+                <a:latin typeface="Calibri" pitchFamily="34" charset="0"/>
+                <a:ea typeface="Calibri" pitchFamily="34" charset="-122"/>
+                <a:cs typeface="Calibri" pitchFamily="34" charset="-120"/>
+              </a:rPr>
+              <a:t>Entramos na sua empresa para entendê-la a fundo, construímos as soluções certas para o seu fluxo de trabalho, validamos cada uma com dados reais antes de qualquer investimento pesado, formamos as suas pessoas e ficamos ao seu lado acompanhando, mês a mês, o que mudou.</a:t>
+            </a:r>
+            <a:endParaRPr lang="en-US" sz="1550" dirty="0"/>
+          </a:p>
+        </p:txBody>
+      </p:sp>
+      <p:sp>
+        <p:nvSpPr>
+          <p:cNvPr id="6" name="Shape 4"/>
+          <p:cNvSpPr/>
+          <p:nvPr/>
+        </p:nvSpPr>
+        <p:spPr>
+          <a:xfrm>
+            <a:off x="822960" y="3520440"/>
+            <a:ext cx="10543032" cy="0"/>
+          </a:xfrm>
+          <a:prstGeom prst="line">
+            <a:avLst/>
+          </a:prstGeom>
+          <a:noFill/>
+          <a:ln w="9525">
+            <a:solidFill>
+              <a:srgbClr val="E5E0D4"/>
+            </a:solidFill>
+            <a:prstDash val="solid"/>
+          </a:ln>
+        </p:spPr>
+      </p:sp>
+      <p:sp>
+        <p:nvSpPr>
+          <p:cNvPr id="7" name="Text 5"/>
+          <p:cNvSpPr/>
+          <p:nvPr/>
+        </p:nvSpPr>
+        <p:spPr>
+          <a:xfrm>
+            <a:off x="822960" y="3749040"/>
+            <a:ext cx="10543032" cy="777240"/>
+          </a:xfrm>
+          <a:prstGeom prst="rect">
+            <a:avLst/>
+          </a:prstGeom>
+          <a:noFill/>
+          <a:ln/>
+        </p:spPr>
+        <p:txBody>
+          <a:bodyPr wrap="square" rtlCol="0" anchor="ctr"/>
+          <a:lstStyle/>
+          <a:p>
+            <a:pPr algn="l" indent="0" marL="0">
+              <a:lnSpc>
+                <a:spcPts val="2000"/>
+              </a:lnSpc>
+              <a:buNone/>
+            </a:pPr>
+            <a:r>
+              <a:rPr lang="en-US" sz="1350" dirty="0">
+                <a:solidFill>
+                  <a:srgbClr val="6E6858"/>
+                </a:solidFill>
+                <a:latin typeface="Calibri" pitchFamily="34" charset="0"/>
+                <a:ea typeface="Calibri" pitchFamily="34" charset="-122"/>
+                <a:cs typeface="Calibri" pitchFamily="34" charset="-120"/>
+              </a:rPr>
+              <a:t>Nos próximos minutos, o caminho completo, da primeira conversa à cadeira de estrategista na sua diretoria: o que fazemos em cada etapa, por quê, e como.</a:t>
+            </a:r>
+            <a:endParaRPr lang="en-US" sz="1350" dirty="0"/>
+          </a:p>
+        </p:txBody>
+      </p:sp>
+      <p:sp>
+        <p:nvSpPr>
+          <p:cNvPr id="8" name="Text 6"/>
+          <p:cNvSpPr/>
+          <p:nvPr/>
+        </p:nvSpPr>
+        <p:spPr>
+          <a:xfrm>
+            <a:off x="822960" y="4846320"/>
+            <a:ext cx="10543032" cy="731520"/>
+          </a:xfrm>
+          <a:prstGeom prst="rect">
+            <a:avLst/>
+          </a:prstGeom>
+          <a:noFill/>
+          <a:ln/>
+        </p:spPr>
+        <p:txBody>
+          <a:bodyPr wrap="square" rtlCol="0" anchor="ctr"/>
+          <a:lstStyle/>
+          <a:p>
+            <a:pPr algn="l" indent="0" marL="0">
+              <a:lnSpc>
+                <a:spcPts val="2100"/>
+              </a:lnSpc>
+              <a:buNone/>
+            </a:pPr>
+            <a:r>
+              <a:rPr lang="en-US" sz="1400" i="1" dirty="0">
                 <a:solidFill>
                   <a:srgbClr val="1B2A4A"/>
                 </a:solidFill>
@@ -3734,48 +5250,9 @@
                 <a:ea typeface="Cambria" pitchFamily="34" charset="-122"/>
                 <a:cs typeface="Cambria" pitchFamily="34" charset="-120"/>
               </a:rPr>
-              <a:t>Não é porque a IA não funciona. É porque ela entrou pelo lugar errado.</a:t>
-            </a:r>
-            <a:endParaRPr lang="en-US" sz="1600" dirty="0"/>
-          </a:p>
-        </p:txBody>
-      </p:sp>
-      <p:sp>
-        <p:nvSpPr>
-          <p:cNvPr id="7" name="Text 5"/>
-          <p:cNvSpPr/>
-          <p:nvPr/>
-        </p:nvSpPr>
-        <p:spPr>
-          <a:xfrm>
-            <a:off x="822960" y="6400800"/>
-            <a:ext cx="10543032" cy="274320"/>
-          </a:xfrm>
-          <a:prstGeom prst="rect">
-            <a:avLst/>
-          </a:prstGeom>
-          <a:noFill/>
-          <a:ln/>
-        </p:spPr>
-        <p:txBody>
-          <a:bodyPr wrap="square" rtlCol="0" anchor="ctr"/>
-          <a:lstStyle/>
-          <a:p>
-            <a:pPr algn="ctr" indent="0" marL="0">
-              <a:buNone/>
-            </a:pPr>
-            <a:r>
-              <a:rPr lang="en-US" sz="900" spc="100" kern="0" dirty="0">
-                <a:solidFill>
-                  <a:srgbClr val="6E6858"/>
-                </a:solidFill>
-                <a:latin typeface="Calibri" pitchFamily="34" charset="0"/>
-                <a:ea typeface="Calibri" pitchFamily="34" charset="-122"/>
-                <a:cs typeface="Calibri" pitchFamily="34" charset="-120"/>
-              </a:rPr>
-              <a:t>ABBA Consultoria de IA · contato@abbaservices.com.br</a:t>
-            </a:r>
-            <a:endParaRPr lang="en-US" sz="900" dirty="0"/>
+              <a:t>O nosso processo começa com quem decide e só termina quando chega a quem executa. Uma empresa não muda por uma ponta só.</a:t>
+            </a:r>
+            <a:endParaRPr lang="en-US" sz="1400" dirty="0"/>
           </a:p>
         </p:txBody>
       </p:sp>
@@ -3819,7 +5296,7 @@
         </p:nvSpPr>
         <p:spPr>
           <a:xfrm>
-            <a:off x="822960" y="594360"/>
+            <a:off x="822960" y="822960"/>
             <a:ext cx="5486400" cy="292608"/>
           </a:xfrm>
           <a:prstGeom prst="rect">
@@ -3844,7 +5321,7 @@
                 <a:ea typeface="Calibri" pitchFamily="34" charset="-122"/>
                 <a:cs typeface="Calibri" pitchFamily="34" charset="-120"/>
               </a:rPr>
-              <a:t>POR ONDE A IA ENTRA</a:t>
+              <a:t>UMA COISA QUE NINGUÉM FALA EM VOZ ALTA</a:t>
             </a:r>
             <a:endParaRPr lang="en-US" sz="1100" dirty="0"/>
           </a:p>
@@ -3858,8 +5335,8 @@
         </p:nvSpPr>
         <p:spPr>
           <a:xfrm>
-            <a:off x="822960" y="960120"/>
-            <a:ext cx="10543032" cy="914400"/>
+            <a:off x="822960" y="1371600"/>
+            <a:ext cx="10543032" cy="1645920"/>
           </a:xfrm>
           <a:prstGeom prst="rect">
             <a:avLst/>
@@ -3873,12 +5350,12 @@
           <a:p>
             <a:pPr indent="0" marL="0">
               <a:lnSpc>
-                <a:spcPts val="3400"/>
+                <a:spcPts val="4000"/>
               </a:lnSpc>
               <a:buNone/>
             </a:pPr>
             <a:r>
-              <a:rPr lang="en-US" sz="2800" b="1" dirty="0">
+              <a:rPr lang="en-US" sz="2900" b="1" dirty="0">
                 <a:solidFill>
                   <a:srgbClr val="1B2A4A"/>
                 </a:solidFill>
@@ -3886,67 +5363,28 @@
                 <a:ea typeface="Cambria" pitchFamily="34" charset="-122"/>
                 <a:cs typeface="Cambria" pitchFamily="34" charset="-120"/>
               </a:rPr>
-              <a:t>Na ponta, ou na veia?</a:t>
-            </a:r>
-            <a:endParaRPr lang="en-US" sz="2800" dirty="0"/>
-          </a:p>
-        </p:txBody>
-      </p:sp>
-      <p:sp>
-        <p:nvSpPr>
-          <p:cNvPr id="4" name="Text 2"/>
-          <p:cNvSpPr/>
-          <p:nvPr/>
-        </p:nvSpPr>
-        <p:spPr>
-          <a:xfrm>
-            <a:off x="822960" y="6400800"/>
-            <a:ext cx="10543032" cy="274320"/>
-          </a:xfrm>
-          <a:prstGeom prst="rect">
-            <a:avLst/>
-          </a:prstGeom>
-          <a:noFill/>
-          <a:ln/>
-        </p:spPr>
-        <p:txBody>
-          <a:bodyPr wrap="square" rtlCol="0" anchor="ctr"/>
-          <a:lstStyle/>
-          <a:p>
-            <a:pPr algn="ctr" indent="0" marL="0">
-              <a:buNone/>
-            </a:pPr>
-            <a:r>
-              <a:rPr lang="en-US" sz="900" spc="100" kern="0" dirty="0">
-                <a:solidFill>
-                  <a:srgbClr val="6E6858"/>
-                </a:solidFill>
-                <a:latin typeface="Calibri" pitchFamily="34" charset="0"/>
-                <a:ea typeface="Calibri" pitchFamily="34" charset="-122"/>
-                <a:cs typeface="Calibri" pitchFamily="34" charset="-120"/>
-              </a:rPr>
-              <a:t>ABBA Consultoria de IA · contato@abbaservices.com.br</a:t>
-            </a:r>
-            <a:endParaRPr lang="en-US" sz="900" dirty="0"/>
-          </a:p>
-        </p:txBody>
-      </p:sp>
-      <p:sp>
-        <p:nvSpPr>
-          <p:cNvPr id="5" name="Shape 3"/>
-          <p:cNvSpPr/>
-          <p:nvPr/>
-        </p:nvSpPr>
-        <p:spPr>
-          <a:xfrm>
-            <a:off x="822960" y="2286000"/>
-            <a:ext cx="4997196" cy="0"/>
+              <a:t>De cada dez empresas que decidiram usar IA este ano, mais de oito não vão conseguir mostrar um número no fim.</a:t>
+            </a:r>
+            <a:endParaRPr lang="en-US" sz="2900" dirty="0"/>
+          </a:p>
+        </p:txBody>
+      </p:sp>
+      <p:sp>
+        <p:nvSpPr>
+          <p:cNvPr id="4" name="Shape 2"/>
+          <p:cNvSpPr/>
+          <p:nvPr/>
+        </p:nvSpPr>
+        <p:spPr>
+          <a:xfrm>
+            <a:off x="822960" y="3200400"/>
+            <a:ext cx="2011680" cy="0"/>
           </a:xfrm>
           <a:prstGeom prst="line">
             <a:avLst/>
           </a:prstGeom>
           <a:noFill/>
-          <a:ln w="15240">
+          <a:ln w="19050">
             <a:solidFill>
               <a:srgbClr val="C2A35B"/>
             </a:solidFill>
@@ -3956,53 +5394,14 @@
       </p:sp>
       <p:sp>
         <p:nvSpPr>
-          <p:cNvPr id="6" name="Text 4"/>
-          <p:cNvSpPr/>
-          <p:nvPr/>
-        </p:nvSpPr>
-        <p:spPr>
-          <a:xfrm>
-            <a:off x="822960" y="2432304"/>
-            <a:ext cx="4997196" cy="292608"/>
-          </a:xfrm>
-          <a:prstGeom prst="rect">
-            <a:avLst/>
-          </a:prstGeom>
-          <a:noFill/>
-          <a:ln/>
-        </p:spPr>
-        <p:txBody>
-          <a:bodyPr wrap="square" rtlCol="0" anchor="ctr"/>
-          <a:lstStyle/>
-          <a:p>
-            <a:pPr algn="l" indent="0" marL="0">
-              <a:buNone/>
-            </a:pPr>
-            <a:r>
-              <a:rPr lang="en-US" sz="1100" b="1" spc="300" kern="0" dirty="0">
-                <a:solidFill>
-                  <a:srgbClr val="C2A35B"/>
-                </a:solidFill>
-                <a:latin typeface="Calibri" pitchFamily="34" charset="0"/>
-                <a:ea typeface="Calibri" pitchFamily="34" charset="-122"/>
-                <a:cs typeface="Calibri" pitchFamily="34" charset="-120"/>
-              </a:rPr>
-              <a:t>IA NA PONTA</a:t>
-            </a:r>
-            <a:endParaRPr lang="en-US" sz="1100" dirty="0"/>
-          </a:p>
-        </p:txBody>
-      </p:sp>
-      <p:sp>
-        <p:nvSpPr>
-          <p:cNvPr id="7" name="Text 5"/>
-          <p:cNvSpPr/>
-          <p:nvPr/>
-        </p:nvSpPr>
-        <p:spPr>
-          <a:xfrm>
-            <a:off x="822960" y="2788920"/>
-            <a:ext cx="4997196" cy="2103120"/>
+          <p:cNvPr id="5" name="Text 3"/>
+          <p:cNvSpPr/>
+          <p:nvPr/>
+        </p:nvSpPr>
+        <p:spPr>
+          <a:xfrm>
+            <a:off x="822960" y="3474720"/>
+            <a:ext cx="10543032" cy="1097280"/>
           </a:xfrm>
           <a:prstGeom prst="rect">
             <a:avLst/>
@@ -4016,12 +5415,12 @@
           <a:p>
             <a:pPr algn="l" indent="0" marL="0">
               <a:lnSpc>
-                <a:spcPts val="2000"/>
+                <a:spcPts val="2300"/>
               </a:lnSpc>
               <a:buNone/>
             </a:pPr>
             <a:r>
-              <a:rPr lang="en-US" sz="1350" dirty="0">
+              <a:rPr lang="en-US" sz="1500" dirty="0">
                 <a:solidFill>
                   <a:srgbClr val="33394A"/>
                 </a:solidFill>
@@ -4029,84 +5428,22 @@
                 <a:ea typeface="Calibri" pitchFamily="34" charset="-122"/>
                 <a:cs typeface="Calibri" pitchFamily="34" charset="-120"/>
               </a:rPr>
-              <a:t>Uma pessoa pega uma tarefa, pede para a ferramenta, recebe o resultado. Começo, meio e fim na mão dela. O ganho fica com a pessoa: se ela sai amanhã, o ganho sai junto pela porta. É remédio que a pessoa toma.</a:t>
-            </a:r>
-            <a:endParaRPr lang="en-US" sz="1350" dirty="0"/>
-          </a:p>
-        </p:txBody>
-      </p:sp>
-      <p:sp>
-        <p:nvSpPr>
-          <p:cNvPr id="8" name="Shape 6"/>
-          <p:cNvSpPr/>
-          <p:nvPr/>
-        </p:nvSpPr>
-        <p:spPr>
-          <a:xfrm>
-            <a:off x="6368796" y="2286000"/>
-            <a:ext cx="4997196" cy="0"/>
-          </a:xfrm>
-          <a:prstGeom prst="line">
-            <a:avLst/>
-          </a:prstGeom>
-          <a:noFill/>
-          <a:ln w="15240">
-            <a:solidFill>
-              <a:srgbClr val="C2A35B"/>
-            </a:solidFill>
-            <a:prstDash val="solid"/>
-          </a:ln>
-        </p:spPr>
-      </p:sp>
-      <p:sp>
-        <p:nvSpPr>
-          <p:cNvPr id="9" name="Text 7"/>
-          <p:cNvSpPr/>
-          <p:nvPr/>
-        </p:nvSpPr>
-        <p:spPr>
-          <a:xfrm>
-            <a:off x="6368796" y="2432304"/>
-            <a:ext cx="4997196" cy="292608"/>
-          </a:xfrm>
-          <a:prstGeom prst="rect">
-            <a:avLst/>
-          </a:prstGeom>
-          <a:noFill/>
-          <a:ln/>
-        </p:spPr>
-        <p:txBody>
-          <a:bodyPr wrap="square" rtlCol="0" anchor="ctr"/>
-          <a:lstStyle/>
-          <a:p>
-            <a:pPr algn="l" indent="0" marL="0">
-              <a:buNone/>
-            </a:pPr>
-            <a:r>
-              <a:rPr lang="en-US" sz="1100" b="1" spc="300" kern="0" dirty="0">
-                <a:solidFill>
-                  <a:srgbClr val="C2A35B"/>
-                </a:solidFill>
-                <a:latin typeface="Calibri" pitchFamily="34" charset="0"/>
-                <a:ea typeface="Calibri" pitchFamily="34" charset="-122"/>
-                <a:cs typeface="Calibri" pitchFamily="34" charset="-120"/>
-              </a:rPr>
-              <a:t>IA NA VEIA</a:t>
-            </a:r>
-            <a:endParaRPr lang="en-US" sz="1100" dirty="0"/>
-          </a:p>
-        </p:txBody>
-      </p:sp>
-      <p:sp>
-        <p:nvSpPr>
-          <p:cNvPr id="10" name="Text 8"/>
-          <p:cNvSpPr/>
-          <p:nvPr/>
-        </p:nvSpPr>
-        <p:spPr>
-          <a:xfrm>
-            <a:off x="6368796" y="2788920"/>
-            <a:ext cx="4997196" cy="2103120"/>
+              <a:t>E não é por falta de tecnologia. Se entrarmos em dez empresas hoje e perguntarmos se usam inteligência artificial, dez dizem que sim. E estão falando a verdade: tem licença, tem gente usando, tem gente feliz. Só que quando se olha o resultado da empresa, não mudou nada.</a:t>
+            </a:r>
+            <a:endParaRPr lang="en-US" sz="1500" dirty="0"/>
+          </a:p>
+        </p:txBody>
+      </p:sp>
+      <p:sp>
+        <p:nvSpPr>
+          <p:cNvPr id="6" name="Text 4"/>
+          <p:cNvSpPr/>
+          <p:nvPr/>
+        </p:nvSpPr>
+        <p:spPr>
+          <a:xfrm>
+            <a:off x="822960" y="4754880"/>
+            <a:ext cx="10543032" cy="548640"/>
           </a:xfrm>
           <a:prstGeom prst="rect">
             <a:avLst/>
@@ -4120,54 +5457,12 @@
           <a:p>
             <a:pPr algn="l" indent="0" marL="0">
               <a:lnSpc>
-                <a:spcPts val="2000"/>
+                <a:spcPts val="2400"/>
               </a:lnSpc>
               <a:buNone/>
             </a:pPr>
             <a:r>
-              <a:rPr lang="en-US" sz="1350" dirty="0">
-                <a:solidFill>
-                  <a:srgbClr val="33394A"/>
-                </a:solidFill>
-                <a:latin typeface="Calibri" pitchFamily="34" charset="0"/>
-                <a:ea typeface="Calibri" pitchFamily="34" charset="-122"/>
-                <a:cs typeface="Calibri" pitchFamily="34" charset="-120"/>
-              </a:rPr>
-              <a:t>A IA roda dentro do processo, com integrações, aprovações humanas nos pontos certos e um número acompanhando. O organismo funciona diferente. O ganho fica na empresa, mesmo quando as pessoas mudam.</a:t>
-            </a:r>
-            <a:endParaRPr lang="en-US" sz="1350" dirty="0"/>
-          </a:p>
-        </p:txBody>
-      </p:sp>
-      <p:sp>
-        <p:nvSpPr>
-          <p:cNvPr id="11" name="Text 9"/>
-          <p:cNvSpPr/>
-          <p:nvPr/>
-        </p:nvSpPr>
-        <p:spPr>
-          <a:xfrm>
-            <a:off x="822960" y="5257800"/>
-            <a:ext cx="10543032" cy="777240"/>
-          </a:xfrm>
-          <a:prstGeom prst="rect">
-            <a:avLst/>
-          </a:prstGeom>
-          <a:noFill/>
-          <a:ln/>
-        </p:spPr>
-        <p:txBody>
-          <a:bodyPr wrap="square" rtlCol="0" anchor="ctr"/>
-          <a:lstStyle/>
-          <a:p>
-            <a:pPr algn="ctr" indent="0" marL="0">
-              <a:lnSpc>
-                <a:spcPts val="2200"/>
-              </a:lnSpc>
-              <a:buNone/>
-            </a:pPr>
-            <a:r>
-              <a:rPr lang="en-US" sz="1500" i="1" dirty="0">
+              <a:rPr lang="en-US" sz="1600" i="1" dirty="0">
                 <a:solidFill>
                   <a:srgbClr val="1B2A4A"/>
                 </a:solidFill>
@@ -4175,9 +5470,48 @@
                 <a:ea typeface="Cambria" pitchFamily="34" charset="-122"/>
                 <a:cs typeface="Cambria" pitchFamily="34" charset="-120"/>
               </a:rPr>
-              <a:t>A pergunta que separa quem colhe de quem não colhe não é qual ferramenta comprar. É por onde a IA está entrando na sua empresa.</a:t>
-            </a:r>
-            <a:endParaRPr lang="en-US" sz="1500" dirty="0"/>
+              <a:t>Não é porque a IA não funciona. É porque ela entrou pelo lugar errado.</a:t>
+            </a:r>
+            <a:endParaRPr lang="en-US" sz="1600" dirty="0"/>
+          </a:p>
+        </p:txBody>
+      </p:sp>
+      <p:sp>
+        <p:nvSpPr>
+          <p:cNvPr id="7" name="Text 5"/>
+          <p:cNvSpPr/>
+          <p:nvPr/>
+        </p:nvSpPr>
+        <p:spPr>
+          <a:xfrm>
+            <a:off x="822960" y="6400800"/>
+            <a:ext cx="10543032" cy="274320"/>
+          </a:xfrm>
+          <a:prstGeom prst="rect">
+            <a:avLst/>
+          </a:prstGeom>
+          <a:noFill/>
+          <a:ln/>
+        </p:spPr>
+        <p:txBody>
+          <a:bodyPr wrap="square" rtlCol="0" anchor="ctr"/>
+          <a:lstStyle/>
+          <a:p>
+            <a:pPr algn="ctr" indent="0" marL="0">
+              <a:buNone/>
+            </a:pPr>
+            <a:r>
+              <a:rPr lang="en-US" sz="900" spc="100" kern="0" dirty="0">
+                <a:solidFill>
+                  <a:srgbClr val="6E6858"/>
+                </a:solidFill>
+                <a:latin typeface="Calibri" pitchFamily="34" charset="0"/>
+                <a:ea typeface="Calibri" pitchFamily="34" charset="-122"/>
+                <a:cs typeface="Calibri" pitchFamily="34" charset="-120"/>
+              </a:rPr>
+              <a:t>ABBA Consultoria de IA · contato@abbaservices.com.br</a:t>
+            </a:r>
+            <a:endParaRPr lang="en-US" sz="900" dirty="0"/>
           </a:p>
         </p:txBody>
       </p:sp>
@@ -4221,7 +5555,7 @@
         </p:nvSpPr>
         <p:spPr>
           <a:xfrm>
-            <a:off x="822960" y="594360"/>
+            <a:off x="822960" y="548640"/>
             <a:ext cx="5486400" cy="292608"/>
           </a:xfrm>
           <a:prstGeom prst="rect">
@@ -4246,7 +5580,7 @@
                 <a:ea typeface="Calibri" pitchFamily="34" charset="-122"/>
                 <a:cs typeface="Calibri" pitchFamily="34" charset="-120"/>
               </a:rPr>
-              <a:t>NÃO É IMPRESSÃO NOSSA</a:t>
+              <a:t>ONDE O TRABALHO ACONTECE</a:t>
             </a:r>
             <a:endParaRPr lang="en-US" sz="1100" dirty="0"/>
           </a:p>
@@ -4260,8 +5594,8 @@
         </p:nvSpPr>
         <p:spPr>
           <a:xfrm>
-            <a:off x="822960" y="960120"/>
-            <a:ext cx="10543032" cy="914400"/>
+            <a:off x="822960" y="896112"/>
+            <a:ext cx="10543032" cy="868680"/>
           </a:xfrm>
           <a:prstGeom prst="rect">
             <a:avLst/>
@@ -4275,12 +5609,12 @@
           <a:p>
             <a:pPr indent="0" marL="0">
               <a:lnSpc>
-                <a:spcPts val="3400"/>
+                <a:spcPts val="3300"/>
               </a:lnSpc>
               <a:buNone/>
             </a:pPr>
             <a:r>
-              <a:rPr lang="en-US" sz="2800" b="1" dirty="0">
+              <a:rPr lang="en-US" sz="2700" b="1" dirty="0">
                 <a:solidFill>
                   <a:srgbClr val="1B2A4A"/>
                 </a:solidFill>
@@ -4288,15 +5622,57 @@
                 <a:ea typeface="Cambria" pitchFamily="34" charset="-122"/>
                 <a:cs typeface="Cambria" pitchFamily="34" charset="-120"/>
               </a:rPr>
-              <a:t>Três medições independentes, dizendo a mesma coisa.</a:t>
-            </a:r>
-            <a:endParaRPr lang="en-US" sz="2800" dirty="0"/>
+              <a:t>Duas frentes, ao mesmo tempo.</a:t>
+            </a:r>
+            <a:endParaRPr lang="en-US" sz="2700" dirty="0"/>
           </a:p>
         </p:txBody>
       </p:sp>
       <p:sp>
         <p:nvSpPr>
           <p:cNvPr id="4" name="Text 2"/>
+          <p:cNvSpPr/>
+          <p:nvPr/>
+        </p:nvSpPr>
+        <p:spPr>
+          <a:xfrm>
+            <a:off x="822960" y="1810512"/>
+            <a:ext cx="10543032" cy="640080"/>
+          </a:xfrm>
+          <a:prstGeom prst="rect">
+            <a:avLst/>
+          </a:prstGeom>
+          <a:noFill/>
+          <a:ln/>
+        </p:spPr>
+        <p:txBody>
+          <a:bodyPr wrap="square" rtlCol="0" anchor="ctr"/>
+          <a:lstStyle/>
+          <a:p>
+            <a:pPr algn="l" indent="0" marL="0">
+              <a:lnSpc>
+                <a:spcPts val="1850"/>
+              </a:lnSpc>
+              <a:buNone/>
+            </a:pPr>
+            <a:r>
+              <a:rPr lang="en-US" sz="1250" dirty="0">
+                <a:solidFill>
+                  <a:srgbClr val="6E6858"/>
+                </a:solidFill>
+                <a:latin typeface="Calibri" pitchFamily="34" charset="0"/>
+                <a:ea typeface="Calibri" pitchFamily="34" charset="-122"/>
+                <a:cs typeface="Calibri" pitchFamily="34" charset="-120"/>
+              </a:rPr>
+              <a:t>Implantamos as nossas soluções dentro do fluxo de trabalho e dos processos da empresa, e nas pessoas que os vivem. As duas frentes andam juntas por desenho.</a:t>
+            </a:r>
+            <a:endParaRPr lang="en-US" sz="1250" dirty="0"/>
+          </a:p>
+        </p:txBody>
+      </p:sp>
+      <p:sp>
+        <p:nvSpPr>
+          <p:cNvPr id="5" name="Text 3"/>
           <p:cNvSpPr/>
           <p:nvPr/>
         </p:nvSpPr>
@@ -4335,13 +5711,221 @@
       </p:sp>
       <p:sp>
         <p:nvSpPr>
-          <p:cNvPr id="5" name="Shape 3"/>
-          <p:cNvSpPr/>
-          <p:nvPr/>
-        </p:nvSpPr>
-        <p:spPr>
-          <a:xfrm>
-            <a:off x="822960" y="2148840"/>
+          <p:cNvPr id="6" name="Shape 4"/>
+          <p:cNvSpPr/>
+          <p:nvPr/>
+        </p:nvSpPr>
+        <p:spPr>
+          <a:xfrm>
+            <a:off x="822960" y="2606040"/>
+            <a:ext cx="4997196" cy="0"/>
+          </a:xfrm>
+          <a:prstGeom prst="line">
+            <a:avLst/>
+          </a:prstGeom>
+          <a:noFill/>
+          <a:ln w="15240">
+            <a:solidFill>
+              <a:srgbClr val="C2A35B"/>
+            </a:solidFill>
+            <a:prstDash val="solid"/>
+          </a:ln>
+        </p:spPr>
+      </p:sp>
+      <p:sp>
+        <p:nvSpPr>
+          <p:cNvPr id="7" name="Text 5"/>
+          <p:cNvSpPr/>
+          <p:nvPr/>
+        </p:nvSpPr>
+        <p:spPr>
+          <a:xfrm>
+            <a:off x="822960" y="2743200"/>
+            <a:ext cx="4997196" cy="292608"/>
+          </a:xfrm>
+          <a:prstGeom prst="rect">
+            <a:avLst/>
+          </a:prstGeom>
+          <a:noFill/>
+          <a:ln/>
+        </p:spPr>
+        <p:txBody>
+          <a:bodyPr wrap="square" rtlCol="0" anchor="ctr"/>
+          <a:lstStyle/>
+          <a:p>
+            <a:pPr algn="l" indent="0" marL="0">
+              <a:buNone/>
+            </a:pPr>
+            <a:r>
+              <a:rPr lang="en-US" sz="1100" b="1" spc="300" kern="0" dirty="0">
+                <a:solidFill>
+                  <a:srgbClr val="C2A35B"/>
+                </a:solidFill>
+                <a:latin typeface="Calibri" pitchFamily="34" charset="0"/>
+                <a:ea typeface="Calibri" pitchFamily="34" charset="-122"/>
+                <a:cs typeface="Calibri" pitchFamily="34" charset="-120"/>
+              </a:rPr>
+              <a:t>NOS PROCESSOS</a:t>
+            </a:r>
+            <a:endParaRPr lang="en-US" sz="1100" dirty="0"/>
+          </a:p>
+        </p:txBody>
+      </p:sp>
+      <p:sp>
+        <p:nvSpPr>
+          <p:cNvPr id="8" name="Text 6"/>
+          <p:cNvSpPr/>
+          <p:nvPr/>
+        </p:nvSpPr>
+        <p:spPr>
+          <a:xfrm>
+            <a:off x="822960" y="3108960"/>
+            <a:ext cx="4997196" cy="1554480"/>
+          </a:xfrm>
+          <a:prstGeom prst="rect">
+            <a:avLst/>
+          </a:prstGeom>
+          <a:noFill/>
+          <a:ln/>
+        </p:spPr>
+        <p:txBody>
+          <a:bodyPr wrap="square" rtlCol="0" anchor="ctr"/>
+          <a:lstStyle/>
+          <a:p>
+            <a:pPr algn="l" indent="0" marL="0">
+              <a:lnSpc>
+                <a:spcPts val="1950"/>
+              </a:lnSpc>
+              <a:buNone/>
+            </a:pPr>
+            <a:r>
+              <a:rPr lang="en-US" sz="1300" dirty="0">
+                <a:solidFill>
+                  <a:srgbClr val="33394A"/>
+                </a:solidFill>
+                <a:latin typeface="Calibri" pitchFamily="34" charset="0"/>
+                <a:ea typeface="Calibri" pitchFamily="34" charset="-122"/>
+                <a:cs typeface="Calibri" pitchFamily="34" charset="-120"/>
+              </a:rPr>
+              <a:t>Projetamos e implantamos sistemas inteligentes: arquitetura, integrações e agentes de IA trabalhando em conjunto, que tornam a operação mais eficiente, mais rápida e mais poderosa.</a:t>
+            </a:r>
+            <a:endParaRPr lang="en-US" sz="1300" dirty="0"/>
+          </a:p>
+        </p:txBody>
+      </p:sp>
+      <p:sp>
+        <p:nvSpPr>
+          <p:cNvPr id="9" name="Shape 7"/>
+          <p:cNvSpPr/>
+          <p:nvPr/>
+        </p:nvSpPr>
+        <p:spPr>
+          <a:xfrm>
+            <a:off x="6368796" y="2606040"/>
+            <a:ext cx="4997196" cy="0"/>
+          </a:xfrm>
+          <a:prstGeom prst="line">
+            <a:avLst/>
+          </a:prstGeom>
+          <a:noFill/>
+          <a:ln w="15240">
+            <a:solidFill>
+              <a:srgbClr val="C2A35B"/>
+            </a:solidFill>
+            <a:prstDash val="solid"/>
+          </a:ln>
+        </p:spPr>
+      </p:sp>
+      <p:sp>
+        <p:nvSpPr>
+          <p:cNvPr id="10" name="Text 8"/>
+          <p:cNvSpPr/>
+          <p:nvPr/>
+        </p:nvSpPr>
+        <p:spPr>
+          <a:xfrm>
+            <a:off x="6368796" y="2743200"/>
+            <a:ext cx="4997196" cy="292608"/>
+          </a:xfrm>
+          <a:prstGeom prst="rect">
+            <a:avLst/>
+          </a:prstGeom>
+          <a:noFill/>
+          <a:ln/>
+        </p:spPr>
+        <p:txBody>
+          <a:bodyPr wrap="square" rtlCol="0" anchor="ctr"/>
+          <a:lstStyle/>
+          <a:p>
+            <a:pPr algn="l" indent="0" marL="0">
+              <a:buNone/>
+            </a:pPr>
+            <a:r>
+              <a:rPr lang="en-US" sz="1100" b="1" spc="300" kern="0" dirty="0">
+                <a:solidFill>
+                  <a:srgbClr val="C2A35B"/>
+                </a:solidFill>
+                <a:latin typeface="Calibri" pitchFamily="34" charset="0"/>
+                <a:ea typeface="Calibri" pitchFamily="34" charset="-122"/>
+                <a:cs typeface="Calibri" pitchFamily="34" charset="-120"/>
+              </a:rPr>
+              <a:t>NAS PESSOAS</a:t>
+            </a:r>
+            <a:endParaRPr lang="en-US" sz="1100" dirty="0"/>
+          </a:p>
+        </p:txBody>
+      </p:sp>
+      <p:sp>
+        <p:nvSpPr>
+          <p:cNvPr id="11" name="Text 9"/>
+          <p:cNvSpPr/>
+          <p:nvPr/>
+        </p:nvSpPr>
+        <p:spPr>
+          <a:xfrm>
+            <a:off x="6368796" y="3108960"/>
+            <a:ext cx="4997196" cy="1554480"/>
+          </a:xfrm>
+          <a:prstGeom prst="rect">
+            <a:avLst/>
+          </a:prstGeom>
+          <a:noFill/>
+          <a:ln/>
+        </p:spPr>
+        <p:txBody>
+          <a:bodyPr wrap="square" rtlCol="0" anchor="ctr"/>
+          <a:lstStyle/>
+          <a:p>
+            <a:pPr algn="l" indent="0" marL="0">
+              <a:lnSpc>
+                <a:spcPts val="1950"/>
+              </a:lnSpc>
+              <a:buNone/>
+            </a:pPr>
+            <a:r>
+              <a:rPr lang="en-US" sz="1300" dirty="0">
+                <a:solidFill>
+                  <a:srgbClr val="33394A"/>
+                </a:solidFill>
+                <a:latin typeface="Calibri" pitchFamily="34" charset="0"/>
+                <a:ea typeface="Calibri" pitchFamily="34" charset="-122"/>
+                <a:cs typeface="Calibri" pitchFamily="34" charset="-120"/>
+              </a:rPr>
+              <a:t>Formamos cada nível da equipe para trabalhar com IA e enxergar o próprio trabalho de um jeito novo, do conselho à linha de frente.</a:t>
+            </a:r>
+            <a:endParaRPr lang="en-US" sz="1300" dirty="0"/>
+          </a:p>
+        </p:txBody>
+      </p:sp>
+      <p:sp>
+        <p:nvSpPr>
+          <p:cNvPr id="12" name="Shape 10"/>
+          <p:cNvSpPr/>
+          <p:nvPr/>
+        </p:nvSpPr>
+        <p:spPr>
+          <a:xfrm>
+            <a:off x="822960" y="4846320"/>
             <a:ext cx="10543032" cy="0"/>
           </a:xfrm>
           <a:prstGeom prst="line">
@@ -4358,53 +5942,14 @@
       </p:sp>
       <p:sp>
         <p:nvSpPr>
-          <p:cNvPr id="6" name="Text 4"/>
-          <p:cNvSpPr/>
-          <p:nvPr/>
-        </p:nvSpPr>
-        <p:spPr>
-          <a:xfrm>
-            <a:off x="822960" y="2258568"/>
-            <a:ext cx="1463040" cy="292608"/>
-          </a:xfrm>
-          <a:prstGeom prst="rect">
-            <a:avLst/>
-          </a:prstGeom>
-          <a:noFill/>
-          <a:ln/>
-        </p:spPr>
-        <p:txBody>
-          <a:bodyPr wrap="square" rtlCol="0" anchor="ctr"/>
-          <a:lstStyle/>
-          <a:p>
-            <a:pPr algn="l" indent="0" marL="0">
-              <a:buNone/>
-            </a:pPr>
-            <a:r>
-              <a:rPr lang="en-US" sz="1100" b="1" spc="300" kern="0" dirty="0">
-                <a:solidFill>
-                  <a:srgbClr val="C2A35B"/>
-                </a:solidFill>
-                <a:latin typeface="Calibri" pitchFamily="34" charset="0"/>
-                <a:ea typeface="Calibri" pitchFamily="34" charset="-122"/>
-                <a:cs typeface="Calibri" pitchFamily="34" charset="-120"/>
-              </a:rPr>
-              <a:t>RAND</a:t>
-            </a:r>
-            <a:endParaRPr lang="en-US" sz="1100" dirty="0"/>
-          </a:p>
-        </p:txBody>
-      </p:sp>
-      <p:sp>
-        <p:nvSpPr>
-          <p:cNvPr id="7" name="Text 5"/>
-          <p:cNvSpPr/>
-          <p:nvPr/>
-        </p:nvSpPr>
-        <p:spPr>
-          <a:xfrm>
-            <a:off x="2468880" y="2240280"/>
-            <a:ext cx="8897112" cy="1097280"/>
+          <p:cNvPr id="13" name="Text 11"/>
+          <p:cNvSpPr/>
+          <p:nvPr/>
+        </p:nvSpPr>
+        <p:spPr>
+          <a:xfrm>
+            <a:off x="822960" y="5074920"/>
+            <a:ext cx="10543032" cy="1005840"/>
           </a:xfrm>
           <a:prstGeom prst="rect">
             <a:avLst/>
@@ -4418,230 +5963,22 @@
           <a:p>
             <a:pPr algn="l" indent="0" marL="0">
               <a:lnSpc>
-                <a:spcPts val="1900"/>
+                <a:spcPts val="2000"/>
               </a:lnSpc>
               <a:buNone/>
             </a:pPr>
             <a:r>
-              <a:rPr lang="en-US" sz="1300" dirty="0">
-                <a:solidFill>
-                  <a:srgbClr val="33394A"/>
-                </a:solidFill>
-                <a:latin typeface="Calibri" pitchFamily="34" charset="0"/>
-                <a:ea typeface="Calibri" pitchFamily="34" charset="-122"/>
-                <a:cs typeface="Calibri" pitchFamily="34" charset="-120"/>
-              </a:rPr>
-              <a:t>Mais de 80% dos projetos de IA falham. O dobro dos projetos comuns de tecnologia. E a causa número um não foi a qualidade do modelo: foi começar sem ninguém combinar o que seria dar certo.</a:t>
-            </a:r>
-            <a:endParaRPr lang="en-US" sz="1300" dirty="0"/>
-          </a:p>
-        </p:txBody>
-      </p:sp>
-      <p:sp>
-        <p:nvSpPr>
-          <p:cNvPr id="8" name="Shape 6"/>
-          <p:cNvSpPr/>
-          <p:nvPr/>
-        </p:nvSpPr>
-        <p:spPr>
-          <a:xfrm>
-            <a:off x="822960" y="3474720"/>
-            <a:ext cx="10543032" cy="0"/>
-          </a:xfrm>
-          <a:prstGeom prst="line">
-            <a:avLst/>
-          </a:prstGeom>
-          <a:noFill/>
-          <a:ln w="9525">
-            <a:solidFill>
-              <a:srgbClr val="E5E0D4"/>
-            </a:solidFill>
-            <a:prstDash val="solid"/>
-          </a:ln>
-        </p:spPr>
-      </p:sp>
-      <p:sp>
-        <p:nvSpPr>
-          <p:cNvPr id="9" name="Text 7"/>
-          <p:cNvSpPr/>
-          <p:nvPr/>
-        </p:nvSpPr>
-        <p:spPr>
-          <a:xfrm>
-            <a:off x="822960" y="3584448"/>
-            <a:ext cx="1463040" cy="292608"/>
-          </a:xfrm>
-          <a:prstGeom prst="rect">
-            <a:avLst/>
-          </a:prstGeom>
-          <a:noFill/>
-          <a:ln/>
-        </p:spPr>
-        <p:txBody>
-          <a:bodyPr wrap="square" rtlCol="0" anchor="ctr"/>
-          <a:lstStyle/>
-          <a:p>
-            <a:pPr algn="l" indent="0" marL="0">
-              <a:buNone/>
-            </a:pPr>
-            <a:r>
-              <a:rPr lang="en-US" sz="1100" b="1" spc="300" kern="0" dirty="0">
-                <a:solidFill>
-                  <a:srgbClr val="C2A35B"/>
-                </a:solidFill>
-                <a:latin typeface="Calibri" pitchFamily="34" charset="0"/>
-                <a:ea typeface="Calibri" pitchFamily="34" charset="-122"/>
-                <a:cs typeface="Calibri" pitchFamily="34" charset="-120"/>
-              </a:rPr>
-              <a:t>METR</a:t>
-            </a:r>
-            <a:endParaRPr lang="en-US" sz="1100" dirty="0"/>
-          </a:p>
-        </p:txBody>
-      </p:sp>
-      <p:sp>
-        <p:nvSpPr>
-          <p:cNvPr id="10" name="Text 8"/>
-          <p:cNvSpPr/>
-          <p:nvPr/>
-        </p:nvSpPr>
-        <p:spPr>
-          <a:xfrm>
-            <a:off x="2468880" y="3566160"/>
-            <a:ext cx="8897112" cy="1097280"/>
-          </a:xfrm>
-          <a:prstGeom prst="rect">
-            <a:avLst/>
-          </a:prstGeom>
-          <a:noFill/>
-          <a:ln/>
-        </p:spPr>
-        <p:txBody>
-          <a:bodyPr wrap="square" rtlCol="0" anchor="ctr"/>
-          <a:lstStyle/>
-          <a:p>
-            <a:pPr algn="l" indent="0" marL="0">
-              <a:lnSpc>
-                <a:spcPts val="1900"/>
-              </a:lnSpc>
-              <a:buNone/>
-            </a:pPr>
-            <a:r>
-              <a:rPr lang="en-US" sz="1300" dirty="0">
-                <a:solidFill>
-                  <a:srgbClr val="33394A"/>
-                </a:solidFill>
-                <a:latin typeface="Calibri" pitchFamily="34" charset="0"/>
-                <a:ea typeface="Calibri" pitchFamily="34" charset="-122"/>
-                <a:cs typeface="Calibri" pitchFamily="34" charset="-120"/>
-              </a:rPr>
-              <a:t>Programadores experientes ficaram 19% mais lentos usando IA, e saíram convencidos de que tinham ficado 20% mais rápidos. Ninguém sabe o próprio ganho sem medir de fora.</a:t>
-            </a:r>
-            <a:endParaRPr lang="en-US" sz="1300" dirty="0"/>
-          </a:p>
-        </p:txBody>
-      </p:sp>
-      <p:sp>
-        <p:nvSpPr>
-          <p:cNvPr id="11" name="Shape 9"/>
-          <p:cNvSpPr/>
-          <p:nvPr/>
-        </p:nvSpPr>
-        <p:spPr>
-          <a:xfrm>
-            <a:off x="822960" y="4800600"/>
-            <a:ext cx="10543032" cy="0"/>
-          </a:xfrm>
-          <a:prstGeom prst="line">
-            <a:avLst/>
-          </a:prstGeom>
-          <a:noFill/>
-          <a:ln w="9525">
-            <a:solidFill>
-              <a:srgbClr val="E5E0D4"/>
-            </a:solidFill>
-            <a:prstDash val="solid"/>
-          </a:ln>
-        </p:spPr>
-      </p:sp>
-      <p:sp>
-        <p:nvSpPr>
-          <p:cNvPr id="12" name="Text 10"/>
-          <p:cNvSpPr/>
-          <p:nvPr/>
-        </p:nvSpPr>
-        <p:spPr>
-          <a:xfrm>
-            <a:off x="822960" y="4910328"/>
-            <a:ext cx="1463040" cy="292608"/>
-          </a:xfrm>
-          <a:prstGeom prst="rect">
-            <a:avLst/>
-          </a:prstGeom>
-          <a:noFill/>
-          <a:ln/>
-        </p:spPr>
-        <p:txBody>
-          <a:bodyPr wrap="square" rtlCol="0" anchor="ctr"/>
-          <a:lstStyle/>
-          <a:p>
-            <a:pPr algn="l" indent="0" marL="0">
-              <a:buNone/>
-            </a:pPr>
-            <a:r>
-              <a:rPr lang="en-US" sz="1100" b="1" spc="300" kern="0" dirty="0">
-                <a:solidFill>
-                  <a:srgbClr val="C2A35B"/>
-                </a:solidFill>
-                <a:latin typeface="Calibri" pitchFamily="34" charset="0"/>
-                <a:ea typeface="Calibri" pitchFamily="34" charset="-122"/>
-                <a:cs typeface="Calibri" pitchFamily="34" charset="-120"/>
-              </a:rPr>
-              <a:t>DORA</a:t>
-            </a:r>
-            <a:endParaRPr lang="en-US" sz="1100" dirty="0"/>
-          </a:p>
-        </p:txBody>
-      </p:sp>
-      <p:sp>
-        <p:nvSpPr>
-          <p:cNvPr id="13" name="Text 11"/>
-          <p:cNvSpPr/>
-          <p:nvPr/>
-        </p:nvSpPr>
-        <p:spPr>
-          <a:xfrm>
-            <a:off x="2468880" y="4892040"/>
-            <a:ext cx="8897112" cy="1097280"/>
-          </a:xfrm>
-          <a:prstGeom prst="rect">
-            <a:avLst/>
-          </a:prstGeom>
-          <a:noFill/>
-          <a:ln/>
-        </p:spPr>
-        <p:txBody>
-          <a:bodyPr wrap="square" rtlCol="0" anchor="ctr"/>
-          <a:lstStyle/>
-          <a:p>
-            <a:pPr algn="l" indent="0" marL="0">
-              <a:lnSpc>
-                <a:spcPts val="1900"/>
-              </a:lnSpc>
-              <a:buNone/>
-            </a:pPr>
-            <a:r>
-              <a:rPr lang="en-US" sz="1300" dirty="0">
-                <a:solidFill>
-                  <a:srgbClr val="33394A"/>
-                </a:solidFill>
-                <a:latin typeface="Calibri" pitchFamily="34" charset="0"/>
-                <a:ea typeface="Calibri" pitchFamily="34" charset="-122"/>
-                <a:cs typeface="Calibri" pitchFamily="34" charset="-120"/>
-              </a:rPr>
-              <a:t>A IA amplifica o que já existe: time com base arrumada acelera, base bagunçada piora mais rápido. Arrumar a base não é atraso. É a condição do ganho.</a:t>
-            </a:r>
-            <a:endParaRPr lang="en-US" sz="1300" dirty="0"/>
+              <a:rPr lang="en-US" sz="1350" i="1" dirty="0">
+                <a:solidFill>
+                  <a:srgbClr val="1B2A4A"/>
+                </a:solidFill>
+                <a:latin typeface="Cambria" pitchFamily="34" charset="0"/>
+                <a:ea typeface="Cambria" pitchFamily="34" charset="-122"/>
+                <a:cs typeface="Cambria" pitchFamily="34" charset="-120"/>
+              </a:rPr>
+              <a:t>É a diferença entre a IA na ponta e a IA na veia: na ponta, uma pessoa pede e recebe, e o ganho vai embora com ela. Na veia, dentro do processo e das pessoas, o ganho fica na empresa, mesmo quando as pessoas mudam. De nada adiantam sistemas novos com a empresa pensando do jeito antigo.</a:t>
+            </a:r>
+            <a:endParaRPr lang="en-US" sz="1350" dirty="0"/>
           </a:p>
         </p:txBody>
       </p:sp>
@@ -4685,7 +6022,7 @@
         </p:nvSpPr>
         <p:spPr>
           <a:xfrm>
-            <a:off x="822960" y="594360"/>
+            <a:off x="822960" y="548640"/>
             <a:ext cx="5486400" cy="292608"/>
           </a:xfrm>
           <a:prstGeom prst="rect">
@@ -4710,7 +6047,7 @@
                 <a:ea typeface="Calibri" pitchFamily="34" charset="-122"/>
                 <a:cs typeface="Calibri" pitchFamily="34" charset="-120"/>
               </a:rPr>
-              <a:t>A NOSSA TESE</a:t>
+              <a:t>NÃO É IMPRESSÃO NOSSA</a:t>
             </a:r>
             <a:endParaRPr lang="en-US" sz="1100" dirty="0"/>
           </a:p>
@@ -4724,8 +6061,8 @@
         </p:nvSpPr>
         <p:spPr>
           <a:xfrm>
-            <a:off x="822960" y="960120"/>
-            <a:ext cx="10543032" cy="914400"/>
+            <a:off x="822960" y="896112"/>
+            <a:ext cx="10543032" cy="868680"/>
           </a:xfrm>
           <a:prstGeom prst="rect">
             <a:avLst/>
@@ -4739,12 +6076,12 @@
           <a:p>
             <a:pPr indent="0" marL="0">
               <a:lnSpc>
-                <a:spcPts val="3400"/>
+                <a:spcPts val="3300"/>
               </a:lnSpc>
               <a:buNone/>
             </a:pPr>
             <a:r>
-              <a:rPr lang="en-US" sz="2800" b="1" dirty="0">
+              <a:rPr lang="en-US" sz="2700" b="1" dirty="0">
                 <a:solidFill>
                   <a:srgbClr val="1B2A4A"/>
                 </a:solidFill>
@@ -4752,9 +6089,9 @@
                 <a:ea typeface="Cambria" pitchFamily="34" charset="-122"/>
                 <a:cs typeface="Cambria" pitchFamily="34" charset="-120"/>
               </a:rPr>
-              <a:t>Isto é uma mesa de três pés.</a:t>
-            </a:r>
-            <a:endParaRPr lang="en-US" sz="2800" dirty="0"/>
+              <a:t>Três medições independentes, dizendo a mesma coisa.</a:t>
+            </a:r>
+            <a:endParaRPr lang="en-US" sz="2700" dirty="0"/>
           </a:p>
         </p:txBody>
       </p:sp>
@@ -4799,97 +6136,13 @@
       </p:sp>
       <p:sp>
         <p:nvSpPr>
-          <p:cNvPr id="5" name="Text 3"/>
-          <p:cNvSpPr/>
-          <p:nvPr/>
-        </p:nvSpPr>
-        <p:spPr>
-          <a:xfrm>
-            <a:off x="822960" y="2103120"/>
-            <a:ext cx="10543032" cy="1188720"/>
-          </a:xfrm>
-          <a:prstGeom prst="rect">
-            <a:avLst/>
-          </a:prstGeom>
-          <a:noFill/>
-          <a:ln/>
-        </p:spPr>
-        <p:txBody>
-          <a:bodyPr wrap="square" rtlCol="0" anchor="ctr"/>
-          <a:lstStyle/>
-          <a:p>
-            <a:pPr algn="l" indent="0" marL="0">
-              <a:lnSpc>
-                <a:spcPts val="2400"/>
-              </a:lnSpc>
-              <a:buNone/>
-            </a:pPr>
-            <a:r>
-              <a:rPr lang="en-US" sz="1550" dirty="0">
-                <a:solidFill>
-                  <a:srgbClr val="33394A"/>
-                </a:solidFill>
-                <a:latin typeface="Calibri" pitchFamily="34" charset="0"/>
-                <a:ea typeface="Calibri" pitchFamily="34" charset="-122"/>
-                <a:cs typeface="Calibri" pitchFamily="34" charset="-120"/>
-              </a:rPr>
-              <a:t>Tecnologia, processo e gente. Se um pé fica mais curto que os outros, o problema não é o pé: é a mesa inteira. E aí a empresa passa o resto da vida enfiando papelzinho embaixo. Papelzinho não é solução. É convivência com o defeito.</a:t>
-            </a:r>
-            <a:endParaRPr lang="en-US" sz="1550" dirty="0"/>
-          </a:p>
-        </p:txBody>
-      </p:sp>
-      <p:sp>
-        <p:nvSpPr>
-          <p:cNvPr id="6" name="Text 4"/>
-          <p:cNvSpPr/>
-          <p:nvPr/>
-        </p:nvSpPr>
-        <p:spPr>
-          <a:xfrm>
-            <a:off x="822960" y="3429000"/>
-            <a:ext cx="10543032" cy="1051560"/>
-          </a:xfrm>
-          <a:prstGeom prst="rect">
-            <a:avLst/>
-          </a:prstGeom>
-          <a:noFill/>
-          <a:ln/>
-        </p:spPr>
-        <p:txBody>
-          <a:bodyPr wrap="square" rtlCol="0" anchor="ctr"/>
-          <a:lstStyle/>
-          <a:p>
-            <a:pPr algn="l" indent="0" marL="0">
-              <a:lnSpc>
-                <a:spcPts val="2000"/>
-              </a:lnSpc>
-              <a:buNone/>
-            </a:pPr>
-            <a:r>
-              <a:rPr lang="en-US" sz="1350" dirty="0">
-                <a:solidFill>
-                  <a:srgbClr val="6E6858"/>
-                </a:solidFill>
-                <a:latin typeface="Calibri" pitchFamily="34" charset="0"/>
-                <a:ea typeface="Calibri" pitchFamily="34" charset="-122"/>
-                <a:cs typeface="Calibri" pitchFamily="34" charset="-120"/>
-              </a:rPr>
-              <a:t>O mercado vende um pé de cada vez: licença para todo mundo, software de prateleira, curso que vira aplauso e segunda-feira igual. Nenhum desses caminhos é burro. Todos foram escolhidos por gente inteligente. Eles só não seguram a mesa.</a:t>
-            </a:r>
-            <a:endParaRPr lang="en-US" sz="1350" dirty="0"/>
-          </a:p>
-        </p:txBody>
-      </p:sp>
-      <p:sp>
-        <p:nvSpPr>
-          <p:cNvPr id="7" name="Shape 5"/>
-          <p:cNvSpPr/>
-          <p:nvPr/>
-        </p:nvSpPr>
-        <p:spPr>
-          <a:xfrm>
-            <a:off x="822960" y="4663440"/>
+          <p:cNvPr id="5" name="Shape 3"/>
+          <p:cNvSpPr/>
+          <p:nvPr/>
+        </p:nvSpPr>
+        <p:spPr>
+          <a:xfrm>
+            <a:off x="822960" y="2148840"/>
             <a:ext cx="10543032" cy="0"/>
           </a:xfrm>
           <a:prstGeom prst="line">
@@ -4906,14 +6159,53 @@
       </p:sp>
       <p:sp>
         <p:nvSpPr>
-          <p:cNvPr id="8" name="Text 6"/>
-          <p:cNvSpPr/>
-          <p:nvPr/>
-        </p:nvSpPr>
-        <p:spPr>
-          <a:xfrm>
-            <a:off x="822960" y="4892040"/>
-            <a:ext cx="10543032" cy="868680"/>
+          <p:cNvPr id="6" name="Text 4"/>
+          <p:cNvSpPr/>
+          <p:nvPr/>
+        </p:nvSpPr>
+        <p:spPr>
+          <a:xfrm>
+            <a:off x="822960" y="2258568"/>
+            <a:ext cx="1463040" cy="292608"/>
+          </a:xfrm>
+          <a:prstGeom prst="rect">
+            <a:avLst/>
+          </a:prstGeom>
+          <a:noFill/>
+          <a:ln/>
+        </p:spPr>
+        <p:txBody>
+          <a:bodyPr wrap="square" rtlCol="0" anchor="ctr"/>
+          <a:lstStyle/>
+          <a:p>
+            <a:pPr algn="l" indent="0" marL="0">
+              <a:buNone/>
+            </a:pPr>
+            <a:r>
+              <a:rPr lang="en-US" sz="1100" b="1" spc="300" kern="0" dirty="0">
+                <a:solidFill>
+                  <a:srgbClr val="C2A35B"/>
+                </a:solidFill>
+                <a:latin typeface="Calibri" pitchFamily="34" charset="0"/>
+                <a:ea typeface="Calibri" pitchFamily="34" charset="-122"/>
+                <a:cs typeface="Calibri" pitchFamily="34" charset="-120"/>
+              </a:rPr>
+              <a:t>RAND</a:t>
+            </a:r>
+            <a:endParaRPr lang="en-US" sz="1100" dirty="0"/>
+          </a:p>
+        </p:txBody>
+      </p:sp>
+      <p:sp>
+        <p:nvSpPr>
+          <p:cNvPr id="7" name="Text 5"/>
+          <p:cNvSpPr/>
+          <p:nvPr/>
+        </p:nvSpPr>
+        <p:spPr>
+          <a:xfrm>
+            <a:off x="2468880" y="2240280"/>
+            <a:ext cx="8897112" cy="1097280"/>
           </a:xfrm>
           <a:prstGeom prst="rect">
             <a:avLst/>
@@ -4927,22 +6219,230 @@
           <a:p>
             <a:pPr algn="l" indent="0" marL="0">
               <a:lnSpc>
-                <a:spcPts val="2200"/>
+                <a:spcPts val="1900"/>
               </a:lnSpc>
               <a:buNone/>
             </a:pPr>
             <a:r>
-              <a:rPr lang="en-US" sz="1450" i="1" dirty="0">
-                <a:solidFill>
-                  <a:srgbClr val="1B2A4A"/>
-                </a:solidFill>
-                <a:latin typeface="Cambria" pitchFamily="34" charset="0"/>
-                <a:ea typeface="Cambria" pitchFamily="34" charset="-122"/>
-                <a:cs typeface="Cambria" pitchFamily="34" charset="-120"/>
-              </a:rPr>
-              <a:t>Por isso não vendemos ferramenta, nem piloto, nem curso: instalamos os três pés juntos, num caminho de um ano com porta de saída limpa em cada fase. E provamos que a mesa parou de balançar.</a:t>
-            </a:r>
-            <a:endParaRPr lang="en-US" sz="1450" dirty="0"/>
+              <a:rPr lang="en-US" sz="1300" dirty="0">
+                <a:solidFill>
+                  <a:srgbClr val="33394A"/>
+                </a:solidFill>
+                <a:latin typeface="Calibri" pitchFamily="34" charset="0"/>
+                <a:ea typeface="Calibri" pitchFamily="34" charset="-122"/>
+                <a:cs typeface="Calibri" pitchFamily="34" charset="-120"/>
+              </a:rPr>
+              <a:t>Mais de 80% dos projetos de IA falham. O dobro dos projetos comuns de tecnologia. E a causa número um não foi a qualidade do modelo: foi começar sem ninguém combinar o que seria dar certo.</a:t>
+            </a:r>
+            <a:endParaRPr lang="en-US" sz="1300" dirty="0"/>
+          </a:p>
+        </p:txBody>
+      </p:sp>
+      <p:sp>
+        <p:nvSpPr>
+          <p:cNvPr id="8" name="Shape 6"/>
+          <p:cNvSpPr/>
+          <p:nvPr/>
+        </p:nvSpPr>
+        <p:spPr>
+          <a:xfrm>
+            <a:off x="822960" y="3474720"/>
+            <a:ext cx="10543032" cy="0"/>
+          </a:xfrm>
+          <a:prstGeom prst="line">
+            <a:avLst/>
+          </a:prstGeom>
+          <a:noFill/>
+          <a:ln w="9525">
+            <a:solidFill>
+              <a:srgbClr val="E5E0D4"/>
+            </a:solidFill>
+            <a:prstDash val="solid"/>
+          </a:ln>
+        </p:spPr>
+      </p:sp>
+      <p:sp>
+        <p:nvSpPr>
+          <p:cNvPr id="9" name="Text 7"/>
+          <p:cNvSpPr/>
+          <p:nvPr/>
+        </p:nvSpPr>
+        <p:spPr>
+          <a:xfrm>
+            <a:off x="822960" y="3584448"/>
+            <a:ext cx="1463040" cy="292608"/>
+          </a:xfrm>
+          <a:prstGeom prst="rect">
+            <a:avLst/>
+          </a:prstGeom>
+          <a:noFill/>
+          <a:ln/>
+        </p:spPr>
+        <p:txBody>
+          <a:bodyPr wrap="square" rtlCol="0" anchor="ctr"/>
+          <a:lstStyle/>
+          <a:p>
+            <a:pPr algn="l" indent="0" marL="0">
+              <a:buNone/>
+            </a:pPr>
+            <a:r>
+              <a:rPr lang="en-US" sz="1100" b="1" spc="300" kern="0" dirty="0">
+                <a:solidFill>
+                  <a:srgbClr val="C2A35B"/>
+                </a:solidFill>
+                <a:latin typeface="Calibri" pitchFamily="34" charset="0"/>
+                <a:ea typeface="Calibri" pitchFamily="34" charset="-122"/>
+                <a:cs typeface="Calibri" pitchFamily="34" charset="-120"/>
+              </a:rPr>
+              <a:t>METR</a:t>
+            </a:r>
+            <a:endParaRPr lang="en-US" sz="1100" dirty="0"/>
+          </a:p>
+        </p:txBody>
+      </p:sp>
+      <p:sp>
+        <p:nvSpPr>
+          <p:cNvPr id="10" name="Text 8"/>
+          <p:cNvSpPr/>
+          <p:nvPr/>
+        </p:nvSpPr>
+        <p:spPr>
+          <a:xfrm>
+            <a:off x="2468880" y="3566160"/>
+            <a:ext cx="8897112" cy="1097280"/>
+          </a:xfrm>
+          <a:prstGeom prst="rect">
+            <a:avLst/>
+          </a:prstGeom>
+          <a:noFill/>
+          <a:ln/>
+        </p:spPr>
+        <p:txBody>
+          <a:bodyPr wrap="square" rtlCol="0" anchor="ctr"/>
+          <a:lstStyle/>
+          <a:p>
+            <a:pPr algn="l" indent="0" marL="0">
+              <a:lnSpc>
+                <a:spcPts val="1900"/>
+              </a:lnSpc>
+              <a:buNone/>
+            </a:pPr>
+            <a:r>
+              <a:rPr lang="en-US" sz="1300" dirty="0">
+                <a:solidFill>
+                  <a:srgbClr val="33394A"/>
+                </a:solidFill>
+                <a:latin typeface="Calibri" pitchFamily="34" charset="0"/>
+                <a:ea typeface="Calibri" pitchFamily="34" charset="-122"/>
+                <a:cs typeface="Calibri" pitchFamily="34" charset="-120"/>
+              </a:rPr>
+              <a:t>Programadores experientes ficaram 19% mais lentos usando IA, e saíram convencidos de que tinham ficado 20% mais rápidos. Ninguém sabe o próprio ganho sem medir de fora.</a:t>
+            </a:r>
+            <a:endParaRPr lang="en-US" sz="1300" dirty="0"/>
+          </a:p>
+        </p:txBody>
+      </p:sp>
+      <p:sp>
+        <p:nvSpPr>
+          <p:cNvPr id="11" name="Shape 9"/>
+          <p:cNvSpPr/>
+          <p:nvPr/>
+        </p:nvSpPr>
+        <p:spPr>
+          <a:xfrm>
+            <a:off x="822960" y="4800600"/>
+            <a:ext cx="10543032" cy="0"/>
+          </a:xfrm>
+          <a:prstGeom prst="line">
+            <a:avLst/>
+          </a:prstGeom>
+          <a:noFill/>
+          <a:ln w="9525">
+            <a:solidFill>
+              <a:srgbClr val="E5E0D4"/>
+            </a:solidFill>
+            <a:prstDash val="solid"/>
+          </a:ln>
+        </p:spPr>
+      </p:sp>
+      <p:sp>
+        <p:nvSpPr>
+          <p:cNvPr id="12" name="Text 10"/>
+          <p:cNvSpPr/>
+          <p:nvPr/>
+        </p:nvSpPr>
+        <p:spPr>
+          <a:xfrm>
+            <a:off x="822960" y="4910328"/>
+            <a:ext cx="1463040" cy="292608"/>
+          </a:xfrm>
+          <a:prstGeom prst="rect">
+            <a:avLst/>
+          </a:prstGeom>
+          <a:noFill/>
+          <a:ln/>
+        </p:spPr>
+        <p:txBody>
+          <a:bodyPr wrap="square" rtlCol="0" anchor="ctr"/>
+          <a:lstStyle/>
+          <a:p>
+            <a:pPr algn="l" indent="0" marL="0">
+              <a:buNone/>
+            </a:pPr>
+            <a:r>
+              <a:rPr lang="en-US" sz="1100" b="1" spc="300" kern="0" dirty="0">
+                <a:solidFill>
+                  <a:srgbClr val="C2A35B"/>
+                </a:solidFill>
+                <a:latin typeface="Calibri" pitchFamily="34" charset="0"/>
+                <a:ea typeface="Calibri" pitchFamily="34" charset="-122"/>
+                <a:cs typeface="Calibri" pitchFamily="34" charset="-120"/>
+              </a:rPr>
+              <a:t>DORA</a:t>
+            </a:r>
+            <a:endParaRPr lang="en-US" sz="1100" dirty="0"/>
+          </a:p>
+        </p:txBody>
+      </p:sp>
+      <p:sp>
+        <p:nvSpPr>
+          <p:cNvPr id="13" name="Text 11"/>
+          <p:cNvSpPr/>
+          <p:nvPr/>
+        </p:nvSpPr>
+        <p:spPr>
+          <a:xfrm>
+            <a:off x="2468880" y="4892040"/>
+            <a:ext cx="8897112" cy="1097280"/>
+          </a:xfrm>
+          <a:prstGeom prst="rect">
+            <a:avLst/>
+          </a:prstGeom>
+          <a:noFill/>
+          <a:ln/>
+        </p:spPr>
+        <p:txBody>
+          <a:bodyPr wrap="square" rtlCol="0" anchor="ctr"/>
+          <a:lstStyle/>
+          <a:p>
+            <a:pPr algn="l" indent="0" marL="0">
+              <a:lnSpc>
+                <a:spcPts val="1900"/>
+              </a:lnSpc>
+              <a:buNone/>
+            </a:pPr>
+            <a:r>
+              <a:rPr lang="en-US" sz="1300" dirty="0">
+                <a:solidFill>
+                  <a:srgbClr val="33394A"/>
+                </a:solidFill>
+                <a:latin typeface="Calibri" pitchFamily="34" charset="0"/>
+                <a:ea typeface="Calibri" pitchFamily="34" charset="-122"/>
+                <a:cs typeface="Calibri" pitchFamily="34" charset="-120"/>
+              </a:rPr>
+              <a:t>A IA amplifica o que já existe: time com base arrumada acelera, base bagunçada piora mais rápido. Arrumar a base não é atraso. É a condição do ganho.</a:t>
+            </a:r>
+            <a:endParaRPr lang="en-US" sz="1300" dirty="0"/>
           </a:p>
         </p:txBody>
       </p:sp>
@@ -4986,7 +6486,7 @@
         </p:nvSpPr>
         <p:spPr>
           <a:xfrm>
-            <a:off x="822960" y="594360"/>
+            <a:off x="822960" y="548640"/>
             <a:ext cx="5486400" cy="292608"/>
           </a:xfrm>
           <a:prstGeom prst="rect">
@@ -5025,8 +6525,8 @@
         </p:nvSpPr>
         <p:spPr>
           <a:xfrm>
-            <a:off x="822960" y="960120"/>
-            <a:ext cx="10543032" cy="914400"/>
+            <a:off x="822960" y="896112"/>
+            <a:ext cx="10543032" cy="868680"/>
           </a:xfrm>
           <a:prstGeom prst="rect">
             <a:avLst/>
@@ -5040,12 +6540,12 @@
           <a:p>
             <a:pPr indent="0" marL="0">
               <a:lnSpc>
-                <a:spcPts val="3400"/>
+                <a:spcPts val="3300"/>
               </a:lnSpc>
               <a:buNone/>
             </a:pPr>
             <a:r>
-              <a:rPr lang="en-US" sz="2800" b="1" dirty="0">
+              <a:rPr lang="en-US" sz="2700" b="1" dirty="0">
                 <a:solidFill>
                   <a:srgbClr val="1B2A4A"/>
                 </a:solidFill>
@@ -5053,9 +6553,9 @@
                 <a:ea typeface="Cambria" pitchFamily="34" charset="-122"/>
                 <a:cs typeface="Cambria" pitchFamily="34" charset="-120"/>
               </a:rPr>
-              <a:t>O Mapa de Vazamento: grátis, feito de fora, com um número dentro.</a:t>
-            </a:r>
-            <a:endParaRPr lang="en-US" sz="2800" dirty="0"/>
+              <a:t>O Mapa de Vazamento: gratuito, feito de fora, com um número dentro.</a:t>
+            </a:r>
+            <a:endParaRPr lang="en-US" sz="2700" dirty="0"/>
           </a:p>
         </p:txBody>
       </p:sp>
@@ -5067,7 +6567,7 @@
         </p:nvSpPr>
         <p:spPr>
           <a:xfrm>
-            <a:off x="822960" y="1920240"/>
+            <a:off x="822960" y="1810512"/>
             <a:ext cx="10543032" cy="640080"/>
           </a:xfrm>
           <a:prstGeom prst="rect">
@@ -5082,12 +6582,12 @@
           <a:p>
             <a:pPr algn="l" indent="0" marL="0">
               <a:lnSpc>
-                <a:spcPts val="2000"/>
+                <a:spcPts val="1850"/>
               </a:lnSpc>
               <a:buNone/>
             </a:pPr>
             <a:r>
-              <a:rPr lang="en-US" sz="1300" dirty="0">
+              <a:rPr lang="en-US" sz="1250" dirty="0">
                 <a:solidFill>
                   <a:srgbClr val="6E6858"/>
                 </a:solidFill>
@@ -5095,9 +6595,9 @@
                 <a:ea typeface="Calibri" pitchFamily="34" charset="-122"/>
                 <a:cs typeface="Calibri" pitchFamily="34" charset="-120"/>
               </a:rPr>
-              <a:t>Antes de qualquer contrato, entregamos um mapa do que estimamos estar vazando na sua operação: onde, quanto por mês, e o que faríamos primeiro. Se o número não convencer, a conversa termina ali. Sem custo e sem compromisso.</a:t>
-            </a:r>
-            <a:endParaRPr lang="en-US" sz="1300" dirty="0"/>
+              <a:t>Antes de qualquer contrato, entregamos um mapa do que estimamos estar vazando na sua operação: onde, quanto por mês, e o que faríamos primeiro. Ninguém deveria pagar para descobrir se faz sentido. Se o número não convencer, a conversa termina ali, sem custo e sem compromisso.</a:t>
+            </a:r>
+            <a:endParaRPr lang="en-US" sz="1250" dirty="0"/>
           </a:p>
         </p:txBody>
       </p:sp>
@@ -5156,8 +6656,8 @@
         </p:blipFill>
         <p:spPr>
           <a:xfrm>
-            <a:off x="4494276" y="2834640"/>
-            <a:ext cx="3200400" cy="3520440"/>
+            <a:off x="4539996" y="2880360"/>
+            <a:ext cx="3108960" cy="3419856"/>
           </a:xfrm>
           <a:prstGeom prst="rect">
             <a:avLst/>
@@ -5204,7 +6704,7 @@
         </p:nvSpPr>
         <p:spPr>
           <a:xfrm>
-            <a:off x="822960" y="594360"/>
+            <a:off x="822960" y="548640"/>
             <a:ext cx="5486400" cy="292608"/>
           </a:xfrm>
           <a:prstGeom prst="rect">
@@ -5243,8 +6743,8 @@
         </p:nvSpPr>
         <p:spPr>
           <a:xfrm>
-            <a:off x="822960" y="960120"/>
-            <a:ext cx="10543032" cy="914400"/>
+            <a:off x="822960" y="896112"/>
+            <a:ext cx="10543032" cy="868680"/>
           </a:xfrm>
           <a:prstGeom prst="rect">
             <a:avLst/>
@@ -5258,12 +6758,12 @@
           <a:p>
             <a:pPr indent="0" marL="0">
               <a:lnSpc>
-                <a:spcPts val="3400"/>
+                <a:spcPts val="3300"/>
               </a:lnSpc>
               <a:buNone/>
             </a:pPr>
             <a:r>
-              <a:rPr lang="en-US" sz="2800" b="1" dirty="0">
+              <a:rPr lang="en-US" sz="2700" b="1" dirty="0">
                 <a:solidFill>
                   <a:srgbClr val="1B2A4A"/>
                 </a:solidFill>
@@ -5273,7 +6773,7 @@
               </a:rPr>
               <a:t>Um programa, um ano, três fases. E três portas de saída.</a:t>
             </a:r>
-            <a:endParaRPr lang="en-US" sz="2800" dirty="0"/>
+            <a:endParaRPr lang="en-US" sz="2700" dirty="0"/>
           </a:p>
         </p:txBody>
       </p:sp>
@@ -5285,7 +6785,7 @@
         </p:nvSpPr>
         <p:spPr>
           <a:xfrm>
-            <a:off x="822960" y="1920240"/>
+            <a:off x="822960" y="1810512"/>
             <a:ext cx="10543032" cy="640080"/>
           </a:xfrm>
           <a:prstGeom prst="rect">
@@ -5300,12 +6800,12 @@
           <a:p>
             <a:pPr algn="l" indent="0" marL="0">
               <a:lnSpc>
-                <a:spcPts val="2000"/>
+                <a:spcPts val="1850"/>
               </a:lnSpc>
               <a:buNone/>
             </a:pPr>
             <a:r>
-              <a:rPr lang="en-US" sz="1300" dirty="0">
+              <a:rPr lang="en-US" sz="1250" dirty="0">
                 <a:solidFill>
                   <a:srgbClr val="6E6858"/>
                 </a:solidFill>
@@ -5313,9 +6813,9 @@
                 <a:ea typeface="Calibri" pitchFamily="34" charset="-122"/>
                 <a:cs typeface="Calibri" pitchFamily="34" charset="-120"/>
               </a:rPr>
-              <a:t>Ninguém espera o terreno ficar perfeito para começar a obra: escolhemos juntos a primeira parede, e é ela que paga a fundação do resto.</a:t>
-            </a:r>
-            <a:endParaRPr lang="en-US" sz="1300" dirty="0"/>
+              <a:t>Cada etapa entrega algo inteiro sozinha e produz o insumo da próxima. A decisão do ano é tomada uma vez; o risco, fase a fase: cada uma termina num portão onde a decisão volta para a sua mão.</a:t>
+            </a:r>
+            <a:endParaRPr lang="en-US" sz="1250" dirty="0"/>
           </a:p>
         </p:txBody>
       </p:sp>
@@ -5468,7 +6968,7 @@
         <p:spPr>
           <a:xfrm>
             <a:off x="822960" y="3520440"/>
-            <a:ext cx="3270504" cy="2377440"/>
+            <a:ext cx="3270504" cy="2194560"/>
           </a:xfrm>
           <a:prstGeom prst="rect">
             <a:avLst/>
@@ -5495,7 +6995,7 @@
                 <a:ea typeface="Calibri" pitchFamily="34" charset="-122"/>
                 <a:cs typeface="Calibri" pitchFamily="34" charset="-120"/>
               </a:rPr>
-              <a:t>Um caso construído com os seus dados, rodando e medido contra a métrica combinada por escrito na primeira semana. Dentro dela: a avaliação profunda, o protótipo em uso real e o retrato completo de oportunidades, ranqueado.</a:t>
+              <a:t>O Assessment: o mergulho profundo, do conselho à linha de frente. E o protótipo do caso mais promissor, construído com os seus dados reais e medido contra o critério combinado por escrito.</a:t>
             </a:r>
             <a:endParaRPr lang="en-US" sz="1150" dirty="0"/>
           </a:p>
@@ -5611,7 +7111,7 @@
         <p:spPr>
           <a:xfrm>
             <a:off x="4459224" y="3520440"/>
-            <a:ext cx="3270504" cy="2377440"/>
+            <a:ext cx="3270504" cy="2194560"/>
           </a:xfrm>
           <a:prstGeom prst="rect">
             <a:avLst/>
@@ -5638,7 +7138,7 @@
                 <a:ea typeface="Calibri" pitchFamily="34" charset="-122"/>
                 <a:cs typeface="Calibri" pitchFamily="34" charset="-120"/>
               </a:rPr>
-              <a:t>Os casos aprovados em produção. Dentro dela: arquitetura, integrações e agentes com aprovação humana nos pontos certos, e a turma da sua equipe no nosso portal, com fluência medida em 30, 60 e 90 dias.</a:t>
+              <a:t>A engenharia da solução: sistemas sob medida em produção, com aprovação humana no que é crítico. E o treinamento de todos os níveis, na nossa plataforma própria e em sessões presenciais.</a:t>
             </a:r>
             <a:endParaRPr lang="en-US" sz="1150" dirty="0"/>
           </a:p>
@@ -5754,7 +7254,7 @@
         <p:spPr>
           <a:xfrm>
             <a:off x="8095488" y="3520440"/>
-            <a:ext cx="3270504" cy="2377440"/>
+            <a:ext cx="3270504" cy="2194560"/>
           </a:xfrm>
           <a:prstGeom prst="rect">
             <a:avLst/>
@@ -5781,7 +7281,49 @@
                 <a:ea typeface="Calibri" pitchFamily="34" charset="-122"/>
                 <a:cs typeface="Calibri" pitchFamily="34" charset="-120"/>
               </a:rPr>
-              <a:t>A capacidade rodando sem consultor no meio. Dentro dela: operação sob SLA com presença semanal, relatório de projetado versus realizado e o ritual com a diretoria.</a:t>
+              <a:t>A operação com presença: monitoramento, evolução contínua, ritual semanal com quem decide e o relatório mensal de projetado versus realizado.</a:t>
+            </a:r>
+            <a:endParaRPr lang="en-US" sz="1150" dirty="0"/>
+          </a:p>
+        </p:txBody>
+      </p:sp>
+      <p:sp>
+        <p:nvSpPr>
+          <p:cNvPr id="18" name="Text 16"/>
+          <p:cNvSpPr/>
+          <p:nvPr/>
+        </p:nvSpPr>
+        <p:spPr>
+          <a:xfrm>
+            <a:off x="822960" y="5989320"/>
+            <a:ext cx="10543032" cy="365760"/>
+          </a:xfrm>
+          <a:prstGeom prst="rect">
+            <a:avLst/>
+          </a:prstGeom>
+          <a:noFill/>
+          <a:ln/>
+        </p:spPr>
+        <p:txBody>
+          <a:bodyPr wrap="square" rtlCol="0" anchor="ctr"/>
+          <a:lstStyle/>
+          <a:p>
+            <a:pPr algn="ctr" indent="0" marL="0">
+              <a:lnSpc>
+                <a:spcPts val="2000"/>
+              </a:lnSpc>
+              <a:buNone/>
+            </a:pPr>
+            <a:r>
+              <a:rPr lang="en-US" sz="1150" i="1" dirty="0">
+                <a:solidFill>
+                  <a:srgbClr val="6E6858"/>
+                </a:solidFill>
+                <a:latin typeface="Calibri" pitchFamily="34" charset="0"/>
+                <a:ea typeface="Calibri" pitchFamily="34" charset="-122"/>
+                <a:cs typeface="Calibri" pitchFamily="34" charset="-120"/>
+              </a:rPr>
+              <a:t>Os três slides seguintes abrem cada fase: o que cada serviço faz, por quê, e o que fica com você.</a:t>
             </a:r>
             <a:endParaRPr lang="en-US" sz="1150" dirty="0"/>
           </a:p>
@@ -5801,7 +7343,7 @@
     <p:bg>
       <p:bgPr>
         <a:solidFill>
-          <a:srgbClr val="1B2A4A"/>
+          <a:srgbClr val="FFFFFF"/>
         </a:solidFill>
       </p:bgPr>
     </p:bg>
@@ -5827,7 +7369,7 @@
         </p:nvSpPr>
         <p:spPr>
           <a:xfrm>
-            <a:off x="822960" y="1828800"/>
+            <a:off x="822960" y="548640"/>
             <a:ext cx="5486400" cy="292608"/>
           </a:xfrm>
           <a:prstGeom prst="rect">
@@ -5844,7 +7386,7 @@
               <a:buNone/>
             </a:pPr>
             <a:r>
-              <a:rPr lang="en-US" sz="1200" b="1" spc="300" kern="0" dirty="0">
+              <a:rPr lang="en-US" sz="1100" b="1" spc="300" kern="0" dirty="0">
                 <a:solidFill>
                   <a:srgbClr val="C2A35B"/>
                 </a:solidFill>
@@ -5852,9 +7394,9 @@
                 <a:ea typeface="Calibri" pitchFamily="34" charset="-122"/>
                 <a:cs typeface="Calibri" pitchFamily="34" charset="-120"/>
               </a:rPr>
-              <a:t>O PORTÃO DA PROVA</a:t>
-            </a:r>
-            <a:endParaRPr lang="en-US" sz="1200" dirty="0"/>
+              <a:t>FASE 1 · A PROVA · POR DENTRO</a:t>
+            </a:r>
+            <a:endParaRPr lang="en-US" sz="1100" dirty="0"/>
           </a:p>
         </p:txBody>
       </p:sp>
@@ -5866,8 +7408,8 @@
         </p:nvSpPr>
         <p:spPr>
           <a:xfrm>
-            <a:off x="822960" y="2286000"/>
-            <a:ext cx="10543032" cy="2011680"/>
+            <a:off x="822960" y="896112"/>
+            <a:ext cx="10543032" cy="868680"/>
           </a:xfrm>
           <a:prstGeom prst="rect">
             <a:avLst/>
@@ -5881,41 +7423,146 @@
           <a:p>
             <a:pPr indent="0" marL="0">
               <a:lnSpc>
-                <a:spcPts val="3400"/>
+                <a:spcPts val="3300"/>
               </a:lnSpc>
               <a:buNone/>
             </a:pPr>
             <a:r>
-              <a:rPr lang="en-US" sz="2400" b="1" dirty="0">
-                <a:solidFill>
-                  <a:srgbClr val="FFFFFF"/>
+              <a:rPr lang="en-US" sz="2700" b="1" dirty="0">
+                <a:solidFill>
+                  <a:srgbClr val="1B2A4A"/>
                 </a:solidFill>
                 <a:latin typeface="Cambria" pitchFamily="34" charset="0"/>
                 <a:ea typeface="Cambria" pitchFamily="34" charset="-122"/>
                 <a:cs typeface="Cambria" pitchFamily="34" charset="-120"/>
               </a:rPr>
-              <a:t>Se em seis semanas o número combinado não apareceu, ou se você simplesmente mudar de ideia, você sai levando tudo o que foi produzido. Sem multa. Sem constrangimento.</a:t>
-            </a:r>
-            <a:endParaRPr lang="en-US" sz="2400" dirty="0"/>
-          </a:p>
-        </p:txBody>
-      </p:sp>
-      <p:sp>
-        <p:nvSpPr>
-          <p:cNvPr id="4" name="Shape 2"/>
-          <p:cNvSpPr/>
-          <p:nvPr/>
-        </p:nvSpPr>
-        <p:spPr>
-          <a:xfrm>
-            <a:off x="822960" y="4480560"/>
-            <a:ext cx="2011680" cy="0"/>
+              <a:t>O mergulho que revela, e a prova antes do investimento.</a:t>
+            </a:r>
+            <a:endParaRPr lang="en-US" sz="2700" dirty="0"/>
+          </a:p>
+        </p:txBody>
+      </p:sp>
+      <p:sp>
+        <p:nvSpPr>
+          <p:cNvPr id="4" name="Text 2"/>
+          <p:cNvSpPr/>
+          <p:nvPr/>
+        </p:nvSpPr>
+        <p:spPr>
+          <a:xfrm>
+            <a:off x="822960" y="6400800"/>
+            <a:ext cx="10543032" cy="274320"/>
+          </a:xfrm>
+          <a:prstGeom prst="rect">
+            <a:avLst/>
+          </a:prstGeom>
+          <a:noFill/>
+          <a:ln/>
+        </p:spPr>
+        <p:txBody>
+          <a:bodyPr wrap="square" rtlCol="0" anchor="ctr"/>
+          <a:lstStyle/>
+          <a:p>
+            <a:pPr algn="ctr" indent="0" marL="0">
+              <a:buNone/>
+            </a:pPr>
+            <a:r>
+              <a:rPr lang="en-US" sz="900" spc="100" kern="0" dirty="0">
+                <a:solidFill>
+                  <a:srgbClr val="6E6858"/>
+                </a:solidFill>
+                <a:latin typeface="Calibri" pitchFamily="34" charset="0"/>
+                <a:ea typeface="Calibri" pitchFamily="34" charset="-122"/>
+                <a:cs typeface="Calibri" pitchFamily="34" charset="-120"/>
+              </a:rPr>
+              <a:t>ABBA Consultoria de IA · contato@abbaservices.com.br</a:t>
+            </a:r>
+            <a:endParaRPr lang="en-US" sz="900" dirty="0"/>
+          </a:p>
+        </p:txBody>
+      </p:sp>
+      <p:pic>
+        <p:nvPicPr>
+          <p:cNvPr id="5" name="Image 0" descr="/home/user/abba-ops/08-materiais/assets/fotos/assessment--relatorio-interno.jpg">    </p:cNvPr>
+          <p:cNvPicPr>
+            <a:picLocks noChangeAspect="1"/>
+          </p:cNvPicPr>
+          <p:nvPr/>
+        </p:nvPicPr>
+        <p:blipFill>
+          <a:blip r:embed="rId1"/>
+          <a:stretch>
+            <a:fillRect/>
+          </a:stretch>
+        </p:blipFill>
+        <p:spPr>
+          <a:xfrm>
+            <a:off x="9217152" y="1965960"/>
+            <a:ext cx="2148840" cy="3035808"/>
+          </a:xfrm>
+          <a:prstGeom prst="rect">
+            <a:avLst/>
+          </a:prstGeom>
+        </p:spPr>
+      </p:pic>
+      <p:sp>
+        <p:nvSpPr>
+          <p:cNvPr id="6" name="Text 3"/>
+          <p:cNvSpPr/>
+          <p:nvPr/>
+        </p:nvSpPr>
+        <p:spPr>
+          <a:xfrm>
+            <a:off x="9217152" y="5029200"/>
+            <a:ext cx="2148840" cy="365760"/>
+          </a:xfrm>
+          <a:prstGeom prst="rect">
+            <a:avLst/>
+          </a:prstGeom>
+          <a:noFill/>
+          <a:ln/>
+        </p:spPr>
+        <p:txBody>
+          <a:bodyPr wrap="square" rtlCol="0" anchor="ctr"/>
+          <a:lstStyle/>
+          <a:p>
+            <a:pPr algn="l" indent="0" marL="0">
+              <a:lnSpc>
+                <a:spcPts val="1200"/>
+              </a:lnSpc>
+              <a:buNone/>
+            </a:pPr>
+            <a:r>
+              <a:rPr lang="en-US" sz="900" i="1" dirty="0">
+                <a:solidFill>
+                  <a:srgbClr val="6E6858"/>
+                </a:solidFill>
+                <a:latin typeface="Calibri" pitchFamily="34" charset="0"/>
+                <a:ea typeface="Calibri" pitchFamily="34" charset="-122"/>
+                <a:cs typeface="Calibri" pitchFamily="34" charset="-120"/>
+              </a:rPr>
+              <a:t>Página do relatório de maturidade (modelo).</a:t>
+            </a:r>
+            <a:endParaRPr lang="en-US" sz="900" dirty="0"/>
+          </a:p>
+        </p:txBody>
+      </p:sp>
+      <p:sp>
+        <p:nvSpPr>
+          <p:cNvPr id="7" name="Shape 4"/>
+          <p:cNvSpPr/>
+          <p:nvPr/>
+        </p:nvSpPr>
+        <p:spPr>
+          <a:xfrm>
+            <a:off x="822960" y="1965960"/>
+            <a:ext cx="7936992" cy="0"/>
           </a:xfrm>
           <a:prstGeom prst="line">
             <a:avLst/>
           </a:prstGeom>
           <a:noFill/>
-          <a:ln w="19050">
+          <a:ln w="15240">
             <a:solidFill>
               <a:srgbClr val="C2A35B"/>
             </a:solidFill>
@@ -5925,14 +7572,53 @@
       </p:sp>
       <p:sp>
         <p:nvSpPr>
-          <p:cNvPr id="5" name="Text 3"/>
-          <p:cNvSpPr/>
-          <p:nvPr/>
-        </p:nvSpPr>
-        <p:spPr>
-          <a:xfrm>
-            <a:off x="822960" y="4709160"/>
-            <a:ext cx="10543032" cy="822960"/>
+          <p:cNvPr id="8" name="Text 5"/>
+          <p:cNvSpPr/>
+          <p:nvPr/>
+        </p:nvSpPr>
+        <p:spPr>
+          <a:xfrm>
+            <a:off x="822960" y="2084832"/>
+            <a:ext cx="7936992" cy="292608"/>
+          </a:xfrm>
+          <a:prstGeom prst="rect">
+            <a:avLst/>
+          </a:prstGeom>
+          <a:noFill/>
+          <a:ln/>
+        </p:spPr>
+        <p:txBody>
+          <a:bodyPr wrap="square" rtlCol="0" anchor="ctr"/>
+          <a:lstStyle/>
+          <a:p>
+            <a:pPr algn="l" indent="0" marL="0">
+              <a:buNone/>
+            </a:pPr>
+            <a:r>
+              <a:rPr lang="en-US" sz="1050" b="1" spc="300" kern="0" dirty="0">
+                <a:solidFill>
+                  <a:srgbClr val="C2A35B"/>
+                </a:solidFill>
+                <a:latin typeface="Calibri" pitchFamily="34" charset="0"/>
+                <a:ea typeface="Calibri" pitchFamily="34" charset="-122"/>
+                <a:cs typeface="Calibri" pitchFamily="34" charset="-120"/>
+              </a:rPr>
+              <a:t>O ASSESSMENT · O MERGULHO PROFUNDO</a:t>
+            </a:r>
+            <a:endParaRPr lang="en-US" sz="1050" dirty="0"/>
+          </a:p>
+        </p:txBody>
+      </p:sp>
+      <p:sp>
+        <p:nvSpPr>
+          <p:cNvPr id="9" name="Text 6"/>
+          <p:cNvSpPr/>
+          <p:nvPr/>
+        </p:nvSpPr>
+        <p:spPr>
+          <a:xfrm>
+            <a:off x="822960" y="2423160"/>
+            <a:ext cx="960120" cy="256032"/>
           </a:xfrm>
           <a:prstGeom prst="rect">
             <a:avLst/>
@@ -5945,23 +7631,448 @@
           <a:lstStyle/>
           <a:p>
             <a:pPr indent="0" marL="0">
+              <a:buNone/>
+            </a:pPr>
+            <a:r>
+              <a:rPr lang="en-US" sz="850" b="1" spc="200" kern="0" dirty="0">
+                <a:solidFill>
+                  <a:srgbClr val="C2A35B"/>
+                </a:solidFill>
+                <a:latin typeface="Calibri" pitchFamily="34" charset="0"/>
+                <a:ea typeface="Calibri" pitchFamily="34" charset="-122"/>
+                <a:cs typeface="Calibri" pitchFamily="34" charset="-120"/>
+              </a:rPr>
+              <a:t>O QUÊ</a:t>
+            </a:r>
+            <a:endParaRPr lang="en-US" sz="850" dirty="0"/>
+          </a:p>
+        </p:txBody>
+      </p:sp>
+      <p:sp>
+        <p:nvSpPr>
+          <p:cNvPr id="10" name="Text 7"/>
+          <p:cNvSpPr/>
+          <p:nvPr/>
+        </p:nvSpPr>
+        <p:spPr>
+          <a:xfrm>
+            <a:off x="1828800" y="2404872"/>
+            <a:ext cx="6931152" cy="658368"/>
+          </a:xfrm>
+          <a:prstGeom prst="rect">
+            <a:avLst/>
+          </a:prstGeom>
+          <a:noFill/>
+          <a:ln/>
+        </p:spPr>
+        <p:txBody>
+          <a:bodyPr wrap="square" rtlCol="0" anchor="ctr"/>
+          <a:lstStyle/>
+          <a:p>
+            <a:pPr algn="l" indent="0" marL="0">
               <a:lnSpc>
-                <a:spcPts val="2200"/>
+                <a:spcPts val="1450"/>
               </a:lnSpc>
               <a:buNone/>
             </a:pPr>
             <a:r>
-              <a:rPr lang="en-US" sz="1500" i="1" dirty="0">
-                <a:solidFill>
-                  <a:srgbClr val="D8DCE8"/>
-                </a:solidFill>
-                <a:latin typeface="Cambria" pitchFamily="34" charset="0"/>
-                <a:ea typeface="Cambria" pitchFamily="34" charset="-122"/>
-                <a:cs typeface="Cambria" pitchFamily="34" charset="-120"/>
-              </a:rPr>
-              <a:t>Se a gente não bater o número, a gente não segue para a próxima fase. O portão retém execução, nunca informação: o retrato de oportunidades é seu, fique ou não.</a:t>
-            </a:r>
-            <a:endParaRPr lang="en-US" sz="1500" dirty="0"/>
+              <a:rPr lang="en-US" sz="1050" dirty="0">
+                <a:solidFill>
+                  <a:srgbClr val="33394A"/>
+                </a:solidFill>
+                <a:latin typeface="Calibri" pitchFamily="34" charset="0"/>
+                <a:ea typeface="Calibri" pitchFamily="34" charset="-122"/>
+                <a:cs typeface="Calibri" pitchFamily="34" charset="-120"/>
+              </a:rPr>
+              <a:t>Entramos na empresa e entendemos, do conselho à linha de frente, como o trabalho realmente flui: onde quebra, onde vaza valor, quem decide o quê. Entrevistas em todos os níveis, analisadas com a nossa ferramenta própria.</a:t>
+            </a:r>
+            <a:endParaRPr lang="en-US" sz="1050" dirty="0"/>
+          </a:p>
+        </p:txBody>
+      </p:sp>
+      <p:sp>
+        <p:nvSpPr>
+          <p:cNvPr id="11" name="Text 8"/>
+          <p:cNvSpPr/>
+          <p:nvPr/>
+        </p:nvSpPr>
+        <p:spPr>
+          <a:xfrm>
+            <a:off x="822960" y="3191256"/>
+            <a:ext cx="960120" cy="256032"/>
+          </a:xfrm>
+          <a:prstGeom prst="rect">
+            <a:avLst/>
+          </a:prstGeom>
+          <a:noFill/>
+          <a:ln/>
+        </p:spPr>
+        <p:txBody>
+          <a:bodyPr wrap="square" rtlCol="0" anchor="ctr"/>
+          <a:lstStyle/>
+          <a:p>
+            <a:pPr indent="0" marL="0">
+              <a:buNone/>
+            </a:pPr>
+            <a:r>
+              <a:rPr lang="en-US" sz="850" b="1" spc="200" kern="0" dirty="0">
+                <a:solidFill>
+                  <a:srgbClr val="C2A35B"/>
+                </a:solidFill>
+                <a:latin typeface="Calibri" pitchFamily="34" charset="0"/>
+                <a:ea typeface="Calibri" pitchFamily="34" charset="-122"/>
+                <a:cs typeface="Calibri" pitchFamily="34" charset="-120"/>
+              </a:rPr>
+              <a:t>POR QUÊ</a:t>
+            </a:r>
+            <a:endParaRPr lang="en-US" sz="850" dirty="0"/>
+          </a:p>
+        </p:txBody>
+      </p:sp>
+      <p:sp>
+        <p:nvSpPr>
+          <p:cNvPr id="12" name="Text 9"/>
+          <p:cNvSpPr/>
+          <p:nvPr/>
+        </p:nvSpPr>
+        <p:spPr>
+          <a:xfrm>
+            <a:off x="1828800" y="3172968"/>
+            <a:ext cx="6931152" cy="603504"/>
+          </a:xfrm>
+          <a:prstGeom prst="rect">
+            <a:avLst/>
+          </a:prstGeom>
+          <a:noFill/>
+          <a:ln/>
+        </p:spPr>
+        <p:txBody>
+          <a:bodyPr wrap="square" rtlCol="0" anchor="ctr"/>
+          <a:lstStyle/>
+          <a:p>
+            <a:pPr algn="l" indent="0" marL="0">
+              <a:lnSpc>
+                <a:spcPts val="1450"/>
+              </a:lnSpc>
+              <a:buNone/>
+            </a:pPr>
+            <a:r>
+              <a:rPr lang="en-US" sz="1050" dirty="0">
+                <a:solidFill>
+                  <a:srgbClr val="33394A"/>
+                </a:solidFill>
+                <a:latin typeface="Calibri" pitchFamily="34" charset="0"/>
+                <a:ea typeface="Calibri" pitchFamily="34" charset="-122"/>
+                <a:cs typeface="Calibri" pitchFamily="34" charset="-120"/>
+              </a:rPr>
+              <a:t>Solução genérica falha. O que separa o investimento certo do desperdício é entender onde, no seu fluxo, existe valor preso. O Assessment transforma opinião em portfólio priorizado, com número.</a:t>
+            </a:r>
+            <a:endParaRPr lang="en-US" sz="1050" dirty="0"/>
+          </a:p>
+        </p:txBody>
+      </p:sp>
+      <p:sp>
+        <p:nvSpPr>
+          <p:cNvPr id="13" name="Text 10"/>
+          <p:cNvSpPr/>
+          <p:nvPr/>
+        </p:nvSpPr>
+        <p:spPr>
+          <a:xfrm>
+            <a:off x="822960" y="3904488"/>
+            <a:ext cx="960120" cy="256032"/>
+          </a:xfrm>
+          <a:prstGeom prst="rect">
+            <a:avLst/>
+          </a:prstGeom>
+          <a:noFill/>
+          <a:ln/>
+        </p:spPr>
+        <p:txBody>
+          <a:bodyPr wrap="square" rtlCol="0" anchor="ctr"/>
+          <a:lstStyle/>
+          <a:p>
+            <a:pPr indent="0" marL="0">
+              <a:buNone/>
+            </a:pPr>
+            <a:r>
+              <a:rPr lang="en-US" sz="850" b="1" spc="200" kern="0" dirty="0">
+                <a:solidFill>
+                  <a:srgbClr val="C2A35B"/>
+                </a:solidFill>
+                <a:latin typeface="Calibri" pitchFamily="34" charset="0"/>
+                <a:ea typeface="Calibri" pitchFamily="34" charset="-122"/>
+                <a:cs typeface="Calibri" pitchFamily="34" charset="-120"/>
+              </a:rPr>
+              <a:t>O QUE FICA</a:t>
+            </a:r>
+            <a:endParaRPr lang="en-US" sz="850" dirty="0"/>
+          </a:p>
+        </p:txBody>
+      </p:sp>
+      <p:sp>
+        <p:nvSpPr>
+          <p:cNvPr id="14" name="Text 11"/>
+          <p:cNvSpPr/>
+          <p:nvPr/>
+        </p:nvSpPr>
+        <p:spPr>
+          <a:xfrm>
+            <a:off x="1828800" y="3886200"/>
+            <a:ext cx="6931152" cy="566928"/>
+          </a:xfrm>
+          <a:prstGeom prst="rect">
+            <a:avLst/>
+          </a:prstGeom>
+          <a:noFill/>
+          <a:ln/>
+        </p:spPr>
+        <p:txBody>
+          <a:bodyPr wrap="square" rtlCol="0" anchor="ctr"/>
+          <a:lstStyle/>
+          <a:p>
+            <a:pPr algn="l" indent="0" marL="0">
+              <a:lnSpc>
+                <a:spcPts val="1450"/>
+              </a:lnSpc>
+              <a:buNone/>
+            </a:pPr>
+            <a:r>
+              <a:rPr lang="en-US" sz="1050" dirty="0">
+                <a:solidFill>
+                  <a:srgbClr val="33394A"/>
+                </a:solidFill>
+                <a:latin typeface="Calibri" pitchFamily="34" charset="0"/>
+                <a:ea typeface="Calibri" pitchFamily="34" charset="-122"/>
+                <a:cs typeface="Calibri" pitchFamily="34" charset="-120"/>
+              </a:rPr>
+              <a:t>O relatório de maturidade, o portfólio de oportunidades ranqueado e quantificado, e o plano diretor: o que fazer, em que ordem, e por quê. Não uma lista de ideias.</a:t>
+            </a:r>
+            <a:endParaRPr lang="en-US" sz="1050" dirty="0"/>
+          </a:p>
+        </p:txBody>
+      </p:sp>
+      <p:sp>
+        <p:nvSpPr>
+          <p:cNvPr id="15" name="Shape 12"/>
+          <p:cNvSpPr/>
+          <p:nvPr/>
+        </p:nvSpPr>
+        <p:spPr>
+          <a:xfrm>
+            <a:off x="822960" y="4718304"/>
+            <a:ext cx="7936992" cy="0"/>
+          </a:xfrm>
+          <a:prstGeom prst="line">
+            <a:avLst/>
+          </a:prstGeom>
+          <a:noFill/>
+          <a:ln w="15240">
+            <a:solidFill>
+              <a:srgbClr val="C2A35B"/>
+            </a:solidFill>
+            <a:prstDash val="solid"/>
+          </a:ln>
+        </p:spPr>
+      </p:sp>
+      <p:sp>
+        <p:nvSpPr>
+          <p:cNvPr id="16" name="Text 13"/>
+          <p:cNvSpPr/>
+          <p:nvPr/>
+        </p:nvSpPr>
+        <p:spPr>
+          <a:xfrm>
+            <a:off x="822960" y="4837176"/>
+            <a:ext cx="7936992" cy="292608"/>
+          </a:xfrm>
+          <a:prstGeom prst="rect">
+            <a:avLst/>
+          </a:prstGeom>
+          <a:noFill/>
+          <a:ln/>
+        </p:spPr>
+        <p:txBody>
+          <a:bodyPr wrap="square" rtlCol="0" anchor="ctr"/>
+          <a:lstStyle/>
+          <a:p>
+            <a:pPr algn="l" indent="0" marL="0">
+              <a:buNone/>
+            </a:pPr>
+            <a:r>
+              <a:rPr lang="en-US" sz="1050" b="1" spc="300" kern="0" dirty="0">
+                <a:solidFill>
+                  <a:srgbClr val="C2A35B"/>
+                </a:solidFill>
+                <a:latin typeface="Calibri" pitchFamily="34" charset="0"/>
+                <a:ea typeface="Calibri" pitchFamily="34" charset="-122"/>
+                <a:cs typeface="Calibri" pitchFamily="34" charset="-120"/>
+              </a:rPr>
+              <a:t>O PROTÓTIPO DE CASO DE USO · A PROVA</a:t>
+            </a:r>
+            <a:endParaRPr lang="en-US" sz="1050" dirty="0"/>
+          </a:p>
+        </p:txBody>
+      </p:sp>
+      <p:sp>
+        <p:nvSpPr>
+          <p:cNvPr id="17" name="Text 14"/>
+          <p:cNvSpPr/>
+          <p:nvPr/>
+        </p:nvSpPr>
+        <p:spPr>
+          <a:xfrm>
+            <a:off x="822960" y="5175504"/>
+            <a:ext cx="960120" cy="256032"/>
+          </a:xfrm>
+          <a:prstGeom prst="rect">
+            <a:avLst/>
+          </a:prstGeom>
+          <a:noFill/>
+          <a:ln/>
+        </p:spPr>
+        <p:txBody>
+          <a:bodyPr wrap="square" rtlCol="0" anchor="ctr"/>
+          <a:lstStyle/>
+          <a:p>
+            <a:pPr indent="0" marL="0">
+              <a:buNone/>
+            </a:pPr>
+            <a:r>
+              <a:rPr lang="en-US" sz="850" b="1" spc="200" kern="0" dirty="0">
+                <a:solidFill>
+                  <a:srgbClr val="C2A35B"/>
+                </a:solidFill>
+                <a:latin typeface="Calibri" pitchFamily="34" charset="0"/>
+                <a:ea typeface="Calibri" pitchFamily="34" charset="-122"/>
+                <a:cs typeface="Calibri" pitchFamily="34" charset="-120"/>
+              </a:rPr>
+              <a:t>O QUÊ</a:t>
+            </a:r>
+            <a:endParaRPr lang="en-US" sz="850" dirty="0"/>
+          </a:p>
+        </p:txBody>
+      </p:sp>
+      <p:sp>
+        <p:nvSpPr>
+          <p:cNvPr id="18" name="Text 15"/>
+          <p:cNvSpPr/>
+          <p:nvPr/>
+        </p:nvSpPr>
+        <p:spPr>
+          <a:xfrm>
+            <a:off x="1828800" y="5157216"/>
+            <a:ext cx="6931152" cy="621792"/>
+          </a:xfrm>
+          <a:prstGeom prst="rect">
+            <a:avLst/>
+          </a:prstGeom>
+          <a:noFill/>
+          <a:ln/>
+        </p:spPr>
+        <p:txBody>
+          <a:bodyPr wrap="square" rtlCol="0" anchor="ctr"/>
+          <a:lstStyle/>
+          <a:p>
+            <a:pPr algn="l" indent="0" marL="0">
+              <a:lnSpc>
+                <a:spcPts val="1450"/>
+              </a:lnSpc>
+              <a:buNone/>
+            </a:pPr>
+            <a:r>
+              <a:rPr lang="en-US" sz="1050" dirty="0">
+                <a:solidFill>
+                  <a:srgbClr val="33394A"/>
+                </a:solidFill>
+                <a:latin typeface="Calibri" pitchFamily="34" charset="0"/>
+                <a:ea typeface="Calibri" pitchFamily="34" charset="-122"/>
+                <a:cs typeface="Calibri" pitchFamily="34" charset="-120"/>
+              </a:rPr>
+              <a:t>O caso mais promissor do portfólio, construído com os seus dados reais e testado pelas pessoas que vão usá-lo, contra critérios de sucesso combinados por escrito antes da primeira linha de código.</a:t>
+            </a:r>
+            <a:endParaRPr lang="en-US" sz="1050" dirty="0"/>
+          </a:p>
+        </p:txBody>
+      </p:sp>
+      <p:sp>
+        <p:nvSpPr>
+          <p:cNvPr id="19" name="Text 16"/>
+          <p:cNvSpPr/>
+          <p:nvPr/>
+        </p:nvSpPr>
+        <p:spPr>
+          <a:xfrm>
+            <a:off x="822960" y="5907024"/>
+            <a:ext cx="960120" cy="256032"/>
+          </a:xfrm>
+          <a:prstGeom prst="rect">
+            <a:avLst/>
+          </a:prstGeom>
+          <a:noFill/>
+          <a:ln/>
+        </p:spPr>
+        <p:txBody>
+          <a:bodyPr wrap="square" rtlCol="0" anchor="ctr"/>
+          <a:lstStyle/>
+          <a:p>
+            <a:pPr indent="0" marL="0">
+              <a:buNone/>
+            </a:pPr>
+            <a:r>
+              <a:rPr lang="en-US" sz="850" b="1" spc="200" kern="0" dirty="0">
+                <a:solidFill>
+                  <a:srgbClr val="C2A35B"/>
+                </a:solidFill>
+                <a:latin typeface="Calibri" pitchFamily="34" charset="0"/>
+                <a:ea typeface="Calibri" pitchFamily="34" charset="-122"/>
+                <a:cs typeface="Calibri" pitchFamily="34" charset="-120"/>
+              </a:rPr>
+              <a:t>POR QUÊ</a:t>
+            </a:r>
+            <a:endParaRPr lang="en-US" sz="850" dirty="0"/>
+          </a:p>
+        </p:txBody>
+      </p:sp>
+      <p:sp>
+        <p:nvSpPr>
+          <p:cNvPr id="20" name="Text 17"/>
+          <p:cNvSpPr/>
+          <p:nvPr/>
+        </p:nvSpPr>
+        <p:spPr>
+          <a:xfrm>
+            <a:off x="1828800" y="5888736"/>
+            <a:ext cx="6931152" cy="731520"/>
+          </a:xfrm>
+          <a:prstGeom prst="rect">
+            <a:avLst/>
+          </a:prstGeom>
+          <a:noFill/>
+          <a:ln/>
+        </p:spPr>
+        <p:txBody>
+          <a:bodyPr wrap="square" rtlCol="0" anchor="ctr"/>
+          <a:lstStyle/>
+          <a:p>
+            <a:pPr algn="l" indent="0" marL="0">
+              <a:lnSpc>
+                <a:spcPts val="1450"/>
+              </a:lnSpc>
+              <a:buNone/>
+            </a:pPr>
+            <a:r>
+              <a:rPr lang="en-US" sz="1050" dirty="0">
+                <a:solidFill>
+                  <a:srgbClr val="33394A"/>
+                </a:solidFill>
+                <a:latin typeface="Calibri" pitchFamily="34" charset="0"/>
+                <a:ea typeface="Calibri" pitchFamily="34" charset="-122"/>
+                <a:cs typeface="Calibri" pitchFamily="34" charset="-120"/>
+              </a:rPr>
+              <a:t>Ninguém investe no escuro: o investimento grande só acontece depois que o caso provou, com números, que merece. A diretoria decide GO ou NO-GO com números na mesa. E NO-GO também é resultado: custou pouco e evitou um investimento errado.</a:t>
+            </a:r>
+            <a:endParaRPr lang="en-US" sz="1050" dirty="0"/>
           </a:p>
         </p:txBody>
       </p:sp>
@@ -6005,7 +8116,7 @@
         </p:nvSpPr>
         <p:spPr>
           <a:xfrm>
-            <a:off x="822960" y="594360"/>
+            <a:off x="822960" y="548640"/>
             <a:ext cx="5486400" cy="292608"/>
           </a:xfrm>
           <a:prstGeom prst="rect">
@@ -6030,7 +8141,7 @@
                 <a:ea typeface="Calibri" pitchFamily="34" charset="-122"/>
                 <a:cs typeface="Calibri" pitchFamily="34" charset="-120"/>
               </a:rPr>
-              <a:t>DENTRO DA CONSTRUÇÃO</a:t>
+              <a:t>FASE 2 · A CONSTRUÇÃO · POR DENTRO</a:t>
             </a:r>
             <a:endParaRPr lang="en-US" sz="1100" dirty="0"/>
           </a:p>
@@ -6044,8 +8155,8 @@
         </p:nvSpPr>
         <p:spPr>
           <a:xfrm>
-            <a:off x="822960" y="960120"/>
-            <a:ext cx="10543032" cy="914400"/>
+            <a:off x="822960" y="896112"/>
+            <a:ext cx="10543032" cy="868680"/>
           </a:xfrm>
           <a:prstGeom prst="rect">
             <a:avLst/>
@@ -6059,12 +8170,12 @@
           <a:p>
             <a:pPr indent="0" marL="0">
               <a:lnSpc>
-                <a:spcPts val="3400"/>
+                <a:spcPts val="3300"/>
               </a:lnSpc>
               <a:buNone/>
             </a:pPr>
             <a:r>
-              <a:rPr lang="en-US" sz="2800" b="1" dirty="0">
+              <a:rPr lang="en-US" sz="2700" b="1" dirty="0">
                 <a:solidFill>
                   <a:srgbClr val="1B2A4A"/>
                 </a:solidFill>
@@ -6072,9 +8183,9 @@
                 <a:ea typeface="Cambria" pitchFamily="34" charset="-122"/>
                 <a:cs typeface="Cambria" pitchFamily="34" charset="-120"/>
               </a:rPr>
-              <a:t>Engenharia de verdade. E gente formada de verdade.</a:t>
-            </a:r>
-            <a:endParaRPr lang="en-US" sz="2800" dirty="0"/>
+              <a:t>A engenharia da solução, e a mentalidade nova.</a:t>
+            </a:r>
+            <a:endParaRPr lang="en-US" sz="2700" dirty="0"/>
           </a:p>
         </p:txBody>
       </p:sp>
@@ -6086,8 +8197,148 @@
         </p:nvSpPr>
         <p:spPr>
           <a:xfrm>
-            <a:off x="822960" y="1920240"/>
-            <a:ext cx="10543032" cy="640080"/>
+            <a:off x="822960" y="6400800"/>
+            <a:ext cx="10543032" cy="274320"/>
+          </a:xfrm>
+          <a:prstGeom prst="rect">
+            <a:avLst/>
+          </a:prstGeom>
+          <a:noFill/>
+          <a:ln/>
+        </p:spPr>
+        <p:txBody>
+          <a:bodyPr wrap="square" rtlCol="0" anchor="ctr"/>
+          <a:lstStyle/>
+          <a:p>
+            <a:pPr algn="ctr" indent="0" marL="0">
+              <a:buNone/>
+            </a:pPr>
+            <a:r>
+              <a:rPr lang="en-US" sz="900" spc="100" kern="0" dirty="0">
+                <a:solidFill>
+                  <a:srgbClr val="6E6858"/>
+                </a:solidFill>
+                <a:latin typeface="Calibri" pitchFamily="34" charset="0"/>
+                <a:ea typeface="Calibri" pitchFamily="34" charset="-122"/>
+                <a:cs typeface="Calibri" pitchFamily="34" charset="-120"/>
+              </a:rPr>
+              <a:t>ABBA Consultoria de IA · contato@abbaservices.com.br</a:t>
+            </a:r>
+            <a:endParaRPr lang="en-US" sz="900" dirty="0"/>
+          </a:p>
+        </p:txBody>
+      </p:sp>
+      <p:sp>
+        <p:nvSpPr>
+          <p:cNvPr id="5" name="Shape 3"/>
+          <p:cNvSpPr/>
+          <p:nvPr/>
+        </p:nvSpPr>
+        <p:spPr>
+          <a:xfrm>
+            <a:off x="822960" y="1965960"/>
+            <a:ext cx="10543032" cy="0"/>
+          </a:xfrm>
+          <a:prstGeom prst="line">
+            <a:avLst/>
+          </a:prstGeom>
+          <a:noFill/>
+          <a:ln w="15240">
+            <a:solidFill>
+              <a:srgbClr val="C2A35B"/>
+            </a:solidFill>
+            <a:prstDash val="solid"/>
+          </a:ln>
+        </p:spPr>
+      </p:sp>
+      <p:sp>
+        <p:nvSpPr>
+          <p:cNvPr id="6" name="Text 4"/>
+          <p:cNvSpPr/>
+          <p:nvPr/>
+        </p:nvSpPr>
+        <p:spPr>
+          <a:xfrm>
+            <a:off x="822960" y="2084832"/>
+            <a:ext cx="10543032" cy="292608"/>
+          </a:xfrm>
+          <a:prstGeom prst="rect">
+            <a:avLst/>
+          </a:prstGeom>
+          <a:noFill/>
+          <a:ln/>
+        </p:spPr>
+        <p:txBody>
+          <a:bodyPr wrap="square" rtlCol="0" anchor="ctr"/>
+          <a:lstStyle/>
+          <a:p>
+            <a:pPr algn="l" indent="0" marL="0">
+              <a:buNone/>
+            </a:pPr>
+            <a:r>
+              <a:rPr lang="en-US" sz="1050" b="1" spc="300" kern="0" dirty="0">
+                <a:solidFill>
+                  <a:srgbClr val="C2A35B"/>
+                </a:solidFill>
+                <a:latin typeface="Calibri" pitchFamily="34" charset="0"/>
+                <a:ea typeface="Calibri" pitchFamily="34" charset="-122"/>
+                <a:cs typeface="Calibri" pitchFamily="34" charset="-120"/>
+              </a:rPr>
+              <a:t>CONSTRUÇÃO E IMPLANTAÇÃO · A ENGENHARIA DA SOLUÇÃO</a:t>
+            </a:r>
+            <a:endParaRPr lang="en-US" sz="1050" dirty="0"/>
+          </a:p>
+        </p:txBody>
+      </p:sp>
+      <p:sp>
+        <p:nvSpPr>
+          <p:cNvPr id="7" name="Text 5"/>
+          <p:cNvSpPr/>
+          <p:nvPr/>
+        </p:nvSpPr>
+        <p:spPr>
+          <a:xfrm>
+            <a:off x="822960" y="2423160"/>
+            <a:ext cx="960120" cy="256032"/>
+          </a:xfrm>
+          <a:prstGeom prst="rect">
+            <a:avLst/>
+          </a:prstGeom>
+          <a:noFill/>
+          <a:ln/>
+        </p:spPr>
+        <p:txBody>
+          <a:bodyPr wrap="square" rtlCol="0" anchor="ctr"/>
+          <a:lstStyle/>
+          <a:p>
+            <a:pPr indent="0" marL="0">
+              <a:buNone/>
+            </a:pPr>
+            <a:r>
+              <a:rPr lang="en-US" sz="850" b="1" spc="200" kern="0" dirty="0">
+                <a:solidFill>
+                  <a:srgbClr val="C2A35B"/>
+                </a:solidFill>
+                <a:latin typeface="Calibri" pitchFamily="34" charset="0"/>
+                <a:ea typeface="Calibri" pitchFamily="34" charset="-122"/>
+                <a:cs typeface="Calibri" pitchFamily="34" charset="-120"/>
+              </a:rPr>
+              <a:t>O QUÊ</a:t>
+            </a:r>
+            <a:endParaRPr lang="en-US" sz="850" dirty="0"/>
+          </a:p>
+        </p:txBody>
+      </p:sp>
+      <p:sp>
+        <p:nvSpPr>
+          <p:cNvPr id="8" name="Text 6"/>
+          <p:cNvSpPr/>
+          <p:nvPr/>
+        </p:nvSpPr>
+        <p:spPr>
+          <a:xfrm>
+            <a:off x="1828800" y="2404872"/>
+            <a:ext cx="9537192" cy="475488"/>
           </a:xfrm>
           <a:prstGeom prst="rect">
             <a:avLst/>
@@ -6101,151 +8352,408 @@
           <a:p>
             <a:pPr algn="l" indent="0" marL="0">
               <a:lnSpc>
-                <a:spcPts val="2000"/>
+                <a:spcPts val="1450"/>
               </a:lnSpc>
               <a:buNone/>
             </a:pPr>
             <a:r>
-              <a:rPr lang="en-US" sz="1300" dirty="0">
-                <a:solidFill>
-                  <a:srgbClr val="6E6858"/>
-                </a:solidFill>
-                <a:latin typeface="Calibri" pitchFamily="34" charset="0"/>
-                <a:ea typeface="Calibri" pitchFamily="34" charset="-122"/>
-                <a:cs typeface="Calibri" pitchFamily="34" charset="-120"/>
-              </a:rPr>
-              <a:t>Arquitetura, integrações com os seus sistemas e agentes com aprovação humana nos pontos certos: erro caro passa por gente antes de acontecer. Em paralelo, a sua equipe estuda em turma própria no nosso portal, uma prática por dia, no trabalho real.</a:t>
-            </a:r>
-            <a:endParaRPr lang="en-US" sz="1300" dirty="0"/>
-          </a:p>
-        </p:txBody>
-      </p:sp>
-      <p:sp>
-        <p:nvSpPr>
-          <p:cNvPr id="5" name="Text 3"/>
-          <p:cNvSpPr/>
-          <p:nvPr/>
-        </p:nvSpPr>
-        <p:spPr>
-          <a:xfrm>
-            <a:off x="822960" y="6400800"/>
-            <a:ext cx="10543032" cy="274320"/>
-          </a:xfrm>
-          <a:prstGeom prst="rect">
-            <a:avLst/>
-          </a:prstGeom>
-          <a:noFill/>
-          <a:ln/>
-        </p:spPr>
-        <p:txBody>
-          <a:bodyPr wrap="square" rtlCol="0" anchor="ctr"/>
-          <a:lstStyle/>
-          <a:p>
-            <a:pPr algn="ctr" indent="0" marL="0">
-              <a:buNone/>
-            </a:pPr>
-            <a:r>
-              <a:rPr lang="en-US" sz="900" spc="100" kern="0" dirty="0">
-                <a:solidFill>
-                  <a:srgbClr val="6E6858"/>
-                </a:solidFill>
-                <a:latin typeface="Calibri" pitchFamily="34" charset="0"/>
-                <a:ea typeface="Calibri" pitchFamily="34" charset="-122"/>
-                <a:cs typeface="Calibri" pitchFamily="34" charset="-120"/>
-              </a:rPr>
-              <a:t>ABBA Consultoria de IA · contato@abbaservices.com.br</a:t>
-            </a:r>
-            <a:endParaRPr lang="en-US" sz="900" dirty="0"/>
-          </a:p>
-        </p:txBody>
-      </p:sp>
-      <p:pic>
-        <p:nvPicPr>
-          <p:cNvPr id="6" name="Image 0" descr="/home/user/abba-ops/08-materiais/assets/fotos/portal--inicio-atual.png">    </p:cNvPr>
-          <p:cNvPicPr>
-            <a:picLocks noChangeAspect="1"/>
-          </p:cNvPicPr>
-          <p:nvPr/>
-        </p:nvPicPr>
-        <p:blipFill>
-          <a:blip r:embed="rId1"/>
-          <a:stretch>
-            <a:fillRect/>
-          </a:stretch>
-        </p:blipFill>
-        <p:spPr>
-          <a:xfrm>
-            <a:off x="1325880" y="2926080"/>
-            <a:ext cx="5394960" cy="3044952"/>
-          </a:xfrm>
-          <a:prstGeom prst="rect">
-            <a:avLst/>
-          </a:prstGeom>
-        </p:spPr>
-      </p:pic>
-      <p:pic>
-        <p:nvPicPr>
-          <p:cNvPr id="7" name="Image 1" descr="/home/user/abba-ops/08-materiais/assets/fotos/portal--aula-atual.png">    </p:cNvPr>
-          <p:cNvPicPr>
-            <a:picLocks noChangeAspect="1"/>
-          </p:cNvPicPr>
-          <p:nvPr/>
-        </p:nvPicPr>
-        <p:blipFill>
-          <a:blip r:embed="rId2"/>
-          <a:stretch>
-            <a:fillRect/>
-          </a:stretch>
-        </p:blipFill>
-        <p:spPr>
-          <a:xfrm>
-            <a:off x="6995160" y="2926080"/>
-            <a:ext cx="5394960" cy="3044952"/>
-          </a:xfrm>
-          <a:prstGeom prst="rect">
-            <a:avLst/>
-          </a:prstGeom>
-        </p:spPr>
-      </p:pic>
-      <p:sp>
-        <p:nvSpPr>
-          <p:cNvPr id="8" name="Text 4"/>
-          <p:cNvSpPr/>
-          <p:nvPr/>
-        </p:nvSpPr>
-        <p:spPr>
-          <a:xfrm>
-            <a:off x="1325880" y="6035040"/>
-            <a:ext cx="9537192" cy="274320"/>
-          </a:xfrm>
-          <a:prstGeom prst="rect">
-            <a:avLst/>
-          </a:prstGeom>
-          <a:noFill/>
-          <a:ln/>
-        </p:spPr>
-        <p:txBody>
-          <a:bodyPr wrap="square" rtlCol="0" anchor="ctr"/>
-          <a:lstStyle/>
-          <a:p>
-            <a:pPr algn="ctr" indent="0" marL="0">
+              <a:rPr lang="en-US" sz="1050" dirty="0">
+                <a:solidFill>
+                  <a:srgbClr val="33394A"/>
+                </a:solidFill>
+                <a:latin typeface="Calibri" pitchFamily="34" charset="0"/>
+                <a:ea typeface="Calibri" pitchFamily="34" charset="-122"/>
+                <a:cs typeface="Calibri" pitchFamily="34" charset="-120"/>
+              </a:rPr>
+              <a:t>Projetamos a arquitetura: dados, integrações e lógica de decisão. E construímos sistemas inteligentes sob medida, com agentes de IA inseridos onde fazem diferença, em produção no fluxo real da sua equipe.</a:t>
+            </a:r>
+            <a:endParaRPr lang="en-US" sz="1050" dirty="0"/>
+          </a:p>
+        </p:txBody>
+      </p:sp>
+      <p:sp>
+        <p:nvSpPr>
+          <p:cNvPr id="9" name="Text 7"/>
+          <p:cNvSpPr/>
+          <p:nvPr/>
+        </p:nvSpPr>
+        <p:spPr>
+          <a:xfrm>
+            <a:off x="822960" y="3008376"/>
+            <a:ext cx="960120" cy="256032"/>
+          </a:xfrm>
+          <a:prstGeom prst="rect">
+            <a:avLst/>
+          </a:prstGeom>
+          <a:noFill/>
+          <a:ln/>
+        </p:spPr>
+        <p:txBody>
+          <a:bodyPr wrap="square" rtlCol="0" anchor="ctr"/>
+          <a:lstStyle/>
+          <a:p>
+            <a:pPr indent="0" marL="0">
+              <a:buNone/>
+            </a:pPr>
+            <a:r>
+              <a:rPr lang="en-US" sz="850" b="1" spc="200" kern="0" dirty="0">
+                <a:solidFill>
+                  <a:srgbClr val="C2A35B"/>
+                </a:solidFill>
+                <a:latin typeface="Calibri" pitchFamily="34" charset="0"/>
+                <a:ea typeface="Calibri" pitchFamily="34" charset="-122"/>
+                <a:cs typeface="Calibri" pitchFamily="34" charset="-120"/>
+              </a:rPr>
+              <a:t>POR QUÊ</a:t>
+            </a:r>
+            <a:endParaRPr lang="en-US" sz="850" dirty="0"/>
+          </a:p>
+        </p:txBody>
+      </p:sp>
+      <p:sp>
+        <p:nvSpPr>
+          <p:cNvPr id="10" name="Text 8"/>
+          <p:cNvSpPr/>
+          <p:nvPr/>
+        </p:nvSpPr>
+        <p:spPr>
+          <a:xfrm>
+            <a:off x="1828800" y="2990088"/>
+            <a:ext cx="9537192" cy="475488"/>
+          </a:xfrm>
+          <a:prstGeom prst="rect">
+            <a:avLst/>
+          </a:prstGeom>
+          <a:noFill/>
+          <a:ln/>
+        </p:spPr>
+        <p:txBody>
+          <a:bodyPr wrap="square" rtlCol="0" anchor="ctr"/>
+          <a:lstStyle/>
+          <a:p>
+            <a:pPr algn="l" indent="0" marL="0">
               <a:lnSpc>
-                <a:spcPts val="2000"/>
+                <a:spcPts val="1450"/>
               </a:lnSpc>
               <a:buNone/>
             </a:pPr>
             <a:r>
-              <a:rPr lang="en-US" sz="1000" i="1" dirty="0">
-                <a:solidFill>
-                  <a:srgbClr val="6E6858"/>
-                </a:solidFill>
-                <a:latin typeface="Calibri" pitchFamily="34" charset="0"/>
-                <a:ea typeface="Calibri" pitchFamily="34" charset="-122"/>
-                <a:cs typeface="Calibri" pitchFamily="34" charset="-120"/>
-              </a:rPr>
-              <a:t>O portal da turma, como o seu time vê: o início com a prática do dia e uma aula real da formação.</a:t>
-            </a:r>
-            <a:endParaRPr lang="en-US" sz="1000" dirty="0"/>
+              <a:rPr lang="en-US" sz="1050" dirty="0">
+                <a:solidFill>
+                  <a:srgbClr val="33394A"/>
+                </a:solidFill>
+                <a:latin typeface="Calibri" pitchFamily="34" charset="0"/>
+                <a:ea typeface="Calibri" pitchFamily="34" charset="-122"/>
+                <a:cs typeface="Calibri" pitchFamily="34" charset="-120"/>
+              </a:rPr>
+              <a:t>Relatório na gaveta não muda empresa. Sistema rodando muda. E engenharia importa: solução montada às pressas quebra no primeiro mês; a nossa é projetada para conviver com os seus sistemas e crescer com a operação.</a:t>
+            </a:r>
+            <a:endParaRPr lang="en-US" sz="1050" dirty="0"/>
+          </a:p>
+        </p:txBody>
+      </p:sp>
+      <p:sp>
+        <p:nvSpPr>
+          <p:cNvPr id="11" name="Text 9"/>
+          <p:cNvSpPr/>
+          <p:nvPr/>
+        </p:nvSpPr>
+        <p:spPr>
+          <a:xfrm>
+            <a:off x="822960" y="3593592"/>
+            <a:ext cx="960120" cy="256032"/>
+          </a:xfrm>
+          <a:prstGeom prst="rect">
+            <a:avLst/>
+          </a:prstGeom>
+          <a:noFill/>
+          <a:ln/>
+        </p:spPr>
+        <p:txBody>
+          <a:bodyPr wrap="square" rtlCol="0" anchor="ctr"/>
+          <a:lstStyle/>
+          <a:p>
+            <a:pPr indent="0" marL="0">
+              <a:buNone/>
+            </a:pPr>
+            <a:r>
+              <a:rPr lang="en-US" sz="850" b="1" spc="200" kern="0" dirty="0">
+                <a:solidFill>
+                  <a:srgbClr val="C2A35B"/>
+                </a:solidFill>
+                <a:latin typeface="Calibri" pitchFamily="34" charset="0"/>
+                <a:ea typeface="Calibri" pitchFamily="34" charset="-122"/>
+                <a:cs typeface="Calibri" pitchFamily="34" charset="-120"/>
+              </a:rPr>
+              <a:t>COMO</a:t>
+            </a:r>
+            <a:endParaRPr lang="en-US" sz="850" dirty="0"/>
+          </a:p>
+        </p:txBody>
+      </p:sp>
+      <p:sp>
+        <p:nvSpPr>
+          <p:cNvPr id="12" name="Text 10"/>
+          <p:cNvSpPr/>
+          <p:nvPr/>
+        </p:nvSpPr>
+        <p:spPr>
+          <a:xfrm>
+            <a:off x="1828800" y="3575304"/>
+            <a:ext cx="9537192" cy="457200"/>
+          </a:xfrm>
+          <a:prstGeom prst="rect">
+            <a:avLst/>
+          </a:prstGeom>
+          <a:noFill/>
+          <a:ln/>
+        </p:spPr>
+        <p:txBody>
+          <a:bodyPr wrap="square" rtlCol="0" anchor="ctr"/>
+          <a:lstStyle/>
+          <a:p>
+            <a:pPr algn="l" indent="0" marL="0">
+              <a:lnSpc>
+                <a:spcPts val="1450"/>
+              </a:lnSpc>
+              <a:buNone/>
+            </a:pPr>
+            <a:r>
+              <a:rPr lang="en-US" sz="1050" dirty="0">
+                <a:solidFill>
+                  <a:srgbClr val="33394A"/>
+                </a:solidFill>
+                <a:latin typeface="Calibri" pitchFamily="34" charset="0"/>
+                <a:ea typeface="Calibri" pitchFamily="34" charset="-122"/>
+                <a:cs typeface="Calibri" pitchFamily="34" charset="-120"/>
+              </a:rPr>
+              <a:t>Arquitetura primeiro; aprovação humana em tudo que é crítico (a IA executa, gente da sua confiança valida); na sua infraestrutura ou em nuvem; testes de aceite antes de o sistema assumir o trabalho real.</a:t>
+            </a:r>
+            <a:endParaRPr lang="en-US" sz="1050" dirty="0"/>
+          </a:p>
+        </p:txBody>
+      </p:sp>
+      <p:sp>
+        <p:nvSpPr>
+          <p:cNvPr id="13" name="Shape 11"/>
+          <p:cNvSpPr/>
+          <p:nvPr/>
+        </p:nvSpPr>
+        <p:spPr>
+          <a:xfrm>
+            <a:off x="822960" y="4251960"/>
+            <a:ext cx="10543032" cy="0"/>
+          </a:xfrm>
+          <a:prstGeom prst="line">
+            <a:avLst/>
+          </a:prstGeom>
+          <a:noFill/>
+          <a:ln w="15240">
+            <a:solidFill>
+              <a:srgbClr val="C2A35B"/>
+            </a:solidFill>
+            <a:prstDash val="solid"/>
+          </a:ln>
+        </p:spPr>
+      </p:sp>
+      <p:sp>
+        <p:nvSpPr>
+          <p:cNvPr id="14" name="Text 12"/>
+          <p:cNvSpPr/>
+          <p:nvPr/>
+        </p:nvSpPr>
+        <p:spPr>
+          <a:xfrm>
+            <a:off x="822960" y="4370832"/>
+            <a:ext cx="10543032" cy="292608"/>
+          </a:xfrm>
+          <a:prstGeom prst="rect">
+            <a:avLst/>
+          </a:prstGeom>
+          <a:noFill/>
+          <a:ln/>
+        </p:spPr>
+        <p:txBody>
+          <a:bodyPr wrap="square" rtlCol="0" anchor="ctr"/>
+          <a:lstStyle/>
+          <a:p>
+            <a:pPr algn="l" indent="0" marL="0">
+              <a:buNone/>
+            </a:pPr>
+            <a:r>
+              <a:rPr lang="en-US" sz="1050" b="1" spc="300" kern="0" dirty="0">
+                <a:solidFill>
+                  <a:srgbClr val="C2A35B"/>
+                </a:solidFill>
+                <a:latin typeface="Calibri" pitchFamily="34" charset="0"/>
+                <a:ea typeface="Calibri" pitchFamily="34" charset="-122"/>
+                <a:cs typeface="Calibri" pitchFamily="34" charset="-120"/>
+              </a:rPr>
+              <a:t>TREINAMENTO + ABBA PORTAL · A MENTALIDADE NOVA</a:t>
+            </a:r>
+            <a:endParaRPr lang="en-US" sz="1050" dirty="0"/>
+          </a:p>
+        </p:txBody>
+      </p:sp>
+      <p:sp>
+        <p:nvSpPr>
+          <p:cNvPr id="15" name="Text 13"/>
+          <p:cNvSpPr/>
+          <p:nvPr/>
+        </p:nvSpPr>
+        <p:spPr>
+          <a:xfrm>
+            <a:off x="822960" y="4709160"/>
+            <a:ext cx="960120" cy="256032"/>
+          </a:xfrm>
+          <a:prstGeom prst="rect">
+            <a:avLst/>
+          </a:prstGeom>
+          <a:noFill/>
+          <a:ln/>
+        </p:spPr>
+        <p:txBody>
+          <a:bodyPr wrap="square" rtlCol="0" anchor="ctr"/>
+          <a:lstStyle/>
+          <a:p>
+            <a:pPr indent="0" marL="0">
+              <a:buNone/>
+            </a:pPr>
+            <a:r>
+              <a:rPr lang="en-US" sz="850" b="1" spc="200" kern="0" dirty="0">
+                <a:solidFill>
+                  <a:srgbClr val="C2A35B"/>
+                </a:solidFill>
+                <a:latin typeface="Calibri" pitchFamily="34" charset="0"/>
+                <a:ea typeface="Calibri" pitchFamily="34" charset="-122"/>
+                <a:cs typeface="Calibri" pitchFamily="34" charset="-120"/>
+              </a:rPr>
+              <a:t>O QUÊ</a:t>
+            </a:r>
+            <a:endParaRPr lang="en-US" sz="850" dirty="0"/>
+          </a:p>
+        </p:txBody>
+      </p:sp>
+      <p:sp>
+        <p:nvSpPr>
+          <p:cNvPr id="16" name="Text 14"/>
+          <p:cNvSpPr/>
+          <p:nvPr/>
+        </p:nvSpPr>
+        <p:spPr>
+          <a:xfrm>
+            <a:off x="1828800" y="4690872"/>
+            <a:ext cx="9537192" cy="457200"/>
+          </a:xfrm>
+          <a:prstGeom prst="rect">
+            <a:avLst/>
+          </a:prstGeom>
+          <a:noFill/>
+          <a:ln/>
+        </p:spPr>
+        <p:txBody>
+          <a:bodyPr wrap="square" rtlCol="0" anchor="ctr"/>
+          <a:lstStyle/>
+          <a:p>
+            <a:pPr algn="l" indent="0" marL="0">
+              <a:lnSpc>
+                <a:spcPts val="1450"/>
+              </a:lnSpc>
+              <a:buNone/>
+            </a:pPr>
+            <a:r>
+              <a:rPr lang="en-US" sz="1050" dirty="0">
+                <a:solidFill>
+                  <a:srgbClr val="33394A"/>
+                </a:solidFill>
+                <a:latin typeface="Calibri" pitchFamily="34" charset="0"/>
+                <a:ea typeface="Calibri" pitchFamily="34" charset="-122"/>
+                <a:cs typeface="Calibri" pitchFamily="34" charset="-120"/>
+              </a:rPr>
+              <a:t>Todos os níveis da equipe, na nossa plataforma própria e em sessões presenciais: trilhas por papel, desafios aplicados no trabalho real, fluência medida em 30, 60 e 90 dias, campeões internos formados.</a:t>
+            </a:r>
+            <a:endParaRPr lang="en-US" sz="1050" dirty="0"/>
+          </a:p>
+        </p:txBody>
+      </p:sp>
+      <p:sp>
+        <p:nvSpPr>
+          <p:cNvPr id="17" name="Text 15"/>
+          <p:cNvSpPr/>
+          <p:nvPr/>
+        </p:nvSpPr>
+        <p:spPr>
+          <a:xfrm>
+            <a:off x="822960" y="5276088"/>
+            <a:ext cx="960120" cy="256032"/>
+          </a:xfrm>
+          <a:prstGeom prst="rect">
+            <a:avLst/>
+          </a:prstGeom>
+          <a:noFill/>
+          <a:ln/>
+        </p:spPr>
+        <p:txBody>
+          <a:bodyPr wrap="square" rtlCol="0" anchor="ctr"/>
+          <a:lstStyle/>
+          <a:p>
+            <a:pPr indent="0" marL="0">
+              <a:buNone/>
+            </a:pPr>
+            <a:r>
+              <a:rPr lang="en-US" sz="850" b="1" spc="200" kern="0" dirty="0">
+                <a:solidFill>
+                  <a:srgbClr val="C2A35B"/>
+                </a:solidFill>
+                <a:latin typeface="Calibri" pitchFamily="34" charset="0"/>
+                <a:ea typeface="Calibri" pitchFamily="34" charset="-122"/>
+                <a:cs typeface="Calibri" pitchFamily="34" charset="-120"/>
+              </a:rPr>
+              <a:t>POR QUÊ</a:t>
+            </a:r>
+            <a:endParaRPr lang="en-US" sz="850" dirty="0"/>
+          </a:p>
+        </p:txBody>
+      </p:sp>
+      <p:sp>
+        <p:nvSpPr>
+          <p:cNvPr id="18" name="Text 16"/>
+          <p:cNvSpPr/>
+          <p:nvPr/>
+        </p:nvSpPr>
+        <p:spPr>
+          <a:xfrm>
+            <a:off x="1828800" y="5257800"/>
+            <a:ext cx="9537192" cy="475488"/>
+          </a:xfrm>
+          <a:prstGeom prst="rect">
+            <a:avLst/>
+          </a:prstGeom>
+          <a:noFill/>
+          <a:ln/>
+        </p:spPr>
+        <p:txBody>
+          <a:bodyPr wrap="square" rtlCol="0" anchor="ctr"/>
+          <a:lstStyle/>
+          <a:p>
+            <a:pPr algn="l" indent="0" marL="0">
+              <a:lnSpc>
+                <a:spcPts val="1450"/>
+              </a:lnSpc>
+              <a:buNone/>
+            </a:pPr>
+            <a:r>
+              <a:rPr lang="en-US" sz="1050" dirty="0">
+                <a:solidFill>
+                  <a:srgbClr val="33394A"/>
+                </a:solidFill>
+                <a:latin typeface="Calibri" pitchFamily="34" charset="0"/>
+                <a:ea typeface="Calibri" pitchFamily="34" charset="-122"/>
+                <a:cs typeface="Calibri" pitchFamily="34" charset="-120"/>
+              </a:rPr>
+              <a:t>O objetivo não é ensinar ferramenta: é instalar em cada pessoa as três perguntas que mudam o olhar sobre o próprio trabalho. O que posso parar de fazer? O que posso começar a fazer? O que só eu faço, e devo fazer ainda melhor?</a:t>
+            </a:r>
+            <a:endParaRPr lang="en-US" sz="1050" dirty="0"/>
           </a:p>
         </p:txBody>
       </p:sp>
